--- a/docs/wine-fund/WineBank_ワインファンドSPC組成提案_5億_20260811.pptx
+++ b/docs/wine-fund/WineBank_ワインファンドSPC組成提案_5億_20260811.pptx
@@ -22,9 +22,10 @@
     <p:sldId id="270" r:id="rId16"/>
     <p:sldId id="271" r:id="rId17"/>
     <p:sldId id="272" r:id="rId18"/>
+    <p:sldId id="273" r:id="rId19"/>
   </p:sldIdLst>
   <p:notesMasterIdLst>
-    <p:notesMasterId r:id="rId19"/>
+    <p:notesMasterId r:id="rId20"/>
   </p:notesMasterIdLst>
   <p:sldSz cx="12192000" cy="6858000"/>
   <p:notesSz cx="6858000" cy="12192000"/>
@@ -426,7 +427,7 @@
                 </a:solidFill>
                 <a:latin typeface="Yu Gothic"/>
               </a:rPr>
-              <a:t>投資家IRR（3年）</a:t>
+              <a:t>年平均利回り（3年通算）</a:t>
             </a:r>
           </a:p>
         </c:rich>
@@ -450,7 +451,7 @@
               <c:strCache>
                 <c:ptCount val="1"/>
                 <c:pt idx="0">
-                  <c:v>投資家IRR（3年）</c:v>
+                  <c:v>年平均利回り（3年通算）</c:v>
                 </c:pt>
               </c:strCache>
             </c:strRef>
@@ -515,13 +516,13 @@
                 <c:formatCode>General</c:formatCode>
                 <c:ptCount val="4"/>
                 <c:pt idx="0">
-                  <c:v>16.9</c:v>
+                  <c:v>17</c:v>
                 </c:pt>
                 <c:pt idx="1">
-                  <c:v>11</c:v>
+                  <c:v>11.1</c:v>
                 </c:pt>
                 <c:pt idx="2">
-                  <c:v>10.3</c:v>
+                  <c:v>10.8</c:v>
                 </c:pt>
                 <c:pt idx="3">
                   <c:v>5.1</c:v>
@@ -703,7 +704,7 @@
                 </a:solidFill>
                 <a:latin typeface="Yu Gothic"/>
               </a:rPr>
-              <a:t>投資家IRR（5年）</a:t>
+              <a:t>年平均利回り（5年通算）</a:t>
             </a:r>
           </a:p>
         </c:rich>
@@ -727,7 +728,7 @@
               <c:strCache>
                 <c:ptCount val="1"/>
                 <c:pt idx="0">
-                  <c:v>投資家IRR（5年）</c:v>
+                  <c:v>年平均利回り（5年通算）</c:v>
                 </c:pt>
               </c:strCache>
             </c:strRef>
@@ -792,16 +793,16 @@
                 <c:formatCode>General</c:formatCode>
                 <c:ptCount val="4"/>
                 <c:pt idx="0">
-                  <c:v>20</c:v>
+                  <c:v>20.7</c:v>
                 </c:pt>
                 <c:pt idx="1">
-                  <c:v>13.3</c:v>
+                  <c:v>13.4</c:v>
                 </c:pt>
                 <c:pt idx="2">
-                  <c:v>9.6</c:v>
+                  <c:v>9.7</c:v>
                 </c:pt>
                 <c:pt idx="3">
-                  <c:v>9</c:v>
+                  <c:v>9.5</c:v>
                 </c:pt>
               </c:numCache>
             </c:numRef>
@@ -880,7 +881,7 @@
         <c:axId val="2094734552"/>
         <c:scaling>
           <c:orientation val="minMax"/>
-          <c:max val="24"/>
+          <c:max val="25"/>
           <c:min val="0"/>
         </c:scaling>
         <c:delete val="0"/>
@@ -980,7 +981,7 @@
                 </a:solidFill>
                 <a:latin typeface="Yu Gothic"/>
               </a:rPr>
-              <a:t>在庫回転期間別 投資家IRR（3年・％）</a:t>
+              <a:t>在庫回転期間別 定常年間利回り（％）</a:t>
             </a:r>
           </a:p>
         </c:rich>
@@ -1069,16 +1070,16 @@
                 <c:formatCode>General</c:formatCode>
                 <c:ptCount val="4"/>
                 <c:pt idx="0">
-                  <c:v>36.7</c:v>
+                  <c:v>50.1</c:v>
                 </c:pt>
                 <c:pt idx="1">
-                  <c:v>24.3</c:v>
+                  <c:v>37.1</c:v>
                 </c:pt>
                 <c:pt idx="2">
-                  <c:v>22.2</c:v>
+                  <c:v>29.3</c:v>
                 </c:pt>
                 <c:pt idx="3">
-                  <c:v>11.8</c:v>
+                  <c:v>24.1</c:v>
                 </c:pt>
               </c:numCache>
             </c:numRef>
@@ -1158,16 +1159,16 @@
                 <c:formatCode>General</c:formatCode>
                 <c:ptCount val="4"/>
                 <c:pt idx="0">
+                  <c:v>23.1</c:v>
+                </c:pt>
+                <c:pt idx="1">
                   <c:v>16.9</c:v>
                 </c:pt>
-                <c:pt idx="1">
-                  <c:v>11</c:v>
-                </c:pt>
                 <c:pt idx="2">
-                  <c:v>10.3</c:v>
+                  <c:v>13.1</c:v>
                 </c:pt>
                 <c:pt idx="3">
-                  <c:v>5.1</c:v>
+                  <c:v>10.7</c:v>
                 </c:pt>
               </c:numCache>
             </c:numRef>
@@ -1247,16 +1248,16 @@
                 <c:formatCode>General</c:formatCode>
                 <c:ptCount val="4"/>
                 <c:pt idx="0">
-                  <c:v>13.9</c:v>
+                  <c:v>19</c:v>
                 </c:pt>
                 <c:pt idx="1">
-                  <c:v>9</c:v>
+                  <c:v>13.8</c:v>
                 </c:pt>
                 <c:pt idx="2">
-                  <c:v>8.4</c:v>
+                  <c:v>10.7</c:v>
                 </c:pt>
                 <c:pt idx="3">
-                  <c:v>4.1</c:v>
+                  <c:v>8.6</c:v>
                 </c:pt>
               </c:numCache>
             </c:numRef>
@@ -1335,7 +1336,7 @@
         <c:axId val="2094734552"/>
         <c:scaling>
           <c:orientation val="minMax"/>
-          <c:max val="42"/>
+          <c:max val="58"/>
           <c:min val="0"/>
         </c:scaling>
         <c:delete val="0"/>
@@ -2528,7 +2529,7 @@
           <a:p>
             <a:r>
               <a:rPr lang="en-US" dirty="0"/>
-              <a:t/>
+              <a:t>まとめ。意義は5点。先方基準20%に対しては回転10.3ヶ月が分岐点であることを明示する。</a:t>
             </a:r>
             <a:endParaRPr lang="en-US" dirty="0"/>
           </a:p>
@@ -2552,6 +2553,94 @@
             <a:fld id="{F7021451-1387-4CA6-816F-3879F97B5CBC}" type="slidenum">
               <a:rPr lang="en-US"/>
               <a:t>17</a:t>
+            </a:fld>
+            <a:endParaRPr lang="en-US"/>
+          </a:p>
+        </p:txBody>
+      </p:sp>
+    </p:spTree>
+    <p:extLst>
+      <p:ext uri="{BB962C8B-B14F-4D97-AF65-F5344CB8AC3E}">
+        <p14:creationId xmlns:p14="http://schemas.microsoft.com/office/powerpoint/2010/main" val="1024086991"/>
+      </p:ext>
+    </p:extLst>
+  </p:cSld>
+  <p:clrMapOvr>
+    <a:masterClrMapping/>
+  </p:clrMapOvr>
+</p:notes>
+</file>
+
+<file path=ppt/notesSlides/notesSlide18.xml><?xml version="1.0" encoding="utf-8"?>
+<p:notes xmlns:a="http://schemas.openxmlformats.org/drawingml/2006/main" xmlns:r="http://schemas.openxmlformats.org/officeDocument/2006/relationships" xmlns:p="http://schemas.openxmlformats.org/presentationml/2006/main">
+  <p:cSld>
+    <p:spTree>
+      <p:nvGrpSpPr>
+        <p:cNvPr id="1" name=""/>
+        <p:cNvGrpSpPr/>
+        <p:nvPr/>
+      </p:nvGrpSpPr>
+      <p:grpSpPr>
+        <a:xfrm>
+          <a:off x="0" y="0"/>
+          <a:ext cx="0" cy="0"/>
+          <a:chOff x="0" y="0"/>
+          <a:chExt cx="0" cy="0"/>
+        </a:xfrm>
+      </p:grpSpPr>
+      <p:sp>
+        <p:nvSpPr>
+          <p:cNvPr id="2" name="Slide Image Placeholder 1"/>
+          <p:cNvSpPr>
+            <a:spLocks noGrp="1" noRot="1" noChangeAspect="1"/>
+          </p:cNvSpPr>
+          <p:nvPr>
+            <p:ph type="sldImg"/>
+          </p:nvPr>
+        </p:nvSpPr>
+        <p:spPr/>
+      </p:sp>
+      <p:sp>
+        <p:nvSpPr>
+          <p:cNvPr id="3" name="Notes Placeholder 2"/>
+          <p:cNvSpPr>
+            <a:spLocks noGrp="1"/>
+          </p:cNvSpPr>
+          <p:nvPr>
+            <p:ph type="body" idx="1"/>
+          </p:nvPr>
+        </p:nvSpPr>
+        <p:spPr/>
+        <p:txBody>
+          <a:bodyPr/>
+          <a:lstStyle/>
+          <a:p>
+            <a:r>
+              <a:rPr lang="en-US" dirty="0"/>
+              <a:t/>
+            </a:r>
+            <a:endParaRPr lang="en-US" dirty="0"/>
+          </a:p>
+        </p:txBody>
+      </p:sp>
+      <p:sp>
+        <p:nvSpPr>
+          <p:cNvPr id="4" name="Slide Number Placeholder 3"/>
+          <p:cNvSpPr>
+            <a:spLocks noGrp="1"/>
+          </p:cNvSpPr>
+          <p:nvPr>
+            <p:ph type="sldNum" sz="quarter" idx="10"/>
+          </p:nvPr>
+        </p:nvSpPr>
+        <p:spPr/>
+        <p:txBody>
+          <a:bodyPr/>
+          <a:lstStyle/>
+          <a:p>
+            <a:fld id="{F7021451-1387-4CA6-816F-3879F97B5CBC}" type="slidenum">
+              <a:rPr lang="en-US"/>
+              <a:t>18</a:t>
             </a:fld>
             <a:endParaRPr lang="en-US"/>
           </a:p>
@@ -2616,7 +2705,7 @@
           <a:p>
             <a:r>
               <a:rPr lang="en-US" dirty="0"/>
-              <a:t>骨子。IRRの主線は回転9〜12ヶ月で11.0〜16.9%。</a:t>
+              <a:t>骨子。主線は回転9〜12ヶ月で定常年間利回り16.9〜23.1%、3年通算の年平均利回り11.1〜17.0%。</a:t>
             </a:r>
             <a:endParaRPr lang="en-US" dirty="0"/>
           </a:p>
@@ -2704,7 +2793,7 @@
           <a:p>
             <a:r>
               <a:rPr lang="en-US" dirty="0"/>
-              <a:t>改訂は2点。影響は定常利回りで▲1.0pt、IRRで▲0.7pt。粗利率は33.3%→32.7%となる。</a:t>
+              <a:t>改訂は2点。影響は定常年間利回りで▲1.0pt、3年通算の年平均利回りで▲0.7pt。粗利率は33.3%→32.7%となる。</a:t>
             </a:r>
             <a:endParaRPr lang="en-US" dirty="0"/>
           </a:p>
@@ -5215,7 +5304,7 @@
                           <a:ea typeface="Yu Gothic" pitchFamily="34" charset="-122"/>
                           <a:cs typeface="Yu Gothic" pitchFamily="34" charset="-120"/>
                         </a:rPr>
-                        <a:t>IRR（3年）</a:t>
+                        <a:t>年平均3年</a:t>
                       </a:r>
                       <a:endParaRPr lang="en-US" sz="950" dirty="0">
                         <a:latin typeface="Yu Gothic" charset="0"/>
@@ -5557,7 +5646,7 @@
                           <a:ea typeface="Yu Gothic" pitchFamily="34" charset="-122"/>
                           <a:cs typeface="Yu Gothic" pitchFamily="34" charset="-120"/>
                         </a:rPr>
-                        <a:t>36.7%</a:t>
+                        <a:t>37.3%</a:t>
                       </a:r>
                       <a:endParaRPr lang="en-US" sz="950" dirty="0">
                         <a:latin typeface="Yu Gothic" charset="0"/>
@@ -5899,7 +5988,7 @@
                           <a:ea typeface="Yu Gothic" pitchFamily="34" charset="-122"/>
                           <a:cs typeface="Yu Gothic" pitchFamily="34" charset="-120"/>
                         </a:rPr>
-                        <a:t>24.3%</a:t>
+                        <a:t>24.6%</a:t>
                       </a:r>
                       <a:endParaRPr lang="en-US" sz="950" dirty="0">
                         <a:latin typeface="Yu Gothic" charset="0"/>
@@ -6241,7 +6330,7 @@
                           <a:ea typeface="Yu Gothic" pitchFamily="34" charset="-122"/>
                           <a:cs typeface="Yu Gothic" pitchFamily="34" charset="-120"/>
                         </a:rPr>
-                        <a:t>22.2%</a:t>
+                        <a:t>24.2%</a:t>
                       </a:r>
                       <a:endParaRPr lang="en-US" sz="950" dirty="0">
                         <a:latin typeface="Yu Gothic" charset="0"/>
@@ -6583,7 +6672,7 @@
                           <a:ea typeface="Yu Gothic" pitchFamily="34" charset="-122"/>
                           <a:cs typeface="Yu Gothic" pitchFamily="34" charset="-120"/>
                         </a:rPr>
-                        <a:t>11.8%</a:t>
+                        <a:t>11.9%</a:t>
                       </a:r>
                       <a:endParaRPr lang="en-US" sz="950" dirty="0">
                         <a:latin typeface="Yu Gothic" charset="0"/>
@@ -7066,7 +7155,7 @@
                           <a:ea typeface="Yu Gothic" pitchFamily="34" charset="-122"/>
                           <a:cs typeface="Yu Gothic" pitchFamily="34" charset="-120"/>
                         </a:rPr>
-                        <a:t>IRR（3年）</a:t>
+                        <a:t>年平均3年</a:t>
                       </a:r>
                       <a:endParaRPr lang="en-US" sz="950" dirty="0">
                         <a:latin typeface="Yu Gothic" charset="0"/>
@@ -7408,7 +7497,7 @@
                           <a:ea typeface="Yu Gothic" pitchFamily="34" charset="-122"/>
                           <a:cs typeface="Yu Gothic" pitchFamily="34" charset="-120"/>
                         </a:rPr>
-                        <a:t>13.9%</a:t>
+                        <a:t>14.0%</a:t>
                       </a:r>
                       <a:endParaRPr lang="en-US" sz="950" dirty="0">
                         <a:latin typeface="Yu Gothic" charset="0"/>
@@ -8092,7 +8181,7 @@
                           <a:ea typeface="Yu Gothic" pitchFamily="34" charset="-122"/>
                           <a:cs typeface="Yu Gothic" pitchFamily="34" charset="-120"/>
                         </a:rPr>
-                        <a:t>8.4%</a:t>
+                        <a:t>8.7%</a:t>
                       </a:r>
                       <a:endParaRPr lang="en-US" sz="950" dirty="0">
                         <a:latin typeface="Yu Gothic" charset="0"/>
@@ -8744,7 +8833,7 @@
                 <a:ea typeface="Yu Mincho" pitchFamily="34" charset="-122"/>
                 <a:cs typeface="Yu Mincho" pitchFamily="34" charset="-120"/>
               </a:rPr>
-              <a:t>3シナリオ比較：投資家IRR（3年）</a:t>
+              <a:t>3シナリオ比較：定常年間利回り</a:t>
             </a:r>
             <a:endParaRPr lang="en-US" sz="2700" dirty="0"/>
           </a:p>
@@ -8783,7 +8872,7 @@
                 <a:ea typeface="Yu Gothic" pitchFamily="34" charset="-122"/>
                 <a:cs typeface="Yu Gothic" pitchFamily="34" charset="-120"/>
               </a:rPr>
-              <a:t>現物譲渡1%・SPC人件費360万円を反映した後の投資家IRR。</a:t>
+              <a:t>現物譲渡1%・SPC人件費360万円を反映した後の、運用が軌道に乗った後の年間実力値。</a:t>
             </a:r>
             <a:endParaRPr lang="en-US" sz="1150" dirty="0"/>
           </a:p>
@@ -9012,7 +9101,7 @@
                 <a:ea typeface="Yu Gothic" pitchFamily="34" charset="-122"/>
                 <a:cs typeface="Yu Gothic" pitchFamily="34" charset="-120"/>
               </a:rPr>
-              <a:t>回転9〜12ヶ月でIRR11.0〜16.9%。保守的な前提を積み上げた数値であり、交渉の出発点として提示する。</a:t>
+              <a:t>回転9〜12ヶ月で定常利回り16.9〜23.1%（3年通算の年平均利回り11.1〜17.0%）。保守的な前提を積み上げた数値であり、交渉の出発点として提示する。</a:t>
             </a:r>
             <a:endParaRPr lang="en-US" sz="950" dirty="0"/>
           </a:p>
@@ -9120,7 +9209,7 @@
                 <a:ea typeface="Yu Gothic" pitchFamily="34" charset="-122"/>
                 <a:cs typeface="Yu Gothic" pitchFamily="34" charset="-120"/>
               </a:rPr>
-              <a:t>調達をインポーター直に寄せ、販売を自社チャネルに寄せれば、同じ回転期間でIRRは2倍以上になる。</a:t>
+              <a:t>調達をインポーター直に寄せ、販売を自社チャネルに寄せれば、同じ回転期間で利回りは2倍以上になる。</a:t>
             </a:r>
             <a:endParaRPr lang="en-US" sz="950" dirty="0"/>
           </a:p>
@@ -9228,7 +9317,7 @@
                 <a:ea typeface="Yu Gothic" pitchFamily="34" charset="-122"/>
                 <a:cs typeface="Yu Gothic" pitchFamily="34" charset="-120"/>
               </a:rPr>
-              <a:t>値引き5%を強いられても、回転9ヶ月を維持できればIRR13.9%を確保できる。回転の維持が防衛線。</a:t>
+              <a:t>値引き5%を強いられても、回転9ヶ月を維持できれば定常利回り19.0%を確保できる。回転の維持が防衛線。</a:t>
             </a:r>
             <a:endParaRPr lang="en-US" sz="950" dirty="0"/>
           </a:p>
@@ -15469,7 +15558,7 @@
                           <a:ea typeface="Yu Gothic" pitchFamily="34" charset="-122"/>
                           <a:cs typeface="Yu Gothic" pitchFamily="34" charset="-120"/>
                         </a:rPr>
-                        <a:t>投資家IRR 11.0〜16.9%（回転12〜9ヶ月）</a:t>
+                        <a:t>定常年間利回り 16.9〜23.1%（回転12〜9ヶ月）</a:t>
                       </a:r>
                       <a:endParaRPr lang="en-US" sz="1000" dirty="0">
                         <a:latin typeface="Yu Gothic" charset="0"/>
@@ -15537,7 +15626,7 @@
                           <a:ea typeface="Yu Gothic" pitchFamily="34" charset="-122"/>
                           <a:cs typeface="Yu Gothic" pitchFamily="34" charset="-120"/>
                         </a:rPr>
-                        <a:t>ニュートラル前提。上振れ余地は前掲</a:t>
+                        <a:t>ニュートラル前提。3年通算の年平均利回りは11.1〜17.0%</a:t>
                       </a:r>
                       <a:endParaRPr lang="en-US" sz="1000" dirty="0">
                         <a:latin typeface="Yu Gothic" charset="0"/>
@@ -16313,7 +16402,7 @@
                 <a:ea typeface="Yu Gothic" pitchFamily="34" charset="-122"/>
                 <a:cs typeface="Yu Gothic" pitchFamily="34" charset="-120"/>
               </a:rPr>
-              <a:t>半期解約に応じるには常時1〜3割を現金または即時換金可能な在庫で保有する必要があり、その分だけ稼働率が下がる。稼働率85%→70%で定常利回りは16.9%→13.7%、IRR（3年）は11.0%→8.9%に低下する。解約条件はご要望に合わせて設計するが、利回りとの両立が難しい点を事前に共有したい。</a:t>
+              <a:t>半期解約に応じるには常時1〜3割を現金または即時換金可能な在庫で保有する必要があり、その分だけ稼働率が下がる。稼働率85%→70%で定常年間利回りは16.9%→13.7%、3年通算の年平均利回りは11.1%→8.9%に低下する。解約条件はご要望に合わせて設計するが、利回りとの両立が難しい点を事前に共有したい。</a:t>
             </a:r>
             <a:endParaRPr lang="en-US" sz="1000" dirty="0"/>
           </a:p>
@@ -17485,6 +17574,1717 @@
       </p:grpSpPr>
       <p:sp>
         <p:nvSpPr>
+          <p:cNvPr id="2" name="Text 0"/>
+          <p:cNvSpPr/>
+          <p:nvPr/>
+        </p:nvSpPr>
+        <p:spPr>
+          <a:xfrm>
+            <a:off x="658368" y="384048"/>
+            <a:ext cx="10874959" cy="219456"/>
+          </a:xfrm>
+          <a:prstGeom prst="rect">
+            <a:avLst/>
+          </a:prstGeom>
+          <a:noFill/>
+          <a:ln/>
+        </p:spPr>
+        <p:txBody>
+          <a:bodyPr wrap="square" lIns="0" tIns="0" rIns="0" bIns="0" rtlCol="0" anchor="ctr"/>
+          <a:lstStyle/>
+          <a:p>
+            <a:pPr indent="0" marL="0">
+              <a:buNone/>
+            </a:pPr>
+            <a:r>
+              <a:rPr lang="en-US" sz="1050" b="1" spc="340" kern="0" dirty="0">
+                <a:solidFill>
+                  <a:srgbClr val="A78450"/>
+                </a:solidFill>
+                <a:latin typeface="Cambria" pitchFamily="34" charset="0"/>
+                <a:ea typeface="Cambria" pitchFamily="34" charset="-122"/>
+                <a:cs typeface="Cambria" pitchFamily="34" charset="-120"/>
+              </a:rPr>
+              <a:t>CONCLUSION</a:t>
+            </a:r>
+            <a:endParaRPr lang="en-US" sz="1050" dirty="0"/>
+          </a:p>
+        </p:txBody>
+      </p:sp>
+      <p:sp>
+        <p:nvSpPr>
+          <p:cNvPr id="3" name="Text 1"/>
+          <p:cNvSpPr/>
+          <p:nvPr/>
+        </p:nvSpPr>
+        <p:spPr>
+          <a:xfrm>
+            <a:off x="658368" y="640080"/>
+            <a:ext cx="10874959" cy="548640"/>
+          </a:xfrm>
+          <a:prstGeom prst="rect">
+            <a:avLst/>
+          </a:prstGeom>
+          <a:noFill/>
+          <a:ln/>
+        </p:spPr>
+        <p:txBody>
+          <a:bodyPr wrap="square" lIns="0" tIns="0" rIns="0" bIns="0" rtlCol="0" anchor="ctr"/>
+          <a:lstStyle/>
+          <a:p>
+            <a:pPr indent="0" marL="0">
+              <a:buNone/>
+            </a:pPr>
+            <a:r>
+              <a:rPr lang="en-US" sz="2700" b="1" dirty="0">
+                <a:solidFill>
+                  <a:srgbClr val="EFEBE3"/>
+                </a:solidFill>
+                <a:latin typeface="Yu Mincho" pitchFamily="34" charset="0"/>
+                <a:ea typeface="Yu Mincho" pitchFamily="34" charset="-122"/>
+                <a:cs typeface="Yu Mincho" pitchFamily="34" charset="-120"/>
+              </a:rPr>
+              <a:t>まとめ：本ファンドに出資いただく意義</a:t>
+            </a:r>
+            <a:endParaRPr lang="en-US" sz="2700" dirty="0"/>
+          </a:p>
+        </p:txBody>
+      </p:sp>
+      <p:sp>
+        <p:nvSpPr>
+          <p:cNvPr id="4" name="Text 2"/>
+          <p:cNvSpPr/>
+          <p:nvPr/>
+        </p:nvSpPr>
+        <p:spPr>
+          <a:xfrm>
+            <a:off x="658368" y="6437376"/>
+            <a:ext cx="5029200" cy="219456"/>
+          </a:xfrm>
+          <a:prstGeom prst="rect">
+            <a:avLst/>
+          </a:prstGeom>
+          <a:noFill/>
+          <a:ln/>
+        </p:spPr>
+        <p:txBody>
+          <a:bodyPr wrap="square" lIns="0" tIns="0" rIns="0" bIns="0" rtlCol="0" anchor="ctr"/>
+          <a:lstStyle/>
+          <a:p>
+            <a:pPr indent="0" marL="0">
+              <a:buNone/>
+            </a:pPr>
+            <a:r>
+              <a:rPr lang="en-US" sz="850" dirty="0">
+                <a:solidFill>
+                  <a:srgbClr val="6E675E"/>
+                </a:solidFill>
+                <a:latin typeface="Yu Gothic" pitchFamily="34" charset="0"/>
+                <a:ea typeface="Yu Gothic" pitchFamily="34" charset="-122"/>
+                <a:cs typeface="Yu Gothic" pitchFamily="34" charset="-120"/>
+              </a:rPr>
+              <a:t>CONFIDENTIAL ｜ 株式会社WineBank</a:t>
+            </a:r>
+            <a:endParaRPr lang="en-US" sz="850" dirty="0"/>
+          </a:p>
+        </p:txBody>
+      </p:sp>
+      <p:sp>
+        <p:nvSpPr>
+          <p:cNvPr id="5" name="Text 3"/>
+          <p:cNvSpPr/>
+          <p:nvPr/>
+        </p:nvSpPr>
+        <p:spPr>
+          <a:xfrm>
+            <a:off x="10618927" y="6437376"/>
+            <a:ext cx="914400" cy="219456"/>
+          </a:xfrm>
+          <a:prstGeom prst="rect">
+            <a:avLst/>
+          </a:prstGeom>
+          <a:noFill/>
+          <a:ln/>
+        </p:spPr>
+        <p:txBody>
+          <a:bodyPr wrap="square" lIns="0" tIns="0" rIns="0" bIns="0" rtlCol="0" anchor="ctr"/>
+          <a:lstStyle/>
+          <a:p>
+            <a:pPr algn="r" indent="0" marL="0">
+              <a:buNone/>
+            </a:pPr>
+            <a:r>
+              <a:rPr lang="en-US" sz="950" spc="150" kern="0" dirty="0">
+                <a:solidFill>
+                  <a:srgbClr val="6E5730"/>
+                </a:solidFill>
+                <a:latin typeface="Cambria" pitchFamily="34" charset="0"/>
+                <a:ea typeface="Cambria" pitchFamily="34" charset="-122"/>
+                <a:cs typeface="Cambria" pitchFamily="34" charset="-120"/>
+              </a:rPr>
+              <a:t>16</a:t>
+            </a:r>
+            <a:endParaRPr lang="en-US" sz="950" dirty="0"/>
+          </a:p>
+        </p:txBody>
+      </p:sp>
+      <p:sp>
+        <p:nvSpPr>
+          <p:cNvPr id="6" name="Shape 4"/>
+          <p:cNvSpPr/>
+          <p:nvPr/>
+        </p:nvSpPr>
+        <p:spPr>
+          <a:xfrm>
+            <a:off x="658368" y="1572768"/>
+            <a:ext cx="6537960" cy="749808"/>
+          </a:xfrm>
+          <a:prstGeom prst="roundRect">
+            <a:avLst>
+              <a:gd name="adj" fmla="val 5488"/>
+            </a:avLst>
+          </a:prstGeom>
+          <a:solidFill>
+            <a:srgbClr val="171614"/>
+          </a:solidFill>
+          <a:ln w="9525">
+            <a:solidFill>
+              <a:srgbClr val="2E2A24"/>
+            </a:solidFill>
+            <a:prstDash val="solid"/>
+          </a:ln>
+        </p:spPr>
+      </p:sp>
+      <p:sp>
+        <p:nvSpPr>
+          <p:cNvPr id="7" name="Shape 5"/>
+          <p:cNvSpPr/>
+          <p:nvPr/>
+        </p:nvSpPr>
+        <p:spPr>
+          <a:xfrm>
+            <a:off x="877824" y="1792224"/>
+            <a:ext cx="310896" cy="310896"/>
+          </a:xfrm>
+          <a:prstGeom prst="ellipse">
+            <a:avLst/>
+          </a:prstGeom>
+          <a:solidFill>
+            <a:srgbClr val="0C0C0C"/>
+          </a:solidFill>
+          <a:ln w="11430">
+            <a:solidFill>
+              <a:srgbClr val="A78450"/>
+            </a:solidFill>
+            <a:prstDash val="solid"/>
+          </a:ln>
+        </p:spPr>
+      </p:sp>
+      <p:sp>
+        <p:nvSpPr>
+          <p:cNvPr id="8" name="Text 6"/>
+          <p:cNvSpPr/>
+          <p:nvPr/>
+        </p:nvSpPr>
+        <p:spPr>
+          <a:xfrm>
+            <a:off x="877824" y="1792224"/>
+            <a:ext cx="310896" cy="310896"/>
+          </a:xfrm>
+          <a:prstGeom prst="rect">
+            <a:avLst/>
+          </a:prstGeom>
+          <a:noFill/>
+          <a:ln/>
+        </p:spPr>
+        <p:txBody>
+          <a:bodyPr wrap="square" lIns="0" tIns="0" rIns="0" bIns="0" rtlCol="0" anchor="ctr"/>
+          <a:lstStyle/>
+          <a:p>
+            <a:pPr algn="ctr" indent="0" marL="0">
+              <a:buNone/>
+            </a:pPr>
+            <a:r>
+              <a:rPr lang="en-US" sz="1100" b="1" dirty="0">
+                <a:solidFill>
+                  <a:srgbClr val="C9A96E"/>
+                </a:solidFill>
+                <a:latin typeface="Cambria" pitchFamily="34" charset="0"/>
+                <a:ea typeface="Cambria" pitchFamily="34" charset="-122"/>
+                <a:cs typeface="Cambria" pitchFamily="34" charset="-120"/>
+              </a:rPr>
+              <a:t>01</a:t>
+            </a:r>
+            <a:endParaRPr lang="en-US" sz="1100" dirty="0"/>
+          </a:p>
+        </p:txBody>
+      </p:sp>
+      <p:sp>
+        <p:nvSpPr>
+          <p:cNvPr id="9" name="Text 7"/>
+          <p:cNvSpPr/>
+          <p:nvPr/>
+        </p:nvSpPr>
+        <p:spPr>
+          <a:xfrm>
+            <a:off x="1280160" y="1682496"/>
+            <a:ext cx="5678424" cy="237744"/>
+          </a:xfrm>
+          <a:prstGeom prst="rect">
+            <a:avLst/>
+          </a:prstGeom>
+          <a:noFill/>
+          <a:ln/>
+        </p:spPr>
+        <p:txBody>
+          <a:bodyPr wrap="square" lIns="0" tIns="0" rIns="0" bIns="0" rtlCol="0" anchor="ctr"/>
+          <a:lstStyle/>
+          <a:p>
+            <a:pPr indent="0" marL="0">
+              <a:buNone/>
+            </a:pPr>
+            <a:r>
+              <a:rPr lang="en-US" sz="1150" b="1" dirty="0">
+                <a:solidFill>
+                  <a:srgbClr val="EFEBE3"/>
+                </a:solidFill>
+                <a:latin typeface="Yu Gothic" pitchFamily="34" charset="0"/>
+                <a:ea typeface="Yu Gothic" pitchFamily="34" charset="-122"/>
+                <a:cs typeface="Yu Gothic" pitchFamily="34" charset="-120"/>
+              </a:rPr>
+              <a:t>現物が元本を裏付ける</a:t>
+            </a:r>
+            <a:endParaRPr lang="en-US" sz="1150" dirty="0"/>
+          </a:p>
+        </p:txBody>
+      </p:sp>
+      <p:sp>
+        <p:nvSpPr>
+          <p:cNvPr id="10" name="Text 8"/>
+          <p:cNvSpPr/>
+          <p:nvPr/>
+        </p:nvSpPr>
+        <p:spPr>
+          <a:xfrm>
+            <a:off x="1280160" y="1920240"/>
+            <a:ext cx="5678424" cy="329184"/>
+          </a:xfrm>
+          <a:prstGeom prst="rect">
+            <a:avLst/>
+          </a:prstGeom>
+          <a:noFill/>
+          <a:ln/>
+        </p:spPr>
+        <p:txBody>
+          <a:bodyPr wrap="square" lIns="0" tIns="0" rIns="0" bIns="0" rtlCol="0" anchor="ctr"/>
+          <a:lstStyle/>
+          <a:p>
+            <a:pPr indent="0" marL="0">
+              <a:lnSpc>
+                <a:spcPct val="115000"/>
+              </a:lnSpc>
+              <a:buNone/>
+            </a:pPr>
+            <a:r>
+              <a:rPr lang="en-US" sz="900" dirty="0">
+                <a:solidFill>
+                  <a:srgbClr val="9A938A"/>
+                </a:solidFill>
+                <a:latin typeface="Yu Gothic" pitchFamily="34" charset="0"/>
+                <a:ea typeface="Yu Gothic" pitchFamily="34" charset="-122"/>
+                <a:cs typeface="Yu Gothic" pitchFamily="34" charset="-120"/>
+              </a:rPr>
+              <a:t>出資金は常にワイン現物と現金として存在する。SPC名義で保有し倒産隔離。値上がり益はリターンに一切算入していない。</a:t>
+            </a:r>
+            <a:endParaRPr lang="en-US" sz="900" dirty="0"/>
+          </a:p>
+        </p:txBody>
+      </p:sp>
+      <p:sp>
+        <p:nvSpPr>
+          <p:cNvPr id="11" name="Shape 9"/>
+          <p:cNvSpPr/>
+          <p:nvPr/>
+        </p:nvSpPr>
+        <p:spPr>
+          <a:xfrm>
+            <a:off x="658368" y="2395728"/>
+            <a:ext cx="6537960" cy="749808"/>
+          </a:xfrm>
+          <a:prstGeom prst="roundRect">
+            <a:avLst>
+              <a:gd name="adj" fmla="val 5488"/>
+            </a:avLst>
+          </a:prstGeom>
+          <a:solidFill>
+            <a:srgbClr val="171614"/>
+          </a:solidFill>
+          <a:ln w="9525">
+            <a:solidFill>
+              <a:srgbClr val="2E2A24"/>
+            </a:solidFill>
+            <a:prstDash val="solid"/>
+          </a:ln>
+        </p:spPr>
+      </p:sp>
+      <p:sp>
+        <p:nvSpPr>
+          <p:cNvPr id="12" name="Shape 10"/>
+          <p:cNvSpPr/>
+          <p:nvPr/>
+        </p:nvSpPr>
+        <p:spPr>
+          <a:xfrm>
+            <a:off x="877824" y="2615184"/>
+            <a:ext cx="310896" cy="310896"/>
+          </a:xfrm>
+          <a:prstGeom prst="ellipse">
+            <a:avLst/>
+          </a:prstGeom>
+          <a:solidFill>
+            <a:srgbClr val="0C0C0C"/>
+          </a:solidFill>
+          <a:ln w="11430">
+            <a:solidFill>
+              <a:srgbClr val="A78450"/>
+            </a:solidFill>
+            <a:prstDash val="solid"/>
+          </a:ln>
+        </p:spPr>
+      </p:sp>
+      <p:sp>
+        <p:nvSpPr>
+          <p:cNvPr id="13" name="Text 11"/>
+          <p:cNvSpPr/>
+          <p:nvPr/>
+        </p:nvSpPr>
+        <p:spPr>
+          <a:xfrm>
+            <a:off x="877824" y="2615184"/>
+            <a:ext cx="310896" cy="310896"/>
+          </a:xfrm>
+          <a:prstGeom prst="rect">
+            <a:avLst/>
+          </a:prstGeom>
+          <a:noFill/>
+          <a:ln/>
+        </p:spPr>
+        <p:txBody>
+          <a:bodyPr wrap="square" lIns="0" tIns="0" rIns="0" bIns="0" rtlCol="0" anchor="ctr"/>
+          <a:lstStyle/>
+          <a:p>
+            <a:pPr algn="ctr" indent="0" marL="0">
+              <a:buNone/>
+            </a:pPr>
+            <a:r>
+              <a:rPr lang="en-US" sz="1100" b="1" dirty="0">
+                <a:solidFill>
+                  <a:srgbClr val="C9A96E"/>
+                </a:solidFill>
+                <a:latin typeface="Cambria" pitchFamily="34" charset="0"/>
+                <a:ea typeface="Cambria" pitchFamily="34" charset="-122"/>
+                <a:cs typeface="Cambria" pitchFamily="34" charset="-120"/>
+              </a:rPr>
+              <a:t>02</a:t>
+            </a:r>
+            <a:endParaRPr lang="en-US" sz="1100" dirty="0"/>
+          </a:p>
+        </p:txBody>
+      </p:sp>
+      <p:sp>
+        <p:nvSpPr>
+          <p:cNvPr id="14" name="Text 12"/>
+          <p:cNvSpPr/>
+          <p:nvPr/>
+        </p:nvSpPr>
+        <p:spPr>
+          <a:xfrm>
+            <a:off x="1280160" y="2505456"/>
+            <a:ext cx="5678424" cy="237744"/>
+          </a:xfrm>
+          <a:prstGeom prst="rect">
+            <a:avLst/>
+          </a:prstGeom>
+          <a:noFill/>
+          <a:ln/>
+        </p:spPr>
+        <p:txBody>
+          <a:bodyPr wrap="square" lIns="0" tIns="0" rIns="0" bIns="0" rtlCol="0" anchor="ctr"/>
+          <a:lstStyle/>
+          <a:p>
+            <a:pPr indent="0" marL="0">
+              <a:buNone/>
+            </a:pPr>
+            <a:r>
+              <a:rPr lang="en-US" sz="1150" b="1" dirty="0">
+                <a:solidFill>
+                  <a:srgbClr val="EFEBE3"/>
+                </a:solidFill>
+                <a:latin typeface="Yu Gothic" pitchFamily="34" charset="0"/>
+                <a:ea typeface="Yu Gothic" pitchFamily="34" charset="-122"/>
+                <a:cs typeface="Yu Gothic" pitchFamily="34" charset="-120"/>
+              </a:rPr>
+              <a:t>相場ではなく流通の価格差から収益を得る</a:t>
+            </a:r>
+            <a:endParaRPr lang="en-US" sz="1150" dirty="0"/>
+          </a:p>
+        </p:txBody>
+      </p:sp>
+      <p:sp>
+        <p:nvSpPr>
+          <p:cNvPr id="15" name="Text 13"/>
+          <p:cNvSpPr/>
+          <p:nvPr/>
+        </p:nvSpPr>
+        <p:spPr>
+          <a:xfrm>
+            <a:off x="1280160" y="2743200"/>
+            <a:ext cx="5678424" cy="329184"/>
+          </a:xfrm>
+          <a:prstGeom prst="rect">
+            <a:avLst/>
+          </a:prstGeom>
+          <a:noFill/>
+          <a:ln/>
+        </p:spPr>
+        <p:txBody>
+          <a:bodyPr wrap="square" lIns="0" tIns="0" rIns="0" bIns="0" rtlCol="0" anchor="ctr"/>
+          <a:lstStyle/>
+          <a:p>
+            <a:pPr indent="0" marL="0">
+              <a:lnSpc>
+                <a:spcPct val="115000"/>
+              </a:lnSpc>
+              <a:buNone/>
+            </a:pPr>
+            <a:r>
+              <a:rPr lang="en-US" sz="900" dirty="0">
+                <a:solidFill>
+                  <a:srgbClr val="9A938A"/>
+                </a:solidFill>
+                <a:latin typeface="Yu Gothic" pitchFamily="34" charset="0"/>
+                <a:ea typeface="Yu Gothic" pitchFamily="34" charset="-122"/>
+                <a:cs typeface="Yu Gothic" pitchFamily="34" charset="-120"/>
+              </a:rPr>
+              <a:t>Liv-ex市況の上下ではなく、40〜60で仕入れ70〜80で売る価格差が収益源。市況が横ばいでも成立し、株式・債券との相関が低い。</a:t>
+            </a:r>
+            <a:endParaRPr lang="en-US" sz="900" dirty="0"/>
+          </a:p>
+        </p:txBody>
+      </p:sp>
+      <p:sp>
+        <p:nvSpPr>
+          <p:cNvPr id="16" name="Shape 14"/>
+          <p:cNvSpPr/>
+          <p:nvPr/>
+        </p:nvSpPr>
+        <p:spPr>
+          <a:xfrm>
+            <a:off x="658368" y="3218688"/>
+            <a:ext cx="6537960" cy="749808"/>
+          </a:xfrm>
+          <a:prstGeom prst="roundRect">
+            <a:avLst>
+              <a:gd name="adj" fmla="val 5488"/>
+            </a:avLst>
+          </a:prstGeom>
+          <a:solidFill>
+            <a:srgbClr val="171614"/>
+          </a:solidFill>
+          <a:ln w="9525">
+            <a:solidFill>
+              <a:srgbClr val="2E2A24"/>
+            </a:solidFill>
+            <a:prstDash val="solid"/>
+          </a:ln>
+        </p:spPr>
+      </p:sp>
+      <p:sp>
+        <p:nvSpPr>
+          <p:cNvPr id="17" name="Shape 15"/>
+          <p:cNvSpPr/>
+          <p:nvPr/>
+        </p:nvSpPr>
+        <p:spPr>
+          <a:xfrm>
+            <a:off x="877824" y="3438144"/>
+            <a:ext cx="310896" cy="310896"/>
+          </a:xfrm>
+          <a:prstGeom prst="ellipse">
+            <a:avLst/>
+          </a:prstGeom>
+          <a:solidFill>
+            <a:srgbClr val="0C0C0C"/>
+          </a:solidFill>
+          <a:ln w="11430">
+            <a:solidFill>
+              <a:srgbClr val="A78450"/>
+            </a:solidFill>
+            <a:prstDash val="solid"/>
+          </a:ln>
+        </p:spPr>
+      </p:sp>
+      <p:sp>
+        <p:nvSpPr>
+          <p:cNvPr id="18" name="Text 16"/>
+          <p:cNvSpPr/>
+          <p:nvPr/>
+        </p:nvSpPr>
+        <p:spPr>
+          <a:xfrm>
+            <a:off x="877824" y="3438144"/>
+            <a:ext cx="310896" cy="310896"/>
+          </a:xfrm>
+          <a:prstGeom prst="rect">
+            <a:avLst/>
+          </a:prstGeom>
+          <a:noFill/>
+          <a:ln/>
+        </p:spPr>
+        <p:txBody>
+          <a:bodyPr wrap="square" lIns="0" tIns="0" rIns="0" bIns="0" rtlCol="0" anchor="ctr"/>
+          <a:lstStyle/>
+          <a:p>
+            <a:pPr algn="ctr" indent="0" marL="0">
+              <a:buNone/>
+            </a:pPr>
+            <a:r>
+              <a:rPr lang="en-US" sz="1100" b="1" dirty="0">
+                <a:solidFill>
+                  <a:srgbClr val="C9A96E"/>
+                </a:solidFill>
+                <a:latin typeface="Cambria" pitchFamily="34" charset="0"/>
+                <a:ea typeface="Cambria" pitchFamily="34" charset="-122"/>
+                <a:cs typeface="Cambria" pitchFamily="34" charset="-120"/>
+              </a:rPr>
+              <a:t>03</a:t>
+            </a:r>
+            <a:endParaRPr lang="en-US" sz="1100" dirty="0"/>
+          </a:p>
+        </p:txBody>
+      </p:sp>
+      <p:sp>
+        <p:nvSpPr>
+          <p:cNvPr id="19" name="Text 17"/>
+          <p:cNvSpPr/>
+          <p:nvPr/>
+        </p:nvSpPr>
+        <p:spPr>
+          <a:xfrm>
+            <a:off x="1280160" y="3328416"/>
+            <a:ext cx="5678424" cy="237744"/>
+          </a:xfrm>
+          <a:prstGeom prst="rect">
+            <a:avLst/>
+          </a:prstGeom>
+          <a:noFill/>
+          <a:ln/>
+        </p:spPr>
+        <p:txBody>
+          <a:bodyPr wrap="square" lIns="0" tIns="0" rIns="0" bIns="0" rtlCol="0" anchor="ctr"/>
+          <a:lstStyle/>
+          <a:p>
+            <a:pPr indent="0" marL="0">
+              <a:buNone/>
+            </a:pPr>
+            <a:r>
+              <a:rPr lang="en-US" sz="1150" b="1" dirty="0">
+                <a:solidFill>
+                  <a:srgbClr val="EFEBE3"/>
+                </a:solidFill>
+                <a:latin typeface="Yu Gothic" pitchFamily="34" charset="0"/>
+                <a:ea typeface="Yu Gothic" pitchFamily="34" charset="-122"/>
+                <a:cs typeface="Yu Gothic" pitchFamily="34" charset="-120"/>
+              </a:rPr>
+              <a:t>他社が再現できない調達力</a:t>
+            </a:r>
+            <a:endParaRPr lang="en-US" sz="1150" dirty="0"/>
+          </a:p>
+        </p:txBody>
+      </p:sp>
+      <p:sp>
+        <p:nvSpPr>
+          <p:cNvPr id="20" name="Text 18"/>
+          <p:cNvSpPr/>
+          <p:nvPr/>
+        </p:nvSpPr>
+        <p:spPr>
+          <a:xfrm>
+            <a:off x="1280160" y="3566160"/>
+            <a:ext cx="5678424" cy="329184"/>
+          </a:xfrm>
+          <a:prstGeom prst="rect">
+            <a:avLst/>
+          </a:prstGeom>
+          <a:noFill/>
+          <a:ln/>
+        </p:spPr>
+        <p:txBody>
+          <a:bodyPr wrap="square" lIns="0" tIns="0" rIns="0" bIns="0" rtlCol="0" anchor="ctr"/>
+          <a:lstStyle/>
+          <a:p>
+            <a:pPr indent="0" marL="0">
+              <a:lnSpc>
+                <a:spcPct val="115000"/>
+              </a:lnSpc>
+              <a:buNone/>
+            </a:pPr>
+            <a:r>
+              <a:rPr lang="en-US" sz="900" dirty="0">
+                <a:solidFill>
+                  <a:srgbClr val="9A938A"/>
+                </a:solidFill>
+                <a:latin typeface="Yu Gothic" pitchFamily="34" charset="0"/>
+                <a:ea typeface="Yu Gothic" pitchFamily="34" charset="-122"/>
+                <a:cs typeface="Yu Gothic" pitchFamily="34" charset="-120"/>
+              </a:rPr>
+              <a:t>創業55年の酒販免許、大手インポーターとの直接取引、輸出入ライセンス。新規参入業者が正規品を同じ価格で大量に仕入れることはできない。</a:t>
+            </a:r>
+            <a:endParaRPr lang="en-US" sz="900" dirty="0"/>
+          </a:p>
+        </p:txBody>
+      </p:sp>
+      <p:sp>
+        <p:nvSpPr>
+          <p:cNvPr id="21" name="Shape 19"/>
+          <p:cNvSpPr/>
+          <p:nvPr/>
+        </p:nvSpPr>
+        <p:spPr>
+          <a:xfrm>
+            <a:off x="658368" y="4041648"/>
+            <a:ext cx="6537960" cy="749808"/>
+          </a:xfrm>
+          <a:prstGeom prst="roundRect">
+            <a:avLst>
+              <a:gd name="adj" fmla="val 5488"/>
+            </a:avLst>
+          </a:prstGeom>
+          <a:solidFill>
+            <a:srgbClr val="171614"/>
+          </a:solidFill>
+          <a:ln w="9525">
+            <a:solidFill>
+              <a:srgbClr val="2E2A24"/>
+            </a:solidFill>
+            <a:prstDash val="solid"/>
+          </a:ln>
+        </p:spPr>
+      </p:sp>
+      <p:sp>
+        <p:nvSpPr>
+          <p:cNvPr id="22" name="Shape 20"/>
+          <p:cNvSpPr/>
+          <p:nvPr/>
+        </p:nvSpPr>
+        <p:spPr>
+          <a:xfrm>
+            <a:off x="877824" y="4261104"/>
+            <a:ext cx="310896" cy="310896"/>
+          </a:xfrm>
+          <a:prstGeom prst="ellipse">
+            <a:avLst/>
+          </a:prstGeom>
+          <a:solidFill>
+            <a:srgbClr val="0C0C0C"/>
+          </a:solidFill>
+          <a:ln w="11430">
+            <a:solidFill>
+              <a:srgbClr val="A78450"/>
+            </a:solidFill>
+            <a:prstDash val="solid"/>
+          </a:ln>
+        </p:spPr>
+      </p:sp>
+      <p:sp>
+        <p:nvSpPr>
+          <p:cNvPr id="23" name="Text 21"/>
+          <p:cNvSpPr/>
+          <p:nvPr/>
+        </p:nvSpPr>
+        <p:spPr>
+          <a:xfrm>
+            <a:off x="877824" y="4261104"/>
+            <a:ext cx="310896" cy="310896"/>
+          </a:xfrm>
+          <a:prstGeom prst="rect">
+            <a:avLst/>
+          </a:prstGeom>
+          <a:noFill/>
+          <a:ln/>
+        </p:spPr>
+        <p:txBody>
+          <a:bodyPr wrap="square" lIns="0" tIns="0" rIns="0" bIns="0" rtlCol="0" anchor="ctr"/>
+          <a:lstStyle/>
+          <a:p>
+            <a:pPr algn="ctr" indent="0" marL="0">
+              <a:buNone/>
+            </a:pPr>
+            <a:r>
+              <a:rPr lang="en-US" sz="1100" b="1" dirty="0">
+                <a:solidFill>
+                  <a:srgbClr val="C9A96E"/>
+                </a:solidFill>
+                <a:latin typeface="Cambria" pitchFamily="34" charset="0"/>
+                <a:ea typeface="Cambria" pitchFamily="34" charset="-122"/>
+                <a:cs typeface="Cambria" pitchFamily="34" charset="-120"/>
+              </a:rPr>
+              <a:t>04</a:t>
+            </a:r>
+            <a:endParaRPr lang="en-US" sz="1100" dirty="0"/>
+          </a:p>
+        </p:txBody>
+      </p:sp>
+      <p:sp>
+        <p:nvSpPr>
+          <p:cNvPr id="24" name="Text 22"/>
+          <p:cNvSpPr/>
+          <p:nvPr/>
+        </p:nvSpPr>
+        <p:spPr>
+          <a:xfrm>
+            <a:off x="1280160" y="4151376"/>
+            <a:ext cx="5678424" cy="237744"/>
+          </a:xfrm>
+          <a:prstGeom prst="rect">
+            <a:avLst/>
+          </a:prstGeom>
+          <a:noFill/>
+          <a:ln/>
+        </p:spPr>
+        <p:txBody>
+          <a:bodyPr wrap="square" lIns="0" tIns="0" rIns="0" bIns="0" rtlCol="0" anchor="ctr"/>
+          <a:lstStyle/>
+          <a:p>
+            <a:pPr indent="0" marL="0">
+              <a:buNone/>
+            </a:pPr>
+            <a:r>
+              <a:rPr lang="en-US" sz="1150" b="1" dirty="0">
+                <a:solidFill>
+                  <a:srgbClr val="EFEBE3"/>
+                </a:solidFill>
+                <a:latin typeface="Yu Gothic" pitchFamily="34" charset="0"/>
+                <a:ea typeface="Yu Gothic" pitchFamily="34" charset="-122"/>
+                <a:cs typeface="Yu Gothic" pitchFamily="34" charset="-120"/>
+              </a:rPr>
+              <a:t>出口を自社で複数持っている</a:t>
+            </a:r>
+            <a:endParaRPr lang="en-US" sz="1150" dirty="0"/>
+          </a:p>
+        </p:txBody>
+      </p:sp>
+      <p:sp>
+        <p:nvSpPr>
+          <p:cNvPr id="25" name="Text 23"/>
+          <p:cNvSpPr/>
+          <p:nvPr/>
+        </p:nvSpPr>
+        <p:spPr>
+          <a:xfrm>
+            <a:off x="1280160" y="4389120"/>
+            <a:ext cx="5678424" cy="329184"/>
+          </a:xfrm>
+          <a:prstGeom prst="rect">
+            <a:avLst/>
+          </a:prstGeom>
+          <a:noFill/>
+          <a:ln/>
+        </p:spPr>
+        <p:txBody>
+          <a:bodyPr wrap="square" lIns="0" tIns="0" rIns="0" bIns="0" rtlCol="0" anchor="ctr"/>
+          <a:lstStyle/>
+          <a:p>
+            <a:pPr indent="0" marL="0">
+              <a:lnSpc>
+                <a:spcPct val="115000"/>
+              </a:lnSpc>
+              <a:buNone/>
+            </a:pPr>
+            <a:r>
+              <a:rPr lang="en-US" sz="900" dirty="0">
+                <a:solidFill>
+                  <a:srgbClr val="9A938A"/>
+                </a:solidFill>
+                <a:latin typeface="Yu Gothic" pitchFamily="34" charset="0"/>
+                <a:ea typeface="Yu Gothic" pitchFamily="34" charset="-122"/>
+                <a:cs typeface="Yu Gothic" pitchFamily="34" charset="-120"/>
+              </a:rPr>
+              <a:t>酒販店卸・自社EC（楽天／Yahoo／寺田）・WineBank Auction・CLUB会員・グループのアピシウス。回転期間を自力で短縮できる構造。</a:t>
+            </a:r>
+            <a:endParaRPr lang="en-US" sz="900" dirty="0"/>
+          </a:p>
+        </p:txBody>
+      </p:sp>
+      <p:sp>
+        <p:nvSpPr>
+          <p:cNvPr id="26" name="Shape 24"/>
+          <p:cNvSpPr/>
+          <p:nvPr/>
+        </p:nvSpPr>
+        <p:spPr>
+          <a:xfrm>
+            <a:off x="658368" y="4864608"/>
+            <a:ext cx="6537960" cy="749808"/>
+          </a:xfrm>
+          <a:prstGeom prst="roundRect">
+            <a:avLst>
+              <a:gd name="adj" fmla="val 5488"/>
+            </a:avLst>
+          </a:prstGeom>
+          <a:solidFill>
+            <a:srgbClr val="1F1D19"/>
+          </a:solidFill>
+          <a:ln w="9525">
+            <a:solidFill>
+              <a:srgbClr val="6E5730"/>
+            </a:solidFill>
+            <a:prstDash val="solid"/>
+          </a:ln>
+        </p:spPr>
+      </p:sp>
+      <p:sp>
+        <p:nvSpPr>
+          <p:cNvPr id="27" name="Shape 25"/>
+          <p:cNvSpPr/>
+          <p:nvPr/>
+        </p:nvSpPr>
+        <p:spPr>
+          <a:xfrm>
+            <a:off x="877824" y="5084064"/>
+            <a:ext cx="310896" cy="310896"/>
+          </a:xfrm>
+          <a:prstGeom prst="ellipse">
+            <a:avLst/>
+          </a:prstGeom>
+          <a:solidFill>
+            <a:srgbClr val="0C0C0C"/>
+          </a:solidFill>
+          <a:ln w="11430">
+            <a:solidFill>
+              <a:srgbClr val="A78450"/>
+            </a:solidFill>
+            <a:prstDash val="solid"/>
+          </a:ln>
+        </p:spPr>
+      </p:sp>
+      <p:sp>
+        <p:nvSpPr>
+          <p:cNvPr id="28" name="Text 26"/>
+          <p:cNvSpPr/>
+          <p:nvPr/>
+        </p:nvSpPr>
+        <p:spPr>
+          <a:xfrm>
+            <a:off x="877824" y="5084064"/>
+            <a:ext cx="310896" cy="310896"/>
+          </a:xfrm>
+          <a:prstGeom prst="rect">
+            <a:avLst/>
+          </a:prstGeom>
+          <a:noFill/>
+          <a:ln/>
+        </p:spPr>
+        <p:txBody>
+          <a:bodyPr wrap="square" lIns="0" tIns="0" rIns="0" bIns="0" rtlCol="0" anchor="ctr"/>
+          <a:lstStyle/>
+          <a:p>
+            <a:pPr algn="ctr" indent="0" marL="0">
+              <a:buNone/>
+            </a:pPr>
+            <a:r>
+              <a:rPr lang="en-US" sz="1100" b="1" dirty="0">
+                <a:solidFill>
+                  <a:srgbClr val="C9A96E"/>
+                </a:solidFill>
+                <a:latin typeface="Cambria" pitchFamily="34" charset="0"/>
+                <a:ea typeface="Cambria" pitchFamily="34" charset="-122"/>
+                <a:cs typeface="Cambria" pitchFamily="34" charset="-120"/>
+              </a:rPr>
+              <a:t>05</a:t>
+            </a:r>
+            <a:endParaRPr lang="en-US" sz="1100" dirty="0"/>
+          </a:p>
+        </p:txBody>
+      </p:sp>
+      <p:sp>
+        <p:nvSpPr>
+          <p:cNvPr id="29" name="Text 27"/>
+          <p:cNvSpPr/>
+          <p:nvPr/>
+        </p:nvSpPr>
+        <p:spPr>
+          <a:xfrm>
+            <a:off x="1280160" y="4974336"/>
+            <a:ext cx="5678424" cy="237744"/>
+          </a:xfrm>
+          <a:prstGeom prst="rect">
+            <a:avLst/>
+          </a:prstGeom>
+          <a:noFill/>
+          <a:ln/>
+        </p:spPr>
+        <p:txBody>
+          <a:bodyPr wrap="square" lIns="0" tIns="0" rIns="0" bIns="0" rtlCol="0" anchor="ctr"/>
+          <a:lstStyle/>
+          <a:p>
+            <a:pPr indent="0" marL="0">
+              <a:buNone/>
+            </a:pPr>
+            <a:r>
+              <a:rPr lang="en-US" sz="1150" b="1" dirty="0">
+                <a:solidFill>
+                  <a:srgbClr val="C9A96E"/>
+                </a:solidFill>
+                <a:latin typeface="Yu Gothic" pitchFamily="34" charset="0"/>
+                <a:ea typeface="Yu Gothic" pitchFamily="34" charset="-122"/>
+                <a:cs typeface="Yu Gothic" pitchFamily="34" charset="-120"/>
+              </a:rPr>
+              <a:t>運営者と利害が完全に一致している</a:t>
+            </a:r>
+            <a:endParaRPr lang="en-US" sz="1150" dirty="0"/>
+          </a:p>
+        </p:txBody>
+      </p:sp>
+      <p:sp>
+        <p:nvSpPr>
+          <p:cNvPr id="30" name="Text 28"/>
+          <p:cNvSpPr/>
+          <p:nvPr/>
+        </p:nvSpPr>
+        <p:spPr>
+          <a:xfrm>
+            <a:off x="1280160" y="5212080"/>
+            <a:ext cx="5678424" cy="329184"/>
+          </a:xfrm>
+          <a:prstGeom prst="rect">
+            <a:avLst/>
+          </a:prstGeom>
+          <a:noFill/>
+          <a:ln/>
+        </p:spPr>
+        <p:txBody>
+          <a:bodyPr wrap="square" lIns="0" tIns="0" rIns="0" bIns="0" rtlCol="0" anchor="ctr"/>
+          <a:lstStyle/>
+          <a:p>
+            <a:pPr indent="0" marL="0">
+              <a:lnSpc>
+                <a:spcPct val="115000"/>
+              </a:lnSpc>
+              <a:buNone/>
+            </a:pPr>
+            <a:r>
+              <a:rPr lang="en-US" sz="900" dirty="0">
+                <a:solidFill>
+                  <a:srgbClr val="9A938A"/>
+                </a:solidFill>
+                <a:latin typeface="Yu Gothic" pitchFamily="34" charset="0"/>
+                <a:ea typeface="Yu Gothic" pitchFamily="34" charset="-122"/>
+                <a:cs typeface="Yu Gothic" pitchFamily="34" charset="-120"/>
+              </a:rPr>
+              <a:t>期中報酬も成功報酬も取らず、報酬は利益の折半のみ。投資家が儲からなければWineBankも儲からない。1号ファンド（2022年〜）の運営実績あり。</a:t>
+            </a:r>
+            <a:endParaRPr lang="en-US" sz="900" dirty="0"/>
+          </a:p>
+        </p:txBody>
+      </p:sp>
+      <p:sp>
+        <p:nvSpPr>
+          <p:cNvPr id="31" name="Shape 29"/>
+          <p:cNvSpPr/>
+          <p:nvPr/>
+        </p:nvSpPr>
+        <p:spPr>
+          <a:xfrm>
+            <a:off x="7470648" y="1572768"/>
+            <a:ext cx="4062679" cy="4041648"/>
+          </a:xfrm>
+          <a:prstGeom prst="roundRect">
+            <a:avLst>
+              <a:gd name="adj" fmla="val 1018"/>
+            </a:avLst>
+          </a:prstGeom>
+          <a:solidFill>
+            <a:srgbClr val="1F1D19"/>
+          </a:solidFill>
+          <a:ln w="9525">
+            <a:solidFill>
+              <a:srgbClr val="6E5730"/>
+            </a:solidFill>
+            <a:prstDash val="solid"/>
+          </a:ln>
+        </p:spPr>
+      </p:sp>
+      <p:sp>
+        <p:nvSpPr>
+          <p:cNvPr id="32" name="Text 30"/>
+          <p:cNvSpPr/>
+          <p:nvPr/>
+        </p:nvSpPr>
+        <p:spPr>
+          <a:xfrm>
+            <a:off x="7726680" y="1755648"/>
+            <a:ext cx="3550615" cy="256032"/>
+          </a:xfrm>
+          <a:prstGeom prst="rect">
+            <a:avLst/>
+          </a:prstGeom>
+          <a:noFill/>
+          <a:ln/>
+        </p:spPr>
+        <p:txBody>
+          <a:bodyPr wrap="square" lIns="0" tIns="0" rIns="0" bIns="0" rtlCol="0" anchor="ctr"/>
+          <a:lstStyle/>
+          <a:p>
+            <a:pPr indent="0" marL="0">
+              <a:buNone/>
+            </a:pPr>
+            <a:r>
+              <a:rPr lang="en-US" sz="1250" b="1" dirty="0">
+                <a:solidFill>
+                  <a:srgbClr val="C9A96E"/>
+                </a:solidFill>
+                <a:latin typeface="Yu Gothic" pitchFamily="34" charset="0"/>
+                <a:ea typeface="Yu Gothic" pitchFamily="34" charset="-122"/>
+                <a:cs typeface="Yu Gothic" pitchFamily="34" charset="-120"/>
+              </a:rPr>
+              <a:t>貴社の投資基準との照合</a:t>
+            </a:r>
+            <a:endParaRPr lang="en-US" sz="1250" dirty="0"/>
+          </a:p>
+        </p:txBody>
+      </p:sp>
+      <p:sp>
+        <p:nvSpPr>
+          <p:cNvPr id="33" name="Shape 31"/>
+          <p:cNvSpPr/>
+          <p:nvPr/>
+        </p:nvSpPr>
+        <p:spPr>
+          <a:xfrm>
+            <a:off x="7726680" y="2180844"/>
+            <a:ext cx="137160" cy="137160"/>
+          </a:xfrm>
+          <a:prstGeom prst="ellipse">
+            <a:avLst/>
+          </a:prstGeom>
+          <a:solidFill>
+            <a:srgbClr val="A78450"/>
+          </a:solidFill>
+          <a:ln w="11430">
+            <a:solidFill>
+              <a:srgbClr val="A78450"/>
+            </a:solidFill>
+            <a:prstDash val="solid"/>
+          </a:ln>
+        </p:spPr>
+      </p:sp>
+      <p:sp>
+        <p:nvSpPr>
+          <p:cNvPr id="34" name="Text 32"/>
+          <p:cNvSpPr/>
+          <p:nvPr/>
+        </p:nvSpPr>
+        <p:spPr>
+          <a:xfrm>
+            <a:off x="7726680" y="2180844"/>
+            <a:ext cx="137160" cy="137160"/>
+          </a:xfrm>
+          <a:prstGeom prst="rect">
+            <a:avLst/>
+          </a:prstGeom>
+          <a:noFill/>
+          <a:ln/>
+        </p:spPr>
+        <p:txBody>
+          <a:bodyPr wrap="square" lIns="0" tIns="0" rIns="0" bIns="0" rtlCol="0" anchor="ctr"/>
+          <a:lstStyle/>
+          <a:p>
+            <a:pPr algn="ctr" indent="0" marL="0">
+              <a:buNone/>
+            </a:pPr>
+            <a:endParaRPr lang="en-US" sz="1100" dirty="0"/>
+          </a:p>
+        </p:txBody>
+      </p:sp>
+      <p:sp>
+        <p:nvSpPr>
+          <p:cNvPr id="35" name="Text 33"/>
+          <p:cNvSpPr/>
+          <p:nvPr/>
+        </p:nvSpPr>
+        <p:spPr>
+          <a:xfrm>
+            <a:off x="7964424" y="2121408"/>
+            <a:ext cx="3312871" cy="219456"/>
+          </a:xfrm>
+          <a:prstGeom prst="rect">
+            <a:avLst/>
+          </a:prstGeom>
+          <a:noFill/>
+          <a:ln/>
+        </p:spPr>
+        <p:txBody>
+          <a:bodyPr wrap="square" lIns="0" tIns="0" rIns="0" bIns="0" rtlCol="0" anchor="ctr"/>
+          <a:lstStyle/>
+          <a:p>
+            <a:pPr indent="0" marL="0">
+              <a:buNone/>
+            </a:pPr>
+            <a:r>
+              <a:rPr lang="en-US" sz="1050" b="1" dirty="0">
+                <a:solidFill>
+                  <a:srgbClr val="EFEBE3"/>
+                </a:solidFill>
+                <a:latin typeface="Yu Gothic" pitchFamily="34" charset="0"/>
+                <a:ea typeface="Yu Gothic" pitchFamily="34" charset="-122"/>
+                <a:cs typeface="Yu Gothic" pitchFamily="34" charset="-120"/>
+              </a:rPr>
+              <a:t>想定利回り20%（実績）に対して</a:t>
+            </a:r>
+            <a:endParaRPr lang="en-US" sz="1050" dirty="0"/>
+          </a:p>
+        </p:txBody>
+      </p:sp>
+      <p:sp>
+        <p:nvSpPr>
+          <p:cNvPr id="36" name="Text 34"/>
+          <p:cNvSpPr/>
+          <p:nvPr/>
+        </p:nvSpPr>
+        <p:spPr>
+          <a:xfrm>
+            <a:off x="7964424" y="2350008"/>
+            <a:ext cx="3312871" cy="384048"/>
+          </a:xfrm>
+          <a:prstGeom prst="rect">
+            <a:avLst/>
+          </a:prstGeom>
+          <a:noFill/>
+          <a:ln/>
+        </p:spPr>
+        <p:txBody>
+          <a:bodyPr wrap="square" lIns="0" tIns="0" rIns="0" bIns="0" rtlCol="0" anchor="ctr"/>
+          <a:lstStyle/>
+          <a:p>
+            <a:pPr indent="0" marL="0">
+              <a:lnSpc>
+                <a:spcPct val="118000"/>
+              </a:lnSpc>
+              <a:buNone/>
+            </a:pPr>
+            <a:r>
+              <a:rPr lang="en-US" sz="900" dirty="0">
+                <a:solidFill>
+                  <a:srgbClr val="9A938A"/>
+                </a:solidFill>
+                <a:latin typeface="Yu Gothic" pitchFamily="34" charset="0"/>
+                <a:ea typeface="Yu Gothic" pitchFamily="34" charset="-122"/>
+                <a:cs typeface="Yu Gothic" pitchFamily="34" charset="-120"/>
+              </a:rPr>
+              <a:t>定常年間利回りが20%に到達するのは在庫回転10.3ヶ月。回転9ヶ月なら23.1%、12ヶ月で16.9%。</a:t>
+            </a:r>
+            <a:endParaRPr lang="en-US" sz="900" dirty="0"/>
+          </a:p>
+        </p:txBody>
+      </p:sp>
+      <p:sp>
+        <p:nvSpPr>
+          <p:cNvPr id="37" name="Text 35"/>
+          <p:cNvSpPr/>
+          <p:nvPr/>
+        </p:nvSpPr>
+        <p:spPr>
+          <a:xfrm>
+            <a:off x="7964424" y="2743200"/>
+            <a:ext cx="3312871" cy="457200"/>
+          </a:xfrm>
+          <a:prstGeom prst="rect">
+            <a:avLst/>
+          </a:prstGeom>
+          <a:noFill/>
+          <a:ln/>
+        </p:spPr>
+        <p:txBody>
+          <a:bodyPr wrap="square" lIns="0" tIns="0" rIns="0" bIns="0" rtlCol="0" anchor="ctr"/>
+          <a:lstStyle/>
+          <a:p>
+            <a:pPr indent="0" marL="0">
+              <a:lnSpc>
+                <a:spcPct val="118000"/>
+              </a:lnSpc>
+              <a:buNone/>
+            </a:pPr>
+            <a:r>
+              <a:rPr lang="en-US" sz="900" dirty="0">
+                <a:solidFill>
+                  <a:srgbClr val="C9A96E"/>
+                </a:solidFill>
+                <a:latin typeface="Yu Gothic" pitchFamily="34" charset="0"/>
+                <a:ea typeface="Yu Gothic" pitchFamily="34" charset="-122"/>
+                <a:cs typeface="Yu Gothic" pitchFamily="34" charset="-120"/>
+              </a:rPr>
+              <a:t>回転10ヶ月前後が貴社基準との分岐点。ここを運用KPIとして四半期報告する。</a:t>
+            </a:r>
+            <a:endParaRPr lang="en-US" sz="900" dirty="0"/>
+          </a:p>
+        </p:txBody>
+      </p:sp>
+      <p:sp>
+        <p:nvSpPr>
+          <p:cNvPr id="38" name="Shape 36"/>
+          <p:cNvSpPr/>
+          <p:nvPr/>
+        </p:nvSpPr>
+        <p:spPr>
+          <a:xfrm>
+            <a:off x="7726680" y="3369564"/>
+            <a:ext cx="137160" cy="137160"/>
+          </a:xfrm>
+          <a:prstGeom prst="ellipse">
+            <a:avLst/>
+          </a:prstGeom>
+          <a:solidFill>
+            <a:srgbClr val="A78450"/>
+          </a:solidFill>
+          <a:ln w="11430">
+            <a:solidFill>
+              <a:srgbClr val="A78450"/>
+            </a:solidFill>
+            <a:prstDash val="solid"/>
+          </a:ln>
+        </p:spPr>
+      </p:sp>
+      <p:sp>
+        <p:nvSpPr>
+          <p:cNvPr id="39" name="Text 37"/>
+          <p:cNvSpPr/>
+          <p:nvPr/>
+        </p:nvSpPr>
+        <p:spPr>
+          <a:xfrm>
+            <a:off x="7726680" y="3369564"/>
+            <a:ext cx="137160" cy="137160"/>
+          </a:xfrm>
+          <a:prstGeom prst="rect">
+            <a:avLst/>
+          </a:prstGeom>
+          <a:noFill/>
+          <a:ln/>
+        </p:spPr>
+        <p:txBody>
+          <a:bodyPr wrap="square" lIns="0" tIns="0" rIns="0" bIns="0" rtlCol="0" anchor="ctr"/>
+          <a:lstStyle/>
+          <a:p>
+            <a:pPr algn="ctr" indent="0" marL="0">
+              <a:buNone/>
+            </a:pPr>
+            <a:endParaRPr lang="en-US" sz="1100" dirty="0"/>
+          </a:p>
+        </p:txBody>
+      </p:sp>
+      <p:sp>
+        <p:nvSpPr>
+          <p:cNvPr id="40" name="Text 38"/>
+          <p:cNvSpPr/>
+          <p:nvPr/>
+        </p:nvSpPr>
+        <p:spPr>
+          <a:xfrm>
+            <a:off x="7964424" y="3310128"/>
+            <a:ext cx="3312871" cy="219456"/>
+          </a:xfrm>
+          <a:prstGeom prst="rect">
+            <a:avLst/>
+          </a:prstGeom>
+          <a:noFill/>
+          <a:ln/>
+        </p:spPr>
+        <p:txBody>
+          <a:bodyPr wrap="square" lIns="0" tIns="0" rIns="0" bIns="0" rtlCol="0" anchor="ctr"/>
+          <a:lstStyle/>
+          <a:p>
+            <a:pPr indent="0" marL="0">
+              <a:buNone/>
+            </a:pPr>
+            <a:r>
+              <a:rPr lang="en-US" sz="1050" b="1" dirty="0">
+                <a:solidFill>
+                  <a:srgbClr val="EFEBE3"/>
+                </a:solidFill>
+                <a:latin typeface="Yu Gothic" pitchFamily="34" charset="0"/>
+                <a:ea typeface="Yu Gothic" pitchFamily="34" charset="-122"/>
+                <a:cs typeface="Yu Gothic" pitchFamily="34" charset="-120"/>
+              </a:rPr>
+              <a:t>半期受入・半期解約に対して</a:t>
+            </a:r>
+            <a:endParaRPr lang="en-US" sz="1050" dirty="0"/>
+          </a:p>
+        </p:txBody>
+      </p:sp>
+      <p:sp>
+        <p:nvSpPr>
+          <p:cNvPr id="41" name="Text 39"/>
+          <p:cNvSpPr/>
+          <p:nvPr/>
+        </p:nvSpPr>
+        <p:spPr>
+          <a:xfrm>
+            <a:off x="7964424" y="3538728"/>
+            <a:ext cx="3312871" cy="384048"/>
+          </a:xfrm>
+          <a:prstGeom prst="rect">
+            <a:avLst/>
+          </a:prstGeom>
+          <a:noFill/>
+          <a:ln/>
+        </p:spPr>
+        <p:txBody>
+          <a:bodyPr wrap="square" lIns="0" tIns="0" rIns="0" bIns="0" rtlCol="0" anchor="ctr"/>
+          <a:lstStyle/>
+          <a:p>
+            <a:pPr indent="0" marL="0">
+              <a:lnSpc>
+                <a:spcPct val="118000"/>
+              </a:lnSpc>
+              <a:buNone/>
+            </a:pPr>
+            <a:r>
+              <a:rPr lang="en-US" sz="900" dirty="0">
+                <a:solidFill>
+                  <a:srgbClr val="9A938A"/>
+                </a:solidFill>
+                <a:latin typeface="Yu Gothic" pitchFamily="34" charset="0"/>
+                <a:ea typeface="Yu Gothic" pitchFamily="34" charset="-122"/>
+                <a:cs typeface="Yu Gothic" pitchFamily="34" charset="-120"/>
+              </a:rPr>
+              <a:t>半期分配・半期受入日の設計で貴社の運用サイクルと整合。</a:t>
+            </a:r>
+            <a:endParaRPr lang="en-US" sz="900" dirty="0"/>
+          </a:p>
+        </p:txBody>
+      </p:sp>
+      <p:sp>
+        <p:nvSpPr>
+          <p:cNvPr id="42" name="Text 40"/>
+          <p:cNvSpPr/>
+          <p:nvPr/>
+        </p:nvSpPr>
+        <p:spPr>
+          <a:xfrm>
+            <a:off x="7964424" y="3931920"/>
+            <a:ext cx="3312871" cy="457200"/>
+          </a:xfrm>
+          <a:prstGeom prst="rect">
+            <a:avLst/>
+          </a:prstGeom>
+          <a:noFill/>
+          <a:ln/>
+        </p:spPr>
+        <p:txBody>
+          <a:bodyPr wrap="square" lIns="0" tIns="0" rIns="0" bIns="0" rtlCol="0" anchor="ctr"/>
+          <a:lstStyle/>
+          <a:p>
+            <a:pPr indent="0" marL="0">
+              <a:lnSpc>
+                <a:spcPct val="118000"/>
+              </a:lnSpc>
+              <a:buNone/>
+            </a:pPr>
+            <a:r>
+              <a:rPr lang="en-US" sz="900" dirty="0">
+                <a:solidFill>
+                  <a:srgbClr val="C9A96E"/>
+                </a:solidFill>
+                <a:latin typeface="Yu Gothic" pitchFamily="34" charset="0"/>
+                <a:ea typeface="Yu Gothic" pitchFamily="34" charset="-122"/>
+                <a:cs typeface="Yu Gothic" pitchFamily="34" charset="-120"/>
+              </a:rPr>
+              <a:t>ただし解約に応じる分だけ現金比率が上がり利回りは下がる（稼働率85%→70%で16.9%→13.7%）。解約枠の上限設定をご相談したい。</a:t>
+            </a:r>
+            <a:endParaRPr lang="en-US" sz="900" dirty="0"/>
+          </a:p>
+        </p:txBody>
+      </p:sp>
+      <p:sp>
+        <p:nvSpPr>
+          <p:cNvPr id="43" name="Shape 41"/>
+          <p:cNvSpPr/>
+          <p:nvPr/>
+        </p:nvSpPr>
+        <p:spPr>
+          <a:xfrm>
+            <a:off x="7726680" y="4558284"/>
+            <a:ext cx="137160" cy="137160"/>
+          </a:xfrm>
+          <a:prstGeom prst="ellipse">
+            <a:avLst/>
+          </a:prstGeom>
+          <a:solidFill>
+            <a:srgbClr val="A78450"/>
+          </a:solidFill>
+          <a:ln w="11430">
+            <a:solidFill>
+              <a:srgbClr val="A78450"/>
+            </a:solidFill>
+            <a:prstDash val="solid"/>
+          </a:ln>
+        </p:spPr>
+      </p:sp>
+      <p:sp>
+        <p:nvSpPr>
+          <p:cNvPr id="44" name="Text 42"/>
+          <p:cNvSpPr/>
+          <p:nvPr/>
+        </p:nvSpPr>
+        <p:spPr>
+          <a:xfrm>
+            <a:off x="7726680" y="4558284"/>
+            <a:ext cx="137160" cy="137160"/>
+          </a:xfrm>
+          <a:prstGeom prst="rect">
+            <a:avLst/>
+          </a:prstGeom>
+          <a:noFill/>
+          <a:ln/>
+        </p:spPr>
+        <p:txBody>
+          <a:bodyPr wrap="square" lIns="0" tIns="0" rIns="0" bIns="0" rtlCol="0" anchor="ctr"/>
+          <a:lstStyle/>
+          <a:p>
+            <a:pPr algn="ctr" indent="0" marL="0">
+              <a:buNone/>
+            </a:pPr>
+            <a:endParaRPr lang="en-US" sz="1100" dirty="0"/>
+          </a:p>
+        </p:txBody>
+      </p:sp>
+      <p:sp>
+        <p:nvSpPr>
+          <p:cNvPr id="45" name="Text 43"/>
+          <p:cNvSpPr/>
+          <p:nvPr/>
+        </p:nvSpPr>
+        <p:spPr>
+          <a:xfrm>
+            <a:off x="7964424" y="4498848"/>
+            <a:ext cx="3312871" cy="219456"/>
+          </a:xfrm>
+          <a:prstGeom prst="rect">
+            <a:avLst/>
+          </a:prstGeom>
+          <a:noFill/>
+          <a:ln/>
+        </p:spPr>
+        <p:txBody>
+          <a:bodyPr wrap="square" lIns="0" tIns="0" rIns="0" bIns="0" rtlCol="0" anchor="ctr"/>
+          <a:lstStyle/>
+          <a:p>
+            <a:pPr indent="0" marL="0">
+              <a:buNone/>
+            </a:pPr>
+            <a:r>
+              <a:rPr lang="en-US" sz="1050" b="1" dirty="0">
+                <a:solidFill>
+                  <a:srgbClr val="EFEBE3"/>
+                </a:solidFill>
+                <a:latin typeface="Yu Gothic" pitchFamily="34" charset="0"/>
+                <a:ea typeface="Yu Gothic" pitchFamily="34" charset="-122"/>
+                <a:cs typeface="Yu Gothic" pitchFamily="34" charset="-120"/>
+              </a:rPr>
+              <a:t>リスク分散に対して</a:t>
+            </a:r>
+            <a:endParaRPr lang="en-US" sz="1050" dirty="0"/>
+          </a:p>
+        </p:txBody>
+      </p:sp>
+      <p:sp>
+        <p:nvSpPr>
+          <p:cNvPr id="46" name="Text 44"/>
+          <p:cNvSpPr/>
+          <p:nvPr/>
+        </p:nvSpPr>
+        <p:spPr>
+          <a:xfrm>
+            <a:off x="7964424" y="4727448"/>
+            <a:ext cx="3312871" cy="384048"/>
+          </a:xfrm>
+          <a:prstGeom prst="rect">
+            <a:avLst/>
+          </a:prstGeom>
+          <a:noFill/>
+          <a:ln/>
+        </p:spPr>
+        <p:txBody>
+          <a:bodyPr wrap="square" lIns="0" tIns="0" rIns="0" bIns="0" rtlCol="0" anchor="ctr"/>
+          <a:lstStyle/>
+          <a:p>
+            <a:pPr indent="0" marL="0">
+              <a:lnSpc>
+                <a:spcPct val="118000"/>
+              </a:lnSpc>
+              <a:buNone/>
+            </a:pPr>
+            <a:r>
+              <a:rPr lang="en-US" sz="900" dirty="0">
+                <a:solidFill>
+                  <a:srgbClr val="9A938A"/>
+                </a:solidFill>
+                <a:latin typeface="Yu Gothic" pitchFamily="34" charset="0"/>
+                <a:ea typeface="Yu Gothic" pitchFamily="34" charset="-122"/>
+                <a:cs typeface="Yu Gothic" pitchFamily="34" charset="-120"/>
+              </a:rPr>
+              <a:t>伝統的資産と相関の低い実物資産。既存30億円のポートフォリオに対し5億円は約17%。</a:t>
+            </a:r>
+            <a:endParaRPr lang="en-US" sz="900" dirty="0"/>
+          </a:p>
+        </p:txBody>
+      </p:sp>
+      <p:sp>
+        <p:nvSpPr>
+          <p:cNvPr id="47" name="Text 45"/>
+          <p:cNvSpPr/>
+          <p:nvPr/>
+        </p:nvSpPr>
+        <p:spPr>
+          <a:xfrm>
+            <a:off x="7964424" y="5120640"/>
+            <a:ext cx="3312871" cy="457200"/>
+          </a:xfrm>
+          <a:prstGeom prst="rect">
+            <a:avLst/>
+          </a:prstGeom>
+          <a:noFill/>
+          <a:ln/>
+        </p:spPr>
+        <p:txBody>
+          <a:bodyPr wrap="square" lIns="0" tIns="0" rIns="0" bIns="0" rtlCol="0" anchor="ctr"/>
+          <a:lstStyle/>
+          <a:p>
+            <a:pPr indent="0" marL="0">
+              <a:lnSpc>
+                <a:spcPct val="118000"/>
+              </a:lnSpc>
+              <a:buNone/>
+            </a:pPr>
+            <a:r>
+              <a:rPr lang="en-US" sz="900" dirty="0">
+                <a:solidFill>
+                  <a:srgbClr val="C9A96E"/>
+                </a:solidFill>
+                <a:latin typeface="Yu Gothic" pitchFamily="34" charset="0"/>
+                <a:ea typeface="Yu Gothic" pitchFamily="34" charset="-122"/>
+                <a:cs typeface="Yu Gothic" pitchFamily="34" charset="-120"/>
+              </a:rPr>
+              <a:t>単一銘柄ではなく数千本・複数産地への分散となり、ポートフォリオ内での分散効果が働く。</a:t>
+            </a:r>
+            <a:endParaRPr lang="en-US" sz="900" dirty="0"/>
+          </a:p>
+        </p:txBody>
+      </p:sp>
+      <p:sp>
+        <p:nvSpPr>
+          <p:cNvPr id="48" name="Shape 46"/>
+          <p:cNvSpPr/>
+          <p:nvPr/>
+        </p:nvSpPr>
+        <p:spPr>
+          <a:xfrm>
+            <a:off x="658368" y="5724144"/>
+            <a:ext cx="10874959" cy="566928"/>
+          </a:xfrm>
+          <a:prstGeom prst="roundRect">
+            <a:avLst>
+              <a:gd name="adj" fmla="val 7258"/>
+            </a:avLst>
+          </a:prstGeom>
+          <a:solidFill>
+            <a:srgbClr val="171614"/>
+          </a:solidFill>
+          <a:ln w="9525">
+            <a:solidFill>
+              <a:srgbClr val="2E2A24"/>
+            </a:solidFill>
+            <a:prstDash val="solid"/>
+          </a:ln>
+        </p:spPr>
+      </p:sp>
+      <p:sp>
+        <p:nvSpPr>
+          <p:cNvPr id="49" name="Text 47"/>
+          <p:cNvSpPr/>
+          <p:nvPr/>
+        </p:nvSpPr>
+        <p:spPr>
+          <a:xfrm>
+            <a:off x="932688" y="5815584"/>
+            <a:ext cx="10326319" cy="384048"/>
+          </a:xfrm>
+          <a:prstGeom prst="rect">
+            <a:avLst/>
+          </a:prstGeom>
+          <a:noFill/>
+          <a:ln/>
+        </p:spPr>
+        <p:txBody>
+          <a:bodyPr wrap="square" lIns="0" tIns="0" rIns="0" bIns="0" rtlCol="0" anchor="ctr"/>
+          <a:lstStyle/>
+          <a:p>
+            <a:pPr indent="0" marL="0">
+              <a:lnSpc>
+                <a:spcPct val="120000"/>
+              </a:lnSpc>
+              <a:buNone/>
+            </a:pPr>
+            <a:r>
+              <a:rPr lang="en-US" sz="1050" dirty="0">
+                <a:solidFill>
+                  <a:srgbClr val="EFEBE3"/>
+                </a:solidFill>
+                <a:latin typeface="Yu Gothic" pitchFamily="34" charset="0"/>
+                <a:ea typeface="Yu Gothic" pitchFamily="34" charset="-122"/>
+                <a:cs typeface="Yu Gothic" pitchFamily="34" charset="-120"/>
+              </a:rPr>
+              <a:t>ワインは飲めば消える嗜好品ではなく、正規流通の価格差という再現性のある収益源です。その価格差を取りに行く実務を、55年分の免許と取引関係で担うのがWineBankです。本ファンドは、値上がりを待つ投資ではなく、この実務そのものに出資いただくご提案です。</a:t>
+            </a:r>
+            <a:endParaRPr lang="en-US" sz="1050" dirty="0"/>
+          </a:p>
+        </p:txBody>
+      </p:sp>
+    </p:spTree>
+  </p:cSld>
+  <p:clrMapOvr>
+    <a:masterClrMapping/>
+  </p:clrMapOvr>
+</p:sld>
+</file>
+
+<file path=ppt/slides/slide18.xml><?xml version="1.0" encoding="utf-8"?>
+<p:sld xmlns:a="http://schemas.openxmlformats.org/drawingml/2006/main" xmlns:r="http://schemas.openxmlformats.org/officeDocument/2006/relationships" xmlns:p="http://schemas.openxmlformats.org/presentationml/2006/main">
+  <p:cSld name="Slide 18">
+    <p:bg>
+      <p:bgPr>
+        <a:solidFill>
+          <a:srgbClr val="0C0C0C"/>
+        </a:solidFill>
+      </p:bgPr>
+    </p:bg>
+    <p:spTree>
+      <p:nvGrpSpPr>
+        <p:cNvPr id="1" name=""/>
+        <p:cNvGrpSpPr/>
+        <p:nvPr/>
+      </p:nvGrpSpPr>
+      <p:grpSpPr>
+        <a:xfrm>
+          <a:off x="0" y="0"/>
+          <a:ext cx="0" cy="0"/>
+          <a:chOff x="0" y="0"/>
+          <a:chExt cx="0" cy="0"/>
+        </a:xfrm>
+      </p:grpSpPr>
+      <p:sp>
+        <p:nvSpPr>
           <p:cNvPr id="2" name="Shape 0"/>
           <p:cNvSpPr/>
           <p:nvPr/>
@@ -17761,7 +19561,7 @@
                 <a:ea typeface="Cambria" pitchFamily="34" charset="-122"/>
                 <a:cs typeface="Cambria" pitchFamily="34" charset="-120"/>
               </a:rPr>
-              <a:t>16</a:t>
+              <a:t>17</a:t>
             </a:r>
             <a:endParaRPr lang="en-US" sz="950" dirty="0"/>
           </a:p>
@@ -18537,7 +20337,7 @@
                 <a:ea typeface="Cambria" pitchFamily="34" charset="-122"/>
                 <a:cs typeface="Cambria" pitchFamily="34" charset="-120"/>
               </a:rPr>
-              <a:t>11.0–16.9</a:t>
+              <a:t>11.1–17.0</a:t>
             </a:r>
             <a:pPr indent="0" marL="0">
               <a:buNone/>
@@ -18590,7 +20390,7 @@
                 <a:ea typeface="Yu Gothic" pitchFamily="34" charset="-122"/>
                 <a:cs typeface="Yu Gothic" pitchFamily="34" charset="-120"/>
               </a:rPr>
-              <a:t>投資家IRR（3年）</a:t>
+              <a:t>年平均利回り（3年通算）</a:t>
             </a:r>
             <a:endParaRPr lang="en-US" sz="1100" dirty="0"/>
           </a:p>
@@ -18774,7 +20574,7 @@
                 <a:ea typeface="Yu Gothic" pitchFamily="34" charset="-122"/>
                 <a:cs typeface="Yu Gothic" pitchFamily="34" charset="-120"/>
               </a:rPr>
-              <a:t>粗利率は前提として固定されるため、投資家リターンは「在庫を年に何回まわせるか」でほぼ決まる。回転9ヶ月でIRR16.9%、12ヶ月で11.0%。</a:t>
+              <a:t>粗利率は前提として固定されるため、投資家リターンは「在庫を年に何回まわせるか」でほぼ決まる。回転9ヶ月で定常利回り23.1%、12ヶ月で16.9%。</a:t>
             </a:r>
             <a:endParaRPr lang="en-US" sz="1000" dirty="0"/>
           </a:p>
@@ -20183,7 +21983,7 @@
                           <a:ea typeface="Yu Gothic" pitchFamily="34" charset="-122"/>
                           <a:cs typeface="Yu Gothic" pitchFamily="34" charset="-120"/>
                         </a:rPr>
-                        <a:t>定常利回り（8/5版）</a:t>
+                        <a:t>定常年間利回り（8/5版）</a:t>
                       </a:r>
                       <a:endParaRPr lang="en-US" sz="950" dirty="0">
                         <a:latin typeface="Yu Gothic" charset="0"/>
@@ -20251,7 +22051,7 @@
                           <a:ea typeface="Yu Gothic" pitchFamily="34" charset="-122"/>
                           <a:cs typeface="Yu Gothic" pitchFamily="34" charset="-120"/>
                         </a:rPr>
-                        <a:t>定常利回り（今回版）</a:t>
+                        <a:t>定常年間利回り（今回版）</a:t>
                       </a:r>
                       <a:endParaRPr lang="en-US" sz="950" dirty="0">
                         <a:latin typeface="Yu Gothic" charset="0"/>
@@ -20387,7 +22187,7 @@
                           <a:ea typeface="Yu Gothic" pitchFamily="34" charset="-122"/>
                           <a:cs typeface="Yu Gothic" pitchFamily="34" charset="-120"/>
                         </a:rPr>
-                        <a:t>投資家IRR 3年（8/5版）</a:t>
+                        <a:t>年平均利回り 3年通算（8/5版）</a:t>
                       </a:r>
                       <a:endParaRPr lang="en-US" sz="950" dirty="0">
                         <a:latin typeface="Yu Gothic" charset="0"/>
@@ -20455,7 +22255,7 @@
                           <a:ea typeface="Yu Gothic" pitchFamily="34" charset="-122"/>
                           <a:cs typeface="Yu Gothic" pitchFamily="34" charset="-120"/>
                         </a:rPr>
-                        <a:t>投資家IRR 3年（今回版）</a:t>
+                        <a:t>年平均利回り 3年通算（今回版）</a:t>
                       </a:r>
                       <a:endParaRPr lang="en-US" sz="950" dirty="0">
                         <a:latin typeface="Yu Gothic" charset="0"/>
@@ -20865,7 +22665,7 @@
                           <a:ea typeface="Yu Gothic" pitchFamily="34" charset="-122"/>
                           <a:cs typeface="Yu Gothic" pitchFamily="34" charset="-120"/>
                         </a:rPr>
-                        <a:t>17.9%</a:t>
+                        <a:t>18.0%</a:t>
                       </a:r>
                       <a:endParaRPr lang="en-US" sz="1000" dirty="0">
                         <a:latin typeface="Yu Gothic" charset="0"/>
@@ -20933,7 +22733,7 @@
                           <a:ea typeface="Yu Gothic" pitchFamily="34" charset="-122"/>
                           <a:cs typeface="Yu Gothic" pitchFamily="34" charset="-120"/>
                         </a:rPr>
-                        <a:t>16.9%</a:t>
+                        <a:t>17.0%</a:t>
                       </a:r>
                       <a:endParaRPr lang="en-US" sz="1000" dirty="0">
                         <a:latin typeface="Yu Gothic" charset="0"/>
@@ -21343,7 +23143,7 @@
                           <a:ea typeface="Yu Gothic" pitchFamily="34" charset="-122"/>
                           <a:cs typeface="Yu Gothic" pitchFamily="34" charset="-120"/>
                         </a:rPr>
-                        <a:t>11.7%</a:t>
+                        <a:t>11.8%</a:t>
                       </a:r>
                       <a:endParaRPr lang="en-US" sz="1000" dirty="0">
                         <a:latin typeface="Yu Gothic" charset="0"/>
@@ -21411,7 +23211,7 @@
                           <a:ea typeface="Yu Gothic" pitchFamily="34" charset="-122"/>
                           <a:cs typeface="Yu Gothic" pitchFamily="34" charset="-120"/>
                         </a:rPr>
-                        <a:t>11.0%</a:t>
+                        <a:t>11.1%</a:t>
                       </a:r>
                       <a:endParaRPr lang="en-US" sz="1000" dirty="0">
                         <a:latin typeface="Yu Gothic" charset="0"/>
@@ -21821,7 +23621,7 @@
                           <a:ea typeface="Yu Gothic" pitchFamily="34" charset="-122"/>
                           <a:cs typeface="Yu Gothic" pitchFamily="34" charset="-120"/>
                         </a:rPr>
-                        <a:t>11.0%</a:t>
+                        <a:t>11.5%</a:t>
                       </a:r>
                       <a:endParaRPr lang="en-US" sz="1000" dirty="0">
                         <a:latin typeface="Yu Gothic" charset="0"/>
@@ -21889,7 +23689,7 @@
                           <a:ea typeface="Yu Gothic" pitchFamily="34" charset="-122"/>
                           <a:cs typeface="Yu Gothic" pitchFamily="34" charset="-120"/>
                         </a:rPr>
-                        <a:t>10.3%</a:t>
+                        <a:t>10.8%</a:t>
                       </a:r>
                       <a:endParaRPr lang="en-US" sz="1000" dirty="0">
                         <a:latin typeface="Yu Gothic" charset="0"/>
@@ -21957,7 +23757,7 @@
                           <a:ea typeface="Yu Gothic" pitchFamily="34" charset="-122"/>
                           <a:cs typeface="Yu Gothic" pitchFamily="34" charset="-120"/>
                         </a:rPr>
-                        <a:t>▲0.7pt</a:t>
+                        <a:t>▲0.8pt</a:t>
                       </a:r>
                       <a:endParaRPr lang="en-US" sz="1000" dirty="0">
                         <a:latin typeface="Yu Gothic" charset="0"/>
@@ -22527,7 +24327,7 @@
                 <a:ea typeface="Yu Gothic" pitchFamily="34" charset="-122"/>
                 <a:cs typeface="Yu Gothic" pitchFamily="34" charset="-120"/>
               </a:rPr>
-              <a:t>※ 8/5版の列は、今回と同一の月次モデルに旧前提（譲渡マージンなし・人件費なし）を入れて再計算したもの。8/5版の公表IRR（12ヶ月＝11.4%）との0.3ポイント差は、月次キャッシュフローの精緻化による計算差であり、前提の変更によるものではない。</a:t>
+              <a:t>※ 8/5版の列は、今回と同一の月次モデルに旧前提（譲渡マージンなし・人件費なし）を入れて再計算したもの。定常年間利回り＝運用が軌道に乗った後の年間実力値、年平均利回り＝運用期間中の累計分配額を出資額と年数で割った通算値。いずれも投資家の税引前ベース。</a:t>
             </a:r>
             <a:endParaRPr lang="en-US" sz="850" dirty="0"/>
           </a:p>
@@ -31268,7 +33068,7 @@
                 <a:ea typeface="Yu Gothic" pitchFamily="34" charset="-122"/>
                 <a:cs typeface="Yu Gothic" pitchFamily="34" charset="-120"/>
               </a:rPr>
-              <a:t>上記はニュートラル・回転12ヶ月・稼働率85%における年間SPC費用（合計3,739万円）の内訳。その他の運用前提：稼働率85%（残15%は運転資金・解約準備として現金保有）／仕入展開6ヶ月／ローリング運用／利益はSPC内で複利再投資せず半期分配／税前利益を投資家50：WineBank50で折半／IRRは投資家の税引前ベース。</a:t>
+              <a:t>上記はニュートラル・回転12ヶ月・稼働率85%における年間SPC費用（合計3,739万円）の内訳。その他の運用前提：稼働率85%（残15%は運転資金・解約準備として現金保有）／仕入展開6ヶ月／ローリング運用／利益はSPC内で複利再投資せず半期分配／税前利益を投資家50：WineBank50で折半／利回りは投資家の税引前ベース。</a:t>
             </a:r>
             <a:endParaRPr lang="en-US" sz="850" dirty="0"/>
           </a:p>
@@ -32029,7 +33829,7 @@
                           <a:ea typeface="Yu Gothic" pitchFamily="34" charset="-122"/>
                           <a:cs typeface="Yu Gothic" pitchFamily="34" charset="-120"/>
                         </a:rPr>
-                        <a:t>定常利回り</a:t>
+                        <a:t>定常年間利回り</a:t>
                       </a:r>
                       <a:endParaRPr lang="en-US" sz="950" dirty="0">
                         <a:latin typeface="Yu Gothic" charset="0"/>
@@ -32097,7 +33897,7 @@
                           <a:ea typeface="Yu Gothic" pitchFamily="34" charset="-122"/>
                           <a:cs typeface="Yu Gothic" pitchFamily="34" charset="-120"/>
                         </a:rPr>
-                        <a:t>IRR（3年）</a:t>
+                        <a:t>年平均利回り 3年通算</a:t>
                       </a:r>
                       <a:endParaRPr lang="en-US" sz="950" dirty="0">
                         <a:latin typeface="Yu Gothic" charset="0"/>
@@ -32165,7 +33965,7 @@
                           <a:ea typeface="Yu Gothic" pitchFamily="34" charset="-122"/>
                           <a:cs typeface="Yu Gothic" pitchFamily="34" charset="-120"/>
                         </a:rPr>
-                        <a:t>IRR（5年）</a:t>
+                        <a:t>年平均利回り 5年通算</a:t>
                       </a:r>
                       <a:endParaRPr lang="en-US" sz="950" dirty="0">
                         <a:latin typeface="Yu Gothic" charset="0"/>
@@ -32779,7 +34579,7 @@
                           <a:ea typeface="Yu Gothic" pitchFamily="34" charset="-122"/>
                           <a:cs typeface="Yu Gothic" pitchFamily="34" charset="-120"/>
                         </a:rPr>
-                        <a:t>16.9%</a:t>
+                        <a:t>17.0%</a:t>
                       </a:r>
                       <a:endParaRPr lang="en-US" sz="1000" dirty="0">
                         <a:latin typeface="Yu Gothic" charset="0"/>
@@ -32847,7 +34647,7 @@
                           <a:ea typeface="Yu Gothic" pitchFamily="34" charset="-122"/>
                           <a:cs typeface="Yu Gothic" pitchFamily="34" charset="-120"/>
                         </a:rPr>
-                        <a:t>20.0%</a:t>
+                        <a:t>20.7%</a:t>
                       </a:r>
                       <a:endParaRPr lang="en-US" sz="1000" dirty="0">
                         <a:latin typeface="Yu Gothic" charset="0"/>
@@ -33461,7 +35261,7 @@
                           <a:ea typeface="Yu Gothic" pitchFamily="34" charset="-122"/>
                           <a:cs typeface="Yu Gothic" pitchFamily="34" charset="-120"/>
                         </a:rPr>
-                        <a:t>11.0%</a:t>
+                        <a:t>11.1%</a:t>
                       </a:r>
                       <a:endParaRPr lang="en-US" sz="1000" dirty="0">
                         <a:latin typeface="Yu Gothic" charset="0"/>
@@ -33529,7 +35329,7 @@
                           <a:ea typeface="Yu Gothic" pitchFamily="34" charset="-122"/>
                           <a:cs typeface="Yu Gothic" pitchFamily="34" charset="-120"/>
                         </a:rPr>
-                        <a:t>13.3%</a:t>
+                        <a:t>13.4%</a:t>
                       </a:r>
                       <a:endParaRPr lang="en-US" sz="1000" dirty="0">
                         <a:latin typeface="Yu Gothic" charset="0"/>
@@ -34143,7 +35943,7 @@
                           <a:ea typeface="Yu Gothic" pitchFamily="34" charset="-122"/>
                           <a:cs typeface="Yu Gothic" pitchFamily="34" charset="-120"/>
                         </a:rPr>
-                        <a:t>10.3%</a:t>
+                        <a:t>10.8%</a:t>
                       </a:r>
                       <a:endParaRPr lang="en-US" sz="1000" dirty="0">
                         <a:latin typeface="Yu Gothic" charset="0"/>
@@ -34211,7 +36011,7 @@
                           <a:ea typeface="Yu Gothic" pitchFamily="34" charset="-122"/>
                           <a:cs typeface="Yu Gothic" pitchFamily="34" charset="-120"/>
                         </a:rPr>
-                        <a:t>9.6%</a:t>
+                        <a:t>9.7%</a:t>
                       </a:r>
                       <a:endParaRPr lang="en-US" sz="1000" dirty="0">
                         <a:latin typeface="Yu Gothic" charset="0"/>
@@ -34893,7 +36693,7 @@
                           <a:ea typeface="Yu Gothic" pitchFamily="34" charset="-122"/>
                           <a:cs typeface="Yu Gothic" pitchFamily="34" charset="-120"/>
                         </a:rPr>
-                        <a:t>9.0%</a:t>
+                        <a:t>9.5%</a:t>
                       </a:r>
                       <a:endParaRPr lang="en-US" sz="1000" dirty="0">
                         <a:latin typeface="Yu Gothic" charset="0"/>
@@ -35104,7 +36904,7 @@
                 <a:ea typeface="Yu Gothic" pitchFamily="34" charset="-122"/>
                 <a:cs typeface="Yu Gothic" pitchFamily="34" charset="-120"/>
               </a:rPr>
-              <a:t>定常利回り＝運用が軌道に乗った後の年間実力値</a:t>
+              <a:t>定常年間利回り＝運用が軌道に乗った後の年間実力値</a:t>
             </a:r>
             <a:endParaRPr lang="en-US" sz="1000" dirty="0"/>
           </a:p>
@@ -35199,7 +36999,7 @@
                 <a:ea typeface="Yu Gothic" pitchFamily="34" charset="-122"/>
                 <a:cs typeface="Yu Gothic" pitchFamily="34" charset="-120"/>
               </a:rPr>
-              <a:t>IRRは仕入展開6ヶ月と満期前の清算期間を織り込んだ実績値</a:t>
+              <a:t>年平均利回り＝累計分配額÷出資額÷年数。仕入展開6ヶ月と満期前の清算期間を織り込んだ通算値</a:t>
             </a:r>
             <a:endParaRPr lang="en-US" sz="1000" dirty="0"/>
           </a:p>
@@ -35399,7 +37199,7 @@
                 <a:ea typeface="Yu Gothic" pitchFamily="34" charset="-122"/>
                 <a:cs typeface="Yu Gothic" pitchFamily="34" charset="-120"/>
               </a:rPr>
-              <a:t>投資家IRR（3年・税引前）</a:t>
+              <a:t>定常年間利回り（税引前）</a:t>
             </a:r>
             <a:endParaRPr lang="en-US" sz="1050" dirty="0"/>
           </a:p>
@@ -35438,7 +37238,7 @@
                 <a:ea typeface="Cambria" pitchFamily="34" charset="-122"/>
                 <a:cs typeface="Cambria" pitchFamily="34" charset="-120"/>
               </a:rPr>
-              <a:t>11.0 – 16.9</a:t>
+              <a:t>16.9 – 23.1</a:t>
             </a:r>
             <a:pPr indent="0" marL="0">
               <a:buNone/>
@@ -35494,7 +37294,7 @@
                 <a:ea typeface="Yu Gothic" pitchFamily="34" charset="-122"/>
                 <a:cs typeface="Yu Gothic" pitchFamily="34" charset="-120"/>
               </a:rPr>
-              <a:t>実務上の想定回転期間を9〜12ヶ月として提示する。18ヶ月まで悪化した場合はIRR5.1%まで低下するため、回転期間の管理が最大の運用課題となる。</a:t>
+              <a:t>実務上の想定回転期間を9〜12ヶ月として提示する（3年通算の年平均利回りは11.1〜17.0%）。18ヶ月まで悪化すると定常利回りは10.7%まで低下するため、回転期間の管理が最大の運用課題となる。</a:t>
             </a:r>
             <a:endParaRPr lang="en-US" sz="1000" dirty="0"/>
           </a:p>

--- a/docs/wine-fund/WineBank_ワインファンドSPC組成提案_5億_20260811.pptx
+++ b/docs/wine-fund/WineBank_ワインファンドSPC組成提案_5億_20260811.pptx
@@ -155,7 +155,7 @@
                 </a:solidFill>
                 <a:latin typeface="Yu Gothic"/>
               </a:rPr>
-              <a:t>エクイティ定常年間利回り（％）</a:t>
+              <a:t>定常年間利回り（％）</a:t>
             </a:r>
           </a:p>
         </c:rich>
@@ -179,7 +179,7 @@
               <c:strCache>
                 <c:ptCount val="1"/>
                 <c:pt idx="0">
-                  <c:v>エクイティ定常年間利回り（％）</c:v>
+                  <c:v>投資家利回り</c:v>
                 </c:pt>
               </c:strCache>
             </c:strRef>
@@ -259,6 +259,95 @@
             </c:numRef>
           </c:val>
         </c:ser>
+        <c:ser>
+          <c:idx val="1"/>
+          <c:order val="1"/>
+          <c:tx>
+            <c:strRef>
+              <c:f>Sheet1!$C$1</c:f>
+              <c:strCache>
+                <c:ptCount val="1"/>
+                <c:pt idx="0">
+                  <c:v>WineBank側利回り</c:v>
+                </c:pt>
+              </c:strCache>
+            </c:strRef>
+          </c:tx>
+          <c:spPr>
+            <a:solidFill>
+              <a:srgbClr val="6E5730"/>
+            </a:solidFill>
+            <a:effectLst/>
+          </c:spPr>
+          <c:invertIfNegative val="0"/>
+          <c:dLbls>
+            <c:numFmt formatCode="0.0&quot;%&quot;" sourceLinked="0"/>
+            <c:txPr>
+              <a:bodyPr/>
+              <a:lstStyle/>
+              <a:p>
+                <a:pPr>
+                  <a:defRPr b="0" i="0" strike="noStrike" sz="950" u="none">
+                    <a:solidFill>
+                      <a:srgbClr val="EFEBE3"/>
+                    </a:solidFill>
+                    <a:latin typeface="Cambria"/>
+                  </a:defRPr>
+                </a:pPr>
+              </a:p>
+            </c:txPr>
+            <c:showLegendKey val="0"/>
+            <c:showVal val="1"/>
+            <c:showCatName val="0"/>
+            <c:showSerName val="0"/>
+            <c:showPercent val="0"/>
+            <c:showBubbleSize val="0"/>
+            <c:showLeaderLines val="0"/>
+          </c:dLbls>
+          <c:cat>
+            <c:multiLvlStrRef>
+              <c:f>Sheet1!$A$2:$A$5</c:f>
+              <c:multiLvlStrCache>
+                <c:ptCount val="4"/>
+                <c:lvl>
+                  <c:pt idx="0">
+                    <c:v>9ヶ月</c:v>
+                  </c:pt>
+                  <c:pt idx="1">
+                    <c:v>12ヶ月</c:v>
+                  </c:pt>
+                  <c:pt idx="2">
+                    <c:v>15ヶ月</c:v>
+                  </c:pt>
+                  <c:pt idx="3">
+                    <c:v>18ヶ月</c:v>
+                  </c:pt>
+                </c:lvl>
+              </c:multiLvlStrCache>
+            </c:multiLvlStrRef>
+          </c:cat>
+          <c:val>
+            <c:numRef>
+              <c:f>Sheet1!$C$2:$C$5</c:f>
+              <c:numCache>
+                <c:formatCode>General</c:formatCode>
+                <c:ptCount val="4"/>
+                <c:pt idx="0">
+                  <c:v>50.2</c:v>
+                </c:pt>
+                <c:pt idx="1">
+                  <c:v>38</c:v>
+                </c:pt>
+                <c:pt idx="2">
+                  <c:v>30.7</c:v>
+                </c:pt>
+                <c:pt idx="3">
+                  <c:v>25.8</c:v>
+                </c:pt>
+              </c:numCache>
+            </c:numRef>
+          </c:val>
+        </c:ser>
         <c:dLbls>
           <c:numFmt formatCode="0.0&quot;%&quot;" sourceLinked="0"/>
           <c:txPr>
@@ -283,7 +372,7 @@
           <c:showBubbleSize val="0"/>
           <c:showLeaderLines val="0"/>
         </c:dLbls>
-        <c:gapWidth val="55"/>
+        <c:gapWidth val="45"/>
         <c:overlap val="0"/>
         <c:axId val="2094734554"/>
         <c:axId val="2094734552"/>
@@ -388,6 +477,26 @@
         <a:effectLst/>
       </c:spPr>
     </c:plotArea>
+    <c:legend>
+      <c:legendPos val="b"/>
+      <c:overlay val="0"/>
+      <c:txPr>
+        <a:bodyPr/>
+        <a:lstStyle/>
+        <a:p>
+          <a:pPr>
+            <a:defRPr sz="900">
+              <a:solidFill>
+                <a:srgbClr val="9A938A"/>
+              </a:solidFill>
+              <a:latin typeface="Yu Gothic"/>
+              <a:cs typeface="Yu Gothic"/>
+            </a:defRPr>
+          </a:pPr>
+          <a:endParaRPr lang="en-US"/>
+        </a:p>
+      </c:txPr>
+    </c:legend>
     <c:plotVisOnly val="1"/>
     <c:dispBlanksAs val="span"/>
   </c:chart>
@@ -432,7 +541,7 @@
                 </a:solidFill>
                 <a:latin typeface="Yu Gothic"/>
               </a:rPr>
-              <a:t>年平均利回り（5年通算・％）</a:t>
+              <a:t>投資家 年平均利回り（5年通算・％）</a:t>
             </a:r>
           </a:p>
         </c:rich>
@@ -456,7 +565,7 @@
               <c:strCache>
                 <c:ptCount val="1"/>
                 <c:pt idx="0">
-                  <c:v>年平均利回り（5年通算・％）</c:v>
+                  <c:v>投資家 年平均利回り</c:v>
                 </c:pt>
               </c:strCache>
             </c:strRef>
@@ -709,7 +818,7 @@
                 </a:solidFill>
                 <a:latin typeface="Yu Gothic"/>
               </a:rPr>
-              <a:t>在庫回転期間別 エクイティ定常年間利回り（％）</a:t>
+              <a:t>在庫回転期間別 投資家利回り（％）</a:t>
             </a:r>
           </a:p>
         </c:rich>
@@ -2257,7 +2366,7 @@
           <a:p>
             <a:r>
               <a:rPr lang="en-US" dirty="0"/>
-              <a:t>SKU排他が主。重複分はSPC優先売却＋価格同一＋補填条項で担保。</a:t>
+              <a:t>プロラタが原則。割り切れない部分でSPC優先。価格同一＋補填条項が金額面の担保。</a:t>
             </a:r>
             <a:endParaRPr lang="en-US" dirty="0"/>
           </a:p>
@@ -3049,7 +3158,7 @@
           <a:p>
             <a:r>
               <a:rPr lang="en-US" dirty="0"/>
-              <a:t>回転12ヶ月＝年間7.48億円。現状実力の上限をやや上回るため、SPC優先売却で埋める。</a:t>
+              <a:t>回転12ヶ月＝年間7.48億円。組入銘柄の選定が最大の手段。重複銘柄はプロラタ＋SPC優先。</a:t>
             </a:r>
             <a:endParaRPr lang="en-US" dirty="0"/>
           </a:p>
@@ -7146,7 +7255,7 @@
                 <a:ea typeface="Yu Gothic" pitchFamily="34" charset="-122"/>
                 <a:cs typeface="Yu Gothic" pitchFamily="34" charset="-120"/>
               </a:rPr>
-              <a:t>SPC取得原価50.5・ワイン価格上昇 年6%／総額5億円（デット2億＋エクイティ3億）・投資家取分60%・稼働率95%</a:t>
+              <a:t>SPC取得原価50.5・ワイン価格上昇 年6%／総額5億円（デット2億＋出資3億）・投資家取分60%・稼働率95%</a:t>
             </a:r>
             <a:endParaRPr lang="en-US" sz="1150" dirty="0"/>
           </a:p>
@@ -7253,16 +7362,16 @@
             <a:tbl>
               <a:tblPr/>
               <a:tblGrid>
-                <a:gridCol w="1572768"/>
-                <a:gridCol w="786384"/>
+                <a:gridCol w="1481328"/>
                 <a:gridCol w="896112"/>
                 <a:gridCol w="896112"/>
                 <a:gridCol w="841248"/>
                 <a:gridCol w="1060704"/>
-                <a:gridCol w="1280160"/>
+                <a:gridCol w="1225296"/>
+                <a:gridCol w="1060704"/>
                 <a:gridCol w="1417320"/>
                 <a:gridCol w="932688"/>
-                <a:gridCol w="1188720"/>
+                <a:gridCol w="1060704"/>
               </a:tblGrid>
               <a:tr h="365760">
                 <a:tc>
@@ -7283,74 +7392,6 @@
                           <a:cs typeface="Yu Gothic" pitchFamily="34" charset="-120"/>
                         </a:rPr>
                         <a:t>在庫回転期間</a:t>
-                      </a:r>
-                      <a:endParaRPr lang="en-US" sz="950" dirty="0">
-                        <a:latin typeface="Yu Gothic" charset="0"/>
-                        <a:ea typeface="Yu Gothic" charset="0"/>
-                        <a:cs typeface="Yu Gothic" charset="0"/>
-                      </a:endParaRPr>
-                    </a:p>
-                  </a:txBody>
-                  <a:tcPr marL="45720" marR="45720" marT="45720" marB="45720" anchor="ctr">
-                    <a:lnL w="7620" cap="flat" cmpd="sng" algn="ctr">
-                      <a:solidFill>
-                        <a:srgbClr val="2E2A24"/>
-                      </a:solidFill>
-                      <a:prstDash val="solid"/>
-                      <a:round/>
-                      <a:headEnd type="none" w="med" len="med"/>
-                      <a:tailEnd type="none" w="med" len="med"/>
-                    </a:lnL>
-                    <a:lnR w="7620" cap="flat" cmpd="sng" algn="ctr">
-                      <a:solidFill>
-                        <a:srgbClr val="2E2A24"/>
-                      </a:solidFill>
-                      <a:prstDash val="solid"/>
-                      <a:round/>
-                      <a:headEnd type="none" w="med" len="med"/>
-                      <a:tailEnd type="none" w="med" len="med"/>
-                    </a:lnR>
-                    <a:lnT w="7620" cap="flat" cmpd="sng" algn="ctr">
-                      <a:solidFill>
-                        <a:srgbClr val="2E2A24"/>
-                      </a:solidFill>
-                      <a:prstDash val="solid"/>
-                      <a:round/>
-                      <a:headEnd type="none" w="med" len="med"/>
-                      <a:tailEnd type="none" w="med" len="med"/>
-                    </a:lnT>
-                    <a:lnB w="7620" cap="flat" cmpd="sng" algn="ctr">
-                      <a:solidFill>
-                        <a:srgbClr val="2E2A24"/>
-                      </a:solidFill>
-                      <a:prstDash val="solid"/>
-                      <a:round/>
-                      <a:headEnd type="none" w="med" len="med"/>
-                      <a:tailEnd type="none" w="med" len="med"/>
-                    </a:lnB>
-                    <a:solidFill>
-                      <a:srgbClr val="231F1A"/>
-                    </a:solidFill>
-                  </a:tcPr>
-                </a:tc>
-                <a:tc>
-                  <a:txBody>
-                    <a:bodyPr/>
-                    <a:lstStyle/>
-                    <a:p>
-                      <a:pPr algn="ctr" indent="0" marL="0">
-                        <a:buNone/>
-                      </a:pPr>
-                      <a:r>
-                        <a:rPr lang="en-US" sz="950" b="1" dirty="0">
-                          <a:solidFill>
-                            <a:srgbClr val="C9A96E"/>
-                          </a:solidFill>
-                          <a:latin typeface="Yu Gothic" pitchFamily="34" charset="0"/>
-                          <a:ea typeface="Yu Gothic" pitchFamily="34" charset="-122"/>
-                          <a:cs typeface="Yu Gothic" pitchFamily="34" charset="-120"/>
-                        </a:rPr>
-                        <a:t>年回転数</a:t>
                       </a:r>
                       <a:endParaRPr lang="en-US" sz="950" dirty="0">
                         <a:latin typeface="Yu Gothic" charset="0"/>
@@ -7758,7 +7799,75 @@
                           <a:ea typeface="Yu Gothic" pitchFamily="34" charset="-122"/>
                           <a:cs typeface="Yu Gothic" pitchFamily="34" charset="-120"/>
                         </a:rPr>
-                        <a:t>エクイティ定常年間利回り</a:t>
+                        <a:t>投資家利回り</a:t>
+                      </a:r>
+                      <a:endParaRPr lang="en-US" sz="950" dirty="0">
+                        <a:latin typeface="Yu Gothic" charset="0"/>
+                        <a:ea typeface="Yu Gothic" charset="0"/>
+                        <a:cs typeface="Yu Gothic" charset="0"/>
+                      </a:endParaRPr>
+                    </a:p>
+                  </a:txBody>
+                  <a:tcPr marL="45720" marR="45720" marT="45720" marB="45720" anchor="ctr">
+                    <a:lnL w="7620" cap="flat" cmpd="sng" algn="ctr">
+                      <a:solidFill>
+                        <a:srgbClr val="2E2A24"/>
+                      </a:solidFill>
+                      <a:prstDash val="solid"/>
+                      <a:round/>
+                      <a:headEnd type="none" w="med" len="med"/>
+                      <a:tailEnd type="none" w="med" len="med"/>
+                    </a:lnL>
+                    <a:lnR w="7620" cap="flat" cmpd="sng" algn="ctr">
+                      <a:solidFill>
+                        <a:srgbClr val="2E2A24"/>
+                      </a:solidFill>
+                      <a:prstDash val="solid"/>
+                      <a:round/>
+                      <a:headEnd type="none" w="med" len="med"/>
+                      <a:tailEnd type="none" w="med" len="med"/>
+                    </a:lnR>
+                    <a:lnT w="7620" cap="flat" cmpd="sng" algn="ctr">
+                      <a:solidFill>
+                        <a:srgbClr val="2E2A24"/>
+                      </a:solidFill>
+                      <a:prstDash val="solid"/>
+                      <a:round/>
+                      <a:headEnd type="none" w="med" len="med"/>
+                      <a:tailEnd type="none" w="med" len="med"/>
+                    </a:lnT>
+                    <a:lnB w="7620" cap="flat" cmpd="sng" algn="ctr">
+                      <a:solidFill>
+                        <a:srgbClr val="2E2A24"/>
+                      </a:solidFill>
+                      <a:prstDash val="solid"/>
+                      <a:round/>
+                      <a:headEnd type="none" w="med" len="med"/>
+                      <a:tailEnd type="none" w="med" len="med"/>
+                    </a:lnB>
+                    <a:solidFill>
+                      <a:srgbClr val="231F1A"/>
+                    </a:solidFill>
+                  </a:tcPr>
+                </a:tc>
+                <a:tc>
+                  <a:txBody>
+                    <a:bodyPr/>
+                    <a:lstStyle/>
+                    <a:p>
+                      <a:pPr algn="ctr" indent="0" marL="0">
+                        <a:buNone/>
+                      </a:pPr>
+                      <a:r>
+                        <a:rPr lang="en-US" sz="950" b="1" dirty="0">
+                          <a:solidFill>
+                            <a:srgbClr val="C9A96E"/>
+                          </a:solidFill>
+                          <a:latin typeface="Yu Gothic" pitchFamily="34" charset="0"/>
+                          <a:ea typeface="Yu Gothic" pitchFamily="34" charset="-122"/>
+                          <a:cs typeface="Yu Gothic" pitchFamily="34" charset="-120"/>
+                        </a:rPr>
+                        <a:t>WineBank側利回り</a:t>
                       </a:r>
                       <a:endParaRPr lang="en-US" sz="950" dirty="0">
                         <a:latin typeface="Yu Gothic" charset="0"/>
@@ -7894,7 +8003,7 @@
                           <a:ea typeface="Yu Gothic" pitchFamily="34" charset="-122"/>
                           <a:cs typeface="Yu Gothic" pitchFamily="34" charset="-120"/>
                         </a:rPr>
-                        <a:t>年平均利回り 5年通算</a:t>
+                        <a:t>投資家 年平均利回り 5年通算</a:t>
                       </a:r>
                       <a:endParaRPr lang="en-US" sz="950" dirty="0">
                         <a:latin typeface="Yu Gothic" charset="0"/>
@@ -8032,74 +8141,6 @@
                           <a:ea typeface="Yu Gothic" pitchFamily="34" charset="-122"/>
                           <a:cs typeface="Yu Gothic" pitchFamily="34" charset="-120"/>
                         </a:rPr>
-                        <a:t>1.33回</a:t>
-                      </a:r>
-                      <a:endParaRPr lang="en-US" sz="1000" dirty="0">
-                        <a:latin typeface="Yu Gothic" charset="0"/>
-                        <a:ea typeface="Yu Gothic" charset="0"/>
-                        <a:cs typeface="Yu Gothic" charset="0"/>
-                      </a:endParaRPr>
-                    </a:p>
-                  </a:txBody>
-                  <a:tcPr marL="45720" marR="45720" marT="45720" marB="45720" anchor="ctr">
-                    <a:lnL w="7620" cap="flat" cmpd="sng" algn="ctr">
-                      <a:solidFill>
-                        <a:srgbClr val="2E2A24"/>
-                      </a:solidFill>
-                      <a:prstDash val="solid"/>
-                      <a:round/>
-                      <a:headEnd type="none" w="med" len="med"/>
-                      <a:tailEnd type="none" w="med" len="med"/>
-                    </a:lnL>
-                    <a:lnR w="7620" cap="flat" cmpd="sng" algn="ctr">
-                      <a:solidFill>
-                        <a:srgbClr val="2E2A24"/>
-                      </a:solidFill>
-                      <a:prstDash val="solid"/>
-                      <a:round/>
-                      <a:headEnd type="none" w="med" len="med"/>
-                      <a:tailEnd type="none" w="med" len="med"/>
-                    </a:lnR>
-                    <a:lnT w="7620" cap="flat" cmpd="sng" algn="ctr">
-                      <a:solidFill>
-                        <a:srgbClr val="2E2A24"/>
-                      </a:solidFill>
-                      <a:prstDash val="solid"/>
-                      <a:round/>
-                      <a:headEnd type="none" w="med" len="med"/>
-                      <a:tailEnd type="none" w="med" len="med"/>
-                    </a:lnT>
-                    <a:lnB w="7620" cap="flat" cmpd="sng" algn="ctr">
-                      <a:solidFill>
-                        <a:srgbClr val="2E2A24"/>
-                      </a:solidFill>
-                      <a:prstDash val="solid"/>
-                      <a:round/>
-                      <a:headEnd type="none" w="med" len="med"/>
-                      <a:tailEnd type="none" w="med" len="med"/>
-                    </a:lnB>
-                    <a:solidFill>
-                      <a:srgbClr val="171614"/>
-                    </a:solidFill>
-                  </a:tcPr>
-                </a:tc>
-                <a:tc>
-                  <a:txBody>
-                    <a:bodyPr/>
-                    <a:lstStyle/>
-                    <a:p>
-                      <a:pPr algn="ctr" indent="0" marL="0">
-                        <a:buNone/>
-                      </a:pPr>
-                      <a:r>
-                        <a:rPr lang="en-US" sz="1000" dirty="0">
-                          <a:solidFill>
-                            <a:srgbClr val="EFEBE3"/>
-                          </a:solidFill>
-                          <a:latin typeface="Yu Gothic" pitchFamily="34" charset="0"/>
-                          <a:ea typeface="Yu Gothic" pitchFamily="34" charset="-122"/>
-                          <a:cs typeface="Yu Gothic" pitchFamily="34" charset="-120"/>
-                        </a:rPr>
                         <a:t>9.83億</a:t>
                       </a:r>
                       <a:endParaRPr lang="en-US" sz="1000" dirty="0">
@@ -8434,13 +8475,81 @@
                       <a:r>
                         <a:rPr lang="en-US" sz="1000" b="1" dirty="0">
                           <a:solidFill>
+                            <a:srgbClr val="C9A96E"/>
+                          </a:solidFill>
+                          <a:latin typeface="Yu Gothic" pitchFamily="34" charset="0"/>
+                          <a:ea typeface="Yu Gothic" pitchFamily="34" charset="-122"/>
+                          <a:cs typeface="Yu Gothic" pitchFamily="34" charset="-120"/>
+                        </a:rPr>
+                        <a:t>54.2%</a:t>
+                      </a:r>
+                      <a:endParaRPr lang="en-US" sz="1000" dirty="0">
+                        <a:latin typeface="Yu Gothic" charset="0"/>
+                        <a:ea typeface="Yu Gothic" charset="0"/>
+                        <a:cs typeface="Yu Gothic" charset="0"/>
+                      </a:endParaRPr>
+                    </a:p>
+                  </a:txBody>
+                  <a:tcPr marL="45720" marR="45720" marT="45720" marB="45720" anchor="ctr">
+                    <a:lnL w="7620" cap="flat" cmpd="sng" algn="ctr">
+                      <a:solidFill>
+                        <a:srgbClr val="2E2A24"/>
+                      </a:solidFill>
+                      <a:prstDash val="solid"/>
+                      <a:round/>
+                      <a:headEnd type="none" w="med" len="med"/>
+                      <a:tailEnd type="none" w="med" len="med"/>
+                    </a:lnL>
+                    <a:lnR w="7620" cap="flat" cmpd="sng" algn="ctr">
+                      <a:solidFill>
+                        <a:srgbClr val="2E2A24"/>
+                      </a:solidFill>
+                      <a:prstDash val="solid"/>
+                      <a:round/>
+                      <a:headEnd type="none" w="med" len="med"/>
+                      <a:tailEnd type="none" w="med" len="med"/>
+                    </a:lnR>
+                    <a:lnT w="7620" cap="flat" cmpd="sng" algn="ctr">
+                      <a:solidFill>
+                        <a:srgbClr val="2E2A24"/>
+                      </a:solidFill>
+                      <a:prstDash val="solid"/>
+                      <a:round/>
+                      <a:headEnd type="none" w="med" len="med"/>
+                      <a:tailEnd type="none" w="med" len="med"/>
+                    </a:lnT>
+                    <a:lnB w="7620" cap="flat" cmpd="sng" algn="ctr">
+                      <a:solidFill>
+                        <a:srgbClr val="2E2A24"/>
+                      </a:solidFill>
+                      <a:prstDash val="solid"/>
+                      <a:round/>
+                      <a:headEnd type="none" w="med" len="med"/>
+                      <a:tailEnd type="none" w="med" len="med"/>
+                    </a:lnB>
+                    <a:solidFill>
+                      <a:srgbClr val="171614"/>
+                    </a:solidFill>
+                  </a:tcPr>
+                </a:tc>
+                <a:tc>
+                  <a:txBody>
+                    <a:bodyPr/>
+                    <a:lstStyle/>
+                    <a:p>
+                      <a:pPr algn="ctr" indent="0" marL="0">
+                        <a:buNone/>
+                      </a:pPr>
+                      <a:r>
+                        <a:rPr lang="en-US" sz="1000" dirty="0">
+                          <a:solidFill>
                             <a:srgbClr val="EFEBE3"/>
                           </a:solidFill>
                           <a:latin typeface="Yu Gothic" pitchFamily="34" charset="0"/>
                           <a:ea typeface="Yu Gothic" pitchFamily="34" charset="-122"/>
                           <a:cs typeface="Yu Gothic" pitchFamily="34" charset="-120"/>
                         </a:rPr>
-                        <a:t>54.2%</a:t>
+                        <a:t>50.2%</a:t>
                       </a:r>
                       <a:endParaRPr lang="en-US" sz="1000" dirty="0">
                         <a:latin typeface="Yu Gothic" charset="0"/>
@@ -8714,74 +8823,6 @@
                           <a:ea typeface="Yu Gothic" pitchFamily="34" charset="-122"/>
                           <a:cs typeface="Yu Gothic" pitchFamily="34" charset="-120"/>
                         </a:rPr>
-                        <a:t>1.00回</a:t>
-                      </a:r>
-                      <a:endParaRPr lang="en-US" sz="1000" dirty="0">
-                        <a:latin typeface="Yu Gothic" charset="0"/>
-                        <a:ea typeface="Yu Gothic" charset="0"/>
-                        <a:cs typeface="Yu Gothic" charset="0"/>
-                      </a:endParaRPr>
-                    </a:p>
-                  </a:txBody>
-                  <a:tcPr marL="45720" marR="45720" marT="45720" marB="45720" anchor="ctr">
-                    <a:lnL w="7620" cap="flat" cmpd="sng" algn="ctr">
-                      <a:solidFill>
-                        <a:srgbClr val="2E2A24"/>
-                      </a:solidFill>
-                      <a:prstDash val="solid"/>
-                      <a:round/>
-                      <a:headEnd type="none" w="med" len="med"/>
-                      <a:tailEnd type="none" w="med" len="med"/>
-                    </a:lnL>
-                    <a:lnR w="7620" cap="flat" cmpd="sng" algn="ctr">
-                      <a:solidFill>
-                        <a:srgbClr val="2E2A24"/>
-                      </a:solidFill>
-                      <a:prstDash val="solid"/>
-                      <a:round/>
-                      <a:headEnd type="none" w="med" len="med"/>
-                      <a:tailEnd type="none" w="med" len="med"/>
-                    </a:lnR>
-                    <a:lnT w="7620" cap="flat" cmpd="sng" algn="ctr">
-                      <a:solidFill>
-                        <a:srgbClr val="2E2A24"/>
-                      </a:solidFill>
-                      <a:prstDash val="solid"/>
-                      <a:round/>
-                      <a:headEnd type="none" w="med" len="med"/>
-                      <a:tailEnd type="none" w="med" len="med"/>
-                    </a:lnT>
-                    <a:lnB w="7620" cap="flat" cmpd="sng" algn="ctr">
-                      <a:solidFill>
-                        <a:srgbClr val="2E2A24"/>
-                      </a:solidFill>
-                      <a:prstDash val="solid"/>
-                      <a:round/>
-                      <a:headEnd type="none" w="med" len="med"/>
-                      <a:tailEnd type="none" w="med" len="med"/>
-                    </a:lnB>
-                    <a:solidFill>
-                      <a:srgbClr val="171614"/>
-                    </a:solidFill>
-                  </a:tcPr>
-                </a:tc>
-                <a:tc>
-                  <a:txBody>
-                    <a:bodyPr/>
-                    <a:lstStyle/>
-                    <a:p>
-                      <a:pPr algn="ctr" indent="0" marL="0">
-                        <a:buNone/>
-                      </a:pPr>
-                      <a:r>
-                        <a:rPr lang="en-US" sz="1000" dirty="0">
-                          <a:solidFill>
-                            <a:srgbClr val="EFEBE3"/>
-                          </a:solidFill>
-                          <a:latin typeface="Yu Gothic" pitchFamily="34" charset="0"/>
-                          <a:ea typeface="Yu Gothic" pitchFamily="34" charset="-122"/>
-                          <a:cs typeface="Yu Gothic" pitchFamily="34" charset="-120"/>
-                        </a:rPr>
                         <a:t>7.48億</a:t>
                       </a:r>
                       <a:endParaRPr lang="en-US" sz="1000" dirty="0">
@@ -9123,6 +9164,74 @@
                           <a:cs typeface="Yu Gothic" pitchFamily="34" charset="-120"/>
                         </a:rPr>
                         <a:t>42.0%</a:t>
+                      </a:r>
+                      <a:endParaRPr lang="en-US" sz="1000" dirty="0">
+                        <a:latin typeface="Yu Gothic" charset="0"/>
+                        <a:ea typeface="Yu Gothic" charset="0"/>
+                        <a:cs typeface="Yu Gothic" charset="0"/>
+                      </a:endParaRPr>
+                    </a:p>
+                  </a:txBody>
+                  <a:tcPr marL="45720" marR="45720" marT="45720" marB="45720" anchor="ctr">
+                    <a:lnL w="7620" cap="flat" cmpd="sng" algn="ctr">
+                      <a:solidFill>
+                        <a:srgbClr val="2E2A24"/>
+                      </a:solidFill>
+                      <a:prstDash val="solid"/>
+                      <a:round/>
+                      <a:headEnd type="none" w="med" len="med"/>
+                      <a:tailEnd type="none" w="med" len="med"/>
+                    </a:lnL>
+                    <a:lnR w="7620" cap="flat" cmpd="sng" algn="ctr">
+                      <a:solidFill>
+                        <a:srgbClr val="2E2A24"/>
+                      </a:solidFill>
+                      <a:prstDash val="solid"/>
+                      <a:round/>
+                      <a:headEnd type="none" w="med" len="med"/>
+                      <a:tailEnd type="none" w="med" len="med"/>
+                    </a:lnR>
+                    <a:lnT w="7620" cap="flat" cmpd="sng" algn="ctr">
+                      <a:solidFill>
+                        <a:srgbClr val="2E2A24"/>
+                      </a:solidFill>
+                      <a:prstDash val="solid"/>
+                      <a:round/>
+                      <a:headEnd type="none" w="med" len="med"/>
+                      <a:tailEnd type="none" w="med" len="med"/>
+                    </a:lnT>
+                    <a:lnB w="7620" cap="flat" cmpd="sng" algn="ctr">
+                      <a:solidFill>
+                        <a:srgbClr val="2E2A24"/>
+                      </a:solidFill>
+                      <a:prstDash val="solid"/>
+                      <a:round/>
+                      <a:headEnd type="none" w="med" len="med"/>
+                      <a:tailEnd type="none" w="med" len="med"/>
+                    </a:lnB>
+                    <a:solidFill>
+                      <a:srgbClr val="171614"/>
+                    </a:solidFill>
+                  </a:tcPr>
+                </a:tc>
+                <a:tc>
+                  <a:txBody>
+                    <a:bodyPr/>
+                    <a:lstStyle/>
+                    <a:p>
+                      <a:pPr algn="ctr" indent="0" marL="0">
+                        <a:buNone/>
+                      </a:pPr>
+                      <a:r>
+                        <a:rPr lang="en-US" sz="1000" dirty="0">
+                          <a:solidFill>
+                            <a:srgbClr val="EFEBE3"/>
+                          </a:solidFill>
+                          <a:latin typeface="Yu Gothic" pitchFamily="34" charset="0"/>
+                          <a:ea typeface="Yu Gothic" pitchFamily="34" charset="-122"/>
+                          <a:cs typeface="Yu Gothic" pitchFamily="34" charset="-120"/>
+                        </a:rPr>
+                        <a:t>38.0%</a:t>
                       </a:r>
                       <a:endParaRPr lang="en-US" sz="1000" dirty="0">
                         <a:latin typeface="Yu Gothic" charset="0"/>
@@ -9396,74 +9505,6 @@
                           <a:ea typeface="Yu Gothic" pitchFamily="34" charset="-122"/>
                           <a:cs typeface="Yu Gothic" pitchFamily="34" charset="-120"/>
                         </a:rPr>
-                        <a:t>0.80回</a:t>
-                      </a:r>
-                      <a:endParaRPr lang="en-US" sz="1000" dirty="0">
-                        <a:latin typeface="Yu Gothic" charset="0"/>
-                        <a:ea typeface="Yu Gothic" charset="0"/>
-                        <a:cs typeface="Yu Gothic" charset="0"/>
-                      </a:endParaRPr>
-                    </a:p>
-                  </a:txBody>
-                  <a:tcPr marL="45720" marR="45720" marT="45720" marB="45720" anchor="ctr">
-                    <a:lnL w="7620" cap="flat" cmpd="sng" algn="ctr">
-                      <a:solidFill>
-                        <a:srgbClr val="2E2A24"/>
-                      </a:solidFill>
-                      <a:prstDash val="solid"/>
-                      <a:round/>
-                      <a:headEnd type="none" w="med" len="med"/>
-                      <a:tailEnd type="none" w="med" len="med"/>
-                    </a:lnL>
-                    <a:lnR w="7620" cap="flat" cmpd="sng" algn="ctr">
-                      <a:solidFill>
-                        <a:srgbClr val="2E2A24"/>
-                      </a:solidFill>
-                      <a:prstDash val="solid"/>
-                      <a:round/>
-                      <a:headEnd type="none" w="med" len="med"/>
-                      <a:tailEnd type="none" w="med" len="med"/>
-                    </a:lnR>
-                    <a:lnT w="7620" cap="flat" cmpd="sng" algn="ctr">
-                      <a:solidFill>
-                        <a:srgbClr val="2E2A24"/>
-                      </a:solidFill>
-                      <a:prstDash val="solid"/>
-                      <a:round/>
-                      <a:headEnd type="none" w="med" len="med"/>
-                      <a:tailEnd type="none" w="med" len="med"/>
-                    </a:lnT>
-                    <a:lnB w="7620" cap="flat" cmpd="sng" algn="ctr">
-                      <a:solidFill>
-                        <a:srgbClr val="2E2A24"/>
-                      </a:solidFill>
-                      <a:prstDash val="solid"/>
-                      <a:round/>
-                      <a:headEnd type="none" w="med" len="med"/>
-                      <a:tailEnd type="none" w="med" len="med"/>
-                    </a:lnB>
-                    <a:solidFill>
-                      <a:srgbClr val="171614"/>
-                    </a:solidFill>
-                  </a:tcPr>
-                </a:tc>
-                <a:tc>
-                  <a:txBody>
-                    <a:bodyPr/>
-                    <a:lstStyle/>
-                    <a:p>
-                      <a:pPr algn="ctr" indent="0" marL="0">
-                        <a:buNone/>
-                      </a:pPr>
-                      <a:r>
-                        <a:rPr lang="en-US" sz="1000" dirty="0">
-                          <a:solidFill>
-                            <a:srgbClr val="EFEBE3"/>
-                          </a:solidFill>
-                          <a:latin typeface="Yu Gothic" pitchFamily="34" charset="0"/>
-                          <a:ea typeface="Yu Gothic" pitchFamily="34" charset="-122"/>
-                          <a:cs typeface="Yu Gothic" pitchFamily="34" charset="-120"/>
-                        </a:rPr>
                         <a:t>6.07億</a:t>
                       </a:r>
                       <a:endParaRPr lang="en-US" sz="1000" dirty="0">
@@ -9798,13 +9839,81 @@
                       <a:r>
                         <a:rPr lang="en-US" sz="1000" b="1" dirty="0">
                           <a:solidFill>
+                            <a:srgbClr val="C9A96E"/>
+                          </a:solidFill>
+                          <a:latin typeface="Yu Gothic" pitchFamily="34" charset="0"/>
+                          <a:ea typeface="Yu Gothic" pitchFamily="34" charset="-122"/>
+                          <a:cs typeface="Yu Gothic" pitchFamily="34" charset="-120"/>
+                        </a:rPr>
+                        <a:t>34.7%</a:t>
+                      </a:r>
+                      <a:endParaRPr lang="en-US" sz="1000" dirty="0">
+                        <a:latin typeface="Yu Gothic" charset="0"/>
+                        <a:ea typeface="Yu Gothic" charset="0"/>
+                        <a:cs typeface="Yu Gothic" charset="0"/>
+                      </a:endParaRPr>
+                    </a:p>
+                  </a:txBody>
+                  <a:tcPr marL="45720" marR="45720" marT="45720" marB="45720" anchor="ctr">
+                    <a:lnL w="7620" cap="flat" cmpd="sng" algn="ctr">
+                      <a:solidFill>
+                        <a:srgbClr val="2E2A24"/>
+                      </a:solidFill>
+                      <a:prstDash val="solid"/>
+                      <a:round/>
+                      <a:headEnd type="none" w="med" len="med"/>
+                      <a:tailEnd type="none" w="med" len="med"/>
+                    </a:lnL>
+                    <a:lnR w="7620" cap="flat" cmpd="sng" algn="ctr">
+                      <a:solidFill>
+                        <a:srgbClr val="2E2A24"/>
+                      </a:solidFill>
+                      <a:prstDash val="solid"/>
+                      <a:round/>
+                      <a:headEnd type="none" w="med" len="med"/>
+                      <a:tailEnd type="none" w="med" len="med"/>
+                    </a:lnR>
+                    <a:lnT w="7620" cap="flat" cmpd="sng" algn="ctr">
+                      <a:solidFill>
+                        <a:srgbClr val="2E2A24"/>
+                      </a:solidFill>
+                      <a:prstDash val="solid"/>
+                      <a:round/>
+                      <a:headEnd type="none" w="med" len="med"/>
+                      <a:tailEnd type="none" w="med" len="med"/>
+                    </a:lnT>
+                    <a:lnB w="7620" cap="flat" cmpd="sng" algn="ctr">
+                      <a:solidFill>
+                        <a:srgbClr val="2E2A24"/>
+                      </a:solidFill>
+                      <a:prstDash val="solid"/>
+                      <a:round/>
+                      <a:headEnd type="none" w="med" len="med"/>
+                      <a:tailEnd type="none" w="med" len="med"/>
+                    </a:lnB>
+                    <a:solidFill>
+                      <a:srgbClr val="171614"/>
+                    </a:solidFill>
+                  </a:tcPr>
+                </a:tc>
+                <a:tc>
+                  <a:txBody>
+                    <a:bodyPr/>
+                    <a:lstStyle/>
+                    <a:p>
+                      <a:pPr algn="ctr" indent="0" marL="0">
+                        <a:buNone/>
+                      </a:pPr>
+                      <a:r>
+                        <a:rPr lang="en-US" sz="1000" dirty="0">
+                          <a:solidFill>
                             <a:srgbClr val="EFEBE3"/>
                           </a:solidFill>
                           <a:latin typeface="Yu Gothic" pitchFamily="34" charset="0"/>
                           <a:ea typeface="Yu Gothic" pitchFamily="34" charset="-122"/>
                           <a:cs typeface="Yu Gothic" pitchFamily="34" charset="-120"/>
                         </a:rPr>
-                        <a:t>34.7%</a:t>
+                        <a:t>30.7%</a:t>
                       </a:r>
                       <a:endParaRPr lang="en-US" sz="1000" dirty="0">
                         <a:latin typeface="Yu Gothic" charset="0"/>
@@ -10078,74 +10187,6 @@
                           <a:ea typeface="Yu Gothic" pitchFamily="34" charset="-122"/>
                           <a:cs typeface="Yu Gothic" pitchFamily="34" charset="-120"/>
                         </a:rPr>
-                        <a:t>0.67回</a:t>
-                      </a:r>
-                      <a:endParaRPr lang="en-US" sz="1000" dirty="0">
-                        <a:latin typeface="Yu Gothic" charset="0"/>
-                        <a:ea typeface="Yu Gothic" charset="0"/>
-                        <a:cs typeface="Yu Gothic" charset="0"/>
-                      </a:endParaRPr>
-                    </a:p>
-                  </a:txBody>
-                  <a:tcPr marL="45720" marR="45720" marT="45720" marB="45720" anchor="ctr">
-                    <a:lnL w="7620" cap="flat" cmpd="sng" algn="ctr">
-                      <a:solidFill>
-                        <a:srgbClr val="2E2A24"/>
-                      </a:solidFill>
-                      <a:prstDash val="solid"/>
-                      <a:round/>
-                      <a:headEnd type="none" w="med" len="med"/>
-                      <a:tailEnd type="none" w="med" len="med"/>
-                    </a:lnL>
-                    <a:lnR w="7620" cap="flat" cmpd="sng" algn="ctr">
-                      <a:solidFill>
-                        <a:srgbClr val="2E2A24"/>
-                      </a:solidFill>
-                      <a:prstDash val="solid"/>
-                      <a:round/>
-                      <a:headEnd type="none" w="med" len="med"/>
-                      <a:tailEnd type="none" w="med" len="med"/>
-                    </a:lnR>
-                    <a:lnT w="7620" cap="flat" cmpd="sng" algn="ctr">
-                      <a:solidFill>
-                        <a:srgbClr val="2E2A24"/>
-                      </a:solidFill>
-                      <a:prstDash val="solid"/>
-                      <a:round/>
-                      <a:headEnd type="none" w="med" len="med"/>
-                      <a:tailEnd type="none" w="med" len="med"/>
-                    </a:lnT>
-                    <a:lnB w="7620" cap="flat" cmpd="sng" algn="ctr">
-                      <a:solidFill>
-                        <a:srgbClr val="2E2A24"/>
-                      </a:solidFill>
-                      <a:prstDash val="solid"/>
-                      <a:round/>
-                      <a:headEnd type="none" w="med" len="med"/>
-                      <a:tailEnd type="none" w="med" len="med"/>
-                    </a:lnB>
-                    <a:solidFill>
-                      <a:srgbClr val="171614"/>
-                    </a:solidFill>
-                  </a:tcPr>
-                </a:tc>
-                <a:tc>
-                  <a:txBody>
-                    <a:bodyPr/>
-                    <a:lstStyle/>
-                    <a:p>
-                      <a:pPr algn="ctr" indent="0" marL="0">
-                        <a:buNone/>
-                      </a:pPr>
-                      <a:r>
-                        <a:rPr lang="en-US" sz="1000" dirty="0">
-                          <a:solidFill>
-                            <a:srgbClr val="EFEBE3"/>
-                          </a:solidFill>
-                          <a:latin typeface="Yu Gothic" pitchFamily="34" charset="0"/>
-                          <a:ea typeface="Yu Gothic" pitchFamily="34" charset="-122"/>
-                          <a:cs typeface="Yu Gothic" pitchFamily="34" charset="-120"/>
-                        </a:rPr>
                         <a:t>5.13億</a:t>
                       </a:r>
                       <a:endParaRPr lang="en-US" sz="1000" dirty="0">
@@ -10480,13 +10521,81 @@
                       <a:r>
                         <a:rPr lang="en-US" sz="1000" b="1" dirty="0">
                           <a:solidFill>
+                            <a:srgbClr val="C9A96E"/>
+                          </a:solidFill>
+                          <a:latin typeface="Yu Gothic" pitchFamily="34" charset="0"/>
+                          <a:ea typeface="Yu Gothic" pitchFamily="34" charset="-122"/>
+                          <a:cs typeface="Yu Gothic" pitchFamily="34" charset="-120"/>
+                        </a:rPr>
+                        <a:t>29.8%</a:t>
+                      </a:r>
+                      <a:endParaRPr lang="en-US" sz="1000" dirty="0">
+                        <a:latin typeface="Yu Gothic" charset="0"/>
+                        <a:ea typeface="Yu Gothic" charset="0"/>
+                        <a:cs typeface="Yu Gothic" charset="0"/>
+                      </a:endParaRPr>
+                    </a:p>
+                  </a:txBody>
+                  <a:tcPr marL="45720" marR="45720" marT="45720" marB="45720" anchor="ctr">
+                    <a:lnL w="7620" cap="flat" cmpd="sng" algn="ctr">
+                      <a:solidFill>
+                        <a:srgbClr val="2E2A24"/>
+                      </a:solidFill>
+                      <a:prstDash val="solid"/>
+                      <a:round/>
+                      <a:headEnd type="none" w="med" len="med"/>
+                      <a:tailEnd type="none" w="med" len="med"/>
+                    </a:lnL>
+                    <a:lnR w="7620" cap="flat" cmpd="sng" algn="ctr">
+                      <a:solidFill>
+                        <a:srgbClr val="2E2A24"/>
+                      </a:solidFill>
+                      <a:prstDash val="solid"/>
+                      <a:round/>
+                      <a:headEnd type="none" w="med" len="med"/>
+                      <a:tailEnd type="none" w="med" len="med"/>
+                    </a:lnR>
+                    <a:lnT w="7620" cap="flat" cmpd="sng" algn="ctr">
+                      <a:solidFill>
+                        <a:srgbClr val="2E2A24"/>
+                      </a:solidFill>
+                      <a:prstDash val="solid"/>
+                      <a:round/>
+                      <a:headEnd type="none" w="med" len="med"/>
+                      <a:tailEnd type="none" w="med" len="med"/>
+                    </a:lnT>
+                    <a:lnB w="7620" cap="flat" cmpd="sng" algn="ctr">
+                      <a:solidFill>
+                        <a:srgbClr val="2E2A24"/>
+                      </a:solidFill>
+                      <a:prstDash val="solid"/>
+                      <a:round/>
+                      <a:headEnd type="none" w="med" len="med"/>
+                      <a:tailEnd type="none" w="med" len="med"/>
+                    </a:lnB>
+                    <a:solidFill>
+                      <a:srgbClr val="171614"/>
+                    </a:solidFill>
+                  </a:tcPr>
+                </a:tc>
+                <a:tc>
+                  <a:txBody>
+                    <a:bodyPr/>
+                    <a:lstStyle/>
+                    <a:p>
+                      <a:pPr algn="ctr" indent="0" marL="0">
+                        <a:buNone/>
+                      </a:pPr>
+                      <a:r>
+                        <a:rPr lang="en-US" sz="1000" dirty="0">
+                          <a:solidFill>
                             <a:srgbClr val="EFEBE3"/>
                           </a:solidFill>
                           <a:latin typeface="Yu Gothic" pitchFamily="34" charset="0"/>
                           <a:ea typeface="Yu Gothic" pitchFamily="34" charset="-122"/>
                           <a:cs typeface="Yu Gothic" pitchFamily="34" charset="-120"/>
                         </a:rPr>
-                        <a:t>29.8%</a:t>
+                        <a:t>25.8%</a:t>
                       </a:r>
                       <a:endParaRPr lang="en-US" sz="1000" dirty="0">
                         <a:latin typeface="Yu Gothic" charset="0"/>
@@ -10833,7 +10942,7 @@
                 <a:ea typeface="Yu Gothic" pitchFamily="34" charset="-122"/>
                 <a:cs typeface="Yu Gothic" pitchFamily="34" charset="-120"/>
               </a:rPr>
-              <a:t>定常年間利回り＝運用が軌道に乗った後の年間実力値。エクイティ3億円に対する比率</a:t>
+              <a:t>投資家利回り＝SPC税前利益の60%÷出資3億円。WineBank側利回り＝残り40%からデット金利を控除し持分相当2億円で除したもの</a:t>
             </a:r>
             <a:endParaRPr lang="en-US" sz="950" dirty="0"/>
           </a:p>
@@ -10928,7 +11037,7 @@
                 <a:ea typeface="Yu Gothic" pitchFamily="34" charset="-122"/>
                 <a:cs typeface="Yu Gothic" pitchFamily="34" charset="-120"/>
               </a:rPr>
-              <a:t>年平均利回り＝5年間の累計分配額÷エクイティ3億円÷5年。仕入展開6ヶ月と満期前の清算期間を織り込んだ通算値</a:t>
+              <a:t>年平均利回り＝5年間の累計分配額÷出資3億円÷5年。仕入展開6ヶ月と満期前の清算期間を織り込んだ通算値</a:t>
             </a:r>
             <a:endParaRPr lang="en-US" sz="950" dirty="0"/>
           </a:p>
@@ -11223,7 +11332,7 @@
                 <a:ea typeface="Yu Gothic" pitchFamily="34" charset="-122"/>
                 <a:cs typeface="Yu Gothic" pitchFamily="34" charset="-120"/>
               </a:rPr>
-              <a:t>エクイティ定常年間利回り（税引前）</a:t>
+              <a:t>投資家利回り（定常年間・税引前）</a:t>
             </a:r>
             <a:endParaRPr lang="en-US" sz="1050" dirty="0"/>
           </a:p>
@@ -11318,7 +11427,7 @@
                 <a:ea typeface="Yu Gothic" pitchFamily="34" charset="-122"/>
                 <a:cs typeface="Yu Gothic" pitchFamily="34" charset="-120"/>
               </a:rPr>
-              <a:t>主線の回転12ヶ月で42.0%。最短9ヶ月なら54.2%、18ヶ月まで延びても29.8%を確保する。20%を割り込むのは回転が30ヶ月を超えた場合であり、想定レンジの外にある。</a:t>
+              <a:t>主線の回転12ヶ月で42.0%。最短9ヶ月なら54.2%、18ヶ月まで延びても29.8%を確保する。同じ条件でのWineBank側利回りは38.0%であり、投資家を4.0ポイント下回る。</a:t>
             </a:r>
             <a:endParaRPr lang="en-US" sz="1000" dirty="0"/>
           </a:p>
@@ -11428,7 +11537,7 @@
                 <a:ea typeface="Yu Mincho" pitchFamily="34" charset="-122"/>
                 <a:cs typeface="Yu Mincho" pitchFamily="34" charset="-120"/>
               </a:rPr>
-              <a:t>在庫回転期間と投資家リターンの関係</a:t>
+              <a:t>在庫回転期間とリターンの関係</a:t>
             </a:r>
             <a:endParaRPr lang="en-US" sz="2700" dirty="0"/>
           </a:p>
@@ -11467,7 +11576,7 @@
                 <a:ea typeface="Yu Gothic" pitchFamily="34" charset="-122"/>
                 <a:cs typeface="Yu Gothic" pitchFamily="34" charset="-120"/>
               </a:rPr>
-              <a:t>主線は12ヶ月。回転が延びても値上がりが下支えするため、18ヶ月でも29.8%を確保する。</a:t>
+              <a:t>投資家利回りとWineBank側利回りを分けて示している。WineBankがデット金利を負担するため、常に投資家が上回る。</a:t>
             </a:r>
             <a:endParaRPr lang="en-US" sz="1150" dirty="0"/>
           </a:p>
@@ -11739,7 +11848,7 @@
                 <a:ea typeface="Yu Gothic" pitchFamily="34" charset="-122"/>
                 <a:cs typeface="Yu Gothic" pitchFamily="34" charset="-120"/>
               </a:rPr>
-              <a:t>回転を1ヶ月短縮するごとにエクイティ利回りは約4ポイント改善する。値引きや粗利率の微調整より、売り切る速度を上げる打ち手のほうが効く。</a:t>
+              <a:t>回転を1ヶ月短縮するごとに投資家利回りは約4ポイント改善する。何を組み入れるか（銘柄の流動性）で回転期間の大半が決まる。</a:t>
             </a:r>
             <a:endParaRPr lang="en-US" sz="1000" dirty="0"/>
           </a:p>
@@ -12771,7 +12880,7 @@
                           <a:ea typeface="Yu Gothic" pitchFamily="34" charset="-122"/>
                           <a:cs typeface="Yu Gothic" pitchFamily="34" charset="-120"/>
                         </a:rPr>
-                        <a:t>エクイティ利回り（①＋②）</a:t>
+                        <a:t>投資家利回り（①＋②）</a:t>
                       </a:r>
                       <a:endParaRPr lang="en-US" sz="950" dirty="0">
                         <a:latin typeface="Yu Gothic" charset="0"/>
@@ -15215,7 +15324,7 @@
                           <a:ea typeface="Yu Gothic" pitchFamily="34" charset="-122"/>
                           <a:cs typeface="Yu Gothic" pitchFamily="34" charset="-120"/>
                         </a:rPr>
-                        <a:t>エクイティ利回り</a:t>
+                        <a:t>投資家利回り</a:t>
                       </a:r>
                       <a:endParaRPr lang="en-US" sz="950" dirty="0">
                         <a:latin typeface="Yu Gothic" charset="0"/>
@@ -17066,7 +17175,7 @@
                           <a:ea typeface="Yu Gothic" pitchFamily="34" charset="-122"/>
                           <a:cs typeface="Yu Gothic" pitchFamily="34" charset="-120"/>
                         </a:rPr>
-                        <a:t>エクイティ利回り</a:t>
+                        <a:t>投資家利回り</a:t>
                       </a:r>
                       <a:endParaRPr lang="en-US" sz="950" dirty="0">
                         <a:latin typeface="Yu Gothic" charset="0"/>
@@ -18634,7 +18743,7 @@
                 <a:ea typeface="Yu Gothic" pitchFamily="34" charset="-122"/>
                 <a:cs typeface="Yu Gothic" pitchFamily="34" charset="-120"/>
               </a:rPr>
-              <a:t>「回転を上げるために値引く」は割に合わない。売値5%の値引きは単位粗利を15%毀損し、失うエクイティ利回り7.0ポイントを取り戻すには回転を12ヶ月から約10ヶ月へ短縮する必要がある。価格を維持したまま販売チャネルを増やすことが本筋の改善手段であり、むしろ売れ残りは値上がりを取りにいく機会でもある。</a:t>
+              <a:t>「回転を上げるために値引く」は割に合わない。売値5%の値引きは単位粗利を15%毀損し、失う投資家利回り7.0ポイントを取り戻すには回転を12ヶ月から約10ヶ月へ短縮する必要がある。価格を維持したまま販売チャネルを増やすことが本筋の改善手段であり、むしろ売れ残りは値上がりを取りにいく機会でもある。</a:t>
             </a:r>
             <a:endParaRPr lang="en-US" sz="1150" dirty="0"/>
           </a:p>
@@ -18744,7 +18853,7 @@
                 <a:ea typeface="Yu Mincho" pitchFamily="34" charset="-122"/>
                 <a:cs typeface="Yu Mincho" pitchFamily="34" charset="-120"/>
               </a:rPr>
-              <a:t>3シナリオ比較：エクイティ定常年間利回り</a:t>
+              <a:t>3シナリオ比較：投資家 定常年間利回り</a:t>
             </a:r>
             <a:endParaRPr lang="en-US" sz="2700" dirty="0"/>
           </a:p>
@@ -18783,7 +18892,7 @@
                 <a:ea typeface="Yu Gothic" pitchFamily="34" charset="-122"/>
                 <a:cs typeface="Yu Gothic" pitchFamily="34" charset="-120"/>
               </a:rPr>
-              <a:t>エクイティ3億円に対する年間実力値。投資家取分（SPC税前利益の60%）ベース。</a:t>
+              <a:t>出資3億円に対する投資家の年間実力値。WineBank側利回りは同条件で4.0ポイント下回る。</a:t>
             </a:r>
             <a:endParaRPr lang="en-US" sz="1150" dirty="0"/>
           </a:p>
@@ -19012,7 +19121,7 @@
                 <a:ea typeface="Yu Gothic" pitchFamily="34" charset="-122"/>
                 <a:cs typeface="Yu Gothic" pitchFamily="34" charset="-120"/>
               </a:rPr>
-              <a:t>回転12ヶ月でエクイティ利回り42.0%。想定レンジ9〜18ヶ月では29.8〜54.2%となる。</a:t>
+              <a:t>回転12ヶ月で投資家利回り42.0%。想定レンジ9〜18ヶ月では29.8〜54.2%となる。</a:t>
             </a:r>
             <a:endParaRPr lang="en-US" sz="950" dirty="0"/>
           </a:p>
@@ -19377,7 +19486,7 @@
                 <a:ea typeface="Yu Gothic" pitchFamily="34" charset="-122"/>
                 <a:cs typeface="Yu Gothic" pitchFamily="34" charset="-120"/>
               </a:rPr>
-              <a:t>主線（在庫回転12ヶ月・エクイティ利回り42.0%）を基準とした、各変数の単独変動による影響。</a:t>
+              <a:t>主線（在庫回転12ヶ月・投資家利回り42.0%）を基準とした、各変数の単独変動による影響。</a:t>
             </a:r>
             <a:endParaRPr lang="en-US" sz="1150" dirty="0"/>
           </a:p>
@@ -19644,7 +19753,7 @@
                           <a:ea typeface="Yu Gothic" pitchFamily="34" charset="-122"/>
                           <a:cs typeface="Yu Gothic" pitchFamily="34" charset="-120"/>
                         </a:rPr>
-                        <a:t>エクイティ利回りへの影響</a:t>
+                        <a:t>投資家利回りへの影響</a:t>
                       </a:r>
                       <a:endParaRPr lang="en-US" sz="950" dirty="0">
                         <a:latin typeface="Yu Gothic" charset="0"/>
@@ -21951,7 +22060,7 @@
                 <a:ea typeface="Yu Gothic" pitchFamily="34" charset="-122"/>
                 <a:cs typeface="Yu Gothic" pitchFamily="34" charset="-120"/>
               </a:rPr>
-              <a:t>結論：エクイティ利回りが20%を割り込むのは、回転が30ヶ月を超えた場合のみ（ニュートラル前提）で、想定レンジ9〜18ヶ月の外にある。ただし値引き5%と価格横ばいが同時に起きる複合的な下振れ（ネガティブ）では、回転15.9ヶ月が20%の分岐点となり想定レンジの中に入る。なお、インポーターの仕入価格が上昇する局面では希望小売価格も連動して上昇するため、定価比の構造は維持され、利回りへの影響は生じない。</a:t>
+              <a:t>結論：投資家利回りが20%を割り込むのは、回転が30ヶ月を超えた場合のみ（ニュートラル前提）で、想定レンジ9〜18ヶ月の外にある。ただし値引き5%と価格横ばいが同時に起きる複合的な下振れ（ネガティブ）では、回転15.9ヶ月が20%の分岐点となり想定レンジの中に入る。なお、インポーターの仕入価格が上昇する局面では希望小売価格も連動して上昇するため、定価比の構造は維持され、利回りへの影響は生じない。</a:t>
             </a:r>
             <a:endParaRPr lang="en-US" sz="1100" dirty="0"/>
           </a:p>
@@ -22100,7 +22209,7 @@
                 <a:ea typeface="Yu Gothic" pitchFamily="34" charset="-122"/>
                 <a:cs typeface="Yu Gothic" pitchFamily="34" charset="-120"/>
               </a:rPr>
-              <a:t>調達・保管・販売のすべてをWineBankが担うため配分に構造的な利益相反が生じる。SPC在庫の優先売却を第一原則とする。</a:t>
+              <a:t>調達・保管・販売のすべてをWineBankが担うため配分に構造的な利益相反が生じる。在庫比率によるプロラタ配分を原則とする。</a:t>
             </a:r>
             <a:endParaRPr lang="en-US" sz="1150" dirty="0"/>
           </a:p>
@@ -22192,12 +22301,12 @@
         </p:nvSpPr>
         <p:spPr>
           <a:xfrm>
-            <a:off x="658368" y="1645920"/>
-            <a:ext cx="3454298" cy="2121408"/>
+            <a:off x="658368" y="1627632"/>
+            <a:ext cx="3454298" cy="2011680"/>
           </a:xfrm>
           <a:prstGeom prst="roundRect">
             <a:avLst>
-              <a:gd name="adj" fmla="val 1940"/>
+              <a:gd name="adj" fmla="val 2045"/>
             </a:avLst>
           </a:prstGeom>
           <a:solidFill>
@@ -22219,7 +22328,7 @@
         </p:nvSpPr>
         <p:spPr>
           <a:xfrm>
-            <a:off x="896112" y="1847088"/>
+            <a:off x="896112" y="1810512"/>
             <a:ext cx="310896" cy="310896"/>
           </a:xfrm>
           <a:prstGeom prst="ellipse">
@@ -22244,7 +22353,7 @@
         </p:nvSpPr>
         <p:spPr>
           <a:xfrm>
-            <a:off x="896112" y="1847088"/>
+            <a:off x="896112" y="1810512"/>
             <a:ext cx="310896" cy="310896"/>
           </a:xfrm>
           <a:prstGeom prst="rect">
@@ -22283,7 +22392,7 @@
         </p:nvSpPr>
         <p:spPr>
           <a:xfrm>
-            <a:off x="1298448" y="1865376"/>
+            <a:off x="1298448" y="1828800"/>
             <a:ext cx="2576474" cy="274320"/>
           </a:xfrm>
           <a:prstGeom prst="rect">
@@ -22308,7 +22417,7 @@
                 <a:ea typeface="Yu Gothic" pitchFamily="34" charset="-122"/>
                 <a:cs typeface="Yu Gothic" pitchFamily="34" charset="-120"/>
               </a:rPr>
-              <a:t>SPC在庫の優先売却</a:t>
+              <a:t>プロラタ配分を原則とする</a:t>
             </a:r>
             <a:endParaRPr lang="en-US" sz="1150" dirty="0"/>
           </a:p>
@@ -22322,8 +22431,8 @@
         </p:nvSpPr>
         <p:spPr>
           <a:xfrm>
-            <a:off x="896112" y="2322576"/>
-            <a:ext cx="2978810" cy="1335024"/>
+            <a:off x="896112" y="2267712"/>
+            <a:ext cx="2978810" cy="1298448"/>
           </a:xfrm>
           <a:prstGeom prst="rect">
             <a:avLst/>
@@ -22337,12 +22446,12 @@
           <a:p>
             <a:pPr indent="0" marL="0">
               <a:lnSpc>
-                <a:spcPct val="126000"/>
+                <a:spcPct val="122000"/>
               </a:lnSpc>
               <a:buNone/>
             </a:pPr>
             <a:r>
-              <a:rPr lang="en-US" sz="950" dirty="0">
+              <a:rPr lang="en-US" sz="900" dirty="0">
                 <a:solidFill>
                   <a:srgbClr val="9A938A"/>
                 </a:solidFill>
@@ -22350,9 +22459,9 @@
                 <a:ea typeface="Yu Gothic" pitchFamily="34" charset="-122"/>
                 <a:cs typeface="Yu Gothic" pitchFamily="34" charset="-120"/>
               </a:rPr>
-              <a:t>同一銘柄が両者にある場合、当該SKUのSPC在庫が完売するまでWineBankは自己勘定在庫を売却しない。回転12ヶ月を実現するための運用方針であると同時に、配分の公平性を担保する第一の仕組みでもある。契約上の義務として明記する。</a:t>
-            </a:r>
-            <a:endParaRPr lang="en-US" sz="950" dirty="0"/>
+              <a:t>同一銘柄が両者にある場合、売却を在庫数量の比率に応じて配分する。個々の売却は分割できないため、累計の配分比率が在庫比率に一致するよう配分台帳で管理し、乖離の大きい側から出庫する。人の裁量を介さない機械的な運用とする。</a:t>
+            </a:r>
+            <a:endParaRPr lang="en-US" sz="900" dirty="0"/>
           </a:p>
         </p:txBody>
       </p:sp>
@@ -22364,12 +22473,12 @@
         </p:nvSpPr>
         <p:spPr>
           <a:xfrm>
-            <a:off x="4368698" y="1645920"/>
-            <a:ext cx="3454298" cy="2121408"/>
+            <a:off x="4368698" y="1627632"/>
+            <a:ext cx="3454298" cy="2011680"/>
           </a:xfrm>
           <a:prstGeom prst="roundRect">
             <a:avLst>
-              <a:gd name="adj" fmla="val 1940"/>
+              <a:gd name="adj" fmla="val 2045"/>
             </a:avLst>
           </a:prstGeom>
           <a:solidFill>
@@ -22391,7 +22500,7 @@
         </p:nvSpPr>
         <p:spPr>
           <a:xfrm>
-            <a:off x="4606442" y="1847088"/>
+            <a:off x="4606442" y="1810512"/>
             <a:ext cx="310896" cy="310896"/>
           </a:xfrm>
           <a:prstGeom prst="ellipse">
@@ -22416,7 +22525,7 @@
         </p:nvSpPr>
         <p:spPr>
           <a:xfrm>
-            <a:off x="4606442" y="1847088"/>
+            <a:off x="4606442" y="1810512"/>
             <a:ext cx="310896" cy="310896"/>
           </a:xfrm>
           <a:prstGeom prst="rect">
@@ -22455,7 +22564,7 @@
         </p:nvSpPr>
         <p:spPr>
           <a:xfrm>
-            <a:off x="5008778" y="1865376"/>
+            <a:off x="5008778" y="1828800"/>
             <a:ext cx="2576474" cy="274320"/>
           </a:xfrm>
           <a:prstGeom prst="rect">
@@ -22480,7 +22589,7 @@
                 <a:ea typeface="Yu Gothic" pitchFamily="34" charset="-122"/>
                 <a:cs typeface="Yu Gothic" pitchFamily="34" charset="-120"/>
               </a:rPr>
-              <a:t>銘柄排他の併用</a:t>
+              <a:t>判断を要する場合はSPC優先</a:t>
             </a:r>
             <a:endParaRPr lang="en-US" sz="1150" dirty="0"/>
           </a:p>
@@ -22494,8 +22603,8 @@
         </p:nvSpPr>
         <p:spPr>
           <a:xfrm>
-            <a:off x="4606442" y="2322576"/>
-            <a:ext cx="2978810" cy="1335024"/>
+            <a:off x="4606442" y="2267712"/>
+            <a:ext cx="2978810" cy="1298448"/>
           </a:xfrm>
           <a:prstGeom prst="rect">
             <a:avLst/>
@@ -22509,12 +22618,12 @@
           <a:p>
             <a:pPr indent="0" marL="0">
               <a:lnSpc>
-                <a:spcPct val="126000"/>
+                <a:spcPct val="122000"/>
               </a:lnSpc>
               <a:buNone/>
             </a:pPr>
             <a:r>
-              <a:rPr lang="en-US" sz="950" dirty="0">
+              <a:rPr lang="en-US" sz="900" dirty="0">
                 <a:solidFill>
                   <a:srgbClr val="9A938A"/>
                 </a:solidFill>
@@ -22522,9 +22631,9 @@
                 <a:ea typeface="Yu Gothic" pitchFamily="34" charset="-122"/>
                 <a:cs typeface="Yu Gothic" pitchFamily="34" charset="-120"/>
               </a:rPr>
-              <a:t>SKU（銘柄×ヴィンテージ×フォーマット）単位で、可能な限りSPC組入銘柄とWineBank自己勘定在庫を重複させない。買い手が銘柄を指名した時点で出所が一意に決まるため、配分の判断自体が発生しない。</a:t>
-            </a:r>
-            <a:endParaRPr lang="en-US" sz="950" dirty="0"/>
+              <a:t>乖離が同等である場合や、ロット単位の売却などプロラタで割り切れない場合は、SPC在庫を優先して売却する。四半期末の乖離が許容幅を超えた場合は翌四半期に是正する。</a:t>
+            </a:r>
+            <a:endParaRPr lang="en-US" sz="900" dirty="0"/>
           </a:p>
         </p:txBody>
       </p:sp>
@@ -22536,12 +22645,12 @@
         </p:nvSpPr>
         <p:spPr>
           <a:xfrm>
-            <a:off x="8079029" y="1645920"/>
-            <a:ext cx="3454298" cy="2121408"/>
+            <a:off x="8079029" y="1627632"/>
+            <a:ext cx="3454298" cy="2011680"/>
           </a:xfrm>
           <a:prstGeom prst="roundRect">
             <a:avLst>
-              <a:gd name="adj" fmla="val 1940"/>
+              <a:gd name="adj" fmla="val 2045"/>
             </a:avLst>
           </a:prstGeom>
           <a:solidFill>
@@ -22563,7 +22672,7 @@
         </p:nvSpPr>
         <p:spPr>
           <a:xfrm>
-            <a:off x="8316773" y="1847088"/>
+            <a:off x="8316773" y="1810512"/>
             <a:ext cx="310896" cy="310896"/>
           </a:xfrm>
           <a:prstGeom prst="ellipse">
@@ -22588,7 +22697,7 @@
         </p:nvSpPr>
         <p:spPr>
           <a:xfrm>
-            <a:off x="8316773" y="1847088"/>
+            <a:off x="8316773" y="1810512"/>
             <a:ext cx="310896" cy="310896"/>
           </a:xfrm>
           <a:prstGeom prst="rect">
@@ -22627,7 +22736,7 @@
         </p:nvSpPr>
         <p:spPr>
           <a:xfrm>
-            <a:off x="8719109" y="1865376"/>
+            <a:off x="8719109" y="1828800"/>
             <a:ext cx="2576474" cy="274320"/>
           </a:xfrm>
           <a:prstGeom prst="rect">
@@ -22666,8 +22775,8 @@
         </p:nvSpPr>
         <p:spPr>
           <a:xfrm>
-            <a:off x="8316773" y="2322576"/>
-            <a:ext cx="2978810" cy="1335024"/>
+            <a:off x="8316773" y="2267712"/>
+            <a:ext cx="2978810" cy="1298448"/>
           </a:xfrm>
           <a:prstGeom prst="rect">
             <a:avLst/>
@@ -22681,12 +22790,12 @@
           <a:p>
             <a:pPr indent="0" marL="0">
               <a:lnSpc>
-                <a:spcPct val="126000"/>
+                <a:spcPct val="122000"/>
               </a:lnSpc>
               <a:buNone/>
             </a:pPr>
             <a:r>
-              <a:rPr lang="en-US" sz="950" dirty="0">
+              <a:rPr lang="en-US" sz="900" dirty="0">
                 <a:solidFill>
                   <a:srgbClr val="9A938A"/>
                 </a:solidFill>
@@ -22696,7 +22805,7 @@
               </a:rPr>
               <a:t>同一SKU・同一四半期の実現単価は、SPCがWineBank自己勘定を下回らないものとする。下回った場合は差額×SPC数量をWineBankがSPCへ現金で補填する。運用が崩れても投資家が金額で守られる仕組みとする。</a:t>
             </a:r>
-            <a:endParaRPr lang="en-US" sz="950" dirty="0"/>
+            <a:endParaRPr lang="en-US" sz="900" dirty="0"/>
           </a:p>
         </p:txBody>
       </p:sp>
@@ -22715,7 +22824,7 @@
           </p:nvPr>
         </p:nvGraphicFramePr>
         <p:xfrm>
-          <a:off x="658368" y="3858768"/>
+          <a:off x="658368" y="3749040"/>
           <a:ext cx="10874959" cy="914400"/>
         </p:xfrm>
         <a:graphic>
@@ -22726,7 +22835,7 @@
                 <a:gridCol w="2377440"/>
                 <a:gridCol w="8494776"/>
               </a:tblGrid>
-              <a:tr h="306324">
+              <a:tr h="297180">
                 <a:tc>
                   <a:txBody>
                     <a:bodyPr/>
@@ -22864,7 +22973,145 @@
                   </a:tcPr>
                 </a:tc>
               </a:tr>
-              <a:tr h="306324">
+              <a:tr h="297180">
+                <a:tc>
+                  <a:txBody>
+                    <a:bodyPr/>
+                    <a:lstStyle/>
+                    <a:p>
+                      <a:pPr algn="ctr" indent="0" marL="0">
+                        <a:buNone/>
+                      </a:pPr>
+                      <a:r>
+                        <a:rPr lang="en-US" sz="1000" dirty="0">
+                          <a:solidFill>
+                            <a:srgbClr val="EFEBE3"/>
+                          </a:solidFill>
+                          <a:latin typeface="Yu Gothic" pitchFamily="34" charset="0"/>
+                          <a:ea typeface="Yu Gothic" pitchFamily="34" charset="-122"/>
+                          <a:cs typeface="Yu Gothic" pitchFamily="34" charset="-120"/>
+                        </a:rPr>
+                        <a:t>組入銘柄の選定</a:t>
+                      </a:r>
+                      <a:endParaRPr lang="en-US" sz="1000" dirty="0">
+                        <a:latin typeface="Yu Gothic" charset="0"/>
+                        <a:ea typeface="Yu Gothic" charset="0"/>
+                        <a:cs typeface="Yu Gothic" charset="0"/>
+                      </a:endParaRPr>
+                    </a:p>
+                  </a:txBody>
+                  <a:tcPr marL="45720" marR="45720" marT="45720" marB="45720" anchor="ctr">
+                    <a:lnL w="7620" cap="flat" cmpd="sng" algn="ctr">
+                      <a:solidFill>
+                        <a:srgbClr val="2E2A24"/>
+                      </a:solidFill>
+                      <a:prstDash val="solid"/>
+                      <a:round/>
+                      <a:headEnd type="none" w="med" len="med"/>
+                      <a:tailEnd type="none" w="med" len="med"/>
+                    </a:lnL>
+                    <a:lnR w="7620" cap="flat" cmpd="sng" algn="ctr">
+                      <a:solidFill>
+                        <a:srgbClr val="2E2A24"/>
+                      </a:solidFill>
+                      <a:prstDash val="solid"/>
+                      <a:round/>
+                      <a:headEnd type="none" w="med" len="med"/>
+                      <a:tailEnd type="none" w="med" len="med"/>
+                    </a:lnR>
+                    <a:lnT w="7620" cap="flat" cmpd="sng" algn="ctr">
+                      <a:solidFill>
+                        <a:srgbClr val="2E2A24"/>
+                      </a:solidFill>
+                      <a:prstDash val="solid"/>
+                      <a:round/>
+                      <a:headEnd type="none" w="med" len="med"/>
+                      <a:tailEnd type="none" w="med" len="med"/>
+                    </a:lnT>
+                    <a:lnB w="7620" cap="flat" cmpd="sng" algn="ctr">
+                      <a:solidFill>
+                        <a:srgbClr val="2E2A24"/>
+                      </a:solidFill>
+                      <a:prstDash val="solid"/>
+                      <a:round/>
+                      <a:headEnd type="none" w="med" len="med"/>
+                      <a:tailEnd type="none" w="med" len="med"/>
+                    </a:lnB>
+                    <a:solidFill>
+                      <a:srgbClr val="171614"/>
+                    </a:solidFill>
+                  </a:tcPr>
+                </a:tc>
+                <a:tc>
+                  <a:txBody>
+                    <a:bodyPr/>
+                    <a:lstStyle/>
+                    <a:p>
+                      <a:pPr algn="l" indent="0" marL="0">
+                        <a:buNone/>
+                      </a:pPr>
+                      <a:r>
+                        <a:rPr lang="en-US" sz="1000" dirty="0">
+                          <a:solidFill>
+                            <a:srgbClr val="EFEBE3"/>
+                          </a:solidFill>
+                          <a:latin typeface="Yu Gothic" pitchFamily="34" charset="0"/>
+                          <a:ea typeface="Yu Gothic" pitchFamily="34" charset="-122"/>
+                          <a:cs typeface="Yu Gothic" pitchFamily="34" charset="-120"/>
+                        </a:rPr>
+                        <a:t>Liv-ex掲載の流動性上位銘柄をSPCに組み入れ、可能な限り自己勘定在庫と重複させない。重複しない銘柄では配分の判断自体が生じない</a:t>
+                      </a:r>
+                      <a:endParaRPr lang="en-US" sz="1000" dirty="0">
+                        <a:latin typeface="Yu Gothic" charset="0"/>
+                        <a:ea typeface="Yu Gothic" charset="0"/>
+                        <a:cs typeface="Yu Gothic" charset="0"/>
+                      </a:endParaRPr>
+                    </a:p>
+                  </a:txBody>
+                  <a:tcPr marL="45720" marR="45720" marT="45720" marB="45720" anchor="ctr">
+                    <a:lnL w="7620" cap="flat" cmpd="sng" algn="ctr">
+                      <a:solidFill>
+                        <a:srgbClr val="2E2A24"/>
+                      </a:solidFill>
+                      <a:prstDash val="solid"/>
+                      <a:round/>
+                      <a:headEnd type="none" w="med" len="med"/>
+                      <a:tailEnd type="none" w="med" len="med"/>
+                    </a:lnL>
+                    <a:lnR w="7620" cap="flat" cmpd="sng" algn="ctr">
+                      <a:solidFill>
+                        <a:srgbClr val="2E2A24"/>
+                      </a:solidFill>
+                      <a:prstDash val="solid"/>
+                      <a:round/>
+                      <a:headEnd type="none" w="med" len="med"/>
+                      <a:tailEnd type="none" w="med" len="med"/>
+                    </a:lnR>
+                    <a:lnT w="7620" cap="flat" cmpd="sng" algn="ctr">
+                      <a:solidFill>
+                        <a:srgbClr val="2E2A24"/>
+                      </a:solidFill>
+                      <a:prstDash val="solid"/>
+                      <a:round/>
+                      <a:headEnd type="none" w="med" len="med"/>
+                      <a:tailEnd type="none" w="med" len="med"/>
+                    </a:lnT>
+                    <a:lnB w="7620" cap="flat" cmpd="sng" algn="ctr">
+                      <a:solidFill>
+                        <a:srgbClr val="2E2A24"/>
+                      </a:solidFill>
+                      <a:prstDash val="solid"/>
+                      <a:round/>
+                      <a:headEnd type="none" w="med" len="med"/>
+                      <a:tailEnd type="none" w="med" len="med"/>
+                    </a:lnB>
+                    <a:solidFill>
+                      <a:srgbClr val="171614"/>
+                    </a:solidFill>
+                  </a:tcPr>
+                </a:tc>
+              </a:tr>
+              <a:tr h="297180">
                 <a:tc>
                   <a:txBody>
                     <a:bodyPr/>
@@ -23002,7 +23249,7 @@
                   </a:tcPr>
                 </a:tc>
               </a:tr>
-              <a:tr h="306324">
+              <a:tr h="297180">
                 <a:tc>
                   <a:txBody>
                     <a:bodyPr/>
@@ -23088,7 +23335,7 @@
                           <a:ea typeface="Yu Gothic" pitchFamily="34" charset="-122"/>
                           <a:cs typeface="Yu Gothic" pitchFamily="34" charset="-120"/>
                         </a:rPr>
-                        <a:t>SKU別に、期首在庫・取得・売却・期末在庫をSPCとWineBank自己勘定の両建てで記録し、四半期ごとに投資家へ開示する</a:t>
+                        <a:t>SKU別に期首在庫・取得・売却・期末在庫を両建てで記録し、累計配分比率と在庫比率の乖離を四半期ごとに投資家へ開示する</a:t>
                       </a:r>
                       <a:endParaRPr lang="en-US" sz="1000" dirty="0">
                         <a:latin typeface="Yu Gothic" charset="0"/>
@@ -23140,7 +23387,7 @@
                   </a:tcPr>
                 </a:tc>
               </a:tr>
-              <a:tr h="306324">
+              <a:tr h="297180">
                 <a:tc>
                   <a:txBody>
                     <a:bodyPr/>
@@ -23278,7 +23525,7 @@
                   </a:tcPr>
                 </a:tc>
               </a:tr>
-              <a:tr h="306324">
+              <a:tr h="297180">
                 <a:tc>
                   <a:txBody>
                     <a:bodyPr/>
@@ -23416,7 +23663,7 @@
                   </a:tcPr>
                 </a:tc>
               </a:tr>
-              <a:tr h="306324">
+              <a:tr h="297180">
                 <a:tc>
                   <a:txBody>
                     <a:bodyPr/>
@@ -23566,8 +23813,8 @@
         </p:nvSpPr>
         <p:spPr>
           <a:xfrm>
-            <a:off x="658368" y="5870448"/>
-            <a:ext cx="10874959" cy="310896"/>
+            <a:off x="658368" y="5815584"/>
+            <a:ext cx="10874959" cy="329184"/>
           </a:xfrm>
           <a:prstGeom prst="rect">
             <a:avLst/>
@@ -23581,12 +23828,12 @@
           <a:p>
             <a:pPr indent="0" marL="0">
               <a:lnSpc>
-                <a:spcPct val="120000"/>
+                <a:spcPct val="118000"/>
               </a:lnSpc>
               <a:buNone/>
             </a:pPr>
             <a:r>
-              <a:rPr lang="en-US" sz="850" dirty="0">
+              <a:rPr lang="en-US" sz="800" dirty="0">
                 <a:solidFill>
                   <a:srgbClr val="6E675E"/>
                 </a:solidFill>
@@ -23594,9 +23841,9 @@
                 <a:ea typeface="Yu Gothic" pitchFamily="34" charset="-122"/>
                 <a:cs typeface="Yu Gothic" pitchFamily="34" charset="-120"/>
               </a:rPr>
-              <a:t>※ SPC在庫の優先売却は投資家保護のための譲歩であると同時に、回転12ヶ月という運用目標を達成するための手段でもある。WineBank自己勘定在庫の販売は後回しとなるが、ファンド期間中はこれを受け入れる。組成前に組入予定銘柄と自己勘定在庫の重複度を精査し、02の適用範囲を確定する。</a:t>
-            </a:r>
-            <a:endParaRPr lang="en-US" sz="850" dirty="0"/>
+              <a:t>※ SPC在庫を完売するまで自己勘定在庫を売らないという運用は、商品構成が銘柄ごとに異なるため実務上成立しない。したがってプロラタ配分を原則とし、プロラタで決まらない部分についてSPCを優先する設計とした。回転期間は主として「何を組み入れるか」で決まるため、組成時の銘柄選定が最大の担保となる。</a:t>
+            </a:r>
+            <a:endParaRPr lang="en-US" sz="800" dirty="0"/>
           </a:p>
         </p:txBody>
       </p:sp>
@@ -27439,7 +27686,7 @@
                 <a:ea typeface="Yu Gothic" pitchFamily="34" charset="-122"/>
                 <a:cs typeface="Yu Gothic" pitchFamily="34" charset="-120"/>
               </a:rPr>
-              <a:t>エクイティ定常年間利回り</a:t>
+              <a:t>投資家利回り（定常年間）</a:t>
             </a:r>
             <a:endParaRPr lang="en-US" sz="1100" dirty="0"/>
           </a:p>
@@ -27481,7 +27728,7 @@
                 <a:ea typeface="Yu Gothic" pitchFamily="34" charset="-122"/>
                 <a:cs typeface="Yu Gothic" pitchFamily="34" charset="-120"/>
               </a:rPr>
-              <a:t>在庫回転12ヶ月・投資家取分60%・税引前</a:t>
+              <a:t>出資3億円に対する取分。デットの効果は含まない</a:t>
             </a:r>
             <a:endParaRPr lang="en-US" sz="900" dirty="0"/>
           </a:p>
@@ -27745,7 +27992,7 @@
                 <a:ea typeface="Yu Gothic" pitchFamily="34" charset="-122"/>
                 <a:cs typeface="Yu Gothic" pitchFamily="34" charset="-120"/>
               </a:rPr>
-              <a:t>在庫回転12ヶ月で売り切る。SPC在庫を優先して販売する。</a:t>
+              <a:t>在庫回転12ヶ月で売り切る。組入銘柄の選定と配分ルールで実現する。</a:t>
             </a:r>
             <a:endParaRPr lang="en-US" sz="1200" dirty="0"/>
           </a:p>
@@ -27784,7 +28031,7 @@
                 <a:ea typeface="Yu Gothic" pitchFamily="34" charset="-122"/>
                 <a:cs typeface="Yu Gothic" pitchFamily="34" charset="-120"/>
               </a:rPr>
-              <a:t>回転12ヶ月には年間7.5億円の販売が必要となる。WineBank自己勘定在庫より先にSPC在庫を売る運用ルールとし、これを契約上の義務とする。最短9ヶ月、延びても15〜18ヶ月を想定レンジとする。</a:t>
+              <a:t>流動性の高い銘柄をSPCに組み入れ、WineBank自己勘定在庫と重複する銘柄は在庫比率でプロラタ配分する。判断を要する場合はSPC在庫を優先する。最短9ヶ月、延びても15〜18ヶ月を想定レンジとする。</a:t>
             </a:r>
             <a:endParaRPr lang="en-US" sz="1000" dirty="0"/>
           </a:p>
@@ -28029,7 +28276,7 @@
                 <a:ea typeface="Yu Gothic" pitchFamily="34" charset="-122"/>
                 <a:cs typeface="Yu Gothic" pitchFamily="34" charset="-120"/>
               </a:rPr>
-              <a:t>デット2億の調達コストはWineBankが負担する。</a:t>
+              <a:t>デットはWineBank側の資金調達であり、投資家の利回りには影響しない。</a:t>
             </a:r>
             <a:endParaRPr lang="en-US" sz="1200" dirty="0"/>
           </a:p>
@@ -28068,7 +28315,7 @@
                 <a:ea typeface="Yu Gothic" pitchFamily="34" charset="-122"/>
                 <a:cs typeface="Yu Gothic" pitchFamily="34" charset="-120"/>
               </a:rPr>
-              <a:t>その見返りにWineBankはエクイティ2億相当としてカウントされ、SPCの税前利益は出資比率で按分（投資家60：WineBank40）。投資家はレバレッジの効果のみを受け取る。</a:t>
+              <a:t>デット2億円の金利はWineBankが負担し、その見返りにWineBankは出資持分2億円相当としてカウントされる。投資家利回りは出資3億円に対する取分であり、レバレッジによる嵩上げを含まない。</a:t>
             </a:r>
             <a:endParaRPr lang="en-US" sz="1000" dirty="0"/>
           </a:p>
@@ -30931,7 +31178,7 @@
                           <a:ea typeface="Yu Gothic" pitchFamily="34" charset="-122"/>
                           <a:cs typeface="Yu Gothic" pitchFamily="34" charset="-120"/>
                         </a:rPr>
-                        <a:t>エクイティ定常年間利回り42.0%（在庫回転12ヶ月）。5年通算の年平均利回りは33.5%</a:t>
+                        <a:t>投資家利回り42.0%（在庫回転12ヶ月・定常年間）。5年通算の年平均利回りは33.5%</a:t>
                       </a:r>
                       <a:endParaRPr lang="en-US" sz="900" dirty="0">
                         <a:latin typeface="Yu Gothic" charset="0"/>
@@ -31345,7 +31592,7 @@
                           <a:ea typeface="Yu Gothic" pitchFamily="34" charset="-122"/>
                           <a:cs typeface="Yu Gothic" pitchFamily="34" charset="-120"/>
                         </a:rPr>
-                        <a:t>SPC在庫の優先売却を第一原則とする。契約別紙として明文化する</a:t>
+                        <a:t>在庫比率によるプロラタ配分を原則とし、判断を要する場合はSPC在庫を優先する</a:t>
                       </a:r>
                       <a:endParaRPr lang="en-US" sz="900" dirty="0">
                         <a:latin typeface="Yu Gothic" charset="0"/>
@@ -31503,7 +31750,7 @@
                 <a:ea typeface="Yu Gothic" pitchFamily="34" charset="-122"/>
                 <a:cs typeface="Yu Gothic" pitchFamily="34" charset="-120"/>
               </a:rPr>
-              <a:t>半期解約を前提とすると常時1〜3割を現金または即時換金可能な在庫で保有する必要があり、稼働率が下がって利回りも下がる（稼働率95%→85%でエクイティ利回りは42.0%→37.4%）。当初3年ロックアップ・4年目以降は年度ごとの解約という設計により、現金保有を5%に抑え、総額の95%をワインに充当できる。</a:t>
+              <a:t>半期解約を前提とすると常時1〜3割を現金または即時換金可能な在庫で保有する必要があり、稼働率が下がって利回りも下がる（稼働率95%→85%で投資家利回りは42.0%→37.4%）。当初3年ロックアップ・4年目以降は年度ごとの解約という設計により、現金保有を5%に抑え、総額の95%をワインに充当できる。</a:t>
             </a:r>
             <a:endParaRPr lang="en-US" sz="900" dirty="0"/>
           </a:p>
@@ -33167,7 +33414,7 @@
                 <a:ea typeface="Yu Gothic" pitchFamily="34" charset="-122"/>
                 <a:cs typeface="Yu Gothic" pitchFamily="34" charset="-120"/>
               </a:rPr>
-              <a:t>流通価格差（回転に対するリターン）とワインの値上がり（在庫に対するリターン）。価格が横ばいでもエクイティ利回り34.1%、回転が18ヶ月に延びても29.8%を確保する。</a:t>
+              <a:t>流通価格差（回転に対するリターン）とワインの値上がり（在庫に対するリターン）。価格が横ばいでも投資家利回り34.1%、回転が18ヶ月に延びても29.8%を確保する。</a:t>
             </a:r>
             <a:endParaRPr lang="en-US" sz="900" dirty="0"/>
           </a:p>
@@ -33469,7 +33716,7 @@
                 <a:ea typeface="Yu Gothic" pitchFamily="34" charset="-122"/>
                 <a:cs typeface="Yu Gothic" pitchFamily="34" charset="-120"/>
               </a:rPr>
-              <a:t>出口をB2B・B2Cの両輪で持ち、SPC在庫を先に売る</a:t>
+              <a:t>出口をB2B・B2Cの両輪で持っている</a:t>
             </a:r>
             <a:endParaRPr lang="en-US" sz="1150" dirty="0"/>
           </a:p>
@@ -33511,7 +33758,7 @@
                 <a:ea typeface="Yu Gothic" pitchFamily="34" charset="-122"/>
                 <a:cs typeface="Yu Gothic" pitchFamily="34" charset="-120"/>
               </a:rPr>
-              <a:t>酒販店卸（B2B）に加え、自社EC・オークション・CLUB会員・グループのアピシウス（B2C）。そのうえでWineBank自己勘定在庫よりSPC在庫を優先して売却する。</a:t>
+              <a:t>酒販店卸（B2B）に加え、自社EC・オークション・CLUB会員・グループのアピシウス（B2C）。手取りの高いチャネルを選べる構造。</a:t>
             </a:r>
             <a:endParaRPr lang="en-US" sz="900" dirty="0"/>
           </a:p>
@@ -33683,7 +33930,7 @@
                 <a:ea typeface="Yu Gothic" pitchFamily="34" charset="-122"/>
                 <a:cs typeface="Yu Gothic" pitchFamily="34" charset="-120"/>
               </a:rPr>
-              <a:t>期中報酬も成功報酬も取らない。デット2億円の調達コストをWineBankが負担し、損益は出資比率で按分する。投資家が儲からなければWineBankも儲からない。</a:t>
+              <a:t>期中報酬も成功報酬も取らない。デット2億円の金利はWineBankが負担するため、WineBank側利回り38.0%は投資家の42.0%を常に下回る。投資家が儲からなければWineBankも儲からない。</a:t>
             </a:r>
             <a:endParaRPr lang="en-US" sz="900" dirty="0"/>
           </a:p>
@@ -33883,7 +34130,7 @@
                 <a:ea typeface="Yu Gothic" pitchFamily="34" charset="-122"/>
                 <a:cs typeface="Yu Gothic" pitchFamily="34" charset="-120"/>
               </a:rPr>
-              <a:t>在庫回転12ヶ月を主線とし、エクイティ利回り42.0%。想定レンジ9〜18ヶ月では29.8〜54.2%となり、いずれも貴社基準を上回る。</a:t>
+              <a:t>在庫回転12ヶ月を主線とし、投資家利回り42.0%。想定レンジ9〜18ヶ月では29.8〜54.2%となり、いずれも貴社基準を上回る。</a:t>
             </a:r>
             <a:endParaRPr lang="en-US" sz="900" dirty="0"/>
           </a:p>
@@ -33925,7 +34172,7 @@
                 <a:ea typeface="Yu Gothic" pitchFamily="34" charset="-122"/>
                 <a:cs typeface="Yu Gothic" pitchFamily="34" charset="-120"/>
               </a:rPr>
-              <a:t>SPC在庫を優先して売却することで回転12ヶ月を実現する。回転期間を運用KPIとして四半期報告する。</a:t>
+              <a:t>流動性の高い銘柄を組み入れることで回転12ヶ月を実現する。回転期間を運用KPIとして四半期報告する。</a:t>
             </a:r>
             <a:endParaRPr lang="en-US" sz="900" dirty="0"/>
           </a:p>
@@ -36208,7 +36455,7 @@
                           <a:ea typeface="Yu Gothic" pitchFamily="34" charset="-122"/>
                           <a:cs typeface="Yu Gothic" pitchFamily="34" charset="-120"/>
                         </a:rPr>
-                        <a:t>エクイティ3億円に対し 定常年間利回り 42.0%</a:t>
+                        <a:t>出資3億円に対し 投資家利回り 42.0%</a:t>
                       </a:r>
                       <a:endParaRPr lang="en-US" sz="1000" dirty="0">
                         <a:latin typeface="Yu Gothic" charset="0"/>
@@ -36414,7 +36661,7 @@
                           <a:ea typeface="Yu Gothic" pitchFamily="34" charset="-122"/>
                           <a:cs typeface="Yu Gothic" pitchFamily="34" charset="-120"/>
                         </a:rPr>
-                        <a:t>うちデット2億円の金利4%（8百万円）を負担 → 手取り76百万円</a:t>
+                        <a:t>デット金利8百万円を負担 → 手取り76百万円。持分相当2億円に対し WineBank側利回り 38.0%</a:t>
                       </a:r>
                       <a:endParaRPr lang="en-US" sz="1000" dirty="0">
                         <a:latin typeface="Yu Gothic" charset="0"/>
@@ -36778,7 +37025,7 @@
                 <a:ea typeface="Yu Gothic" pitchFamily="34" charset="-122"/>
                 <a:cs typeface="Yu Gothic" pitchFamily="34" charset="-120"/>
               </a:rPr>
-              <a:t>投資家の出資比率（3億円÷5億円＝60%）と損益の配分比率（60%）が一致しているため、エクイティ利回りはSPCの資産利回りそのものとなる。レバレッジによる上振れはWineBankの取り分（無拠出で40%）とデットの金利負担で相殺されており、投資家が過度なレバレッジを負う構造にはなっていない。なお同一投資家がデット2億円とエクイティ3億円の双方を拠出する場合、5億円全体に対する合成利回りは27.2%となる。</a:t>
+              <a:t>デットはWineBankが調達コストを負担する借入であり、投資家の出資とは切り離されている。投資家の出資比率（3億円÷5億円＝60%）と損益の配分比率（60%）が一致しているため、投資家利回り42.0%はSPCの資産利回りそのものであり、レバレッジによって嵩上げされた数値ではない。WineBank側利回りは38.0%と投資家を4.0ポイント下回る。両者の差は、WineBankがデット2億円の金利と保証責任を負っていることによる。</a:t>
             </a:r>
             <a:endParaRPr lang="en-US" sz="900" dirty="0"/>
           </a:p>
@@ -36927,7 +37174,7 @@
                 <a:ea typeface="Yu Gothic" pitchFamily="34" charset="-122"/>
                 <a:cs typeface="Yu Gothic" pitchFamily="34" charset="-120"/>
               </a:rPr>
-              <a:t>回転12ヶ月には年間7.5億円の販売が必要となる。SPC在庫を優先して販売することで達成する。</a:t>
+              <a:t>回転12ヶ月には年間7.5億円の販売が必要となる。組入銘柄の選定を主たる手段とし、配分ルールと販路拡大で補う。</a:t>
             </a:r>
             <a:endParaRPr lang="en-US" sz="1150" dirty="0"/>
           </a:p>
@@ -37034,12 +37281,13 @@
             <a:tbl>
               <a:tblPr/>
               <a:tblGrid>
-                <a:gridCol w="1828800"/>
-                <a:gridCol w="1874520"/>
-                <a:gridCol w="1600200"/>
-                <a:gridCol w="1737360"/>
-                <a:gridCol w="2011680"/>
-                <a:gridCol w="1819656"/>
+                <a:gridCol w="1591056"/>
+                <a:gridCol w="1572768"/>
+                <a:gridCol w="1316736"/>
+                <a:gridCol w="1481328"/>
+                <a:gridCol w="1298448"/>
+                <a:gridCol w="1572768"/>
+                <a:gridCol w="2039112"/>
               </a:tblGrid>
               <a:tr h="384048">
                 <a:tc>
@@ -37331,7 +37579,75 @@
                           <a:ea typeface="Yu Gothic" pitchFamily="34" charset="-122"/>
                           <a:cs typeface="Yu Gothic" pitchFamily="34" charset="-120"/>
                         </a:rPr>
-                        <a:t>エクイティ定常年間利回り</a:t>
+                        <a:t>投資家利回り</a:t>
+                      </a:r>
+                      <a:endParaRPr lang="en-US" sz="950" dirty="0">
+                        <a:latin typeface="Yu Gothic" charset="0"/>
+                        <a:ea typeface="Yu Gothic" charset="0"/>
+                        <a:cs typeface="Yu Gothic" charset="0"/>
+                      </a:endParaRPr>
+                    </a:p>
+                  </a:txBody>
+                  <a:tcPr marL="45720" marR="45720" marT="45720" marB="45720" anchor="ctr">
+                    <a:lnL w="7620" cap="flat" cmpd="sng" algn="ctr">
+                      <a:solidFill>
+                        <a:srgbClr val="2E2A24"/>
+                      </a:solidFill>
+                      <a:prstDash val="solid"/>
+                      <a:round/>
+                      <a:headEnd type="none" w="med" len="med"/>
+                      <a:tailEnd type="none" w="med" len="med"/>
+                    </a:lnL>
+                    <a:lnR w="7620" cap="flat" cmpd="sng" algn="ctr">
+                      <a:solidFill>
+                        <a:srgbClr val="2E2A24"/>
+                      </a:solidFill>
+                      <a:prstDash val="solid"/>
+                      <a:round/>
+                      <a:headEnd type="none" w="med" len="med"/>
+                      <a:tailEnd type="none" w="med" len="med"/>
+                    </a:lnR>
+                    <a:lnT w="7620" cap="flat" cmpd="sng" algn="ctr">
+                      <a:solidFill>
+                        <a:srgbClr val="2E2A24"/>
+                      </a:solidFill>
+                      <a:prstDash val="solid"/>
+                      <a:round/>
+                      <a:headEnd type="none" w="med" len="med"/>
+                      <a:tailEnd type="none" w="med" len="med"/>
+                    </a:lnT>
+                    <a:lnB w="7620" cap="flat" cmpd="sng" algn="ctr">
+                      <a:solidFill>
+                        <a:srgbClr val="2E2A24"/>
+                      </a:solidFill>
+                      <a:prstDash val="solid"/>
+                      <a:round/>
+                      <a:headEnd type="none" w="med" len="med"/>
+                      <a:tailEnd type="none" w="med" len="med"/>
+                    </a:lnB>
+                    <a:solidFill>
+                      <a:srgbClr val="231F1A"/>
+                    </a:solidFill>
+                  </a:tcPr>
+                </a:tc>
+                <a:tc>
+                  <a:txBody>
+                    <a:bodyPr/>
+                    <a:lstStyle/>
+                    <a:p>
+                      <a:pPr algn="ctr" indent="0" marL="0">
+                        <a:buNone/>
+                      </a:pPr>
+                      <a:r>
+                        <a:rPr lang="en-US" sz="950" b="1" dirty="0">
+                          <a:solidFill>
+                            <a:srgbClr val="C9A96E"/>
+                          </a:solidFill>
+                          <a:latin typeface="Yu Gothic" pitchFamily="34" charset="0"/>
+                          <a:ea typeface="Yu Gothic" pitchFamily="34" charset="-122"/>
+                          <a:cs typeface="Yu Gothic" pitchFamily="34" charset="-120"/>
+                        </a:rPr>
+                        <a:t>WineBank側利回り</a:t>
                       </a:r>
                       <a:endParaRPr lang="en-US" sz="950" dirty="0">
                         <a:latin typeface="Yu Gothic" charset="0"/>
@@ -37735,13 +38051,81 @@
                       <a:r>
                         <a:rPr lang="en-US" sz="1000" b="1" dirty="0">
                           <a:solidFill>
+                            <a:srgbClr val="C9A96E"/>
+                          </a:solidFill>
+                          <a:latin typeface="Yu Gothic" pitchFamily="34" charset="0"/>
+                          <a:ea typeface="Yu Gothic" pitchFamily="34" charset="-122"/>
+                          <a:cs typeface="Yu Gothic" pitchFamily="34" charset="-120"/>
+                        </a:rPr>
+                        <a:t>54.2%</a:t>
+                      </a:r>
+                      <a:endParaRPr lang="en-US" sz="1000" dirty="0">
+                        <a:latin typeface="Yu Gothic" charset="0"/>
+                        <a:ea typeface="Yu Gothic" charset="0"/>
+                        <a:cs typeface="Yu Gothic" charset="0"/>
+                      </a:endParaRPr>
+                    </a:p>
+                  </a:txBody>
+                  <a:tcPr marL="45720" marR="45720" marT="45720" marB="45720" anchor="ctr">
+                    <a:lnL w="7620" cap="flat" cmpd="sng" algn="ctr">
+                      <a:solidFill>
+                        <a:srgbClr val="2E2A24"/>
+                      </a:solidFill>
+                      <a:prstDash val="solid"/>
+                      <a:round/>
+                      <a:headEnd type="none" w="med" len="med"/>
+                      <a:tailEnd type="none" w="med" len="med"/>
+                    </a:lnL>
+                    <a:lnR w="7620" cap="flat" cmpd="sng" algn="ctr">
+                      <a:solidFill>
+                        <a:srgbClr val="2E2A24"/>
+                      </a:solidFill>
+                      <a:prstDash val="solid"/>
+                      <a:round/>
+                      <a:headEnd type="none" w="med" len="med"/>
+                      <a:tailEnd type="none" w="med" len="med"/>
+                    </a:lnR>
+                    <a:lnT w="7620" cap="flat" cmpd="sng" algn="ctr">
+                      <a:solidFill>
+                        <a:srgbClr val="2E2A24"/>
+                      </a:solidFill>
+                      <a:prstDash val="solid"/>
+                      <a:round/>
+                      <a:headEnd type="none" w="med" len="med"/>
+                      <a:tailEnd type="none" w="med" len="med"/>
+                    </a:lnT>
+                    <a:lnB w="7620" cap="flat" cmpd="sng" algn="ctr">
+                      <a:solidFill>
+                        <a:srgbClr val="2E2A24"/>
+                      </a:solidFill>
+                      <a:prstDash val="solid"/>
+                      <a:round/>
+                      <a:headEnd type="none" w="med" len="med"/>
+                      <a:tailEnd type="none" w="med" len="med"/>
+                    </a:lnB>
+                    <a:solidFill>
+                      <a:srgbClr val="171614"/>
+                    </a:solidFill>
+                  </a:tcPr>
+                </a:tc>
+                <a:tc>
+                  <a:txBody>
+                    <a:bodyPr/>
+                    <a:lstStyle/>
+                    <a:p>
+                      <a:pPr algn="ctr" indent="0" marL="0">
+                        <a:buNone/>
+                      </a:pPr>
+                      <a:r>
+                        <a:rPr lang="en-US" sz="1000" dirty="0">
+                          <a:solidFill>
                             <a:srgbClr val="EFEBE3"/>
                           </a:solidFill>
                           <a:latin typeface="Yu Gothic" pitchFamily="34" charset="0"/>
                           <a:ea typeface="Yu Gothic" pitchFamily="34" charset="-122"/>
                           <a:cs typeface="Yu Gothic" pitchFamily="34" charset="-120"/>
                         </a:rPr>
-                        <a:t>54.2%</a:t>
+                        <a:t>50.2%</a:t>
                       </a:r>
                       <a:endParaRPr lang="en-US" sz="1000" dirty="0">
                         <a:latin typeface="Yu Gothic" charset="0"/>
@@ -38207,6 +38591,74 @@
                     <a:bodyPr/>
                     <a:lstStyle/>
                     <a:p>
+                      <a:pPr algn="ctr" indent="0" marL="0">
+                        <a:buNone/>
+                      </a:pPr>
+                      <a:r>
+                        <a:rPr lang="en-US" sz="1000" dirty="0">
+                          <a:solidFill>
+                            <a:srgbClr val="EFEBE3"/>
+                          </a:solidFill>
+                          <a:latin typeface="Yu Gothic" pitchFamily="34" charset="0"/>
+                          <a:ea typeface="Yu Gothic" pitchFamily="34" charset="-122"/>
+                          <a:cs typeface="Yu Gothic" pitchFamily="34" charset="-120"/>
+                        </a:rPr>
+                        <a:t>38.0%</a:t>
+                      </a:r>
+                      <a:endParaRPr lang="en-US" sz="1000" dirty="0">
+                        <a:latin typeface="Yu Gothic" charset="0"/>
+                        <a:ea typeface="Yu Gothic" charset="0"/>
+                        <a:cs typeface="Yu Gothic" charset="0"/>
+                      </a:endParaRPr>
+                    </a:p>
+                  </a:txBody>
+                  <a:tcPr marL="45720" marR="45720" marT="45720" marB="45720" anchor="ctr">
+                    <a:lnL w="7620" cap="flat" cmpd="sng" algn="ctr">
+                      <a:solidFill>
+                        <a:srgbClr val="2E2A24"/>
+                      </a:solidFill>
+                      <a:prstDash val="solid"/>
+                      <a:round/>
+                      <a:headEnd type="none" w="med" len="med"/>
+                      <a:tailEnd type="none" w="med" len="med"/>
+                    </a:lnL>
+                    <a:lnR w="7620" cap="flat" cmpd="sng" algn="ctr">
+                      <a:solidFill>
+                        <a:srgbClr val="2E2A24"/>
+                      </a:solidFill>
+                      <a:prstDash val="solid"/>
+                      <a:round/>
+                      <a:headEnd type="none" w="med" len="med"/>
+                      <a:tailEnd type="none" w="med" len="med"/>
+                    </a:lnR>
+                    <a:lnT w="7620" cap="flat" cmpd="sng" algn="ctr">
+                      <a:solidFill>
+                        <a:srgbClr val="2E2A24"/>
+                      </a:solidFill>
+                      <a:prstDash val="solid"/>
+                      <a:round/>
+                      <a:headEnd type="none" w="med" len="med"/>
+                      <a:tailEnd type="none" w="med" len="med"/>
+                    </a:lnT>
+                    <a:lnB w="7620" cap="flat" cmpd="sng" algn="ctr">
+                      <a:solidFill>
+                        <a:srgbClr val="2E2A24"/>
+                      </a:solidFill>
+                      <a:prstDash val="solid"/>
+                      <a:round/>
+                      <a:headEnd type="none" w="med" len="med"/>
+                      <a:tailEnd type="none" w="med" len="med"/>
+                    </a:lnB>
+                    <a:solidFill>
+                      <a:srgbClr val="171614"/>
+                    </a:solidFill>
+                  </a:tcPr>
+                </a:tc>
+                <a:tc>
+                  <a:txBody>
+                    <a:bodyPr/>
+                    <a:lstStyle/>
+                    <a:p>
                       <a:pPr algn="l" indent="0" marL="0">
                         <a:buNone/>
                       </a:pPr>
@@ -38219,7 +38671,7 @@
                           <a:ea typeface="Yu Gothic" pitchFamily="34" charset="-122"/>
                           <a:cs typeface="Yu Gothic" pitchFamily="34" charset="-120"/>
                         </a:rPr>
-                        <a:t>SPC在庫優先売却により達成する水準</a:t>
+                        <a:t>組入銘柄の選定と配分ルールで達成</a:t>
                       </a:r>
                       <a:endParaRPr lang="en-US" sz="1000" dirty="0">
                         <a:latin typeface="Yu Gothic" charset="0"/>
@@ -38555,13 +39007,81 @@
                       <a:r>
                         <a:rPr lang="en-US" sz="1000" b="1" dirty="0">
                           <a:solidFill>
+                            <a:srgbClr val="C9A96E"/>
+                          </a:solidFill>
+                          <a:latin typeface="Yu Gothic" pitchFamily="34" charset="0"/>
+                          <a:ea typeface="Yu Gothic" pitchFamily="34" charset="-122"/>
+                          <a:cs typeface="Yu Gothic" pitchFamily="34" charset="-120"/>
+                        </a:rPr>
+                        <a:t>34.7%</a:t>
+                      </a:r>
+                      <a:endParaRPr lang="en-US" sz="1000" dirty="0">
+                        <a:latin typeface="Yu Gothic" charset="0"/>
+                        <a:ea typeface="Yu Gothic" charset="0"/>
+                        <a:cs typeface="Yu Gothic" charset="0"/>
+                      </a:endParaRPr>
+                    </a:p>
+                  </a:txBody>
+                  <a:tcPr marL="45720" marR="45720" marT="45720" marB="45720" anchor="ctr">
+                    <a:lnL w="7620" cap="flat" cmpd="sng" algn="ctr">
+                      <a:solidFill>
+                        <a:srgbClr val="2E2A24"/>
+                      </a:solidFill>
+                      <a:prstDash val="solid"/>
+                      <a:round/>
+                      <a:headEnd type="none" w="med" len="med"/>
+                      <a:tailEnd type="none" w="med" len="med"/>
+                    </a:lnL>
+                    <a:lnR w="7620" cap="flat" cmpd="sng" algn="ctr">
+                      <a:solidFill>
+                        <a:srgbClr val="2E2A24"/>
+                      </a:solidFill>
+                      <a:prstDash val="solid"/>
+                      <a:round/>
+                      <a:headEnd type="none" w="med" len="med"/>
+                      <a:tailEnd type="none" w="med" len="med"/>
+                    </a:lnR>
+                    <a:lnT w="7620" cap="flat" cmpd="sng" algn="ctr">
+                      <a:solidFill>
+                        <a:srgbClr val="2E2A24"/>
+                      </a:solidFill>
+                      <a:prstDash val="solid"/>
+                      <a:round/>
+                      <a:headEnd type="none" w="med" len="med"/>
+                      <a:tailEnd type="none" w="med" len="med"/>
+                    </a:lnT>
+                    <a:lnB w="7620" cap="flat" cmpd="sng" algn="ctr">
+                      <a:solidFill>
+                        <a:srgbClr val="2E2A24"/>
+                      </a:solidFill>
+                      <a:prstDash val="solid"/>
+                      <a:round/>
+                      <a:headEnd type="none" w="med" len="med"/>
+                      <a:tailEnd type="none" w="med" len="med"/>
+                    </a:lnB>
+                    <a:solidFill>
+                      <a:srgbClr val="171614"/>
+                    </a:solidFill>
+                  </a:tcPr>
+                </a:tc>
+                <a:tc>
+                  <a:txBody>
+                    <a:bodyPr/>
+                    <a:lstStyle/>
+                    <a:p>
+                      <a:pPr algn="ctr" indent="0" marL="0">
+                        <a:buNone/>
+                      </a:pPr>
+                      <a:r>
+                        <a:rPr lang="en-US" sz="1000" dirty="0">
+                          <a:solidFill>
                             <a:srgbClr val="EFEBE3"/>
                           </a:solidFill>
                           <a:latin typeface="Yu Gothic" pitchFamily="34" charset="0"/>
                           <a:ea typeface="Yu Gothic" pitchFamily="34" charset="-122"/>
                           <a:cs typeface="Yu Gothic" pitchFamily="34" charset="-120"/>
                         </a:rPr>
-                        <a:t>34.7%</a:t>
+                        <a:t>30.7%</a:t>
                       </a:r>
                       <a:endParaRPr lang="en-US" sz="1000" dirty="0">
                         <a:latin typeface="Yu Gothic" charset="0"/>
@@ -38965,13 +39485,81 @@
                       <a:r>
                         <a:rPr lang="en-US" sz="1000" b="1" dirty="0">
                           <a:solidFill>
+                            <a:srgbClr val="C9A96E"/>
+                          </a:solidFill>
+                          <a:latin typeface="Yu Gothic" pitchFamily="34" charset="0"/>
+                          <a:ea typeface="Yu Gothic" pitchFamily="34" charset="-122"/>
+                          <a:cs typeface="Yu Gothic" pitchFamily="34" charset="-120"/>
+                        </a:rPr>
+                        <a:t>29.8%</a:t>
+                      </a:r>
+                      <a:endParaRPr lang="en-US" sz="1000" dirty="0">
+                        <a:latin typeface="Yu Gothic" charset="0"/>
+                        <a:ea typeface="Yu Gothic" charset="0"/>
+                        <a:cs typeface="Yu Gothic" charset="0"/>
+                      </a:endParaRPr>
+                    </a:p>
+                  </a:txBody>
+                  <a:tcPr marL="45720" marR="45720" marT="45720" marB="45720" anchor="ctr">
+                    <a:lnL w="7620" cap="flat" cmpd="sng" algn="ctr">
+                      <a:solidFill>
+                        <a:srgbClr val="2E2A24"/>
+                      </a:solidFill>
+                      <a:prstDash val="solid"/>
+                      <a:round/>
+                      <a:headEnd type="none" w="med" len="med"/>
+                      <a:tailEnd type="none" w="med" len="med"/>
+                    </a:lnL>
+                    <a:lnR w="7620" cap="flat" cmpd="sng" algn="ctr">
+                      <a:solidFill>
+                        <a:srgbClr val="2E2A24"/>
+                      </a:solidFill>
+                      <a:prstDash val="solid"/>
+                      <a:round/>
+                      <a:headEnd type="none" w="med" len="med"/>
+                      <a:tailEnd type="none" w="med" len="med"/>
+                    </a:lnR>
+                    <a:lnT w="7620" cap="flat" cmpd="sng" algn="ctr">
+                      <a:solidFill>
+                        <a:srgbClr val="2E2A24"/>
+                      </a:solidFill>
+                      <a:prstDash val="solid"/>
+                      <a:round/>
+                      <a:headEnd type="none" w="med" len="med"/>
+                      <a:tailEnd type="none" w="med" len="med"/>
+                    </a:lnT>
+                    <a:lnB w="7620" cap="flat" cmpd="sng" algn="ctr">
+                      <a:solidFill>
+                        <a:srgbClr val="2E2A24"/>
+                      </a:solidFill>
+                      <a:prstDash val="solid"/>
+                      <a:round/>
+                      <a:headEnd type="none" w="med" len="med"/>
+                      <a:tailEnd type="none" w="med" len="med"/>
+                    </a:lnB>
+                    <a:solidFill>
+                      <a:srgbClr val="171614"/>
+                    </a:solidFill>
+                  </a:tcPr>
+                </a:tc>
+                <a:tc>
+                  <a:txBody>
+                    <a:bodyPr/>
+                    <a:lstStyle/>
+                    <a:p>
+                      <a:pPr algn="ctr" indent="0" marL="0">
+                        <a:buNone/>
+                      </a:pPr>
+                      <a:r>
+                        <a:rPr lang="en-US" sz="1000" dirty="0">
+                          <a:solidFill>
                             <a:srgbClr val="EFEBE3"/>
                           </a:solidFill>
                           <a:latin typeface="Yu Gothic" pitchFamily="34" charset="0"/>
                           <a:ea typeface="Yu Gothic" pitchFamily="34" charset="-122"/>
                           <a:cs typeface="Yu Gothic" pitchFamily="34" charset="-120"/>
                         </a:rPr>
-                        <a:t>29.8%</a:t>
+                        <a:t>25.8%</a:t>
                       </a:r>
                       <a:endParaRPr lang="en-US" sz="1000" dirty="0">
                         <a:latin typeface="Yu Gothic" charset="0"/>
@@ -39112,153 +39700,6 @@
             </a:avLst>
           </a:prstGeom>
           <a:solidFill>
-            <a:srgbClr val="171614"/>
-          </a:solidFill>
-          <a:ln w="9525">
-            <a:solidFill>
-              <a:srgbClr val="2E2A24"/>
-            </a:solidFill>
-            <a:prstDash val="solid"/>
-          </a:ln>
-        </p:spPr>
-      </p:sp>
-      <p:sp>
-        <p:nvSpPr>
-          <p:cNvPr id="9" name="Text 6"/>
-          <p:cNvSpPr/>
-          <p:nvPr/>
-        </p:nvSpPr>
-        <p:spPr>
-          <a:xfrm>
-            <a:off x="896112" y="3913632"/>
-            <a:ext cx="2978810" cy="237744"/>
-          </a:xfrm>
-          <a:prstGeom prst="rect">
-            <a:avLst/>
-          </a:prstGeom>
-          <a:noFill/>
-          <a:ln/>
-        </p:spPr>
-        <p:txBody>
-          <a:bodyPr wrap="square" lIns="0" tIns="0" rIns="0" bIns="0" rtlCol="0" anchor="ctr"/>
-          <a:lstStyle/>
-          <a:p>
-            <a:pPr indent="0" marL="0">
-              <a:buNone/>
-            </a:pPr>
-            <a:r>
-              <a:rPr lang="en-US" sz="1100" b="1" dirty="0">
-                <a:solidFill>
-                  <a:srgbClr val="EFEBE3"/>
-                </a:solidFill>
-                <a:latin typeface="Yu Gothic" pitchFamily="34" charset="0"/>
-                <a:ea typeface="Yu Gothic" pitchFamily="34" charset="-122"/>
-                <a:cs typeface="Yu Gothic" pitchFamily="34" charset="-120"/>
-              </a:rPr>
-              <a:t>現状の販売実力</a:t>
-            </a:r>
-            <a:endParaRPr lang="en-US" sz="1100" dirty="0"/>
-          </a:p>
-        </p:txBody>
-      </p:sp>
-      <p:sp>
-        <p:nvSpPr>
-          <p:cNvPr id="10" name="Text 7"/>
-          <p:cNvSpPr/>
-          <p:nvPr/>
-        </p:nvSpPr>
-        <p:spPr>
-          <a:xfrm>
-            <a:off x="896112" y="4187952"/>
-            <a:ext cx="2978810" cy="365760"/>
-          </a:xfrm>
-          <a:prstGeom prst="rect">
-            <a:avLst/>
-          </a:prstGeom>
-          <a:noFill/>
-          <a:ln/>
-        </p:spPr>
-        <p:txBody>
-          <a:bodyPr wrap="square" lIns="0" tIns="0" rIns="0" bIns="0" rtlCol="0" anchor="ctr"/>
-          <a:lstStyle/>
-          <a:p>
-            <a:pPr indent="0" marL="0">
-              <a:buNone/>
-            </a:pPr>
-            <a:r>
-              <a:rPr lang="en-US" sz="1700" b="1" dirty="0">
-                <a:solidFill>
-                  <a:srgbClr val="C9A96E"/>
-                </a:solidFill>
-                <a:latin typeface="Yu Gothic" pitchFamily="34" charset="0"/>
-                <a:ea typeface="Yu Gothic" pitchFamily="34" charset="-122"/>
-                <a:cs typeface="Yu Gothic" pitchFamily="34" charset="-120"/>
-              </a:rPr>
-              <a:t>5〜7億円</a:t>
-            </a:r>
-            <a:endParaRPr lang="en-US" sz="1700" dirty="0"/>
-          </a:p>
-        </p:txBody>
-      </p:sp>
-      <p:sp>
-        <p:nvSpPr>
-          <p:cNvPr id="11" name="Text 8"/>
-          <p:cNvSpPr/>
-          <p:nvPr/>
-        </p:nvSpPr>
-        <p:spPr>
-          <a:xfrm>
-            <a:off x="896112" y="4608576"/>
-            <a:ext cx="2978810" cy="896112"/>
-          </a:xfrm>
-          <a:prstGeom prst="rect">
-            <a:avLst/>
-          </a:prstGeom>
-          <a:noFill/>
-          <a:ln/>
-        </p:spPr>
-        <p:txBody>
-          <a:bodyPr wrap="square" lIns="0" tIns="0" rIns="0" bIns="0" rtlCol="0" anchor="ctr"/>
-          <a:lstStyle/>
-          <a:p>
-            <a:pPr indent="0" marL="0">
-              <a:lnSpc>
-                <a:spcPct val="124000"/>
-              </a:lnSpc>
-              <a:buNone/>
-            </a:pPr>
-            <a:r>
-              <a:rPr lang="en-US" sz="900" dirty="0">
-                <a:solidFill>
-                  <a:srgbClr val="9A938A"/>
-                </a:solidFill>
-                <a:latin typeface="Yu Gothic" pitchFamily="34" charset="0"/>
-                <a:ea typeface="Yu Gothic" pitchFamily="34" charset="-122"/>
-                <a:cs typeface="Yu Gothic" pitchFamily="34" charset="-120"/>
-              </a:rPr>
-              <a:t>楽天・Yahoo・寺田Wine MarketでのEC、酒販店卸、グループ飲食による現状の年間販売額。回転12ヶ月に必要な7.5億円は、この上限をやや上回る水準にある。</a:t>
-            </a:r>
-            <a:endParaRPr lang="en-US" sz="900" dirty="0"/>
-          </a:p>
-        </p:txBody>
-      </p:sp>
-      <p:sp>
-        <p:nvSpPr>
-          <p:cNvPr id="12" name="Shape 9"/>
-          <p:cNvSpPr/>
-          <p:nvPr/>
-        </p:nvSpPr>
-        <p:spPr>
-          <a:xfrm>
-            <a:off x="4368698" y="3749040"/>
-            <a:ext cx="3454298" cy="1847088"/>
-          </a:xfrm>
-          <a:prstGeom prst="roundRect">
-            <a:avLst>
-              <a:gd name="adj" fmla="val 2228"/>
-            </a:avLst>
-          </a:prstGeom>
-          <a:solidFill>
             <a:srgbClr val="1F1D19"/>
           </a:solidFill>
           <a:ln w="9525">
@@ -39271,13 +39712,13 @@
       </p:sp>
       <p:sp>
         <p:nvSpPr>
-          <p:cNvPr id="13" name="Text 10"/>
-          <p:cNvSpPr/>
-          <p:nvPr/>
-        </p:nvSpPr>
-        <p:spPr>
-          <a:xfrm>
-            <a:off x="4606442" y="3913632"/>
+          <p:cNvPr id="9" name="Text 6"/>
+          <p:cNvSpPr/>
+          <p:nvPr/>
+        </p:nvSpPr>
+        <p:spPr>
+          <a:xfrm>
+            <a:off x="896112" y="3913632"/>
             <a:ext cx="2978810" cy="237744"/>
           </a:xfrm>
           <a:prstGeom prst="rect">
@@ -39302,7 +39743,7 @@
                 <a:ea typeface="Yu Gothic" pitchFamily="34" charset="-122"/>
                 <a:cs typeface="Yu Gothic" pitchFamily="34" charset="-120"/>
               </a:rPr>
-              <a:t>ギャップを埋める第一の手段</a:t>
+              <a:t>第一の手段</a:t>
             </a:r>
             <a:endParaRPr lang="en-US" sz="1100" dirty="0"/>
           </a:p>
@@ -39310,13 +39751,13 @@
       </p:sp>
       <p:sp>
         <p:nvSpPr>
-          <p:cNvPr id="14" name="Text 11"/>
-          <p:cNvSpPr/>
-          <p:nvPr/>
-        </p:nvSpPr>
-        <p:spPr>
-          <a:xfrm>
-            <a:off x="4606442" y="4187952"/>
+          <p:cNvPr id="10" name="Text 7"/>
+          <p:cNvSpPr/>
+          <p:nvPr/>
+        </p:nvSpPr>
+        <p:spPr>
+          <a:xfrm>
+            <a:off x="896112" y="4187952"/>
             <a:ext cx="2978810" cy="365760"/>
           </a:xfrm>
           <a:prstGeom prst="rect">
@@ -39341,7 +39782,7 @@
                 <a:ea typeface="Yu Gothic" pitchFamily="34" charset="-122"/>
                 <a:cs typeface="Yu Gothic" pitchFamily="34" charset="-120"/>
               </a:rPr>
-              <a:t>SPC在庫の優先売却</a:t>
+              <a:t>組入銘柄の選定</a:t>
             </a:r>
             <a:endParaRPr lang="en-US" sz="1700" dirty="0"/>
           </a:p>
@@ -39349,13 +39790,13 @@
       </p:sp>
       <p:sp>
         <p:nvSpPr>
-          <p:cNvPr id="15" name="Text 12"/>
-          <p:cNvSpPr/>
-          <p:nvPr/>
-        </p:nvSpPr>
-        <p:spPr>
-          <a:xfrm>
-            <a:off x="4606442" y="4608576"/>
+          <p:cNvPr id="11" name="Text 8"/>
+          <p:cNvSpPr/>
+          <p:nvPr/>
+        </p:nvSpPr>
+        <p:spPr>
+          <a:xfrm>
+            <a:off x="896112" y="4608576"/>
             <a:ext cx="2978810" cy="896112"/>
           </a:xfrm>
           <a:prstGeom prst="rect">
@@ -39383,7 +39824,7 @@
                 <a:ea typeface="Yu Gothic" pitchFamily="34" charset="-122"/>
                 <a:cs typeface="Yu Gothic" pitchFamily="34" charset="-120"/>
               </a:rPr>
-              <a:t>WineBank自己勘定在庫より先にSPC在庫を売却する運用ルールを契約上の義務とする。現状の販売力をSPCに優先配分することで回転12ヶ月を達成する。</a:t>
+              <a:t>Liv-ex掲載の流動性上位銘柄など、回転の速い銘柄をSPCに組み入れる。何を持たせるかで回転期間の大半が決まるため、これが最も効く打ち手となる。</a:t>
             </a:r>
             <a:endParaRPr lang="en-US" sz="900" dirty="0"/>
           </a:p>
@@ -39391,13 +39832,13 @@
       </p:sp>
       <p:sp>
         <p:nvSpPr>
-          <p:cNvPr id="16" name="Shape 13"/>
-          <p:cNvSpPr/>
-          <p:nvPr/>
-        </p:nvSpPr>
-        <p:spPr>
-          <a:xfrm>
-            <a:off x="8079029" y="3749040"/>
+          <p:cNvPr id="12" name="Shape 9"/>
+          <p:cNvSpPr/>
+          <p:nvPr/>
+        </p:nvSpPr>
+        <p:spPr>
+          <a:xfrm>
+            <a:off x="4368698" y="3749040"/>
             <a:ext cx="3454298" cy="1847088"/>
           </a:xfrm>
           <a:prstGeom prst="roundRect">
@@ -39418,13 +39859,13 @@
       </p:sp>
       <p:sp>
         <p:nvSpPr>
-          <p:cNvPr id="17" name="Text 14"/>
-          <p:cNvSpPr/>
-          <p:nvPr/>
-        </p:nvSpPr>
-        <p:spPr>
-          <a:xfrm>
-            <a:off x="8316773" y="3913632"/>
+          <p:cNvPr id="13" name="Text 10"/>
+          <p:cNvSpPr/>
+          <p:nvPr/>
+        </p:nvSpPr>
+        <p:spPr>
+          <a:xfrm>
+            <a:off x="4606442" y="3913632"/>
             <a:ext cx="2978810" cy="237744"/>
           </a:xfrm>
           <a:prstGeom prst="rect">
@@ -39449,7 +39890,7 @@
                 <a:ea typeface="Yu Gothic" pitchFamily="34" charset="-122"/>
                 <a:cs typeface="Yu Gothic" pitchFamily="34" charset="-120"/>
               </a:rPr>
-              <a:t>販売力そのものを伸ばす打ち手</a:t>
+              <a:t>第二の手段</a:t>
             </a:r>
             <a:endParaRPr lang="en-US" sz="1100" dirty="0"/>
           </a:p>
@@ -39457,13 +39898,13 @@
       </p:sp>
       <p:sp>
         <p:nvSpPr>
-          <p:cNvPr id="18" name="Text 15"/>
-          <p:cNvSpPr/>
-          <p:nvPr/>
-        </p:nvSpPr>
-        <p:spPr>
-          <a:xfrm>
-            <a:off x="8316773" y="4187952"/>
+          <p:cNvPr id="14" name="Text 11"/>
+          <p:cNvSpPr/>
+          <p:nvPr/>
+        </p:nvSpPr>
+        <p:spPr>
+          <a:xfrm>
+            <a:off x="4606442" y="4187952"/>
             <a:ext cx="2978810" cy="365760"/>
           </a:xfrm>
           <a:prstGeom prst="rect">
@@ -39488,7 +39929,7 @@
                 <a:ea typeface="Yu Gothic" pitchFamily="34" charset="-122"/>
                 <a:cs typeface="Yu Gothic" pitchFamily="34" charset="-120"/>
               </a:rPr>
-              <a:t>海外・オークション</a:t>
+              <a:t>配分ルール</a:t>
             </a:r>
             <a:endParaRPr lang="en-US" sz="1700" dirty="0"/>
           </a:p>
@@ -39496,13 +39937,13 @@
       </p:sp>
       <p:sp>
         <p:nvSpPr>
-          <p:cNvPr id="19" name="Text 16"/>
-          <p:cNvSpPr/>
-          <p:nvPr/>
-        </p:nvSpPr>
-        <p:spPr>
-          <a:xfrm>
-            <a:off x="8316773" y="4608576"/>
+          <p:cNvPr id="15" name="Text 12"/>
+          <p:cNvSpPr/>
+          <p:nvPr/>
+        </p:nvSpPr>
+        <p:spPr>
+          <a:xfrm>
+            <a:off x="4606442" y="4608576"/>
             <a:ext cx="2978810" cy="896112"/>
           </a:xfrm>
           <a:prstGeom prst="rect">
@@ -39530,6 +39971,153 @@
                 <a:ea typeface="Yu Gothic" pitchFamily="34" charset="-122"/>
                 <a:cs typeface="Yu Gothic" pitchFamily="34" charset="-120"/>
               </a:rPr>
+              <a:t>自己勘定在庫と重複する銘柄は在庫比率でプロラタ配分し、判断を要する場合はSPC在庫を優先する。契約別紙として明文化する。</a:t>
+            </a:r>
+            <a:endParaRPr lang="en-US" sz="900" dirty="0"/>
+          </a:p>
+        </p:txBody>
+      </p:sp>
+      <p:sp>
+        <p:nvSpPr>
+          <p:cNvPr id="16" name="Shape 13"/>
+          <p:cNvSpPr/>
+          <p:nvPr/>
+        </p:nvSpPr>
+        <p:spPr>
+          <a:xfrm>
+            <a:off x="8079029" y="3749040"/>
+            <a:ext cx="3454298" cy="1847088"/>
+          </a:xfrm>
+          <a:prstGeom prst="roundRect">
+            <a:avLst>
+              <a:gd name="adj" fmla="val 2228"/>
+            </a:avLst>
+          </a:prstGeom>
+          <a:solidFill>
+            <a:srgbClr val="171614"/>
+          </a:solidFill>
+          <a:ln w="9525">
+            <a:solidFill>
+              <a:srgbClr val="2E2A24"/>
+            </a:solidFill>
+            <a:prstDash val="solid"/>
+          </a:ln>
+        </p:spPr>
+      </p:sp>
+      <p:sp>
+        <p:nvSpPr>
+          <p:cNvPr id="17" name="Text 14"/>
+          <p:cNvSpPr/>
+          <p:nvPr/>
+        </p:nvSpPr>
+        <p:spPr>
+          <a:xfrm>
+            <a:off x="8316773" y="3913632"/>
+            <a:ext cx="2978810" cy="237744"/>
+          </a:xfrm>
+          <a:prstGeom prst="rect">
+            <a:avLst/>
+          </a:prstGeom>
+          <a:noFill/>
+          <a:ln/>
+        </p:spPr>
+        <p:txBody>
+          <a:bodyPr wrap="square" lIns="0" tIns="0" rIns="0" bIns="0" rtlCol="0" anchor="ctr"/>
+          <a:lstStyle/>
+          <a:p>
+            <a:pPr indent="0" marL="0">
+              <a:buNone/>
+            </a:pPr>
+            <a:r>
+              <a:rPr lang="en-US" sz="1100" b="1" dirty="0">
+                <a:solidFill>
+                  <a:srgbClr val="EFEBE3"/>
+                </a:solidFill>
+                <a:latin typeface="Yu Gothic" pitchFamily="34" charset="0"/>
+                <a:ea typeface="Yu Gothic" pitchFamily="34" charset="-122"/>
+                <a:cs typeface="Yu Gothic" pitchFamily="34" charset="-120"/>
+              </a:rPr>
+              <a:t>第三の手段</a:t>
+            </a:r>
+            <a:endParaRPr lang="en-US" sz="1100" dirty="0"/>
+          </a:p>
+        </p:txBody>
+      </p:sp>
+      <p:sp>
+        <p:nvSpPr>
+          <p:cNvPr id="18" name="Text 15"/>
+          <p:cNvSpPr/>
+          <p:nvPr/>
+        </p:nvSpPr>
+        <p:spPr>
+          <a:xfrm>
+            <a:off x="8316773" y="4187952"/>
+            <a:ext cx="2978810" cy="365760"/>
+          </a:xfrm>
+          <a:prstGeom prst="rect">
+            <a:avLst/>
+          </a:prstGeom>
+          <a:noFill/>
+          <a:ln/>
+        </p:spPr>
+        <p:txBody>
+          <a:bodyPr wrap="square" lIns="0" tIns="0" rIns="0" bIns="0" rtlCol="0" anchor="ctr"/>
+          <a:lstStyle/>
+          <a:p>
+            <a:pPr indent="0" marL="0">
+              <a:buNone/>
+            </a:pPr>
+            <a:r>
+              <a:rPr lang="en-US" sz="1700" b="1" dirty="0">
+                <a:solidFill>
+                  <a:srgbClr val="C9A96E"/>
+                </a:solidFill>
+                <a:latin typeface="Yu Gothic" pitchFamily="34" charset="0"/>
+                <a:ea typeface="Yu Gothic" pitchFamily="34" charset="-122"/>
+                <a:cs typeface="Yu Gothic" pitchFamily="34" charset="-120"/>
+              </a:rPr>
+              <a:t>販路の拡大</a:t>
+            </a:r>
+            <a:endParaRPr lang="en-US" sz="1700" dirty="0"/>
+          </a:p>
+        </p:txBody>
+      </p:sp>
+      <p:sp>
+        <p:nvSpPr>
+          <p:cNvPr id="19" name="Text 16"/>
+          <p:cNvSpPr/>
+          <p:nvPr/>
+        </p:nvSpPr>
+        <p:spPr>
+          <a:xfrm>
+            <a:off x="8316773" y="4608576"/>
+            <a:ext cx="2978810" cy="896112"/>
+          </a:xfrm>
+          <a:prstGeom prst="rect">
+            <a:avLst/>
+          </a:prstGeom>
+          <a:noFill/>
+          <a:ln/>
+        </p:spPr>
+        <p:txBody>
+          <a:bodyPr wrap="square" lIns="0" tIns="0" rIns="0" bIns="0" rtlCol="0" anchor="ctr"/>
+          <a:lstStyle/>
+          <a:p>
+            <a:pPr indent="0" marL="0">
+              <a:lnSpc>
+                <a:spcPct val="124000"/>
+              </a:lnSpc>
+              <a:buNone/>
+            </a:pPr>
+            <a:r>
+              <a:rPr lang="en-US" sz="900" dirty="0">
+                <a:solidFill>
+                  <a:srgbClr val="9A938A"/>
+                </a:solidFill>
+                <a:latin typeface="Yu Gothic" pitchFamily="34" charset="0"/>
+                <a:ea typeface="Yu Gothic" pitchFamily="34" charset="-122"/>
+                <a:cs typeface="Yu Gothic" pitchFamily="34" charset="-120"/>
+              </a:rPr>
               <a:t>輸出入ライセンスを活かした海外販売、2026年9月開始のWineBank Auction、グループ飲食（アピシウス／ティエリーマルクス）。これらは出資金ではなくWineBank側の資本で手当てする。</a:t>
             </a:r>
             <a:endParaRPr lang="en-US" sz="900" dirty="0"/>
@@ -39572,7 +40160,7 @@
                 <a:ea typeface="Yu Gothic" pitchFamily="34" charset="-122"/>
                 <a:cs typeface="Yu Gothic" pitchFamily="34" charset="-120"/>
               </a:rPr>
-              <a:t>※ 回転12ヶ月に必要な年間販売額7.48億円は、現状の販売実力（5〜7億円）の上限をやや上回る。この差はWineBank自己勘定在庫の販売を後回しにすることで埋める設計であり、SPC在庫の優先売却を契約上の義務として明記する（在庫配分の公平性の頁を参照）。エクイティ利回りが20%を割り込むのは回転が30ヶ月を超えた場合。</a:t>
+              <a:t>※ 回転12ヶ月に必要な年間販売額7.48億円は、現状の販売実力（5〜7億円）の上限をやや上回る。銘柄の大半はSPCと自己勘定で重複しないため配分の判断自体が生じず、回転期間は「何を組み入れるか」でほぼ決まる。重複銘柄の取扱いは在庫配分の公平性の頁を参照。投資家利回りが20%を割り込むのは回転が30ヶ月を超えた場合。</a:t>
             </a:r>
             <a:endParaRPr lang="en-US" sz="850" dirty="0"/>
           </a:p>

--- a/docs/wine-fund/WineBank_ワインファンドSPC組成提案_5億_20260811.pptx
+++ b/docs/wine-fund/WineBank_ワインファンドSPC組成提案_5億_20260811.pptx
@@ -155,7 +155,7 @@
                 </a:solidFill>
                 <a:latin typeface="Yu Gothic"/>
               </a:rPr>
-              <a:t>定常年間利回り（％）</a:t>
+              <a:t>投資家利回り（定常年間・％）</a:t>
             </a:r>
           </a:p>
         </c:rich>
@@ -244,105 +244,16 @@
                 <c:formatCode>General</c:formatCode>
                 <c:ptCount val="4"/>
                 <c:pt idx="0">
-                  <c:v>54.2</c:v>
+                  <c:v>45.2</c:v>
                 </c:pt>
                 <c:pt idx="1">
-                  <c:v>42</c:v>
+                  <c:v>35</c:v>
                 </c:pt>
                 <c:pt idx="2">
-                  <c:v>34.7</c:v>
+                  <c:v>28.9</c:v>
                 </c:pt>
                 <c:pt idx="3">
-                  <c:v>29.8</c:v>
-                </c:pt>
-              </c:numCache>
-            </c:numRef>
-          </c:val>
-        </c:ser>
-        <c:ser>
-          <c:idx val="1"/>
-          <c:order val="1"/>
-          <c:tx>
-            <c:strRef>
-              <c:f>Sheet1!$C$1</c:f>
-              <c:strCache>
-                <c:ptCount val="1"/>
-                <c:pt idx="0">
-                  <c:v>WineBank側利回り</c:v>
-                </c:pt>
-              </c:strCache>
-            </c:strRef>
-          </c:tx>
-          <c:spPr>
-            <a:solidFill>
-              <a:srgbClr val="6E5730"/>
-            </a:solidFill>
-            <a:effectLst/>
-          </c:spPr>
-          <c:invertIfNegative val="0"/>
-          <c:dLbls>
-            <c:numFmt formatCode="0.0&quot;%&quot;" sourceLinked="0"/>
-            <c:txPr>
-              <a:bodyPr/>
-              <a:lstStyle/>
-              <a:p>
-                <a:pPr>
-                  <a:defRPr b="0" i="0" strike="noStrike" sz="950" u="none">
-                    <a:solidFill>
-                      <a:srgbClr val="EFEBE3"/>
-                    </a:solidFill>
-                    <a:latin typeface="Cambria"/>
-                  </a:defRPr>
-                </a:pPr>
-              </a:p>
-            </c:txPr>
-            <c:showLegendKey val="0"/>
-            <c:showVal val="1"/>
-            <c:showCatName val="0"/>
-            <c:showSerName val="0"/>
-            <c:showPercent val="0"/>
-            <c:showBubbleSize val="0"/>
-            <c:showLeaderLines val="0"/>
-          </c:dLbls>
-          <c:cat>
-            <c:multiLvlStrRef>
-              <c:f>Sheet1!$A$2:$A$5</c:f>
-              <c:multiLvlStrCache>
-                <c:ptCount val="4"/>
-                <c:lvl>
-                  <c:pt idx="0">
-                    <c:v>9ヶ月</c:v>
-                  </c:pt>
-                  <c:pt idx="1">
-                    <c:v>12ヶ月</c:v>
-                  </c:pt>
-                  <c:pt idx="2">
-                    <c:v>15ヶ月</c:v>
-                  </c:pt>
-                  <c:pt idx="3">
-                    <c:v>18ヶ月</c:v>
-                  </c:pt>
-                </c:lvl>
-              </c:multiLvlStrCache>
-            </c:multiLvlStrRef>
-          </c:cat>
-          <c:val>
-            <c:numRef>
-              <c:f>Sheet1!$C$2:$C$5</c:f>
-              <c:numCache>
-                <c:formatCode>General</c:formatCode>
-                <c:ptCount val="4"/>
-                <c:pt idx="0">
-                  <c:v>50.2</c:v>
-                </c:pt>
-                <c:pt idx="1">
-                  <c:v>38</c:v>
-                </c:pt>
-                <c:pt idx="2">
-                  <c:v>30.7</c:v>
-                </c:pt>
-                <c:pt idx="3">
-                  <c:v>25.8</c:v>
+                  <c:v>24.8</c:v>
                 </c:pt>
               </c:numCache>
             </c:numRef>
@@ -372,7 +283,7 @@
           <c:showBubbleSize val="0"/>
           <c:showLeaderLines val="0"/>
         </c:dLbls>
-        <c:gapWidth val="45"/>
+        <c:gapWidth val="55"/>
         <c:overlap val="0"/>
         <c:axId val="2094734554"/>
         <c:axId val="2094734552"/>
@@ -421,7 +332,7 @@
         <c:axId val="2094734552"/>
         <c:scaling>
           <c:orientation val="minMax"/>
-          <c:max val="62"/>
+          <c:max val="52"/>
           <c:min val="0"/>
         </c:scaling>
         <c:delete val="0"/>
@@ -477,26 +388,6 @@
         <a:effectLst/>
       </c:spPr>
     </c:plotArea>
-    <c:legend>
-      <c:legendPos val="b"/>
-      <c:overlay val="0"/>
-      <c:txPr>
-        <a:bodyPr/>
-        <a:lstStyle/>
-        <a:p>
-          <a:pPr>
-            <a:defRPr sz="900">
-              <a:solidFill>
-                <a:srgbClr val="9A938A"/>
-              </a:solidFill>
-              <a:latin typeface="Yu Gothic"/>
-              <a:cs typeface="Yu Gothic"/>
-            </a:defRPr>
-          </a:pPr>
-          <a:endParaRPr lang="en-US"/>
-        </a:p>
-      </c:txPr>
-    </c:legend>
     <c:plotVisOnly val="1"/>
     <c:dispBlanksAs val="span"/>
   </c:chart>
@@ -630,16 +521,16 @@
                 <c:formatCode>General</c:formatCode>
                 <c:ptCount val="4"/>
                 <c:pt idx="0">
-                  <c:v>48.7</c:v>
+                  <c:v>40.6</c:v>
                 </c:pt>
                 <c:pt idx="1">
-                  <c:v>33.5</c:v>
+                  <c:v>27.9</c:v>
                 </c:pt>
                 <c:pt idx="2">
-                  <c:v>25.8</c:v>
+                  <c:v>21.5</c:v>
                 </c:pt>
                 <c:pt idx="3">
-                  <c:v>26.7</c:v>
+                  <c:v>22.2</c:v>
                 </c:pt>
               </c:numCache>
             </c:numRef>
@@ -718,7 +609,7 @@
         <c:axId val="2094734552"/>
         <c:scaling>
           <c:orientation val="minMax"/>
-          <c:max val="56"/>
+          <c:max val="46"/>
           <c:min val="0"/>
         </c:scaling>
         <c:delete val="0"/>
@@ -907,16 +798,16 @@
                 <c:formatCode>General</c:formatCode>
                 <c:ptCount val="4"/>
                 <c:pt idx="0">
-                  <c:v>102.7</c:v>
+                  <c:v>85.6</c:v>
                 </c:pt>
                 <c:pt idx="1">
-                  <c:v>78.8</c:v>
+                  <c:v>65.6</c:v>
                 </c:pt>
                 <c:pt idx="2">
-                  <c:v>64.5</c:v>
+                  <c:v>53.7</c:v>
                 </c:pt>
                 <c:pt idx="3">
-                  <c:v>54.9</c:v>
+                  <c:v>45.8</c:v>
                 </c:pt>
               </c:numCache>
             </c:numRef>
@@ -996,16 +887,16 @@
                 <c:formatCode>General</c:formatCode>
                 <c:ptCount val="4"/>
                 <c:pt idx="0">
-                  <c:v>54.2</c:v>
+                  <c:v>45.2</c:v>
                 </c:pt>
                 <c:pt idx="1">
-                  <c:v>42</c:v>
+                  <c:v>35</c:v>
                 </c:pt>
                 <c:pt idx="2">
-                  <c:v>34.7</c:v>
+                  <c:v>28.9</c:v>
                 </c:pt>
                 <c:pt idx="3">
-                  <c:v>29.8</c:v>
+                  <c:v>24.8</c:v>
                 </c:pt>
               </c:numCache>
             </c:numRef>
@@ -1085,16 +976,16 @@
                 <c:formatCode>General</c:formatCode>
                 <c:ptCount val="4"/>
                 <c:pt idx="0">
-                  <c:v>37.6</c:v>
+                  <c:v>31.3</c:v>
                 </c:pt>
                 <c:pt idx="1">
-                  <c:v>27.5</c:v>
+                  <c:v>22.9</c:v>
                 </c:pt>
                 <c:pt idx="2">
-                  <c:v>21.4</c:v>
+                  <c:v>17.8</c:v>
                 </c:pt>
                 <c:pt idx="3">
-                  <c:v>17.4</c:v>
+                  <c:v>14.5</c:v>
                 </c:pt>
               </c:numCache>
             </c:numRef>
@@ -1173,7 +1064,7 @@
         <c:axId val="2094734552"/>
         <c:scaling>
           <c:orientation val="minMax"/>
-          <c:max val="115"/>
+          <c:max val="96"/>
           <c:min val="0"/>
         </c:scaling>
         <c:delete val="0"/>
@@ -2014,7 +1905,7 @@
           <a:p>
             <a:r>
               <a:rPr lang="en-US" dirty="0"/>
-              <a:t>値上がり効果は在庫に対するリターンなので回転期間によらず一定（約+8.0pt）。相殺ではなく底上げ。</a:t>
+              <a:t>値上がり効果は在庫に対するリターンなので回転期間によらず一定（約+6.6pt）。相殺ではなく底上げ。</a:t>
             </a:r>
             <a:endParaRPr lang="en-US" dirty="0"/>
           </a:p>
@@ -2278,7 +2169,7 @@
           <a:p>
             <a:r>
               <a:rPr lang="en-US" dirty="0"/>
-              <a:t>20%割れは年間販売3.2億円割れのみ。ネガティブ複合でも5.05億円が分岐点。</a:t>
+              <a:t>20%割れは回転23.7ヶ月超。ネガティブ複合では13.5ヶ月が分岐点で想定レンジ内。</a:t>
             </a:r>
             <a:endParaRPr lang="en-US" dirty="0"/>
           </a:p>
@@ -3598,7 +3489,7 @@
           <a:p>
             <a:r>
               <a:rPr lang="en-US" dirty="0"/>
-              <a:t>ネガティブは値引き5%＋価格横ばいの複合ケース。</a:t>
+              <a:t>粗利率30.0%と投下原価利益率47.3%は分母が違うだけ。利回りの源泉は後者。</a:t>
             </a:r>
             <a:endParaRPr lang="en-US" dirty="0"/>
           </a:p>
@@ -7255,7 +7146,7 @@
                 <a:ea typeface="Yu Gothic" pitchFamily="34" charset="-122"/>
                 <a:cs typeface="Yu Gothic" pitchFamily="34" charset="-120"/>
               </a:rPr>
-              <a:t>SPC取得原価50.5・ワイン価格上昇 年6%／総額5億円（デット2億＋出資3億）・投資家取分60%・稼働率95%</a:t>
+              <a:t>SPC取得原価50.5・ワイン価格上昇 年6%／総額5億円（デット2億＋出資3億）・損益は折半・稼働率95%</a:t>
             </a:r>
             <a:endParaRPr lang="en-US" sz="1150" dirty="0"/>
           </a:p>
@@ -7365,13 +7256,13 @@
                 <a:gridCol w="1481328"/>
                 <a:gridCol w="896112"/>
                 <a:gridCol w="896112"/>
-                <a:gridCol w="841248"/>
+                <a:gridCol w="749808"/>
+                <a:gridCol w="1170432"/>
+                <a:gridCol w="1097280"/>
+                <a:gridCol w="1207008"/>
                 <a:gridCol w="1060704"/>
-                <a:gridCol w="1225296"/>
-                <a:gridCol w="1060704"/>
-                <a:gridCol w="1417320"/>
-                <a:gridCol w="932688"/>
-                <a:gridCol w="1060704"/>
+                <a:gridCol w="1005840"/>
+                <a:gridCol w="1307592"/>
               </a:tblGrid>
               <a:tr h="365760">
                 <a:tc>
@@ -7527,7 +7418,7 @@
                           <a:ea typeface="Yu Gothic" pitchFamily="34" charset="-122"/>
                           <a:cs typeface="Yu Gothic" pitchFamily="34" charset="-120"/>
                         </a:rPr>
-                        <a:t>年間粗利</a:t>
+                        <a:t>年間粗利※</a:t>
                       </a:r>
                       <a:endParaRPr lang="en-US" sz="950" dirty="0">
                         <a:latin typeface="Yu Gothic" charset="0"/>
@@ -7595,7 +7486,75 @@
                           <a:ea typeface="Yu Gothic" pitchFamily="34" charset="-122"/>
                           <a:cs typeface="Yu Gothic" pitchFamily="34" charset="-120"/>
                         </a:rPr>
-                        <a:t>SPC費用</a:t>
+                        <a:t>粗利率</a:t>
+                      </a:r>
+                      <a:endParaRPr lang="en-US" sz="950" dirty="0">
+                        <a:latin typeface="Yu Gothic" charset="0"/>
+                        <a:ea typeface="Yu Gothic" charset="0"/>
+                        <a:cs typeface="Yu Gothic" charset="0"/>
+                      </a:endParaRPr>
+                    </a:p>
+                  </a:txBody>
+                  <a:tcPr marL="45720" marR="45720" marT="45720" marB="45720" anchor="ctr">
+                    <a:lnL w="7620" cap="flat" cmpd="sng" algn="ctr">
+                      <a:solidFill>
+                        <a:srgbClr val="2E2A24"/>
+                      </a:solidFill>
+                      <a:prstDash val="solid"/>
+                      <a:round/>
+                      <a:headEnd type="none" w="med" len="med"/>
+                      <a:tailEnd type="none" w="med" len="med"/>
+                    </a:lnL>
+                    <a:lnR w="7620" cap="flat" cmpd="sng" algn="ctr">
+                      <a:solidFill>
+                        <a:srgbClr val="2E2A24"/>
+                      </a:solidFill>
+                      <a:prstDash val="solid"/>
+                      <a:round/>
+                      <a:headEnd type="none" w="med" len="med"/>
+                      <a:tailEnd type="none" w="med" len="med"/>
+                    </a:lnR>
+                    <a:lnT w="7620" cap="flat" cmpd="sng" algn="ctr">
+                      <a:solidFill>
+                        <a:srgbClr val="2E2A24"/>
+                      </a:solidFill>
+                      <a:prstDash val="solid"/>
+                      <a:round/>
+                      <a:headEnd type="none" w="med" len="med"/>
+                      <a:tailEnd type="none" w="med" len="med"/>
+                    </a:lnT>
+                    <a:lnB w="7620" cap="flat" cmpd="sng" algn="ctr">
+                      <a:solidFill>
+                        <a:srgbClr val="2E2A24"/>
+                      </a:solidFill>
+                      <a:prstDash val="solid"/>
+                      <a:round/>
+                      <a:headEnd type="none" w="med" len="med"/>
+                      <a:tailEnd type="none" w="med" len="med"/>
+                    </a:lnB>
+                    <a:solidFill>
+                      <a:srgbClr val="231F1A"/>
+                    </a:solidFill>
+                  </a:tcPr>
+                </a:tc>
+                <a:tc>
+                  <a:txBody>
+                    <a:bodyPr/>
+                    <a:lstStyle/>
+                    <a:p>
+                      <a:pPr algn="ctr" indent="0" marL="0">
+                        <a:buNone/>
+                      </a:pPr>
+                      <a:r>
+                        <a:rPr lang="en-US" sz="950" b="1" dirty="0">
+                          <a:solidFill>
+                            <a:srgbClr val="C9A96E"/>
+                          </a:solidFill>
+                          <a:latin typeface="Yu Gothic" pitchFamily="34" charset="0"/>
+                          <a:ea typeface="Yu Gothic" pitchFamily="34" charset="-122"/>
+                          <a:cs typeface="Yu Gothic" pitchFamily="34" charset="-120"/>
+                        </a:rPr>
+                        <a:t>その他SPC費用</a:t>
                       </a:r>
                       <a:endParaRPr lang="en-US" sz="950" dirty="0">
                         <a:latin typeface="Yu Gothic" charset="0"/>
@@ -7731,7 +7690,7 @@
                           <a:ea typeface="Yu Gothic" pitchFamily="34" charset="-122"/>
                           <a:cs typeface="Yu Gothic" pitchFamily="34" charset="-120"/>
                         </a:rPr>
-                        <a:t>投資家取分（60%）</a:t>
+                        <a:t>投資家取分（50%）</a:t>
                       </a:r>
                       <a:endParaRPr lang="en-US" sz="950" dirty="0">
                         <a:latin typeface="Yu Gothic" charset="0"/>
@@ -7800,74 +7759,6 @@
                           <a:cs typeface="Yu Gothic" pitchFamily="34" charset="-120"/>
                         </a:rPr>
                         <a:t>投資家利回り</a:t>
-                      </a:r>
-                      <a:endParaRPr lang="en-US" sz="950" dirty="0">
-                        <a:latin typeface="Yu Gothic" charset="0"/>
-                        <a:ea typeface="Yu Gothic" charset="0"/>
-                        <a:cs typeface="Yu Gothic" charset="0"/>
-                      </a:endParaRPr>
-                    </a:p>
-                  </a:txBody>
-                  <a:tcPr marL="45720" marR="45720" marT="45720" marB="45720" anchor="ctr">
-                    <a:lnL w="7620" cap="flat" cmpd="sng" algn="ctr">
-                      <a:solidFill>
-                        <a:srgbClr val="2E2A24"/>
-                      </a:solidFill>
-                      <a:prstDash val="solid"/>
-                      <a:round/>
-                      <a:headEnd type="none" w="med" len="med"/>
-                      <a:tailEnd type="none" w="med" len="med"/>
-                    </a:lnL>
-                    <a:lnR w="7620" cap="flat" cmpd="sng" algn="ctr">
-                      <a:solidFill>
-                        <a:srgbClr val="2E2A24"/>
-                      </a:solidFill>
-                      <a:prstDash val="solid"/>
-                      <a:round/>
-                      <a:headEnd type="none" w="med" len="med"/>
-                      <a:tailEnd type="none" w="med" len="med"/>
-                    </a:lnR>
-                    <a:lnT w="7620" cap="flat" cmpd="sng" algn="ctr">
-                      <a:solidFill>
-                        <a:srgbClr val="2E2A24"/>
-                      </a:solidFill>
-                      <a:prstDash val="solid"/>
-                      <a:round/>
-                      <a:headEnd type="none" w="med" len="med"/>
-                      <a:tailEnd type="none" w="med" len="med"/>
-                    </a:lnT>
-                    <a:lnB w="7620" cap="flat" cmpd="sng" algn="ctr">
-                      <a:solidFill>
-                        <a:srgbClr val="2E2A24"/>
-                      </a:solidFill>
-                      <a:prstDash val="solid"/>
-                      <a:round/>
-                      <a:headEnd type="none" w="med" len="med"/>
-                      <a:tailEnd type="none" w="med" len="med"/>
-                    </a:lnB>
-                    <a:solidFill>
-                      <a:srgbClr val="231F1A"/>
-                    </a:solidFill>
-                  </a:tcPr>
-                </a:tc>
-                <a:tc>
-                  <a:txBody>
-                    <a:bodyPr/>
-                    <a:lstStyle/>
-                    <a:p>
-                      <a:pPr algn="ctr" indent="0" marL="0">
-                        <a:buNone/>
-                      </a:pPr>
-                      <a:r>
-                        <a:rPr lang="en-US" sz="950" b="1" dirty="0">
-                          <a:solidFill>
-                            <a:srgbClr val="C9A96E"/>
-                          </a:solidFill>
-                          <a:latin typeface="Yu Gothic" pitchFamily="34" charset="0"/>
-                          <a:ea typeface="Yu Gothic" pitchFamily="34" charset="-122"/>
-                          <a:cs typeface="Yu Gothic" pitchFamily="34" charset="-120"/>
-                        </a:rPr>
-                        <a:t>WineBank側利回り</a:t>
                       </a:r>
                       <a:endParaRPr lang="en-US" sz="950" dirty="0">
                         <a:latin typeface="Yu Gothic" charset="0"/>
@@ -8209,7 +8100,7 @@
                           <a:ea typeface="Yu Gothic" pitchFamily="34" charset="-122"/>
                           <a:cs typeface="Yu Gothic" pitchFamily="34" charset="-120"/>
                         </a:rPr>
-                        <a:t>3.49億</a:t>
+                        <a:t>2.86億</a:t>
                       </a:r>
                       <a:endParaRPr lang="en-US" sz="1000" dirty="0">
                         <a:latin typeface="Yu Gothic" charset="0"/>
@@ -8277,7 +8168,75 @@
                           <a:ea typeface="Yu Gothic" pitchFamily="34" charset="-122"/>
                           <a:cs typeface="Yu Gothic" pitchFamily="34" charset="-120"/>
                         </a:rPr>
-                        <a:t>78百万</a:t>
+                        <a:t>29.1%</a:t>
+                      </a:r>
+                      <a:endParaRPr lang="en-US" sz="1000" dirty="0">
+                        <a:latin typeface="Yu Gothic" charset="0"/>
+                        <a:ea typeface="Yu Gothic" charset="0"/>
+                        <a:cs typeface="Yu Gothic" charset="0"/>
+                      </a:endParaRPr>
+                    </a:p>
+                  </a:txBody>
+                  <a:tcPr marL="45720" marR="45720" marT="45720" marB="45720" anchor="ctr">
+                    <a:lnL w="7620" cap="flat" cmpd="sng" algn="ctr">
+                      <a:solidFill>
+                        <a:srgbClr val="2E2A24"/>
+                      </a:solidFill>
+                      <a:prstDash val="solid"/>
+                      <a:round/>
+                      <a:headEnd type="none" w="med" len="med"/>
+                      <a:tailEnd type="none" w="med" len="med"/>
+                    </a:lnL>
+                    <a:lnR w="7620" cap="flat" cmpd="sng" algn="ctr">
+                      <a:solidFill>
+                        <a:srgbClr val="2E2A24"/>
+                      </a:solidFill>
+                      <a:prstDash val="solid"/>
+                      <a:round/>
+                      <a:headEnd type="none" w="med" len="med"/>
+                      <a:tailEnd type="none" w="med" len="med"/>
+                    </a:lnR>
+                    <a:lnT w="7620" cap="flat" cmpd="sng" algn="ctr">
+                      <a:solidFill>
+                        <a:srgbClr val="2E2A24"/>
+                      </a:solidFill>
+                      <a:prstDash val="solid"/>
+                      <a:round/>
+                      <a:headEnd type="none" w="med" len="med"/>
+                      <a:tailEnd type="none" w="med" len="med"/>
+                    </a:lnT>
+                    <a:lnB w="7620" cap="flat" cmpd="sng" algn="ctr">
+                      <a:solidFill>
+                        <a:srgbClr val="2E2A24"/>
+                      </a:solidFill>
+                      <a:prstDash val="solid"/>
+                      <a:round/>
+                      <a:headEnd type="none" w="med" len="med"/>
+                      <a:tailEnd type="none" w="med" len="med"/>
+                    </a:lnB>
+                    <a:solidFill>
+                      <a:srgbClr val="171614"/>
+                    </a:solidFill>
+                  </a:tcPr>
+                </a:tc>
+                <a:tc>
+                  <a:txBody>
+                    <a:bodyPr/>
+                    <a:lstStyle/>
+                    <a:p>
+                      <a:pPr algn="ctr" indent="0" marL="0">
+                        <a:buNone/>
+                      </a:pPr>
+                      <a:r>
+                        <a:rPr lang="en-US" sz="1000" dirty="0">
+                          <a:solidFill>
+                            <a:srgbClr val="EFEBE3"/>
+                          </a:solidFill>
+                          <a:latin typeface="Yu Gothic" pitchFamily="34" charset="0"/>
+                          <a:ea typeface="Yu Gothic" pitchFamily="34" charset="-122"/>
+                          <a:cs typeface="Yu Gothic" pitchFamily="34" charset="-120"/>
+                        </a:rPr>
+                        <a:t>15百万</a:t>
                       </a:r>
                       <a:endParaRPr lang="en-US" sz="1000" dirty="0">
                         <a:latin typeface="Yu Gothic" charset="0"/>
@@ -8413,7 +8372,7 @@
                           <a:ea typeface="Yu Gothic" pitchFamily="34" charset="-122"/>
                           <a:cs typeface="Yu Gothic" pitchFamily="34" charset="-120"/>
                         </a:rPr>
-                        <a:t>163百万</a:t>
+                        <a:t>136百万</a:t>
                       </a:r>
                       <a:endParaRPr lang="en-US" sz="1000" dirty="0">
                         <a:latin typeface="Yu Gothic" charset="0"/>
@@ -8481,7 +8440,7 @@
                           <a:ea typeface="Yu Gothic" pitchFamily="34" charset="-122"/>
                           <a:cs typeface="Yu Gothic" pitchFamily="34" charset="-120"/>
                         </a:rPr>
-                        <a:t>54.2%</a:t>
+                        <a:t>45.2%</a:t>
                       </a:r>
                       <a:endParaRPr lang="en-US" sz="1000" dirty="0">
                         <a:latin typeface="Yu Gothic" charset="0"/>
@@ -8549,75 +8508,7 @@
                           <a:ea typeface="Yu Gothic" pitchFamily="34" charset="-122"/>
                           <a:cs typeface="Yu Gothic" pitchFamily="34" charset="-120"/>
                         </a:rPr>
-                        <a:t>50.2%</a:t>
-                      </a:r>
-                      <a:endParaRPr lang="en-US" sz="1000" dirty="0">
-                        <a:latin typeface="Yu Gothic" charset="0"/>
-                        <a:ea typeface="Yu Gothic" charset="0"/>
-                        <a:cs typeface="Yu Gothic" charset="0"/>
-                      </a:endParaRPr>
-                    </a:p>
-                  </a:txBody>
-                  <a:tcPr marL="45720" marR="45720" marT="45720" marB="45720" anchor="ctr">
-                    <a:lnL w="7620" cap="flat" cmpd="sng" algn="ctr">
-                      <a:solidFill>
-                        <a:srgbClr val="2E2A24"/>
-                      </a:solidFill>
-                      <a:prstDash val="solid"/>
-                      <a:round/>
-                      <a:headEnd type="none" w="med" len="med"/>
-                      <a:tailEnd type="none" w="med" len="med"/>
-                    </a:lnL>
-                    <a:lnR w="7620" cap="flat" cmpd="sng" algn="ctr">
-                      <a:solidFill>
-                        <a:srgbClr val="2E2A24"/>
-                      </a:solidFill>
-                      <a:prstDash val="solid"/>
-                      <a:round/>
-                      <a:headEnd type="none" w="med" len="med"/>
-                      <a:tailEnd type="none" w="med" len="med"/>
-                    </a:lnR>
-                    <a:lnT w="7620" cap="flat" cmpd="sng" algn="ctr">
-                      <a:solidFill>
-                        <a:srgbClr val="2E2A24"/>
-                      </a:solidFill>
-                      <a:prstDash val="solid"/>
-                      <a:round/>
-                      <a:headEnd type="none" w="med" len="med"/>
-                      <a:tailEnd type="none" w="med" len="med"/>
-                    </a:lnT>
-                    <a:lnB w="7620" cap="flat" cmpd="sng" algn="ctr">
-                      <a:solidFill>
-                        <a:srgbClr val="2E2A24"/>
-                      </a:solidFill>
-                      <a:prstDash val="solid"/>
-                      <a:round/>
-                      <a:headEnd type="none" w="med" len="med"/>
-                      <a:tailEnd type="none" w="med" len="med"/>
-                    </a:lnB>
-                    <a:solidFill>
-                      <a:srgbClr val="171614"/>
-                    </a:solidFill>
-                  </a:tcPr>
-                </a:tc>
-                <a:tc>
-                  <a:txBody>
-                    <a:bodyPr/>
-                    <a:lstStyle/>
-                    <a:p>
-                      <a:pPr algn="ctr" indent="0" marL="0">
-                        <a:buNone/>
-                      </a:pPr>
-                      <a:r>
-                        <a:rPr lang="en-US" sz="1000" dirty="0">
-                          <a:solidFill>
-                            <a:srgbClr val="EFEBE3"/>
-                          </a:solidFill>
-                          <a:latin typeface="Yu Gothic" pitchFamily="34" charset="0"/>
-                          <a:ea typeface="Yu Gothic" pitchFamily="34" charset="-122"/>
-                          <a:cs typeface="Yu Gothic" pitchFamily="34" charset="-120"/>
-                        </a:rPr>
-                        <a:t>730百万</a:t>
+                        <a:t>609百万</a:t>
                       </a:r>
                       <a:endParaRPr lang="en-US" sz="1000" dirty="0">
                         <a:latin typeface="Yu Gothic" charset="0"/>
@@ -8685,7 +8576,7 @@
                           <a:ea typeface="Yu Gothic" pitchFamily="34" charset="-122"/>
                           <a:cs typeface="Yu Gothic" pitchFamily="34" charset="-120"/>
                         </a:rPr>
-                        <a:t>48.7%</a:t>
+                        <a:t>40.6%</a:t>
                       </a:r>
                       <a:endParaRPr lang="en-US" sz="1000" dirty="0">
                         <a:latin typeface="Yu Gothic" charset="0"/>
@@ -8891,7 +8782,7 @@
                           <a:ea typeface="Yu Gothic" pitchFamily="34" charset="-122"/>
                           <a:cs typeface="Yu Gothic" pitchFamily="34" charset="-120"/>
                         </a:rPr>
-                        <a:t>2.73億</a:t>
+                        <a:t>2.25億</a:t>
                       </a:r>
                       <a:endParaRPr lang="en-US" sz="1000" dirty="0">
                         <a:latin typeface="Yu Gothic" charset="0"/>
@@ -8959,7 +8850,75 @@
                           <a:ea typeface="Yu Gothic" pitchFamily="34" charset="-122"/>
                           <a:cs typeface="Yu Gothic" pitchFamily="34" charset="-120"/>
                         </a:rPr>
-                        <a:t>63百万</a:t>
+                        <a:t>30.0%</a:t>
+                      </a:r>
+                      <a:endParaRPr lang="en-US" sz="1000" dirty="0">
+                        <a:latin typeface="Yu Gothic" charset="0"/>
+                        <a:ea typeface="Yu Gothic" charset="0"/>
+                        <a:cs typeface="Yu Gothic" charset="0"/>
+                      </a:endParaRPr>
+                    </a:p>
+                  </a:txBody>
+                  <a:tcPr marL="45720" marR="45720" marT="45720" marB="45720" anchor="ctr">
+                    <a:lnL w="7620" cap="flat" cmpd="sng" algn="ctr">
+                      <a:solidFill>
+                        <a:srgbClr val="2E2A24"/>
+                      </a:solidFill>
+                      <a:prstDash val="solid"/>
+                      <a:round/>
+                      <a:headEnd type="none" w="med" len="med"/>
+                      <a:tailEnd type="none" w="med" len="med"/>
+                    </a:lnL>
+                    <a:lnR w="7620" cap="flat" cmpd="sng" algn="ctr">
+                      <a:solidFill>
+                        <a:srgbClr val="2E2A24"/>
+                      </a:solidFill>
+                      <a:prstDash val="solid"/>
+                      <a:round/>
+                      <a:headEnd type="none" w="med" len="med"/>
+                      <a:tailEnd type="none" w="med" len="med"/>
+                    </a:lnR>
+                    <a:lnT w="7620" cap="flat" cmpd="sng" algn="ctr">
+                      <a:solidFill>
+                        <a:srgbClr val="2E2A24"/>
+                      </a:solidFill>
+                      <a:prstDash val="solid"/>
+                      <a:round/>
+                      <a:headEnd type="none" w="med" len="med"/>
+                      <a:tailEnd type="none" w="med" len="med"/>
+                    </a:lnT>
+                    <a:lnB w="7620" cap="flat" cmpd="sng" algn="ctr">
+                      <a:solidFill>
+                        <a:srgbClr val="2E2A24"/>
+                      </a:solidFill>
+                      <a:prstDash val="solid"/>
+                      <a:round/>
+                      <a:headEnd type="none" w="med" len="med"/>
+                      <a:tailEnd type="none" w="med" len="med"/>
+                    </a:lnB>
+                    <a:solidFill>
+                      <a:srgbClr val="171614"/>
+                    </a:solidFill>
+                  </a:tcPr>
+                </a:tc>
+                <a:tc>
+                  <a:txBody>
+                    <a:bodyPr/>
+                    <a:lstStyle/>
+                    <a:p>
+                      <a:pPr algn="ctr" indent="0" marL="0">
+                        <a:buNone/>
+                      </a:pPr>
+                      <a:r>
+                        <a:rPr lang="en-US" sz="1000" dirty="0">
+                          <a:solidFill>
+                            <a:srgbClr val="EFEBE3"/>
+                          </a:solidFill>
+                          <a:latin typeface="Yu Gothic" pitchFamily="34" charset="0"/>
+                          <a:ea typeface="Yu Gothic" pitchFamily="34" charset="-122"/>
+                          <a:cs typeface="Yu Gothic" pitchFamily="34" charset="-120"/>
+                        </a:rPr>
+                        <a:t>15百万</a:t>
                       </a:r>
                       <a:endParaRPr lang="en-US" sz="1000" dirty="0">
                         <a:latin typeface="Yu Gothic" charset="0"/>
@@ -9095,7 +9054,7 @@
                           <a:ea typeface="Yu Gothic" pitchFamily="34" charset="-122"/>
                           <a:cs typeface="Yu Gothic" pitchFamily="34" charset="-120"/>
                         </a:rPr>
-                        <a:t>126百万</a:t>
+                        <a:t>105百万</a:t>
                       </a:r>
                       <a:endParaRPr lang="en-US" sz="1000" dirty="0">
                         <a:latin typeface="Yu Gothic" charset="0"/>
@@ -9163,7 +9122,7 @@
                           <a:ea typeface="Yu Gothic" pitchFamily="34" charset="-122"/>
                           <a:cs typeface="Yu Gothic" pitchFamily="34" charset="-120"/>
                         </a:rPr>
-                        <a:t>42.0%</a:t>
+                        <a:t>35.0%</a:t>
                       </a:r>
                       <a:endParaRPr lang="en-US" sz="1000" dirty="0">
                         <a:latin typeface="Yu Gothic" charset="0"/>
@@ -9231,75 +9190,7 @@
                           <a:ea typeface="Yu Gothic" pitchFamily="34" charset="-122"/>
                           <a:cs typeface="Yu Gothic" pitchFamily="34" charset="-120"/>
                         </a:rPr>
-                        <a:t>38.0%</a:t>
-                      </a:r>
-                      <a:endParaRPr lang="en-US" sz="1000" dirty="0">
-                        <a:latin typeface="Yu Gothic" charset="0"/>
-                        <a:ea typeface="Yu Gothic" charset="0"/>
-                        <a:cs typeface="Yu Gothic" charset="0"/>
-                      </a:endParaRPr>
-                    </a:p>
-                  </a:txBody>
-                  <a:tcPr marL="45720" marR="45720" marT="45720" marB="45720" anchor="ctr">
-                    <a:lnL w="7620" cap="flat" cmpd="sng" algn="ctr">
-                      <a:solidFill>
-                        <a:srgbClr val="2E2A24"/>
-                      </a:solidFill>
-                      <a:prstDash val="solid"/>
-                      <a:round/>
-                      <a:headEnd type="none" w="med" len="med"/>
-                      <a:tailEnd type="none" w="med" len="med"/>
-                    </a:lnL>
-                    <a:lnR w="7620" cap="flat" cmpd="sng" algn="ctr">
-                      <a:solidFill>
-                        <a:srgbClr val="2E2A24"/>
-                      </a:solidFill>
-                      <a:prstDash val="solid"/>
-                      <a:round/>
-                      <a:headEnd type="none" w="med" len="med"/>
-                      <a:tailEnd type="none" w="med" len="med"/>
-                    </a:lnR>
-                    <a:lnT w="7620" cap="flat" cmpd="sng" algn="ctr">
-                      <a:solidFill>
-                        <a:srgbClr val="2E2A24"/>
-                      </a:solidFill>
-                      <a:prstDash val="solid"/>
-                      <a:round/>
-                      <a:headEnd type="none" w="med" len="med"/>
-                      <a:tailEnd type="none" w="med" len="med"/>
-                    </a:lnT>
-                    <a:lnB w="7620" cap="flat" cmpd="sng" algn="ctr">
-                      <a:solidFill>
-                        <a:srgbClr val="2E2A24"/>
-                      </a:solidFill>
-                      <a:prstDash val="solid"/>
-                      <a:round/>
-                      <a:headEnd type="none" w="med" len="med"/>
-                      <a:tailEnd type="none" w="med" len="med"/>
-                    </a:lnB>
-                    <a:solidFill>
-                      <a:srgbClr val="171614"/>
-                    </a:solidFill>
-                  </a:tcPr>
-                </a:tc>
-                <a:tc>
-                  <a:txBody>
-                    <a:bodyPr/>
-                    <a:lstStyle/>
-                    <a:p>
-                      <a:pPr algn="ctr" indent="0" marL="0">
-                        <a:buNone/>
-                      </a:pPr>
-                      <a:r>
-                        <a:rPr lang="en-US" sz="1000" dirty="0">
-                          <a:solidFill>
-                            <a:srgbClr val="EFEBE3"/>
-                          </a:solidFill>
-                          <a:latin typeface="Yu Gothic" pitchFamily="34" charset="0"/>
-                          <a:ea typeface="Yu Gothic" pitchFamily="34" charset="-122"/>
-                          <a:cs typeface="Yu Gothic" pitchFamily="34" charset="-120"/>
-                        </a:rPr>
-                        <a:t>502百万</a:t>
+                        <a:t>418百万</a:t>
                       </a:r>
                       <a:endParaRPr lang="en-US" sz="1000" dirty="0">
                         <a:latin typeface="Yu Gothic" charset="0"/>
@@ -9367,7 +9258,7 @@
                           <a:ea typeface="Yu Gothic" pitchFamily="34" charset="-122"/>
                           <a:cs typeface="Yu Gothic" pitchFamily="34" charset="-120"/>
                         </a:rPr>
-                        <a:t>33.5%</a:t>
+                        <a:t>27.9%</a:t>
                       </a:r>
                       <a:endParaRPr lang="en-US" sz="1000" dirty="0">
                         <a:latin typeface="Yu Gothic" charset="0"/>
@@ -9573,7 +9464,7 @@
                           <a:ea typeface="Yu Gothic" pitchFamily="34" charset="-122"/>
                           <a:cs typeface="Yu Gothic" pitchFamily="34" charset="-120"/>
                         </a:rPr>
-                        <a:t>2.27億</a:t>
+                        <a:t>1.88億</a:t>
                       </a:r>
                       <a:endParaRPr lang="en-US" sz="1000" dirty="0">
                         <a:latin typeface="Yu Gothic" charset="0"/>
@@ -9641,7 +9532,75 @@
                           <a:ea typeface="Yu Gothic" pitchFamily="34" charset="-122"/>
                           <a:cs typeface="Yu Gothic" pitchFamily="34" charset="-120"/>
                         </a:rPr>
-                        <a:t>54百万</a:t>
+                        <a:t>31.0%</a:t>
+                      </a:r>
+                      <a:endParaRPr lang="en-US" sz="1000" dirty="0">
+                        <a:latin typeface="Yu Gothic" charset="0"/>
+                        <a:ea typeface="Yu Gothic" charset="0"/>
+                        <a:cs typeface="Yu Gothic" charset="0"/>
+                      </a:endParaRPr>
+                    </a:p>
+                  </a:txBody>
+                  <a:tcPr marL="45720" marR="45720" marT="45720" marB="45720" anchor="ctr">
+                    <a:lnL w="7620" cap="flat" cmpd="sng" algn="ctr">
+                      <a:solidFill>
+                        <a:srgbClr val="2E2A24"/>
+                      </a:solidFill>
+                      <a:prstDash val="solid"/>
+                      <a:round/>
+                      <a:headEnd type="none" w="med" len="med"/>
+                      <a:tailEnd type="none" w="med" len="med"/>
+                    </a:lnL>
+                    <a:lnR w="7620" cap="flat" cmpd="sng" algn="ctr">
+                      <a:solidFill>
+                        <a:srgbClr val="2E2A24"/>
+                      </a:solidFill>
+                      <a:prstDash val="solid"/>
+                      <a:round/>
+                      <a:headEnd type="none" w="med" len="med"/>
+                      <a:tailEnd type="none" w="med" len="med"/>
+                    </a:lnR>
+                    <a:lnT w="7620" cap="flat" cmpd="sng" algn="ctr">
+                      <a:solidFill>
+                        <a:srgbClr val="2E2A24"/>
+                      </a:solidFill>
+                      <a:prstDash val="solid"/>
+                      <a:round/>
+                      <a:headEnd type="none" w="med" len="med"/>
+                      <a:tailEnd type="none" w="med" len="med"/>
+                    </a:lnT>
+                    <a:lnB w="7620" cap="flat" cmpd="sng" algn="ctr">
+                      <a:solidFill>
+                        <a:srgbClr val="2E2A24"/>
+                      </a:solidFill>
+                      <a:prstDash val="solid"/>
+                      <a:round/>
+                      <a:headEnd type="none" w="med" len="med"/>
+                      <a:tailEnd type="none" w="med" len="med"/>
+                    </a:lnB>
+                    <a:solidFill>
+                      <a:srgbClr val="171614"/>
+                    </a:solidFill>
+                  </a:tcPr>
+                </a:tc>
+                <a:tc>
+                  <a:txBody>
+                    <a:bodyPr/>
+                    <a:lstStyle/>
+                    <a:p>
+                      <a:pPr algn="ctr" indent="0" marL="0">
+                        <a:buNone/>
+                      </a:pPr>
+                      <a:r>
+                        <a:rPr lang="en-US" sz="1000" dirty="0">
+                          <a:solidFill>
+                            <a:srgbClr val="EFEBE3"/>
+                          </a:solidFill>
+                          <a:latin typeface="Yu Gothic" pitchFamily="34" charset="0"/>
+                          <a:ea typeface="Yu Gothic" pitchFamily="34" charset="-122"/>
+                          <a:cs typeface="Yu Gothic" pitchFamily="34" charset="-120"/>
+                        </a:rPr>
+                        <a:t>15百万</a:t>
                       </a:r>
                       <a:endParaRPr lang="en-US" sz="1000" dirty="0">
                         <a:latin typeface="Yu Gothic" charset="0"/>
@@ -9777,7 +9736,7 @@
                           <a:ea typeface="Yu Gothic" pitchFamily="34" charset="-122"/>
                           <a:cs typeface="Yu Gothic" pitchFamily="34" charset="-120"/>
                         </a:rPr>
-                        <a:t>104百万</a:t>
+                        <a:t>87百万</a:t>
                       </a:r>
                       <a:endParaRPr lang="en-US" sz="1000" dirty="0">
                         <a:latin typeface="Yu Gothic" charset="0"/>
@@ -9845,7 +9804,7 @@
                           <a:ea typeface="Yu Gothic" pitchFamily="34" charset="-122"/>
                           <a:cs typeface="Yu Gothic" pitchFamily="34" charset="-120"/>
                         </a:rPr>
-                        <a:t>34.7%</a:t>
+                        <a:t>28.9%</a:t>
                       </a:r>
                       <a:endParaRPr lang="en-US" sz="1000" dirty="0">
                         <a:latin typeface="Yu Gothic" charset="0"/>
@@ -9913,75 +9872,7 @@
                           <a:ea typeface="Yu Gothic" pitchFamily="34" charset="-122"/>
                           <a:cs typeface="Yu Gothic" pitchFamily="34" charset="-120"/>
                         </a:rPr>
-                        <a:t>30.7%</a:t>
-                      </a:r>
-                      <a:endParaRPr lang="en-US" sz="1000" dirty="0">
-                        <a:latin typeface="Yu Gothic" charset="0"/>
-                        <a:ea typeface="Yu Gothic" charset="0"/>
-                        <a:cs typeface="Yu Gothic" charset="0"/>
-                      </a:endParaRPr>
-                    </a:p>
-                  </a:txBody>
-                  <a:tcPr marL="45720" marR="45720" marT="45720" marB="45720" anchor="ctr">
-                    <a:lnL w="7620" cap="flat" cmpd="sng" algn="ctr">
-                      <a:solidFill>
-                        <a:srgbClr val="2E2A24"/>
-                      </a:solidFill>
-                      <a:prstDash val="solid"/>
-                      <a:round/>
-                      <a:headEnd type="none" w="med" len="med"/>
-                      <a:tailEnd type="none" w="med" len="med"/>
-                    </a:lnL>
-                    <a:lnR w="7620" cap="flat" cmpd="sng" algn="ctr">
-                      <a:solidFill>
-                        <a:srgbClr val="2E2A24"/>
-                      </a:solidFill>
-                      <a:prstDash val="solid"/>
-                      <a:round/>
-                      <a:headEnd type="none" w="med" len="med"/>
-                      <a:tailEnd type="none" w="med" len="med"/>
-                    </a:lnR>
-                    <a:lnT w="7620" cap="flat" cmpd="sng" algn="ctr">
-                      <a:solidFill>
-                        <a:srgbClr val="2E2A24"/>
-                      </a:solidFill>
-                      <a:prstDash val="solid"/>
-                      <a:round/>
-                      <a:headEnd type="none" w="med" len="med"/>
-                      <a:tailEnd type="none" w="med" len="med"/>
-                    </a:lnT>
-                    <a:lnB w="7620" cap="flat" cmpd="sng" algn="ctr">
-                      <a:solidFill>
-                        <a:srgbClr val="2E2A24"/>
-                      </a:solidFill>
-                      <a:prstDash val="solid"/>
-                      <a:round/>
-                      <a:headEnd type="none" w="med" len="med"/>
-                      <a:tailEnd type="none" w="med" len="med"/>
-                    </a:lnB>
-                    <a:solidFill>
-                      <a:srgbClr val="171614"/>
-                    </a:solidFill>
-                  </a:tcPr>
-                </a:tc>
-                <a:tc>
-                  <a:txBody>
-                    <a:bodyPr/>
-                    <a:lstStyle/>
-                    <a:p>
-                      <a:pPr algn="ctr" indent="0" marL="0">
-                        <a:buNone/>
-                      </a:pPr>
-                      <a:r>
-                        <a:rPr lang="en-US" sz="1000" dirty="0">
-                          <a:solidFill>
-                            <a:srgbClr val="EFEBE3"/>
-                          </a:solidFill>
-                          <a:latin typeface="Yu Gothic" pitchFamily="34" charset="0"/>
-                          <a:ea typeface="Yu Gothic" pitchFamily="34" charset="-122"/>
-                          <a:cs typeface="Yu Gothic" pitchFamily="34" charset="-120"/>
-                        </a:rPr>
-                        <a:t>387百万</a:t>
+                        <a:t>323百万</a:t>
                       </a:r>
                       <a:endParaRPr lang="en-US" sz="1000" dirty="0">
                         <a:latin typeface="Yu Gothic" charset="0"/>
@@ -10049,7 +9940,7 @@
                           <a:ea typeface="Yu Gothic" pitchFamily="34" charset="-122"/>
                           <a:cs typeface="Yu Gothic" pitchFamily="34" charset="-120"/>
                         </a:rPr>
-                        <a:t>25.8%</a:t>
+                        <a:t>21.5%</a:t>
                       </a:r>
                       <a:endParaRPr lang="en-US" sz="1000" dirty="0">
                         <a:latin typeface="Yu Gothic" charset="0"/>
@@ -10255,7 +10146,7 @@
                           <a:ea typeface="Yu Gothic" pitchFamily="34" charset="-122"/>
                           <a:cs typeface="Yu Gothic" pitchFamily="34" charset="-120"/>
                         </a:rPr>
-                        <a:t>1.97億</a:t>
+                        <a:t>1.64億</a:t>
                       </a:r>
                       <a:endParaRPr lang="en-US" sz="1000" dirty="0">
                         <a:latin typeface="Yu Gothic" charset="0"/>
@@ -10323,7 +10214,75 @@
                           <a:ea typeface="Yu Gothic" pitchFamily="34" charset="-122"/>
                           <a:cs typeface="Yu Gothic" pitchFamily="34" charset="-120"/>
                         </a:rPr>
-                        <a:t>48百万</a:t>
+                        <a:t>31.9%</a:t>
+                      </a:r>
+                      <a:endParaRPr lang="en-US" sz="1000" dirty="0">
+                        <a:latin typeface="Yu Gothic" charset="0"/>
+                        <a:ea typeface="Yu Gothic" charset="0"/>
+                        <a:cs typeface="Yu Gothic" charset="0"/>
+                      </a:endParaRPr>
+                    </a:p>
+                  </a:txBody>
+                  <a:tcPr marL="45720" marR="45720" marT="45720" marB="45720" anchor="ctr">
+                    <a:lnL w="7620" cap="flat" cmpd="sng" algn="ctr">
+                      <a:solidFill>
+                        <a:srgbClr val="2E2A24"/>
+                      </a:solidFill>
+                      <a:prstDash val="solid"/>
+                      <a:round/>
+                      <a:headEnd type="none" w="med" len="med"/>
+                      <a:tailEnd type="none" w="med" len="med"/>
+                    </a:lnL>
+                    <a:lnR w="7620" cap="flat" cmpd="sng" algn="ctr">
+                      <a:solidFill>
+                        <a:srgbClr val="2E2A24"/>
+                      </a:solidFill>
+                      <a:prstDash val="solid"/>
+                      <a:round/>
+                      <a:headEnd type="none" w="med" len="med"/>
+                      <a:tailEnd type="none" w="med" len="med"/>
+                    </a:lnR>
+                    <a:lnT w="7620" cap="flat" cmpd="sng" algn="ctr">
+                      <a:solidFill>
+                        <a:srgbClr val="2E2A24"/>
+                      </a:solidFill>
+                      <a:prstDash val="solid"/>
+                      <a:round/>
+                      <a:headEnd type="none" w="med" len="med"/>
+                      <a:tailEnd type="none" w="med" len="med"/>
+                    </a:lnT>
+                    <a:lnB w="7620" cap="flat" cmpd="sng" algn="ctr">
+                      <a:solidFill>
+                        <a:srgbClr val="2E2A24"/>
+                      </a:solidFill>
+                      <a:prstDash val="solid"/>
+                      <a:round/>
+                      <a:headEnd type="none" w="med" len="med"/>
+                      <a:tailEnd type="none" w="med" len="med"/>
+                    </a:lnB>
+                    <a:solidFill>
+                      <a:srgbClr val="171614"/>
+                    </a:solidFill>
+                  </a:tcPr>
+                </a:tc>
+                <a:tc>
+                  <a:txBody>
+                    <a:bodyPr/>
+                    <a:lstStyle/>
+                    <a:p>
+                      <a:pPr algn="ctr" indent="0" marL="0">
+                        <a:buNone/>
+                      </a:pPr>
+                      <a:r>
+                        <a:rPr lang="en-US" sz="1000" dirty="0">
+                          <a:solidFill>
+                            <a:srgbClr val="EFEBE3"/>
+                          </a:solidFill>
+                          <a:latin typeface="Yu Gothic" pitchFamily="34" charset="0"/>
+                          <a:ea typeface="Yu Gothic" pitchFamily="34" charset="-122"/>
+                          <a:cs typeface="Yu Gothic" pitchFamily="34" charset="-120"/>
+                        </a:rPr>
+                        <a:t>15百万</a:t>
                       </a:r>
                       <a:endParaRPr lang="en-US" sz="1000" dirty="0">
                         <a:latin typeface="Yu Gothic" charset="0"/>
@@ -10459,7 +10418,7 @@
                           <a:ea typeface="Yu Gothic" pitchFamily="34" charset="-122"/>
                           <a:cs typeface="Yu Gothic" pitchFamily="34" charset="-120"/>
                         </a:rPr>
-                        <a:t>89百万</a:t>
+                        <a:t>74百万</a:t>
                       </a:r>
                       <a:endParaRPr lang="en-US" sz="1000" dirty="0">
                         <a:latin typeface="Yu Gothic" charset="0"/>
@@ -10527,7 +10486,7 @@
                           <a:ea typeface="Yu Gothic" pitchFamily="34" charset="-122"/>
                           <a:cs typeface="Yu Gothic" pitchFamily="34" charset="-120"/>
                         </a:rPr>
-                        <a:t>29.8%</a:t>
+                        <a:t>24.8%</a:t>
                       </a:r>
                       <a:endParaRPr lang="en-US" sz="1000" dirty="0">
                         <a:latin typeface="Yu Gothic" charset="0"/>
@@ -10595,75 +10554,7 @@
                           <a:ea typeface="Yu Gothic" pitchFamily="34" charset="-122"/>
                           <a:cs typeface="Yu Gothic" pitchFamily="34" charset="-120"/>
                         </a:rPr>
-                        <a:t>25.8%</a:t>
-                      </a:r>
-                      <a:endParaRPr lang="en-US" sz="1000" dirty="0">
-                        <a:latin typeface="Yu Gothic" charset="0"/>
-                        <a:ea typeface="Yu Gothic" charset="0"/>
-                        <a:cs typeface="Yu Gothic" charset="0"/>
-                      </a:endParaRPr>
-                    </a:p>
-                  </a:txBody>
-                  <a:tcPr marL="45720" marR="45720" marT="45720" marB="45720" anchor="ctr">
-                    <a:lnL w="7620" cap="flat" cmpd="sng" algn="ctr">
-                      <a:solidFill>
-                        <a:srgbClr val="2E2A24"/>
-                      </a:solidFill>
-                      <a:prstDash val="solid"/>
-                      <a:round/>
-                      <a:headEnd type="none" w="med" len="med"/>
-                      <a:tailEnd type="none" w="med" len="med"/>
-                    </a:lnL>
-                    <a:lnR w="7620" cap="flat" cmpd="sng" algn="ctr">
-                      <a:solidFill>
-                        <a:srgbClr val="2E2A24"/>
-                      </a:solidFill>
-                      <a:prstDash val="solid"/>
-                      <a:round/>
-                      <a:headEnd type="none" w="med" len="med"/>
-                      <a:tailEnd type="none" w="med" len="med"/>
-                    </a:lnR>
-                    <a:lnT w="7620" cap="flat" cmpd="sng" algn="ctr">
-                      <a:solidFill>
-                        <a:srgbClr val="2E2A24"/>
-                      </a:solidFill>
-                      <a:prstDash val="solid"/>
-                      <a:round/>
-                      <a:headEnd type="none" w="med" len="med"/>
-                      <a:tailEnd type="none" w="med" len="med"/>
-                    </a:lnT>
-                    <a:lnB w="7620" cap="flat" cmpd="sng" algn="ctr">
-                      <a:solidFill>
-                        <a:srgbClr val="2E2A24"/>
-                      </a:solidFill>
-                      <a:prstDash val="solid"/>
-                      <a:round/>
-                      <a:headEnd type="none" w="med" len="med"/>
-                      <a:tailEnd type="none" w="med" len="med"/>
-                    </a:lnB>
-                    <a:solidFill>
-                      <a:srgbClr val="171614"/>
-                    </a:solidFill>
-                  </a:tcPr>
-                </a:tc>
-                <a:tc>
-                  <a:txBody>
-                    <a:bodyPr/>
-                    <a:lstStyle/>
-                    <a:p>
-                      <a:pPr algn="ctr" indent="0" marL="0">
-                        <a:buNone/>
-                      </a:pPr>
-                      <a:r>
-                        <a:rPr lang="en-US" sz="1000" dirty="0">
-                          <a:solidFill>
-                            <a:srgbClr val="EFEBE3"/>
-                          </a:solidFill>
-                          <a:latin typeface="Yu Gothic" pitchFamily="34" charset="0"/>
-                          <a:ea typeface="Yu Gothic" pitchFamily="34" charset="-122"/>
-                          <a:cs typeface="Yu Gothic" pitchFamily="34" charset="-120"/>
-                        </a:rPr>
-                        <a:t>400百万</a:t>
+                        <a:t>333百万</a:t>
                       </a:r>
                       <a:endParaRPr lang="en-US" sz="1000" dirty="0">
                         <a:latin typeface="Yu Gothic" charset="0"/>
@@ -10731,7 +10622,7 @@
                           <a:ea typeface="Yu Gothic" pitchFamily="34" charset="-122"/>
                           <a:cs typeface="Yu Gothic" pitchFamily="34" charset="-120"/>
                         </a:rPr>
-                        <a:t>26.7%</a:t>
+                        <a:t>22.2%</a:t>
                       </a:r>
                       <a:endParaRPr lang="en-US" sz="1000" dirty="0">
                         <a:latin typeface="Yu Gothic" charset="0"/>
@@ -10804,73 +10695,9 @@
             </a:avLst>
           </a:prstGeom>
           <a:solidFill>
-            <a:srgbClr val="171614"/>
+            <a:srgbClr val="1F1D19"/>
           </a:solidFill>
           <a:ln w="9525">
-            <a:solidFill>
-              <a:srgbClr val="2E2A24"/>
-            </a:solidFill>
-            <a:prstDash val="solid"/>
-          </a:ln>
-        </p:spPr>
-      </p:sp>
-      <p:sp>
-        <p:nvSpPr>
-          <p:cNvPr id="9" name="Text 6"/>
-          <p:cNvSpPr/>
-          <p:nvPr/>
-        </p:nvSpPr>
-        <p:spPr>
-          <a:xfrm>
-            <a:off x="914400" y="3877056"/>
-            <a:ext cx="2743200" cy="237744"/>
-          </a:xfrm>
-          <a:prstGeom prst="rect">
-            <a:avLst/>
-          </a:prstGeom>
-          <a:noFill/>
-          <a:ln/>
-        </p:spPr>
-        <p:txBody>
-          <a:bodyPr wrap="square" lIns="0" tIns="0" rIns="0" bIns="0" rtlCol="0" anchor="ctr"/>
-          <a:lstStyle/>
-          <a:p>
-            <a:pPr indent="0" marL="0">
-              <a:buNone/>
-            </a:pPr>
-            <a:r>
-              <a:rPr lang="en-US" sz="1200" b="1" dirty="0">
-                <a:solidFill>
-                  <a:srgbClr val="C9A96E"/>
-                </a:solidFill>
-                <a:latin typeface="Yu Gothic" pitchFamily="34" charset="0"/>
-                <a:ea typeface="Yu Gothic" pitchFamily="34" charset="-122"/>
-                <a:cs typeface="Yu Gothic" pitchFamily="34" charset="-120"/>
-              </a:rPr>
-              <a:t>読み方</a:t>
-            </a:r>
-            <a:endParaRPr lang="en-US" sz="1200" dirty="0"/>
-          </a:p>
-        </p:txBody>
-      </p:sp>
-      <p:sp>
-        <p:nvSpPr>
-          <p:cNvPr id="10" name="Shape 7"/>
-          <p:cNvSpPr/>
-          <p:nvPr/>
-        </p:nvSpPr>
-        <p:spPr>
-          <a:xfrm>
-            <a:off x="914400" y="4146804"/>
-            <a:ext cx="146304" cy="146304"/>
-          </a:xfrm>
-          <a:prstGeom prst="ellipse">
-            <a:avLst/>
-          </a:prstGeom>
-          <a:solidFill>
-            <a:srgbClr val="6E5730"/>
-          </a:solidFill>
-          <a:ln w="11430">
             <a:solidFill>
               <a:srgbClr val="6E5730"/>
             </a:solidFill>
@@ -10880,42 +10707,14 @@
       </p:sp>
       <p:sp>
         <p:nvSpPr>
-          <p:cNvPr id="11" name="Text 8"/>
-          <p:cNvSpPr/>
-          <p:nvPr/>
-        </p:nvSpPr>
-        <p:spPr>
-          <a:xfrm>
-            <a:off x="914400" y="4146804"/>
-            <a:ext cx="146304" cy="146304"/>
-          </a:xfrm>
-          <a:prstGeom prst="rect">
-            <a:avLst/>
-          </a:prstGeom>
-          <a:noFill/>
-          <a:ln/>
-        </p:spPr>
-        <p:txBody>
-          <a:bodyPr wrap="square" lIns="0" tIns="0" rIns="0" bIns="0" rtlCol="0" anchor="ctr"/>
-          <a:lstStyle/>
-          <a:p>
-            <a:pPr algn="ctr" indent="0" marL="0">
-              <a:buNone/>
-            </a:pPr>
-            <a:endParaRPr lang="en-US" sz="1100" dirty="0"/>
-          </a:p>
-        </p:txBody>
-      </p:sp>
-      <p:sp>
-        <p:nvSpPr>
-          <p:cNvPr id="12" name="Text 9"/>
-          <p:cNvSpPr/>
-          <p:nvPr/>
-        </p:nvSpPr>
-        <p:spPr>
-          <a:xfrm>
-            <a:off x="1170432" y="4096512"/>
-            <a:ext cx="4800600" cy="310896"/>
+          <p:cNvPr id="9" name="Text 6"/>
+          <p:cNvSpPr/>
+          <p:nvPr/>
+        </p:nvSpPr>
+        <p:spPr>
+          <a:xfrm>
+            <a:off x="914400" y="3840480"/>
+            <a:ext cx="5029200" cy="237744"/>
           </a:xfrm>
           <a:prstGeom prst="rect">
             <a:avLst/>
@@ -10928,89 +10727,33 @@
           <a:lstStyle/>
           <a:p>
             <a:pPr indent="0" marL="0">
-              <a:lnSpc>
-                <a:spcPct val="115000"/>
-              </a:lnSpc>
-              <a:buNone/>
-            </a:pPr>
-            <a:r>
-              <a:rPr lang="en-US" sz="950" dirty="0">
-                <a:solidFill>
-                  <a:srgbClr val="9A938A"/>
+              <a:buNone/>
+            </a:pPr>
+            <a:r>
+              <a:rPr lang="en-US" sz="1150" b="1" dirty="0">
+                <a:solidFill>
+                  <a:srgbClr val="C9A96E"/>
                 </a:solidFill>
                 <a:latin typeface="Yu Gothic" pitchFamily="34" charset="0"/>
                 <a:ea typeface="Yu Gothic" pitchFamily="34" charset="-122"/>
                 <a:cs typeface="Yu Gothic" pitchFamily="34" charset="-120"/>
               </a:rPr>
-              <a:t>投資家利回り＝SPC税前利益の60%÷出資3億円。WineBank側利回り＝残り40%からデット金利を控除し持分相当2億円で除したもの</a:t>
-            </a:r>
-            <a:endParaRPr lang="en-US" sz="950" dirty="0"/>
-          </a:p>
-        </p:txBody>
-      </p:sp>
-      <p:sp>
-        <p:nvSpPr>
-          <p:cNvPr id="13" name="Shape 10"/>
-          <p:cNvSpPr/>
-          <p:nvPr/>
-        </p:nvSpPr>
-        <p:spPr>
-          <a:xfrm>
-            <a:off x="914400" y="4494276"/>
-            <a:ext cx="146304" cy="146304"/>
-          </a:xfrm>
-          <a:prstGeom prst="ellipse">
-            <a:avLst/>
-          </a:prstGeom>
-          <a:solidFill>
-            <a:srgbClr val="6E5730"/>
-          </a:solidFill>
-          <a:ln w="11430">
-            <a:solidFill>
-              <a:srgbClr val="6E5730"/>
-            </a:solidFill>
-            <a:prstDash val="solid"/>
-          </a:ln>
-        </p:spPr>
-      </p:sp>
-      <p:sp>
-        <p:nvSpPr>
-          <p:cNvPr id="14" name="Text 11"/>
-          <p:cNvSpPr/>
-          <p:nvPr/>
-        </p:nvSpPr>
-        <p:spPr>
-          <a:xfrm>
-            <a:off x="914400" y="4494276"/>
-            <a:ext cx="146304" cy="146304"/>
-          </a:xfrm>
-          <a:prstGeom prst="rect">
-            <a:avLst/>
-          </a:prstGeom>
-          <a:noFill/>
-          <a:ln/>
-        </p:spPr>
-        <p:txBody>
-          <a:bodyPr wrap="square" lIns="0" tIns="0" rIns="0" bIns="0" rtlCol="0" anchor="ctr"/>
-          <a:lstStyle/>
-          <a:p>
-            <a:pPr algn="ctr" indent="0" marL="0">
-              <a:buNone/>
-            </a:pPr>
-            <a:endParaRPr lang="en-US" sz="1100" dirty="0"/>
-          </a:p>
-        </p:txBody>
-      </p:sp>
-      <p:sp>
-        <p:nvSpPr>
-          <p:cNvPr id="15" name="Text 12"/>
-          <p:cNvSpPr/>
-          <p:nvPr/>
-        </p:nvSpPr>
-        <p:spPr>
-          <a:xfrm>
-            <a:off x="1170432" y="4443984"/>
-            <a:ext cx="4800600" cy="310896"/>
+              <a:t>粗利率30.0%が投資家利回り35.0%になる理由</a:t>
+            </a:r>
+            <a:endParaRPr lang="en-US" sz="1150" dirty="0"/>
+          </a:p>
+        </p:txBody>
+      </p:sp>
+      <p:sp>
+        <p:nvSpPr>
+          <p:cNvPr id="10" name="Text 7"/>
+          <p:cNvSpPr/>
+          <p:nvPr/>
+        </p:nvSpPr>
+        <p:spPr>
+          <a:xfrm>
+            <a:off x="914400" y="4133088"/>
+            <a:ext cx="1737360" cy="256032"/>
           </a:xfrm>
           <a:prstGeom prst="rect">
             <a:avLst/>
@@ -11023,21 +10766,18 @@
           <a:lstStyle/>
           <a:p>
             <a:pPr indent="0" marL="0">
-              <a:lnSpc>
-                <a:spcPct val="115000"/>
-              </a:lnSpc>
-              <a:buNone/>
-            </a:pPr>
-            <a:r>
-              <a:rPr lang="en-US" sz="950" dirty="0">
-                <a:solidFill>
-                  <a:srgbClr val="9A938A"/>
+              <a:buNone/>
+            </a:pPr>
+            <a:r>
+              <a:rPr lang="en-US" sz="950" b="1" dirty="0">
+                <a:solidFill>
+                  <a:srgbClr val="EFEBE3"/>
                 </a:solidFill>
                 <a:latin typeface="Yu Gothic" pitchFamily="34" charset="0"/>
                 <a:ea typeface="Yu Gothic" pitchFamily="34" charset="-122"/>
                 <a:cs typeface="Yu Gothic" pitchFamily="34" charset="-120"/>
               </a:rPr>
-              <a:t>年平均利回り＝5年間の累計分配額÷出資3億円÷5年。仕入展開6ヶ月と満期前の清算期間を織り込んだ通算値</a:t>
+              <a:t>定価100あたり</a:t>
             </a:r>
             <a:endParaRPr lang="en-US" sz="950" dirty="0"/>
           </a:p>
@@ -11045,67 +10785,14 @@
       </p:sp>
       <p:sp>
         <p:nvSpPr>
-          <p:cNvPr id="16" name="Shape 13"/>
-          <p:cNvSpPr/>
-          <p:nvPr/>
-        </p:nvSpPr>
-        <p:spPr>
-          <a:xfrm>
-            <a:off x="914400" y="4841748"/>
-            <a:ext cx="146304" cy="146304"/>
-          </a:xfrm>
-          <a:prstGeom prst="ellipse">
-            <a:avLst/>
-          </a:prstGeom>
-          <a:solidFill>
-            <a:srgbClr val="6E5730"/>
-          </a:solidFill>
-          <a:ln w="11430">
-            <a:solidFill>
-              <a:srgbClr val="6E5730"/>
-            </a:solidFill>
-            <a:prstDash val="solid"/>
-          </a:ln>
-        </p:spPr>
-      </p:sp>
-      <p:sp>
-        <p:nvSpPr>
-          <p:cNvPr id="17" name="Text 14"/>
-          <p:cNvSpPr/>
-          <p:nvPr/>
-        </p:nvSpPr>
-        <p:spPr>
-          <a:xfrm>
-            <a:off x="914400" y="4841748"/>
-            <a:ext cx="146304" cy="146304"/>
-          </a:xfrm>
-          <a:prstGeom prst="rect">
-            <a:avLst/>
-          </a:prstGeom>
-          <a:noFill/>
-          <a:ln/>
-        </p:spPr>
-        <p:txBody>
-          <a:bodyPr wrap="square" lIns="0" tIns="0" rIns="0" bIns="0" rtlCol="0" anchor="ctr"/>
-          <a:lstStyle/>
-          <a:p>
-            <a:pPr algn="ctr" indent="0" marL="0">
-              <a:buNone/>
-            </a:pPr>
-            <a:endParaRPr lang="en-US" sz="1100" dirty="0"/>
-          </a:p>
-        </p:txBody>
-      </p:sp>
-      <p:sp>
-        <p:nvSpPr>
-          <p:cNvPr id="18" name="Text 15"/>
-          <p:cNvSpPr/>
-          <p:nvPr/>
-        </p:nvSpPr>
-        <p:spPr>
-          <a:xfrm>
-            <a:off x="1170432" y="4791456"/>
-            <a:ext cx="4800600" cy="310896"/>
+          <p:cNvPr id="11" name="Text 8"/>
+          <p:cNvSpPr/>
+          <p:nvPr/>
+        </p:nvSpPr>
+        <p:spPr>
+          <a:xfrm>
+            <a:off x="2688336" y="4133088"/>
+            <a:ext cx="3291840" cy="256032"/>
           </a:xfrm>
           <a:prstGeom prst="rect">
             <a:avLst/>
@@ -11119,12 +10806,12 @@
           <a:p>
             <a:pPr indent="0" marL="0">
               <a:lnSpc>
-                <a:spcPct val="115000"/>
+                <a:spcPct val="110000"/>
               </a:lnSpc>
               <a:buNone/>
             </a:pPr>
             <a:r>
-              <a:rPr lang="en-US" sz="950" dirty="0">
+              <a:rPr lang="en-US" sz="850" dirty="0">
                 <a:solidFill>
                   <a:srgbClr val="9A938A"/>
                 </a:solidFill>
@@ -11132,75 +10819,22 @@
                 <a:ea typeface="Yu Gothic" pitchFamily="34" charset="-122"/>
                 <a:cs typeface="Yu Gothic" pitchFamily="34" charset="-120"/>
               </a:rPr>
-              <a:t>主線は在庫回転12ヶ月。最短9ヶ月、延びても15〜18ヶ月を想定レンジとする</a:t>
-            </a:r>
-            <a:endParaRPr lang="en-US" sz="950" dirty="0"/>
-          </a:p>
-        </p:txBody>
-      </p:sp>
-      <p:sp>
-        <p:nvSpPr>
-          <p:cNvPr id="19" name="Shape 16"/>
-          <p:cNvSpPr/>
-          <p:nvPr/>
-        </p:nvSpPr>
-        <p:spPr>
-          <a:xfrm>
-            <a:off x="914400" y="5189220"/>
-            <a:ext cx="146304" cy="146304"/>
-          </a:xfrm>
-          <a:prstGeom prst="ellipse">
-            <a:avLst/>
-          </a:prstGeom>
-          <a:solidFill>
-            <a:srgbClr val="6E5730"/>
-          </a:solidFill>
-          <a:ln w="11430">
-            <a:solidFill>
-              <a:srgbClr val="6E5730"/>
-            </a:solidFill>
-            <a:prstDash val="solid"/>
-          </a:ln>
-        </p:spPr>
-      </p:sp>
-      <p:sp>
-        <p:nvSpPr>
-          <p:cNvPr id="20" name="Text 17"/>
-          <p:cNvSpPr/>
-          <p:nvPr/>
-        </p:nvSpPr>
-        <p:spPr>
-          <a:xfrm>
-            <a:off x="914400" y="5189220"/>
-            <a:ext cx="146304" cy="146304"/>
-          </a:xfrm>
-          <a:prstGeom prst="rect">
-            <a:avLst/>
-          </a:prstGeom>
-          <a:noFill/>
-          <a:ln/>
-        </p:spPr>
-        <p:txBody>
-          <a:bodyPr wrap="square" lIns="0" tIns="0" rIns="0" bIns="0" rtlCol="0" anchor="ctr"/>
-          <a:lstStyle/>
-          <a:p>
-            <a:pPr algn="ctr" indent="0" marL="0">
-              <a:buNone/>
-            </a:pPr>
-            <a:endParaRPr lang="en-US" sz="1100" dirty="0"/>
-          </a:p>
-        </p:txBody>
-      </p:sp>
-      <p:sp>
-        <p:nvSpPr>
-          <p:cNvPr id="21" name="Text 18"/>
-          <p:cNvSpPr/>
-          <p:nvPr/>
-        </p:nvSpPr>
-        <p:spPr>
-          <a:xfrm>
-            <a:off x="1170432" y="5138928"/>
-            <a:ext cx="4800600" cy="310896"/>
+              <a:t>原価50.50で仕入れ、手取り74.38で回収 → 単位粗利23.88</a:t>
+            </a:r>
+            <a:endParaRPr lang="en-US" sz="850" dirty="0"/>
+          </a:p>
+        </p:txBody>
+      </p:sp>
+      <p:sp>
+        <p:nvSpPr>
+          <p:cNvPr id="12" name="Text 9"/>
+          <p:cNvSpPr/>
+          <p:nvPr/>
+        </p:nvSpPr>
+        <p:spPr>
+          <a:xfrm>
+            <a:off x="914400" y="4407408"/>
+            <a:ext cx="1737360" cy="256032"/>
           </a:xfrm>
           <a:prstGeom prst="rect">
             <a:avLst/>
@@ -11213,21 +10847,18 @@
           <a:lstStyle/>
           <a:p>
             <a:pPr indent="0" marL="0">
-              <a:lnSpc>
-                <a:spcPct val="115000"/>
-              </a:lnSpc>
-              <a:buNone/>
-            </a:pPr>
-            <a:r>
-              <a:rPr lang="en-US" sz="950" dirty="0">
-                <a:solidFill>
-                  <a:srgbClr val="9A938A"/>
+              <a:buNone/>
+            </a:pPr>
+            <a:r>
+              <a:rPr lang="en-US" sz="950" b="1" dirty="0">
+                <a:solidFill>
+                  <a:srgbClr val="EFEBE3"/>
                 </a:solidFill>
                 <a:latin typeface="Yu Gothic" pitchFamily="34" charset="0"/>
                 <a:ea typeface="Yu Gothic" pitchFamily="34" charset="-122"/>
                 <a:cs typeface="Yu Gothic" pitchFamily="34" charset="-120"/>
               </a:rPr>
-              <a:t>5年通算が単調でないのは、満期までに何回転が収まるかという期間の刻みによるもの</a:t>
+              <a:t>粗利率 30.0%</a:t>
             </a:r>
             <a:endParaRPr lang="en-US" sz="950" dirty="0"/>
           </a:p>
@@ -11235,7 +10866,292 @@
       </p:sp>
       <p:sp>
         <p:nvSpPr>
-          <p:cNvPr id="22" name="Shape 19"/>
+          <p:cNvPr id="13" name="Text 10"/>
+          <p:cNvSpPr/>
+          <p:nvPr/>
+        </p:nvSpPr>
+        <p:spPr>
+          <a:xfrm>
+            <a:off x="2688336" y="4407408"/>
+            <a:ext cx="3291840" cy="256032"/>
+          </a:xfrm>
+          <a:prstGeom prst="rect">
+            <a:avLst/>
+          </a:prstGeom>
+          <a:noFill/>
+          <a:ln/>
+        </p:spPr>
+        <p:txBody>
+          <a:bodyPr wrap="square" lIns="0" tIns="0" rIns="0" bIns="0" rtlCol="0" anchor="ctr"/>
+          <a:lstStyle/>
+          <a:p>
+            <a:pPr indent="0" marL="0">
+              <a:lnSpc>
+                <a:spcPct val="110000"/>
+              </a:lnSpc>
+              <a:buNone/>
+            </a:pPr>
+            <a:r>
+              <a:rPr lang="en-US" sz="850" dirty="0">
+                <a:solidFill>
+                  <a:srgbClr val="9A938A"/>
+                </a:solidFill>
+                <a:latin typeface="Yu Gothic" pitchFamily="34" charset="0"/>
+                <a:ea typeface="Yu Gothic" pitchFamily="34" charset="-122"/>
+                <a:cs typeface="Yu Gothic" pitchFamily="34" charset="-120"/>
+              </a:rPr>
+              <a:t>分母は売却時の売値79.50</a:t>
+            </a:r>
+            <a:endParaRPr lang="en-US" sz="850" dirty="0"/>
+          </a:p>
+        </p:txBody>
+      </p:sp>
+      <p:sp>
+        <p:nvSpPr>
+          <p:cNvPr id="14" name="Text 11"/>
+          <p:cNvSpPr/>
+          <p:nvPr/>
+        </p:nvSpPr>
+        <p:spPr>
+          <a:xfrm>
+            <a:off x="914400" y="4681728"/>
+            <a:ext cx="1737360" cy="256032"/>
+          </a:xfrm>
+          <a:prstGeom prst="rect">
+            <a:avLst/>
+          </a:prstGeom>
+          <a:noFill/>
+          <a:ln/>
+        </p:spPr>
+        <p:txBody>
+          <a:bodyPr wrap="square" lIns="0" tIns="0" rIns="0" bIns="0" rtlCol="0" anchor="ctr"/>
+          <a:lstStyle/>
+          <a:p>
+            <a:pPr indent="0" marL="0">
+              <a:buNone/>
+            </a:pPr>
+            <a:r>
+              <a:rPr lang="en-US" sz="950" b="1" dirty="0">
+                <a:solidFill>
+                  <a:srgbClr val="C9A96E"/>
+                </a:solidFill>
+                <a:latin typeface="Yu Gothic" pitchFamily="34" charset="0"/>
+                <a:ea typeface="Yu Gothic" pitchFamily="34" charset="-122"/>
+                <a:cs typeface="Yu Gothic" pitchFamily="34" charset="-120"/>
+              </a:rPr>
+              <a:t>投下原価利益率 47.3%</a:t>
+            </a:r>
+            <a:endParaRPr lang="en-US" sz="950" dirty="0"/>
+          </a:p>
+        </p:txBody>
+      </p:sp>
+      <p:sp>
+        <p:nvSpPr>
+          <p:cNvPr id="15" name="Text 12"/>
+          <p:cNvSpPr/>
+          <p:nvPr/>
+        </p:nvSpPr>
+        <p:spPr>
+          <a:xfrm>
+            <a:off x="2688336" y="4681728"/>
+            <a:ext cx="3291840" cy="256032"/>
+          </a:xfrm>
+          <a:prstGeom prst="rect">
+            <a:avLst/>
+          </a:prstGeom>
+          <a:noFill/>
+          <a:ln/>
+        </p:spPr>
+        <p:txBody>
+          <a:bodyPr wrap="square" lIns="0" tIns="0" rIns="0" bIns="0" rtlCol="0" anchor="ctr"/>
+          <a:lstStyle/>
+          <a:p>
+            <a:pPr indent="0" marL="0">
+              <a:lnSpc>
+                <a:spcPct val="110000"/>
+              </a:lnSpc>
+              <a:buNone/>
+            </a:pPr>
+            <a:r>
+              <a:rPr lang="en-US" sz="850" dirty="0">
+                <a:solidFill>
+                  <a:srgbClr val="9A938A"/>
+                </a:solidFill>
+                <a:latin typeface="Yu Gothic" pitchFamily="34" charset="0"/>
+                <a:ea typeface="Yu Gothic" pitchFamily="34" charset="-122"/>
+                <a:cs typeface="Yu Gothic" pitchFamily="34" charset="-120"/>
+              </a:rPr>
+              <a:t>分母は投下資本である取得原価50.50。年1回転なので資本が年47.3%増える</a:t>
+            </a:r>
+            <a:endParaRPr lang="en-US" sz="850" dirty="0"/>
+          </a:p>
+        </p:txBody>
+      </p:sp>
+      <p:sp>
+        <p:nvSpPr>
+          <p:cNvPr id="16" name="Text 13"/>
+          <p:cNvSpPr/>
+          <p:nvPr/>
+        </p:nvSpPr>
+        <p:spPr>
+          <a:xfrm>
+            <a:off x="914400" y="4956048"/>
+            <a:ext cx="1737360" cy="256032"/>
+          </a:xfrm>
+          <a:prstGeom prst="rect">
+            <a:avLst/>
+          </a:prstGeom>
+          <a:noFill/>
+          <a:ln/>
+        </p:spPr>
+        <p:txBody>
+          <a:bodyPr wrap="square" lIns="0" tIns="0" rIns="0" bIns="0" rtlCol="0" anchor="ctr"/>
+          <a:lstStyle/>
+          <a:p>
+            <a:pPr indent="0" marL="0">
+              <a:buNone/>
+            </a:pPr>
+            <a:r>
+              <a:rPr lang="en-US" sz="950" b="1" dirty="0">
+                <a:solidFill>
+                  <a:srgbClr val="EFEBE3"/>
+                </a:solidFill>
+                <a:latin typeface="Yu Gothic" pitchFamily="34" charset="0"/>
+                <a:ea typeface="Yu Gothic" pitchFamily="34" charset="-122"/>
+                <a:cs typeface="Yu Gothic" pitchFamily="34" charset="-120"/>
+              </a:rPr>
+              <a:t>税前利回り 42.0%</a:t>
+            </a:r>
+            <a:endParaRPr lang="en-US" sz="950" dirty="0"/>
+          </a:p>
+        </p:txBody>
+      </p:sp>
+      <p:sp>
+        <p:nvSpPr>
+          <p:cNvPr id="17" name="Text 14"/>
+          <p:cNvSpPr/>
+          <p:nvPr/>
+        </p:nvSpPr>
+        <p:spPr>
+          <a:xfrm>
+            <a:off x="2688336" y="4956048"/>
+            <a:ext cx="3291840" cy="256032"/>
+          </a:xfrm>
+          <a:prstGeom prst="rect">
+            <a:avLst/>
+          </a:prstGeom>
+          <a:noFill/>
+          <a:ln/>
+        </p:spPr>
+        <p:txBody>
+          <a:bodyPr wrap="square" lIns="0" tIns="0" rIns="0" bIns="0" rtlCol="0" anchor="ctr"/>
+          <a:lstStyle/>
+          <a:p>
+            <a:pPr indent="0" marL="0">
+              <a:lnSpc>
+                <a:spcPct val="110000"/>
+              </a:lnSpc>
+              <a:buNone/>
+            </a:pPr>
+            <a:r>
+              <a:rPr lang="en-US" sz="850" dirty="0">
+                <a:solidFill>
+                  <a:srgbClr val="9A938A"/>
+                </a:solidFill>
+                <a:latin typeface="Yu Gothic" pitchFamily="34" charset="0"/>
+                <a:ea typeface="Yu Gothic" pitchFamily="34" charset="-122"/>
+                <a:cs typeface="Yu Gothic" pitchFamily="34" charset="-120"/>
+              </a:rPr>
+              <a:t>SPC費用（保管・保険・入庫・固定 約1,500万円）控除後／総資産5億円に対して</a:t>
+            </a:r>
+            <a:endParaRPr lang="en-US" sz="850" dirty="0"/>
+          </a:p>
+        </p:txBody>
+      </p:sp>
+      <p:sp>
+        <p:nvSpPr>
+          <p:cNvPr id="18" name="Text 15"/>
+          <p:cNvSpPr/>
+          <p:nvPr/>
+        </p:nvSpPr>
+        <p:spPr>
+          <a:xfrm>
+            <a:off x="914400" y="5230368"/>
+            <a:ext cx="1737360" cy="256032"/>
+          </a:xfrm>
+          <a:prstGeom prst="rect">
+            <a:avLst/>
+          </a:prstGeom>
+          <a:noFill/>
+          <a:ln/>
+        </p:spPr>
+        <p:txBody>
+          <a:bodyPr wrap="square" lIns="0" tIns="0" rIns="0" bIns="0" rtlCol="0" anchor="ctr"/>
+          <a:lstStyle/>
+          <a:p>
+            <a:pPr indent="0" marL="0">
+              <a:buNone/>
+            </a:pPr>
+            <a:r>
+              <a:rPr lang="en-US" sz="950" b="1" dirty="0">
+                <a:solidFill>
+                  <a:srgbClr val="C9A96E"/>
+                </a:solidFill>
+                <a:latin typeface="Yu Gothic" pitchFamily="34" charset="0"/>
+                <a:ea typeface="Yu Gothic" pitchFamily="34" charset="-122"/>
+                <a:cs typeface="Yu Gothic" pitchFamily="34" charset="-120"/>
+              </a:rPr>
+              <a:t>投資家利回り 35.0%</a:t>
+            </a:r>
+            <a:endParaRPr lang="en-US" sz="950" dirty="0"/>
+          </a:p>
+        </p:txBody>
+      </p:sp>
+      <p:sp>
+        <p:nvSpPr>
+          <p:cNvPr id="19" name="Text 16"/>
+          <p:cNvSpPr/>
+          <p:nvPr/>
+        </p:nvSpPr>
+        <p:spPr>
+          <a:xfrm>
+            <a:off x="2688336" y="5230368"/>
+            <a:ext cx="3291840" cy="256032"/>
+          </a:xfrm>
+          <a:prstGeom prst="rect">
+            <a:avLst/>
+          </a:prstGeom>
+          <a:noFill/>
+          <a:ln/>
+        </p:spPr>
+        <p:txBody>
+          <a:bodyPr wrap="square" lIns="0" tIns="0" rIns="0" bIns="0" rtlCol="0" anchor="ctr"/>
+          <a:lstStyle/>
+          <a:p>
+            <a:pPr indent="0" marL="0">
+              <a:lnSpc>
+                <a:spcPct val="110000"/>
+              </a:lnSpc>
+              <a:buNone/>
+            </a:pPr>
+            <a:r>
+              <a:rPr lang="en-US" sz="850" dirty="0">
+                <a:solidFill>
+                  <a:srgbClr val="9A938A"/>
+                </a:solidFill>
+                <a:latin typeface="Yu Gothic" pitchFamily="34" charset="0"/>
+                <a:ea typeface="Yu Gothic" pitchFamily="34" charset="-122"/>
+                <a:cs typeface="Yu Gothic" pitchFamily="34" charset="-120"/>
+              </a:rPr>
+              <a:t>税前利益の50%（105百万円）を出資3億円で除したもの</a:t>
+            </a:r>
+            <a:endParaRPr lang="en-US" sz="850" dirty="0"/>
+          </a:p>
+        </p:txBody>
+      </p:sp>
+      <p:sp>
+        <p:nvSpPr>
+          <p:cNvPr id="20" name="Shape 17"/>
           <p:cNvSpPr/>
           <p:nvPr/>
         </p:nvSpPr>
@@ -11262,7 +11178,7 @@
       </p:sp>
       <p:sp>
         <p:nvSpPr>
-          <p:cNvPr id="23" name="Text 20"/>
+          <p:cNvPr id="21" name="Text 18"/>
           <p:cNvSpPr/>
           <p:nvPr/>
         </p:nvSpPr>
@@ -11301,7 +11217,7 @@
       </p:sp>
       <p:sp>
         <p:nvSpPr>
-          <p:cNvPr id="24" name="Text 21"/>
+          <p:cNvPr id="22" name="Text 19"/>
           <p:cNvSpPr/>
           <p:nvPr/>
         </p:nvSpPr>
@@ -11340,7 +11256,7 @@
       </p:sp>
       <p:sp>
         <p:nvSpPr>
-          <p:cNvPr id="25" name="Text 22"/>
+          <p:cNvPr id="23" name="Text 20"/>
           <p:cNvSpPr/>
           <p:nvPr/>
         </p:nvSpPr>
@@ -11371,7 +11287,7 @@
                 <a:ea typeface="Cambria" pitchFamily="34" charset="-122"/>
                 <a:cs typeface="Cambria" pitchFamily="34" charset="-120"/>
               </a:rPr>
-              <a:t>29.8 – 54.2</a:t>
+              <a:t>24.8 – 45.2</a:t>
             </a:r>
             <a:pPr indent="0" marL="0">
               <a:buNone/>
@@ -11393,7 +11309,7 @@
       </p:sp>
       <p:sp>
         <p:nvSpPr>
-          <p:cNvPr id="26" name="Text 23"/>
+          <p:cNvPr id="24" name="Text 21"/>
           <p:cNvSpPr/>
           <p:nvPr/>
         </p:nvSpPr>
@@ -11427,7 +11343,7 @@
                 <a:ea typeface="Yu Gothic" pitchFamily="34" charset="-122"/>
                 <a:cs typeface="Yu Gothic" pitchFamily="34" charset="-120"/>
               </a:rPr>
-              <a:t>主線の回転12ヶ月で42.0%。最短9ヶ月なら54.2%、18ヶ月まで延びても29.8%を確保する。同じ条件でのWineBank側利回りは38.0%であり、投資家を4.0ポイント下回る。</a:t>
+              <a:t>主線の回転12ヶ月で35.0%。最短9ヶ月なら45.2%、18ヶ月まで延びても24.8%を確保する。20%を割り込むのは回転が23.7ヶ月を超えた場合であり、想定レンジの外にある。</a:t>
             </a:r>
             <a:endParaRPr lang="en-US" sz="1000" dirty="0"/>
           </a:p>
@@ -11537,7 +11453,7 @@
                 <a:ea typeface="Yu Mincho" pitchFamily="34" charset="-122"/>
                 <a:cs typeface="Yu Mincho" pitchFamily="34" charset="-120"/>
               </a:rPr>
-              <a:t>在庫回転期間とリターンの関係</a:t>
+              <a:t>在庫回転期間と投資家リターンの関係</a:t>
             </a:r>
             <a:endParaRPr lang="en-US" sz="2700" dirty="0"/>
           </a:p>
@@ -11576,7 +11492,7 @@
                 <a:ea typeface="Yu Gothic" pitchFamily="34" charset="-122"/>
                 <a:cs typeface="Yu Gothic" pitchFamily="34" charset="-120"/>
               </a:rPr>
-              <a:t>投資家利回りとWineBank側利回りを分けて示している。WineBankがデット金利を負担するため、常に投資家が上回る。</a:t>
+              <a:t>いずれも出資3億円に対する数値。SPC税前利益の50%を投資家が受け取る前提。</a:t>
             </a:r>
             <a:endParaRPr lang="en-US" sz="1150" dirty="0"/>
           </a:p>
@@ -11848,7 +11764,7 @@
                 <a:ea typeface="Yu Gothic" pitchFamily="34" charset="-122"/>
                 <a:cs typeface="Yu Gothic" pitchFamily="34" charset="-120"/>
               </a:rPr>
-              <a:t>回転を1ヶ月短縮するごとに投資家利回りは約4ポイント改善する。何を組み入れるか（銘柄の流動性）で回転期間の大半が決まる。</a:t>
+              <a:t>回転を1ヶ月短縮するごとに投資家利回りは約3.4ポイント改善する。何を組み入れるか（銘柄の流動性）で回転期間の大半が決まる。</a:t>
             </a:r>
             <a:endParaRPr lang="en-US" sz="1000" dirty="0"/>
           </a:p>
@@ -11956,7 +11872,7 @@
                 <a:ea typeface="Yu Gothic" pitchFamily="34" charset="-122"/>
                 <a:cs typeface="Yu Gothic" pitchFamily="34" charset="-120"/>
               </a:rPr>
-              <a:t>回転が18ヶ月まで延びても29.8%を確保できる。保有が長いぶん売値が上がるためで、値上がりを織り込まない場合とは約8ポイントの差がつく（次頁）。</a:t>
+              <a:t>回転が18ヶ月まで延びても24.8%を確保できる。保有が長いぶん売値が上がるためで、値上がりを織り込まない場合とは約6.6ポイントの差がつく（次頁）。</a:t>
             </a:r>
             <a:endParaRPr lang="en-US" sz="1000" dirty="0"/>
           </a:p>
@@ -12369,7 +12285,7 @@
                 <a:ea typeface="Yu Gothic" pitchFamily="34" charset="-122"/>
                 <a:cs typeface="Yu Gothic" pitchFamily="34" charset="-120"/>
               </a:rPr>
-              <a:t>主線（回転12ヶ月）で 34.1%</a:t>
+              <a:t>主線（回転12ヶ月）で 28.4%</a:t>
             </a:r>
             <a:endParaRPr lang="en-US" sz="1300" dirty="0"/>
           </a:p>
@@ -12555,7 +12471,7 @@
                 <a:ea typeface="Yu Gothic" pitchFamily="34" charset="-122"/>
                 <a:cs typeface="Yu Gothic" pitchFamily="34" charset="-120"/>
               </a:rPr>
-              <a:t>回転期間によらず 約 +8.0pt</a:t>
+              <a:t>回転期間によらず 約 +6.6pt</a:t>
             </a:r>
             <a:endParaRPr lang="en-US" sz="1300" dirty="0"/>
           </a:p>
@@ -13086,7 +13002,7 @@
                           <a:ea typeface="Yu Gothic" pitchFamily="34" charset="-122"/>
                           <a:cs typeface="Yu Gothic" pitchFamily="34" charset="-120"/>
                         </a:rPr>
-                        <a:t>46.4%</a:t>
+                        <a:t>38.7%</a:t>
                       </a:r>
                       <a:endParaRPr lang="en-US" sz="1000" dirty="0">
                         <a:latin typeface="Yu Gothic" charset="0"/>
@@ -13154,7 +13070,7 @@
                           <a:ea typeface="Yu Gothic" pitchFamily="34" charset="-122"/>
                           <a:cs typeface="Yu Gothic" pitchFamily="34" charset="-120"/>
                         </a:rPr>
-                        <a:t>＋7.9pt</a:t>
+                        <a:t>＋6.6pt</a:t>
                       </a:r>
                       <a:endParaRPr lang="en-US" sz="1000" dirty="0">
                         <a:latin typeface="Yu Gothic" charset="0"/>
@@ -13222,7 +13138,7 @@
                           <a:ea typeface="Yu Gothic" pitchFamily="34" charset="-122"/>
                           <a:cs typeface="Yu Gothic" pitchFamily="34" charset="-120"/>
                         </a:rPr>
-                        <a:t>54.2%</a:t>
+                        <a:t>45.2%</a:t>
                       </a:r>
                       <a:endParaRPr lang="en-US" sz="1000" dirty="0">
                         <a:latin typeface="Yu Gothic" charset="0"/>
@@ -13428,7 +13344,7 @@
                           <a:ea typeface="Yu Gothic" pitchFamily="34" charset="-122"/>
                           <a:cs typeface="Yu Gothic" pitchFamily="34" charset="-120"/>
                         </a:rPr>
-                        <a:t>34.1%</a:t>
+                        <a:t>28.4%</a:t>
                       </a:r>
                       <a:endParaRPr lang="en-US" sz="1000" dirty="0">
                         <a:latin typeface="Yu Gothic" charset="0"/>
@@ -13496,7 +13412,7 @@
                           <a:ea typeface="Yu Gothic" pitchFamily="34" charset="-122"/>
                           <a:cs typeface="Yu Gothic" pitchFamily="34" charset="-120"/>
                         </a:rPr>
-                        <a:t>＋7.9pt</a:t>
+                        <a:t>＋6.6pt</a:t>
                       </a:r>
                       <a:endParaRPr lang="en-US" sz="1000" dirty="0">
                         <a:latin typeface="Yu Gothic" charset="0"/>
@@ -13564,7 +13480,7 @@
                           <a:ea typeface="Yu Gothic" pitchFamily="34" charset="-122"/>
                           <a:cs typeface="Yu Gothic" pitchFamily="34" charset="-120"/>
                         </a:rPr>
-                        <a:t>42.0%</a:t>
+                        <a:t>35.0%</a:t>
                       </a:r>
                       <a:endParaRPr lang="en-US" sz="1000" dirty="0">
                         <a:latin typeface="Yu Gothic" charset="0"/>
@@ -13770,7 +13686,7 @@
                           <a:ea typeface="Yu Gothic" pitchFamily="34" charset="-122"/>
                           <a:cs typeface="Yu Gothic" pitchFamily="34" charset="-120"/>
                         </a:rPr>
-                        <a:t>26.7%</a:t>
+                        <a:t>22.2%</a:t>
                       </a:r>
                       <a:endParaRPr lang="en-US" sz="1000" dirty="0">
                         <a:latin typeface="Yu Gothic" charset="0"/>
@@ -13838,7 +13754,7 @@
                           <a:ea typeface="Yu Gothic" pitchFamily="34" charset="-122"/>
                           <a:cs typeface="Yu Gothic" pitchFamily="34" charset="-120"/>
                         </a:rPr>
-                        <a:t>＋8.0pt</a:t>
+                        <a:t>＋6.6pt</a:t>
                       </a:r>
                       <a:endParaRPr lang="en-US" sz="1000" dirty="0">
                         <a:latin typeface="Yu Gothic" charset="0"/>
@@ -13906,7 +13822,7 @@
                           <a:ea typeface="Yu Gothic" pitchFamily="34" charset="-122"/>
                           <a:cs typeface="Yu Gothic" pitchFamily="34" charset="-120"/>
                         </a:rPr>
-                        <a:t>34.7%</a:t>
+                        <a:t>28.9%</a:t>
                       </a:r>
                       <a:endParaRPr lang="en-US" sz="1000" dirty="0">
                         <a:latin typeface="Yu Gothic" charset="0"/>
@@ -14112,7 +14028,7 @@
                           <a:ea typeface="Yu Gothic" pitchFamily="34" charset="-122"/>
                           <a:cs typeface="Yu Gothic" pitchFamily="34" charset="-120"/>
                         </a:rPr>
-                        <a:t>21.8%</a:t>
+                        <a:t>18.1%</a:t>
                       </a:r>
                       <a:endParaRPr lang="en-US" sz="1000" dirty="0">
                         <a:latin typeface="Yu Gothic" charset="0"/>
@@ -14180,7 +14096,7 @@
                           <a:ea typeface="Yu Gothic" pitchFamily="34" charset="-122"/>
                           <a:cs typeface="Yu Gothic" pitchFamily="34" charset="-120"/>
                         </a:rPr>
-                        <a:t>＋8.0pt</a:t>
+                        <a:t>＋6.7pt</a:t>
                       </a:r>
                       <a:endParaRPr lang="en-US" sz="1000" dirty="0">
                         <a:latin typeface="Yu Gothic" charset="0"/>
@@ -14248,7 +14164,7 @@
                           <a:ea typeface="Yu Gothic" pitchFamily="34" charset="-122"/>
                           <a:cs typeface="Yu Gothic" pitchFamily="34" charset="-120"/>
                         </a:rPr>
-                        <a:t>29.8%</a:t>
+                        <a:t>24.8%</a:t>
                       </a:r>
                       <a:endParaRPr lang="en-US" sz="1000" dirty="0">
                         <a:latin typeface="Yu Gothic" charset="0"/>
@@ -14442,7 +14358,7 @@
                 <a:ea typeface="Cambria" pitchFamily="34" charset="-122"/>
                 <a:cs typeface="Cambria" pitchFamily="34" charset="-120"/>
               </a:rPr>
-              <a:t>34.1%</a:t>
+              <a:t>28.4%</a:t>
             </a:r>
             <a:endParaRPr lang="en-US" sz="1900" dirty="0"/>
           </a:p>
@@ -14520,7 +14436,7 @@
                 <a:ea typeface="Cambria" pitchFamily="34" charset="-122"/>
                 <a:cs typeface="Cambria" pitchFamily="34" charset="-120"/>
               </a:rPr>
-              <a:t>42.0%</a:t>
+              <a:t>35.0%</a:t>
             </a:r>
             <a:endParaRPr lang="en-US" sz="1900" dirty="0"/>
           </a:p>
@@ -14598,7 +14514,7 @@
                 <a:ea typeface="Cambria" pitchFamily="34" charset="-122"/>
                 <a:cs typeface="Cambria" pitchFamily="34" charset="-120"/>
               </a:rPr>
-              <a:t>47.3%</a:t>
+              <a:t>39.4%</a:t>
             </a:r>
             <a:endParaRPr lang="en-US" sz="1900" dirty="0"/>
           </a:p>
@@ -14706,7 +14622,7 @@
                 <a:ea typeface="Yu Gothic" pitchFamily="34" charset="-122"/>
                 <a:cs typeface="Yu Gothic" pitchFamily="34" charset="-120"/>
               </a:rPr>
-              <a:t>値上がりは在庫金額に対して発生するため、年間の上乗せ幅は回転期間によらず約8.0ポイントで一定になる。回転が落ちた分をちょうど埋め合わせるわけではなく、どの回転期間でも一律に底上げする性質のもの。したがって回転期間の管理は引き続き最大の運用課題である。</a:t>
+              <a:t>値上がりは在庫金額に対して発生するため、年間の上乗せ幅は回転期間によらず約6.6ポイントで一定になる。回転が落ちた分をちょうど埋め合わせるわけではなく、どの回転期間でも一律に底上げする性質のもの。したがって回転期間の管理は引き続き最大の運用課題である。</a:t>
             </a:r>
             <a:endParaRPr lang="en-US" sz="900" dirty="0"/>
           </a:p>
@@ -15598,7 +15514,7 @@
                           <a:ea typeface="Yu Gothic" pitchFamily="34" charset="-122"/>
                           <a:cs typeface="Yu Gothic" pitchFamily="34" charset="-120"/>
                         </a:rPr>
-                        <a:t>308百万</a:t>
+                        <a:t>257百万</a:t>
                       </a:r>
                       <a:endParaRPr lang="en-US" sz="950" dirty="0">
                         <a:latin typeface="Yu Gothic" charset="0"/>
@@ -15666,7 +15582,7 @@
                           <a:ea typeface="Yu Gothic" pitchFamily="34" charset="-122"/>
                           <a:cs typeface="Yu Gothic" pitchFamily="34" charset="-120"/>
                         </a:rPr>
-                        <a:t>102.7%</a:t>
+                        <a:t>85.6%</a:t>
                       </a:r>
                       <a:endParaRPr lang="en-US" sz="950" dirty="0">
                         <a:latin typeface="Yu Gothic" charset="0"/>
@@ -15940,7 +15856,7 @@
                           <a:ea typeface="Yu Gothic" pitchFamily="34" charset="-122"/>
                           <a:cs typeface="Yu Gothic" pitchFamily="34" charset="-120"/>
                         </a:rPr>
-                        <a:t>236百万</a:t>
+                        <a:t>197百万</a:t>
                       </a:r>
                       <a:endParaRPr lang="en-US" sz="950" dirty="0">
                         <a:latin typeface="Yu Gothic" charset="0"/>
@@ -16008,7 +15924,7 @@
                           <a:ea typeface="Yu Gothic" pitchFamily="34" charset="-122"/>
                           <a:cs typeface="Yu Gothic" pitchFamily="34" charset="-120"/>
                         </a:rPr>
-                        <a:t>78.8%</a:t>
+                        <a:t>65.6%</a:t>
                       </a:r>
                       <a:endParaRPr lang="en-US" sz="950" dirty="0">
                         <a:latin typeface="Yu Gothic" charset="0"/>
@@ -16282,7 +16198,7 @@
                           <a:ea typeface="Yu Gothic" pitchFamily="34" charset="-122"/>
                           <a:cs typeface="Yu Gothic" pitchFamily="34" charset="-120"/>
                         </a:rPr>
-                        <a:t>193百万</a:t>
+                        <a:t>161百万</a:t>
                       </a:r>
                       <a:endParaRPr lang="en-US" sz="950" dirty="0">
                         <a:latin typeface="Yu Gothic" charset="0"/>
@@ -16350,7 +16266,7 @@
                           <a:ea typeface="Yu Gothic" pitchFamily="34" charset="-122"/>
                           <a:cs typeface="Yu Gothic" pitchFamily="34" charset="-120"/>
                         </a:rPr>
-                        <a:t>64.5%</a:t>
+                        <a:t>53.7%</a:t>
                       </a:r>
                       <a:endParaRPr lang="en-US" sz="950" dirty="0">
                         <a:latin typeface="Yu Gothic" charset="0"/>
@@ -16624,7 +16540,7 @@
                           <a:ea typeface="Yu Gothic" pitchFamily="34" charset="-122"/>
                           <a:cs typeface="Yu Gothic" pitchFamily="34" charset="-120"/>
                         </a:rPr>
-                        <a:t>165百万</a:t>
+                        <a:t>137百万</a:t>
                       </a:r>
                       <a:endParaRPr lang="en-US" sz="950" dirty="0">
                         <a:latin typeface="Yu Gothic" charset="0"/>
@@ -16692,7 +16608,7 @@
                           <a:ea typeface="Yu Gothic" pitchFamily="34" charset="-122"/>
                           <a:cs typeface="Yu Gothic" pitchFamily="34" charset="-120"/>
                         </a:rPr>
-                        <a:t>54.9%</a:t>
+                        <a:t>45.8%</a:t>
                       </a:r>
                       <a:endParaRPr lang="en-US" sz="950" dirty="0">
                         <a:latin typeface="Yu Gothic" charset="0"/>
@@ -17449,7 +17365,7 @@
                           <a:ea typeface="Yu Gothic" pitchFamily="34" charset="-122"/>
                           <a:cs typeface="Yu Gothic" pitchFamily="34" charset="-120"/>
                         </a:rPr>
-                        <a:t>113百万</a:t>
+                        <a:t>94百万</a:t>
                       </a:r>
                       <a:endParaRPr lang="en-US" sz="950" dirty="0">
                         <a:latin typeface="Yu Gothic" charset="0"/>
@@ -17517,7 +17433,7 @@
                           <a:ea typeface="Yu Gothic" pitchFamily="34" charset="-122"/>
                           <a:cs typeface="Yu Gothic" pitchFamily="34" charset="-120"/>
                         </a:rPr>
-                        <a:t>37.6%</a:t>
+                        <a:t>31.3%</a:t>
                       </a:r>
                       <a:endParaRPr lang="en-US" sz="950" dirty="0">
                         <a:latin typeface="Yu Gothic" charset="0"/>
@@ -17791,7 +17707,7 @@
                           <a:ea typeface="Yu Gothic" pitchFamily="34" charset="-122"/>
                           <a:cs typeface="Yu Gothic" pitchFamily="34" charset="-120"/>
                         </a:rPr>
-                        <a:t>82百万</a:t>
+                        <a:t>69百万</a:t>
                       </a:r>
                       <a:endParaRPr lang="en-US" sz="950" dirty="0">
                         <a:latin typeface="Yu Gothic" charset="0"/>
@@ -17859,7 +17775,7 @@
                           <a:ea typeface="Yu Gothic" pitchFamily="34" charset="-122"/>
                           <a:cs typeface="Yu Gothic" pitchFamily="34" charset="-120"/>
                         </a:rPr>
-                        <a:t>27.5%</a:t>
+                        <a:t>22.9%</a:t>
                       </a:r>
                       <a:endParaRPr lang="en-US" sz="950" dirty="0">
                         <a:latin typeface="Yu Gothic" charset="0"/>
@@ -18133,7 +18049,7 @@
                           <a:ea typeface="Yu Gothic" pitchFamily="34" charset="-122"/>
                           <a:cs typeface="Yu Gothic" pitchFamily="34" charset="-120"/>
                         </a:rPr>
-                        <a:t>64百万</a:t>
+                        <a:t>54百万</a:t>
                       </a:r>
                       <a:endParaRPr lang="en-US" sz="950" dirty="0">
                         <a:latin typeface="Yu Gothic" charset="0"/>
@@ -18195,13 +18111,13 @@
                       <a:r>
                         <a:rPr lang="en-US" sz="950" dirty="0">
                           <a:solidFill>
-                            <a:srgbClr val="EFEBE3"/>
+                            <a:srgbClr val="B4553F"/>
                           </a:solidFill>
                           <a:latin typeface="Yu Gothic" pitchFamily="34" charset="0"/>
                           <a:ea typeface="Yu Gothic" pitchFamily="34" charset="-122"/>
                           <a:cs typeface="Yu Gothic" pitchFamily="34" charset="-120"/>
                         </a:rPr>
-                        <a:t>21.4%</a:t>
+                        <a:t>17.8%</a:t>
                       </a:r>
                       <a:endParaRPr lang="en-US" sz="950" dirty="0">
                         <a:latin typeface="Yu Gothic" charset="0"/>
@@ -18475,7 +18391,7 @@
                           <a:ea typeface="Yu Gothic" pitchFamily="34" charset="-122"/>
                           <a:cs typeface="Yu Gothic" pitchFamily="34" charset="-120"/>
                         </a:rPr>
-                        <a:t>52百万</a:t>
+                        <a:t>43百万</a:t>
                       </a:r>
                       <a:endParaRPr lang="en-US" sz="950" dirty="0">
                         <a:latin typeface="Yu Gothic" charset="0"/>
@@ -18543,7 +18459,7 @@
                           <a:ea typeface="Yu Gothic" pitchFamily="34" charset="-122"/>
                           <a:cs typeface="Yu Gothic" pitchFamily="34" charset="-120"/>
                         </a:rPr>
-                        <a:t>17.4%</a:t>
+                        <a:t>14.5%</a:t>
                       </a:r>
                       <a:endParaRPr lang="en-US" sz="950" dirty="0">
                         <a:latin typeface="Yu Gothic" charset="0"/>
@@ -18635,7 +18551,7 @@
                 <a:ea typeface="Yu Gothic" pitchFamily="34" charset="-122"/>
                 <a:cs typeface="Yu Gothic" pitchFamily="34" charset="-120"/>
               </a:rPr>
-              <a:t>値引き（▲7.0pt）と価格横ばい（▲7.9pt）が同時に起きた複合ケース。この場合の20%の分岐点は回転15.9ヶ月となり、想定レンジの15〜18ヶ月に重なる。</a:t>
+              <a:t>値引き（▲5.8pt）と価格横ばい（▲6.6pt）が同時に起きた複合ケース。この場合の20%の分岐点は回転13.5ヶ月となり、想定レンジの中に入る。最も厳しい防衛線となる。</a:t>
             </a:r>
             <a:endParaRPr lang="en-US" sz="900" dirty="0"/>
           </a:p>
@@ -18743,7 +18659,7 @@
                 <a:ea typeface="Yu Gothic" pitchFamily="34" charset="-122"/>
                 <a:cs typeface="Yu Gothic" pitchFamily="34" charset="-120"/>
               </a:rPr>
-              <a:t>「回転を上げるために値引く」は割に合わない。売値5%の値引きは単位粗利を15%毀損し、失う投資家利回り7.0ポイントを取り戻すには回転を12ヶ月から約10ヶ月へ短縮する必要がある。価格を維持したまま販売チャネルを増やすことが本筋の改善手段であり、むしろ売れ残りは値上がりを取りにいく機会でもある。</a:t>
+              <a:t>「回転を上げるために値引く」は割に合わない。売値5%の値引きは単位粗利を15%毀損し、失う投資家利回り5.8ポイントを取り戻すには回転を12ヶ月から約10ヶ月へ短縮する必要がある。価格を維持したまま販売チャネルを増やすことが本筋の改善手段であり、むしろ売れ残りは値上がりを取りにいく機会でもある。</a:t>
             </a:r>
             <a:endParaRPr lang="en-US" sz="1150" dirty="0"/>
           </a:p>
@@ -18892,7 +18808,7 @@
                 <a:ea typeface="Yu Gothic" pitchFamily="34" charset="-122"/>
                 <a:cs typeface="Yu Gothic" pitchFamily="34" charset="-120"/>
               </a:rPr>
-              <a:t>出資3億円に対する投資家の年間実力値。WineBank側利回りは同条件で4.0ポイント下回る。</a:t>
+              <a:t>出資3億円に対する投資家の年間実力値。SPC税前利益の50%を投資家が受け取る前提。</a:t>
             </a:r>
             <a:endParaRPr lang="en-US" sz="1150" dirty="0"/>
           </a:p>
@@ -19121,7 +19037,7 @@
                 <a:ea typeface="Yu Gothic" pitchFamily="34" charset="-122"/>
                 <a:cs typeface="Yu Gothic" pitchFamily="34" charset="-120"/>
               </a:rPr>
-              <a:t>回転12ヶ月で投資家利回り42.0%。想定レンジ9〜18ヶ月では29.8〜54.2%となる。</a:t>
+              <a:t>回転12ヶ月で投資家利回り35.0%。想定レンジ9〜18ヶ月では24.8〜45.2%となる。</a:t>
             </a:r>
             <a:endParaRPr lang="en-US" sz="950" dirty="0"/>
           </a:p>
@@ -19337,7 +19253,7 @@
                 <a:ea typeface="Yu Gothic" pitchFamily="34" charset="-122"/>
                 <a:cs typeface="Yu Gothic" pitchFamily="34" charset="-120"/>
               </a:rPr>
-              <a:t>値引き5%と価格横ばいが重なった場合、20%の分岐点は回転15.9ヶ月。想定レンジの中に入るため最も厳しい防衛線となる。</a:t>
+              <a:t>値引き5%と価格横ばいが重なった場合、20%の分岐点は回転13.5ヶ月。想定レンジの中に入るため最も厳しい防衛線となる。</a:t>
             </a:r>
             <a:endParaRPr lang="en-US" sz="950" dirty="0"/>
           </a:p>
@@ -19486,7 +19402,7 @@
                 <a:ea typeface="Yu Gothic" pitchFamily="34" charset="-122"/>
                 <a:cs typeface="Yu Gothic" pitchFamily="34" charset="-120"/>
               </a:rPr>
-              <a:t>主線（在庫回転12ヶ月・投資家利回り42.0%）を基準とした、各変数の単独変動による影響。</a:t>
+              <a:t>主線（在庫回転12ヶ月・投資家利回り35.0%）を基準とした、各変数の単独変動による影響。</a:t>
             </a:r>
             <a:endParaRPr lang="en-US" sz="1150" dirty="0"/>
           </a:p>
@@ -19599,7 +19515,7 @@
                 <a:gridCol w="877824"/>
                 <a:gridCol w="3630168"/>
               </a:tblGrid>
-              <a:tr h="384048">
+              <a:tr h="356616">
                 <a:tc>
                   <a:txBody>
                     <a:bodyPr/>
@@ -19941,7 +19857,7 @@
                   </a:tcPr>
                 </a:tc>
               </a:tr>
-              <a:tr h="384048">
+              <a:tr h="356616">
                 <a:tc>
                   <a:txBody>
                     <a:bodyPr/>
@@ -20095,7 +20011,7 @@
                           <a:ea typeface="Yu Gothic" pitchFamily="34" charset="-122"/>
                           <a:cs typeface="Yu Gothic" pitchFamily="34" charset="-120"/>
                         </a:rPr>
-                        <a:t>42.0% → 29.8%（▲12.2pt）</a:t>
+                        <a:t>35.0% → 24.8%（▲10.2pt）</a:t>
                       </a:r>
                       <a:endParaRPr lang="en-US" sz="1000" dirty="0">
                         <a:latin typeface="Yu Gothic" charset="0"/>
@@ -20231,7 +20147,7 @@
                           <a:ea typeface="Yu Gothic" pitchFamily="34" charset="-122"/>
                           <a:cs typeface="Yu Gothic" pitchFamily="34" charset="-120"/>
                         </a:rPr>
-                        <a:t>SPC在庫の優先売却・販売チャネルの多重化</a:t>
+                        <a:t>組入銘柄の選定・販売チャネルの多重化</a:t>
                       </a:r>
                       <a:endParaRPr lang="en-US" sz="1000" dirty="0">
                         <a:latin typeface="Yu Gothic" charset="0"/>
@@ -20283,7 +20199,7 @@
                   </a:tcPr>
                 </a:tc>
               </a:tr>
-              <a:tr h="384048">
+              <a:tr h="356616">
                 <a:tc>
                   <a:txBody>
                     <a:bodyPr/>
@@ -20437,7 +20353,7 @@
                           <a:ea typeface="Yu Gothic" pitchFamily="34" charset="-122"/>
                           <a:cs typeface="Yu Gothic" pitchFamily="34" charset="-120"/>
                         </a:rPr>
-                        <a:t>42.0% → 34.1%（▲7.9pt）</a:t>
+                        <a:t>35.0% → 28.4%（▲6.6pt）</a:t>
                       </a:r>
                       <a:endParaRPr lang="en-US" sz="1000" dirty="0">
                         <a:latin typeface="Yu Gothic" charset="0"/>
@@ -20625,7 +20541,7 @@
                   </a:tcPr>
                 </a:tc>
               </a:tr>
-              <a:tr h="384048">
+              <a:tr h="356616">
                 <a:tc>
                   <a:txBody>
                     <a:bodyPr/>
@@ -20779,7 +20695,7 @@
                           <a:ea typeface="Yu Gothic" pitchFamily="34" charset="-122"/>
                           <a:cs typeface="Yu Gothic" pitchFamily="34" charset="-120"/>
                         </a:rPr>
-                        <a:t>42.0% → 35.0%（▲7.0pt）</a:t>
+                        <a:t>35.0% → 29.2%（▲5.8pt）</a:t>
                       </a:r>
                       <a:endParaRPr lang="en-US" sz="1000" dirty="0">
                         <a:latin typeface="Yu Gothic" charset="0"/>
@@ -20967,7 +20883,7 @@
                   </a:tcPr>
                 </a:tc>
               </a:tr>
-              <a:tr h="384048">
+              <a:tr h="356616">
                 <a:tc>
                   <a:txBody>
                     <a:bodyPr/>
@@ -21121,7 +21037,7 @@
                           <a:ea typeface="Yu Gothic" pitchFamily="34" charset="-122"/>
                           <a:cs typeface="Yu Gothic" pitchFamily="34" charset="-120"/>
                         </a:rPr>
-                        <a:t>42.0% → 37.4%（▲4.6pt）</a:t>
+                        <a:t>35.0% → 31.2%（▲3.8pt）</a:t>
                       </a:r>
                       <a:endParaRPr lang="en-US" sz="1000" dirty="0">
                         <a:latin typeface="Yu Gothic" charset="0"/>
@@ -21309,7 +21225,349 @@
                   </a:tcPr>
                 </a:tc>
               </a:tr>
-              <a:tr h="384048">
+              <a:tr h="356616">
+                <a:tc>
+                  <a:txBody>
+                    <a:bodyPr/>
+                    <a:lstStyle/>
+                    <a:p>
+                      <a:pPr algn="ctr" indent="0" marL="0">
+                        <a:buNone/>
+                      </a:pPr>
+                      <a:r>
+                        <a:rPr lang="en-US" sz="1000" dirty="0">
+                          <a:solidFill>
+                            <a:srgbClr val="EFEBE3"/>
+                          </a:solidFill>
+                          <a:latin typeface="Yu Gothic" pitchFamily="34" charset="0"/>
+                          <a:ea typeface="Yu Gothic" pitchFamily="34" charset="-122"/>
+                          <a:cs typeface="Yu Gothic" pitchFamily="34" charset="-120"/>
+                        </a:rPr>
+                        <a:t>B2Cのモール手数料</a:t>
+                      </a:r>
+                      <a:endParaRPr lang="en-US" sz="1000" dirty="0">
+                        <a:latin typeface="Yu Gothic" charset="0"/>
+                        <a:ea typeface="Yu Gothic" charset="0"/>
+                        <a:cs typeface="Yu Gothic" charset="0"/>
+                      </a:endParaRPr>
+                    </a:p>
+                  </a:txBody>
+                  <a:tcPr marL="45720" marR="45720" marT="45720" marB="45720" anchor="ctr">
+                    <a:lnL w="7620" cap="flat" cmpd="sng" algn="ctr">
+                      <a:solidFill>
+                        <a:srgbClr val="2E2A24"/>
+                      </a:solidFill>
+                      <a:prstDash val="solid"/>
+                      <a:round/>
+                      <a:headEnd type="none" w="med" len="med"/>
+                      <a:tailEnd type="none" w="med" len="med"/>
+                    </a:lnL>
+                    <a:lnR w="7620" cap="flat" cmpd="sng" algn="ctr">
+                      <a:solidFill>
+                        <a:srgbClr val="2E2A24"/>
+                      </a:solidFill>
+                      <a:prstDash val="solid"/>
+                      <a:round/>
+                      <a:headEnd type="none" w="med" len="med"/>
+                      <a:tailEnd type="none" w="med" len="med"/>
+                    </a:lnR>
+                    <a:lnT w="7620" cap="flat" cmpd="sng" algn="ctr">
+                      <a:solidFill>
+                        <a:srgbClr val="2E2A24"/>
+                      </a:solidFill>
+                      <a:prstDash val="solid"/>
+                      <a:round/>
+                      <a:headEnd type="none" w="med" len="med"/>
+                      <a:tailEnd type="none" w="med" len="med"/>
+                    </a:lnT>
+                    <a:lnB w="7620" cap="flat" cmpd="sng" algn="ctr">
+                      <a:solidFill>
+                        <a:srgbClr val="2E2A24"/>
+                      </a:solidFill>
+                      <a:prstDash val="solid"/>
+                      <a:round/>
+                      <a:headEnd type="none" w="med" len="med"/>
+                      <a:tailEnd type="none" w="med" len="med"/>
+                    </a:lnB>
+                    <a:solidFill>
+                      <a:srgbClr val="171614"/>
+                    </a:solidFill>
+                  </a:tcPr>
+                </a:tc>
+                <a:tc>
+                  <a:txBody>
+                    <a:bodyPr/>
+                    <a:lstStyle/>
+                    <a:p>
+                      <a:pPr algn="ctr" indent="0" marL="0">
+                        <a:buNone/>
+                      </a:pPr>
+                      <a:r>
+                        <a:rPr lang="en-US" sz="1000" dirty="0">
+                          <a:solidFill>
+                            <a:srgbClr val="EFEBE3"/>
+                          </a:solidFill>
+                          <a:latin typeface="Yu Gothic" pitchFamily="34" charset="0"/>
+                          <a:ea typeface="Yu Gothic" pitchFamily="34" charset="-122"/>
+                          <a:cs typeface="Yu Gothic" pitchFamily="34" charset="-120"/>
+                        </a:rPr>
+                        <a:t>5.5% → 8.0%</a:t>
+                      </a:r>
+                      <a:endParaRPr lang="en-US" sz="1000" dirty="0">
+                        <a:latin typeface="Yu Gothic" charset="0"/>
+                        <a:ea typeface="Yu Gothic" charset="0"/>
+                        <a:cs typeface="Yu Gothic" charset="0"/>
+                      </a:endParaRPr>
+                    </a:p>
+                  </a:txBody>
+                  <a:tcPr marL="45720" marR="45720" marT="45720" marB="45720" anchor="ctr">
+                    <a:lnL w="7620" cap="flat" cmpd="sng" algn="ctr">
+                      <a:solidFill>
+                        <a:srgbClr val="2E2A24"/>
+                      </a:solidFill>
+                      <a:prstDash val="solid"/>
+                      <a:round/>
+                      <a:headEnd type="none" w="med" len="med"/>
+                      <a:tailEnd type="none" w="med" len="med"/>
+                    </a:lnL>
+                    <a:lnR w="7620" cap="flat" cmpd="sng" algn="ctr">
+                      <a:solidFill>
+                        <a:srgbClr val="2E2A24"/>
+                      </a:solidFill>
+                      <a:prstDash val="solid"/>
+                      <a:round/>
+                      <a:headEnd type="none" w="med" len="med"/>
+                      <a:tailEnd type="none" w="med" len="med"/>
+                    </a:lnR>
+                    <a:lnT w="7620" cap="flat" cmpd="sng" algn="ctr">
+                      <a:solidFill>
+                        <a:srgbClr val="2E2A24"/>
+                      </a:solidFill>
+                      <a:prstDash val="solid"/>
+                      <a:round/>
+                      <a:headEnd type="none" w="med" len="med"/>
+                      <a:tailEnd type="none" w="med" len="med"/>
+                    </a:lnT>
+                    <a:lnB w="7620" cap="flat" cmpd="sng" algn="ctr">
+                      <a:solidFill>
+                        <a:srgbClr val="2E2A24"/>
+                      </a:solidFill>
+                      <a:prstDash val="solid"/>
+                      <a:round/>
+                      <a:headEnd type="none" w="med" len="med"/>
+                      <a:tailEnd type="none" w="med" len="med"/>
+                    </a:lnB>
+                    <a:solidFill>
+                      <a:srgbClr val="171614"/>
+                    </a:solidFill>
+                  </a:tcPr>
+                </a:tc>
+                <a:tc>
+                  <a:txBody>
+                    <a:bodyPr/>
+                    <a:lstStyle/>
+                    <a:p>
+                      <a:pPr algn="ctr" indent="0" marL="0">
+                        <a:buNone/>
+                      </a:pPr>
+                      <a:r>
+                        <a:rPr lang="en-US" sz="1000" dirty="0">
+                          <a:solidFill>
+                            <a:srgbClr val="9A938A"/>
+                          </a:solidFill>
+                          <a:latin typeface="Yu Gothic" pitchFamily="34" charset="0"/>
+                          <a:ea typeface="Yu Gothic" pitchFamily="34" charset="-122"/>
+                          <a:cs typeface="Yu Gothic" pitchFamily="34" charset="-120"/>
+                        </a:rPr>
+                        <a:t>35.0% → 33.3%（▲1.7pt）</a:t>
+                      </a:r>
+                      <a:endParaRPr lang="en-US" sz="1000" dirty="0">
+                        <a:latin typeface="Yu Gothic" charset="0"/>
+                        <a:ea typeface="Yu Gothic" charset="0"/>
+                        <a:cs typeface="Yu Gothic" charset="0"/>
+                      </a:endParaRPr>
+                    </a:p>
+                  </a:txBody>
+                  <a:tcPr marL="45720" marR="45720" marT="45720" marB="45720" anchor="ctr">
+                    <a:lnL w="7620" cap="flat" cmpd="sng" algn="ctr">
+                      <a:solidFill>
+                        <a:srgbClr val="2E2A24"/>
+                      </a:solidFill>
+                      <a:prstDash val="solid"/>
+                      <a:round/>
+                      <a:headEnd type="none" w="med" len="med"/>
+                      <a:tailEnd type="none" w="med" len="med"/>
+                    </a:lnL>
+                    <a:lnR w="7620" cap="flat" cmpd="sng" algn="ctr">
+                      <a:solidFill>
+                        <a:srgbClr val="2E2A24"/>
+                      </a:solidFill>
+                      <a:prstDash val="solid"/>
+                      <a:round/>
+                      <a:headEnd type="none" w="med" len="med"/>
+                      <a:tailEnd type="none" w="med" len="med"/>
+                    </a:lnR>
+                    <a:lnT w="7620" cap="flat" cmpd="sng" algn="ctr">
+                      <a:solidFill>
+                        <a:srgbClr val="2E2A24"/>
+                      </a:solidFill>
+                      <a:prstDash val="solid"/>
+                      <a:round/>
+                      <a:headEnd type="none" w="med" len="med"/>
+                      <a:tailEnd type="none" w="med" len="med"/>
+                    </a:lnT>
+                    <a:lnB w="7620" cap="flat" cmpd="sng" algn="ctr">
+                      <a:solidFill>
+                        <a:srgbClr val="2E2A24"/>
+                      </a:solidFill>
+                      <a:prstDash val="solid"/>
+                      <a:round/>
+                      <a:headEnd type="none" w="med" len="med"/>
+                      <a:tailEnd type="none" w="med" len="med"/>
+                    </a:lnB>
+                    <a:solidFill>
+                      <a:srgbClr val="171614"/>
+                    </a:solidFill>
+                  </a:tcPr>
+                </a:tc>
+                <a:tc>
+                  <a:txBody>
+                    <a:bodyPr/>
+                    <a:lstStyle/>
+                    <a:p>
+                      <a:pPr algn="ctr" indent="0" marL="0">
+                        <a:buNone/>
+                      </a:pPr>
+                      <a:r>
+                        <a:rPr lang="en-US" sz="1000" dirty="0">
+                          <a:solidFill>
+                            <a:srgbClr val="EFEBE3"/>
+                          </a:solidFill>
+                          <a:latin typeface="Yu Gothic" pitchFamily="34" charset="0"/>
+                          <a:ea typeface="Yu Gothic" pitchFamily="34" charset="-122"/>
+                          <a:cs typeface="Yu Gothic" pitchFamily="34" charset="-120"/>
+                        </a:rPr>
+                        <a:t>小</a:t>
+                      </a:r>
+                      <a:endParaRPr lang="en-US" sz="1000" dirty="0">
+                        <a:latin typeface="Yu Gothic" charset="0"/>
+                        <a:ea typeface="Yu Gothic" charset="0"/>
+                        <a:cs typeface="Yu Gothic" charset="0"/>
+                      </a:endParaRPr>
+                    </a:p>
+                  </a:txBody>
+                  <a:tcPr marL="45720" marR="45720" marT="45720" marB="45720" anchor="ctr">
+                    <a:lnL w="7620" cap="flat" cmpd="sng" algn="ctr">
+                      <a:solidFill>
+                        <a:srgbClr val="2E2A24"/>
+                      </a:solidFill>
+                      <a:prstDash val="solid"/>
+                      <a:round/>
+                      <a:headEnd type="none" w="med" len="med"/>
+                      <a:tailEnd type="none" w="med" len="med"/>
+                    </a:lnL>
+                    <a:lnR w="7620" cap="flat" cmpd="sng" algn="ctr">
+                      <a:solidFill>
+                        <a:srgbClr val="2E2A24"/>
+                      </a:solidFill>
+                      <a:prstDash val="solid"/>
+                      <a:round/>
+                      <a:headEnd type="none" w="med" len="med"/>
+                      <a:tailEnd type="none" w="med" len="med"/>
+                    </a:lnR>
+                    <a:lnT w="7620" cap="flat" cmpd="sng" algn="ctr">
+                      <a:solidFill>
+                        <a:srgbClr val="2E2A24"/>
+                      </a:solidFill>
+                      <a:prstDash val="solid"/>
+                      <a:round/>
+                      <a:headEnd type="none" w="med" len="med"/>
+                      <a:tailEnd type="none" w="med" len="med"/>
+                    </a:lnT>
+                    <a:lnB w="7620" cap="flat" cmpd="sng" algn="ctr">
+                      <a:solidFill>
+                        <a:srgbClr val="2E2A24"/>
+                      </a:solidFill>
+                      <a:prstDash val="solid"/>
+                      <a:round/>
+                      <a:headEnd type="none" w="med" len="med"/>
+                      <a:tailEnd type="none" w="med" len="med"/>
+                    </a:lnB>
+                    <a:solidFill>
+                      <a:srgbClr val="171614"/>
+                    </a:solidFill>
+                  </a:tcPr>
+                </a:tc>
+                <a:tc>
+                  <a:txBody>
+                    <a:bodyPr/>
+                    <a:lstStyle/>
+                    <a:p>
+                      <a:pPr algn="l" indent="0" marL="0">
+                        <a:buNone/>
+                      </a:pPr>
+                      <a:r>
+                        <a:rPr lang="en-US" sz="1000" dirty="0">
+                          <a:solidFill>
+                            <a:srgbClr val="EFEBE3"/>
+                          </a:solidFill>
+                          <a:latin typeface="Yu Gothic" pitchFamily="34" charset="0"/>
+                          <a:ea typeface="Yu Gothic" pitchFamily="34" charset="-122"/>
+                          <a:cs typeface="Yu Gothic" pitchFamily="34" charset="-120"/>
+                        </a:rPr>
+                        <a:t>自社EC・自社オークションの構成比を引き上げる</a:t>
+                      </a:r>
+                      <a:endParaRPr lang="en-US" sz="1000" dirty="0">
+                        <a:latin typeface="Yu Gothic" charset="0"/>
+                        <a:ea typeface="Yu Gothic" charset="0"/>
+                        <a:cs typeface="Yu Gothic" charset="0"/>
+                      </a:endParaRPr>
+                    </a:p>
+                  </a:txBody>
+                  <a:tcPr marL="45720" marR="45720" marT="45720" marB="45720" anchor="ctr">
+                    <a:lnL w="7620" cap="flat" cmpd="sng" algn="ctr">
+                      <a:solidFill>
+                        <a:srgbClr val="2E2A24"/>
+                      </a:solidFill>
+                      <a:prstDash val="solid"/>
+                      <a:round/>
+                      <a:headEnd type="none" w="med" len="med"/>
+                      <a:tailEnd type="none" w="med" len="med"/>
+                    </a:lnL>
+                    <a:lnR w="7620" cap="flat" cmpd="sng" algn="ctr">
+                      <a:solidFill>
+                        <a:srgbClr val="2E2A24"/>
+                      </a:solidFill>
+                      <a:prstDash val="solid"/>
+                      <a:round/>
+                      <a:headEnd type="none" w="med" len="med"/>
+                      <a:tailEnd type="none" w="med" len="med"/>
+                    </a:lnR>
+                    <a:lnT w="7620" cap="flat" cmpd="sng" algn="ctr">
+                      <a:solidFill>
+                        <a:srgbClr val="2E2A24"/>
+                      </a:solidFill>
+                      <a:prstDash val="solid"/>
+                      <a:round/>
+                      <a:headEnd type="none" w="med" len="med"/>
+                      <a:tailEnd type="none" w="med" len="med"/>
+                    </a:lnT>
+                    <a:lnB w="7620" cap="flat" cmpd="sng" algn="ctr">
+                      <a:solidFill>
+                        <a:srgbClr val="2E2A24"/>
+                      </a:solidFill>
+                      <a:prstDash val="solid"/>
+                      <a:round/>
+                      <a:headEnd type="none" w="med" len="med"/>
+                      <a:tailEnd type="none" w="med" len="med"/>
+                    </a:lnB>
+                    <a:solidFill>
+                      <a:srgbClr val="171614"/>
+                    </a:solidFill>
+                  </a:tcPr>
+                </a:tc>
+              </a:tr>
+              <a:tr h="356616">
                 <a:tc>
                   <a:txBody>
                     <a:bodyPr/>
@@ -21463,7 +21721,7 @@
                           <a:ea typeface="Yu Gothic" pitchFamily="34" charset="-122"/>
                           <a:cs typeface="Yu Gothic" pitchFamily="34" charset="-120"/>
                         </a:rPr>
-                        <a:t>42.0% → 47.3%（＋5.3pt）</a:t>
+                        <a:t>35.0% → 39.4%（＋4.4pt）</a:t>
                       </a:r>
                       <a:endParaRPr lang="en-US" sz="1000" dirty="0">
                         <a:latin typeface="Yu Gothic" charset="0"/>
@@ -21651,7 +21909,7 @@
                   </a:tcPr>
                 </a:tc>
               </a:tr>
-              <a:tr h="384048">
+              <a:tr h="356616">
                 <a:tc>
                   <a:txBody>
                     <a:bodyPr/>
@@ -21805,7 +22063,7 @@
                           <a:ea typeface="Yu Gothic" pitchFamily="34" charset="-122"/>
                           <a:cs typeface="Yu Gothic" pitchFamily="34" charset="-120"/>
                         </a:rPr>
-                        <a:t>42.0% → 57.4%（＋15.4pt）</a:t>
+                        <a:t>35.0% → 47.8%（＋12.8pt）</a:t>
                       </a:r>
                       <a:endParaRPr lang="en-US" sz="1000" dirty="0">
                         <a:latin typeface="Yu Gothic" charset="0"/>
@@ -22060,7 +22318,7 @@
                 <a:ea typeface="Yu Gothic" pitchFamily="34" charset="-122"/>
                 <a:cs typeface="Yu Gothic" pitchFamily="34" charset="-120"/>
               </a:rPr>
-              <a:t>結論：投資家利回りが20%を割り込むのは、回転が30ヶ月を超えた場合のみ（ニュートラル前提）で、想定レンジ9〜18ヶ月の外にある。ただし値引き5%と価格横ばいが同時に起きる複合的な下振れ（ネガティブ）では、回転15.9ヶ月が20%の分岐点となり想定レンジの中に入る。なお、インポーターの仕入価格が上昇する局面では希望小売価格も連動して上昇するため、定価比の構造は維持され、利回りへの影響は生じない。</a:t>
+              <a:t>結論：投資家利回りが20%を割り込むのは、回転が23.7ヶ月を超えた場合（ニュートラル前提）で、想定レンジ9〜18ヶ月の外にある。ただし値引き5%と価格横ばいが同時に起きる複合的な下振れ（ネガティブ）では、回転13.5ヶ月が20%の分岐点となり想定レンジの中に入る。なお、インポーターの仕入価格が上昇する局面では希望小売価格も連動して上昇するため、定価比の構造は維持され、利回りへの影響は生じない。</a:t>
             </a:r>
             <a:endParaRPr lang="en-US" sz="1100" dirty="0"/>
           </a:p>
@@ -27633,7 +27891,7 @@
                 <a:ea typeface="Cambria" pitchFamily="34" charset="-122"/>
                 <a:cs typeface="Cambria" pitchFamily="34" charset="-120"/>
               </a:rPr>
-              <a:t>42.0</a:t>
+              <a:t>35.0</a:t>
             </a:r>
             <a:pPr indent="0" marL="0">
               <a:buNone/>
@@ -27728,7 +27986,7 @@
                 <a:ea typeface="Yu Gothic" pitchFamily="34" charset="-122"/>
                 <a:cs typeface="Yu Gothic" pitchFamily="34" charset="-120"/>
               </a:rPr>
-              <a:t>出資3億円に対する取分。デットの効果は含まない</a:t>
+              <a:t>出資3億円に対し、SPC税前利益の50%を受領</a:t>
             </a:r>
             <a:endParaRPr lang="en-US" sz="900" dirty="0"/>
           </a:p>
@@ -27794,7 +28052,7 @@
                 <a:ea typeface="Cambria" pitchFamily="34" charset="-122"/>
                 <a:cs typeface="Cambria" pitchFamily="34" charset="-120"/>
               </a:rPr>
-              <a:t>33.5</a:t>
+              <a:t>27.9</a:t>
             </a:r>
             <a:pPr indent="0" marL="0">
               <a:buNone/>
@@ -27889,7 +28147,7 @@
                 <a:ea typeface="Yu Gothic" pitchFamily="34" charset="-122"/>
                 <a:cs typeface="Yu Gothic" pitchFamily="34" charset="-120"/>
               </a:rPr>
-              <a:t>在庫回転12ヶ月／累計分配額÷出資額÷5年</a:t>
+              <a:t>在庫回転12ヶ月／累計分配額÷出資3億円÷5年</a:t>
             </a:r>
             <a:endParaRPr lang="en-US" sz="900" dirty="0"/>
           </a:p>
@@ -28276,7 +28534,7 @@
                 <a:ea typeface="Yu Gothic" pitchFamily="34" charset="-122"/>
                 <a:cs typeface="Yu Gothic" pitchFamily="34" charset="-120"/>
               </a:rPr>
-              <a:t>デットはWineBank側の資金調達であり、投資家の利回りには影響しない。</a:t>
+              <a:t>損益は従来どおり折半。投資家は出資3億円に対しSPC税前利益の50%を受け取る。</a:t>
             </a:r>
             <a:endParaRPr lang="en-US" sz="1200" dirty="0"/>
           </a:p>
@@ -28315,7 +28573,7 @@
                 <a:ea typeface="Yu Gothic" pitchFamily="34" charset="-122"/>
                 <a:cs typeface="Yu Gothic" pitchFamily="34" charset="-120"/>
               </a:rPr>
-              <a:t>デット2億円の金利はWineBankが負担し、その見返りにWineBankは出資持分2億円相当としてカウントされる。投資家利回りは出資3億円に対する取分であり、レバレッジによる嵩上げを含まない。</a:t>
+              <a:t>デット2億円の金利と保証責任はWineBankが負担する。投資家利回り35.0%は、粗利率30.0%を投下原価ベースに直した投下原価利益率47.3%から、SPC費用と折半を経て導かれる。</a:t>
             </a:r>
             <a:endParaRPr lang="en-US" sz="1000" dirty="0"/>
           </a:p>
@@ -29492,7 +29750,7 @@
                           <a:ea typeface="Yu Gothic" pitchFamily="34" charset="-122"/>
                           <a:cs typeface="Yu Gothic" pitchFamily="34" charset="-120"/>
                         </a:rPr>
-                        <a:t>SPC税前利益を 投資家60：WineBank40 で按分。WineBankはデット2億円相当を出資持分としてカウント</a:t>
+                        <a:t>SPC税前利益を折半（投資家50：WineBank50）。WineBankは現金拠出なし・期中報酬も成功報酬も課さない</a:t>
                       </a:r>
                       <a:endParaRPr lang="en-US" sz="900" dirty="0">
                         <a:latin typeface="Yu Gothic" charset="0"/>
@@ -31178,7 +31436,7 @@
                           <a:ea typeface="Yu Gothic" pitchFamily="34" charset="-122"/>
                           <a:cs typeface="Yu Gothic" pitchFamily="34" charset="-120"/>
                         </a:rPr>
-                        <a:t>投資家利回り42.0%（在庫回転12ヶ月・定常年間）。5年通算の年平均利回りは33.5%</a:t>
+                        <a:t>投資家利回り35.0%（在庫回転12ヶ月・定常年間）。5年通算の年平均利回りは27.9%</a:t>
                       </a:r>
                       <a:endParaRPr lang="en-US" sz="900" dirty="0">
                         <a:latin typeface="Yu Gothic" charset="0"/>
@@ -31750,7 +32008,7 @@
                 <a:ea typeface="Yu Gothic" pitchFamily="34" charset="-122"/>
                 <a:cs typeface="Yu Gothic" pitchFamily="34" charset="-120"/>
               </a:rPr>
-              <a:t>半期解約を前提とすると常時1〜3割を現金または即時換金可能な在庫で保有する必要があり、稼働率が下がって利回りも下がる（稼働率95%→85%で投資家利回りは42.0%→37.4%）。当初3年ロックアップ・4年目以降は年度ごとの解約という設計により、現金保有を5%に抑え、総額の95%をワインに充当できる。</a:t>
+              <a:t>半期解約を前提とすると常時1〜3割を現金または即時換金可能な在庫で保有する必要があり、稼働率が下がって利回りも下がる（稼働率95%→85%で投資家利回りは35.0%→31.2%）。当初3年ロックアップ・4年目以降は年度ごとの解約という設計により、現金保有を5%に抑え、総額の95%をワインに充当できる。</a:t>
             </a:r>
             <a:endParaRPr lang="en-US" sz="900" dirty="0"/>
           </a:p>
@@ -33414,7 +33672,7 @@
                 <a:ea typeface="Yu Gothic" pitchFamily="34" charset="-122"/>
                 <a:cs typeface="Yu Gothic" pitchFamily="34" charset="-120"/>
               </a:rPr>
-              <a:t>流通価格差（回転に対するリターン）とワインの値上がり（在庫に対するリターン）。価格が横ばいでも投資家利回り34.1%、回転が18ヶ月に延びても29.8%を確保する。</a:t>
+              <a:t>流通価格差（回転に対するリターン）とワインの値上がり（在庫に対するリターン）。価格が横ばいでも投資家利回り28.4%、回転が18ヶ月に延びても24.8%を確保する。</a:t>
             </a:r>
             <a:endParaRPr lang="en-US" sz="900" dirty="0"/>
           </a:p>
@@ -33930,7 +34188,7 @@
                 <a:ea typeface="Yu Gothic" pitchFamily="34" charset="-122"/>
                 <a:cs typeface="Yu Gothic" pitchFamily="34" charset="-120"/>
               </a:rPr>
-              <a:t>期中報酬も成功報酬も取らない。デット2億円の金利はWineBankが負担するため、WineBank側利回り38.0%は投資家の42.0%を常に下回る。投資家が儲からなければWineBankも儲からない。</a:t>
+              <a:t>期中報酬も成功報酬も取らず、報酬はSPC税前利益の折半に一本化されている。加えてデット2億円の金利と保証責任もWineBankが負担する。投資家が儲からなければWineBankも儲からない。</a:t>
             </a:r>
             <a:endParaRPr lang="en-US" sz="900" dirty="0"/>
           </a:p>
@@ -34130,7 +34388,7 @@
                 <a:ea typeface="Yu Gothic" pitchFamily="34" charset="-122"/>
                 <a:cs typeface="Yu Gothic" pitchFamily="34" charset="-120"/>
               </a:rPr>
-              <a:t>在庫回転12ヶ月を主線とし、投資家利回り42.0%。想定レンジ9〜18ヶ月では29.8〜54.2%となり、いずれも貴社基準を上回る。</a:t>
+              <a:t>在庫回転12ヶ月を主線とし、投資家利回り35.0%。想定レンジ9〜18ヶ月では24.8〜45.2%となり、いずれも貴社基準を上回る。</a:t>
             </a:r>
             <a:endParaRPr lang="en-US" sz="900" dirty="0"/>
           </a:p>
@@ -34348,7 +34606,7 @@
                 <a:ea typeface="Yu Gothic" pitchFamily="34" charset="-122"/>
                 <a:cs typeface="Yu Gothic" pitchFamily="34" charset="-120"/>
               </a:rPr>
-              <a:t>この設計により現金保有を5%に抑え、総額の95%をワインに充当できる。半期解約を前提とすると稼働率が下がり42.0%→37.4%に低下する。</a:t>
+              <a:t>この設計により現金保有を5%に抑え、総額の95%をワインに充当できる。半期解約を前提とすると稼働率が下がり35.0%→31.2%に低下する。</a:t>
             </a:r>
             <a:endParaRPr lang="en-US" sz="900" dirty="0"/>
           </a:p>
@@ -35442,7 +35700,7 @@
                 <a:ea typeface="Yu Gothic" pitchFamily="34" charset="-122"/>
                 <a:cs typeface="Yu Gothic" pitchFamily="34" charset="-120"/>
               </a:rPr>
-              <a:t>エクイティ｜投資家</a:t>
+              <a:t>出資｜投資家</a:t>
             </a:r>
             <a:endParaRPr lang="en-US" sz="1150" dirty="0"/>
           </a:p>
@@ -35534,7 +35792,7 @@
                 <a:ea typeface="Yu Gothic" pitchFamily="34" charset="-122"/>
                 <a:cs typeface="Yu Gothic" pitchFamily="34" charset="-120"/>
               </a:rPr>
-              <a:t>SPC税前利益の60%</a:t>
+              <a:t>SPC税前利益の50%</a:t>
             </a:r>
             <a:endParaRPr lang="en-US" sz="1100" dirty="0"/>
           </a:p>
@@ -35682,7 +35940,7 @@
                 <a:ea typeface="Yu Gothic" pitchFamily="34" charset="-122"/>
                 <a:cs typeface="Yu Gothic" pitchFamily="34" charset="-120"/>
               </a:rPr>
-              <a:t>エクイティ相当｜WineBank</a:t>
+              <a:t>GP｜WineBank</a:t>
             </a:r>
             <a:endParaRPr lang="en-US" sz="1150" dirty="0"/>
           </a:p>
@@ -35721,7 +35979,7 @@
                 <a:ea typeface="Cambria" pitchFamily="34" charset="-122"/>
                 <a:cs typeface="Cambria" pitchFamily="34" charset="-120"/>
               </a:rPr>
-              <a:t>2.0</a:t>
+              <a:t>97</a:t>
             </a:r>
             <a:pPr indent="0" marL="0">
               <a:buNone/>
@@ -35735,7 +35993,7 @@
                 <a:ea typeface="Yu Gothic" pitchFamily="34" charset="-122"/>
                 <a:cs typeface="Yu Gothic" pitchFamily="34" charset="-120"/>
               </a:rPr>
-              <a:t> 億円</a:t>
+              <a:t> 百万円</a:t>
             </a:r>
             <a:endParaRPr lang="en-US" sz="3000" dirty="0"/>
           </a:p>
@@ -35774,7 +36032,7 @@
                 <a:ea typeface="Yu Gothic" pitchFamily="34" charset="-122"/>
                 <a:cs typeface="Yu Gothic" pitchFamily="34" charset="-120"/>
               </a:rPr>
-              <a:t>SPC税前利益の40%</a:t>
+              <a:t>SPC税前利益の50%（金利負担後の年間取分）</a:t>
             </a:r>
             <a:endParaRPr lang="en-US" sz="1100" dirty="0"/>
           </a:p>
@@ -35836,7 +36094,7 @@
                 <a:ea typeface="Yu Gothic" pitchFamily="34" charset="-122"/>
                 <a:cs typeface="Yu Gothic" pitchFamily="34" charset="-120"/>
               </a:rPr>
-              <a:t>・デット2億の調達コストを負担</a:t>
+              <a:t>・デット2億の金利と保証責任を負担</a:t>
             </a:r>
             <a:endParaRPr lang="en-US" sz="900" dirty="0"/>
           </a:p>
@@ -35856,7 +36114,7 @@
                 <a:ea typeface="Yu Gothic" pitchFamily="34" charset="-122"/>
                 <a:cs typeface="Yu Gothic" pitchFamily="34" charset="-120"/>
               </a:rPr>
-              <a:t>・その対価として持分にカウント</a:t>
+              <a:t>・期中報酬・成功報酬は取らない</a:t>
             </a:r>
             <a:endParaRPr lang="en-US" sz="900" dirty="0"/>
           </a:p>
@@ -36319,7 +36577,7 @@
                           <a:ea typeface="Yu Gothic" pitchFamily="34" charset="-122"/>
                           <a:cs typeface="Yu Gothic" pitchFamily="34" charset="-120"/>
                         </a:rPr>
-                        <a:t>├ 投資家 60%</a:t>
+                        <a:t>├ 投資家 50%</a:t>
                       </a:r>
                       <a:endParaRPr lang="en-US" sz="1000" dirty="0">
                         <a:latin typeface="Yu Gothic" charset="0"/>
@@ -36387,7 +36645,7 @@
                           <a:ea typeface="Yu Gothic" pitchFamily="34" charset="-122"/>
                           <a:cs typeface="Yu Gothic" pitchFamily="34" charset="-120"/>
                         </a:rPr>
-                        <a:t>126百万円</a:t>
+                        <a:t>105百万円</a:t>
                       </a:r>
                       <a:endParaRPr lang="en-US" sz="1000" dirty="0">
                         <a:latin typeface="Yu Gothic" charset="0"/>
@@ -36455,7 +36713,7 @@
                           <a:ea typeface="Yu Gothic" pitchFamily="34" charset="-122"/>
                           <a:cs typeface="Yu Gothic" pitchFamily="34" charset="-120"/>
                         </a:rPr>
-                        <a:t>出資3億円に対し 投資家利回り 42.0%</a:t>
+                        <a:t>出資3億円に対し 投資家利回り 35.0%</a:t>
                       </a:r>
                       <a:endParaRPr lang="en-US" sz="1000" dirty="0">
                         <a:latin typeface="Yu Gothic" charset="0"/>
@@ -36525,7 +36783,7 @@
                           <a:ea typeface="Yu Gothic" pitchFamily="34" charset="-122"/>
                           <a:cs typeface="Yu Gothic" pitchFamily="34" charset="-120"/>
                         </a:rPr>
-                        <a:t>└ WineBank 40%</a:t>
+                        <a:t>└ WineBank 50%</a:t>
                       </a:r>
                       <a:endParaRPr lang="en-US" sz="1000" dirty="0">
                         <a:latin typeface="Yu Gothic" charset="0"/>
@@ -36593,7 +36851,7 @@
                           <a:ea typeface="Yu Gothic" pitchFamily="34" charset="-122"/>
                           <a:cs typeface="Yu Gothic" pitchFamily="34" charset="-120"/>
                         </a:rPr>
-                        <a:t>84百万円</a:t>
+                        <a:t>105百万円</a:t>
                       </a:r>
                       <a:endParaRPr lang="en-US" sz="1000" dirty="0">
                         <a:latin typeface="Yu Gothic" charset="0"/>
@@ -36661,7 +36919,7 @@
                           <a:ea typeface="Yu Gothic" pitchFamily="34" charset="-122"/>
                           <a:cs typeface="Yu Gothic" pitchFamily="34" charset="-120"/>
                         </a:rPr>
-                        <a:t>デット金利8百万円を負担 → 手取り76百万円。持分相当2億円に対し WineBank側利回り 38.0%</a:t>
+                        <a:t>デット2億円の金利8百万円を負担 → 年間取分97百万円。現金拠出はないため利回りの形では示さない</a:t>
                       </a:r>
                       <a:endParaRPr lang="en-US" sz="1000" dirty="0">
                         <a:latin typeface="Yu Gothic" charset="0"/>
@@ -37025,7 +37283,7 @@
                 <a:ea typeface="Yu Gothic" pitchFamily="34" charset="-122"/>
                 <a:cs typeface="Yu Gothic" pitchFamily="34" charset="-120"/>
               </a:rPr>
-              <a:t>デットはWineBankが調達コストを負担する借入であり、投資家の出資とは切り離されている。投資家の出資比率（3億円÷5億円＝60%）と損益の配分比率（60%）が一致しているため、投資家利回り42.0%はSPCの資産利回りそのものであり、レバレッジによって嵩上げされた数値ではない。WineBank側利回りは38.0%と投資家を4.0ポイント下回る。両者の差は、WineBankがデット2億円の金利と保証責任を負っていることによる。</a:t>
+              <a:t>損益の配分は従来どおりSPC税前利益の折半であり、この点は変更していない。投資家は出資3億円に対して税前利益の50%を受け取る。デット2億円はWineBankが金利と保証責任を負う借入であり、投資家の出資とは切り離されている。WineBankは現金を拠出しないため、その取分は金額（年間97百万円）で示す。WineBankは期中報酬も成功報酬も取らず、報酬はこの利益折半に一本化されている。</a:t>
             </a:r>
             <a:endParaRPr lang="en-US" sz="900" dirty="0"/>
           </a:p>
@@ -37511,7 +37769,7 @@
                           <a:ea typeface="Yu Gothic" pitchFamily="34" charset="-122"/>
                           <a:cs typeface="Yu Gothic" pitchFamily="34" charset="-120"/>
                         </a:rPr>
-                        <a:t>投資家取分（60%）</a:t>
+                        <a:t>投資家取分（50%）</a:t>
                       </a:r>
                       <a:endParaRPr lang="en-US" sz="950" dirty="0">
                         <a:latin typeface="Yu Gothic" charset="0"/>
@@ -37647,7 +37905,7 @@
                           <a:ea typeface="Yu Gothic" pitchFamily="34" charset="-122"/>
                           <a:cs typeface="Yu Gothic" pitchFamily="34" charset="-120"/>
                         </a:rPr>
-                        <a:t>WineBank側利回り</a:t>
+                        <a:t>WineBank取分</a:t>
                       </a:r>
                       <a:endParaRPr lang="en-US" sz="950" dirty="0">
                         <a:latin typeface="Yu Gothic" charset="0"/>
@@ -37989,7 +38247,7 @@
                           <a:ea typeface="Yu Gothic" pitchFamily="34" charset="-122"/>
                           <a:cs typeface="Yu Gothic" pitchFamily="34" charset="-120"/>
                         </a:rPr>
-                        <a:t>163百万円</a:t>
+                        <a:t>136百万円</a:t>
                       </a:r>
                       <a:endParaRPr lang="en-US" sz="1000" dirty="0">
                         <a:latin typeface="Yu Gothic" charset="0"/>
@@ -38057,7 +38315,7 @@
                           <a:ea typeface="Yu Gothic" pitchFamily="34" charset="-122"/>
                           <a:cs typeface="Yu Gothic" pitchFamily="34" charset="-120"/>
                         </a:rPr>
-                        <a:t>54.2%</a:t>
+                        <a:t>45.2%</a:t>
                       </a:r>
                       <a:endParaRPr lang="en-US" sz="1000" dirty="0">
                         <a:latin typeface="Yu Gothic" charset="0"/>
@@ -38125,7 +38383,7 @@
                           <a:ea typeface="Yu Gothic" pitchFamily="34" charset="-122"/>
                           <a:cs typeface="Yu Gothic" pitchFamily="34" charset="-120"/>
                         </a:rPr>
-                        <a:t>50.2%</a:t>
+                        <a:t>128百万円</a:t>
                       </a:r>
                       <a:endParaRPr lang="en-US" sz="1000" dirty="0">
                         <a:latin typeface="Yu Gothic" charset="0"/>
@@ -38467,7 +38725,7 @@
                           <a:ea typeface="Yu Gothic" pitchFamily="34" charset="-122"/>
                           <a:cs typeface="Yu Gothic" pitchFamily="34" charset="-120"/>
                         </a:rPr>
-                        <a:t>126百万円</a:t>
+                        <a:t>105百万円</a:t>
                       </a:r>
                       <a:endParaRPr lang="en-US" sz="1000" dirty="0">
                         <a:latin typeface="Yu Gothic" charset="0"/>
@@ -38535,7 +38793,7 @@
                           <a:ea typeface="Yu Gothic" pitchFamily="34" charset="-122"/>
                           <a:cs typeface="Yu Gothic" pitchFamily="34" charset="-120"/>
                         </a:rPr>
-                        <a:t>42.0%</a:t>
+                        <a:t>35.0%</a:t>
                       </a:r>
                       <a:endParaRPr lang="en-US" sz="1000" dirty="0">
                         <a:latin typeface="Yu Gothic" charset="0"/>
@@ -38603,7 +38861,7 @@
                           <a:ea typeface="Yu Gothic" pitchFamily="34" charset="-122"/>
                           <a:cs typeface="Yu Gothic" pitchFamily="34" charset="-120"/>
                         </a:rPr>
-                        <a:t>38.0%</a:t>
+                        <a:t>97百万円</a:t>
                       </a:r>
                       <a:endParaRPr lang="en-US" sz="1000" dirty="0">
                         <a:latin typeface="Yu Gothic" charset="0"/>
@@ -38945,7 +39203,7 @@
                           <a:ea typeface="Yu Gothic" pitchFamily="34" charset="-122"/>
                           <a:cs typeface="Yu Gothic" pitchFamily="34" charset="-120"/>
                         </a:rPr>
-                        <a:t>104百万円</a:t>
+                        <a:t>87百万円</a:t>
                       </a:r>
                       <a:endParaRPr lang="en-US" sz="1000" dirty="0">
                         <a:latin typeface="Yu Gothic" charset="0"/>
@@ -39013,7 +39271,7 @@
                           <a:ea typeface="Yu Gothic" pitchFamily="34" charset="-122"/>
                           <a:cs typeface="Yu Gothic" pitchFamily="34" charset="-120"/>
                         </a:rPr>
-                        <a:t>34.7%</a:t>
+                        <a:t>28.9%</a:t>
                       </a:r>
                       <a:endParaRPr lang="en-US" sz="1000" dirty="0">
                         <a:latin typeface="Yu Gothic" charset="0"/>
@@ -39081,7 +39339,7 @@
                           <a:ea typeface="Yu Gothic" pitchFamily="34" charset="-122"/>
                           <a:cs typeface="Yu Gothic" pitchFamily="34" charset="-120"/>
                         </a:rPr>
-                        <a:t>30.7%</a:t>
+                        <a:t>79百万円</a:t>
                       </a:r>
                       <a:endParaRPr lang="en-US" sz="1000" dirty="0">
                         <a:latin typeface="Yu Gothic" charset="0"/>
@@ -39423,7 +39681,7 @@
                           <a:ea typeface="Yu Gothic" pitchFamily="34" charset="-122"/>
                           <a:cs typeface="Yu Gothic" pitchFamily="34" charset="-120"/>
                         </a:rPr>
-                        <a:t>89百万円</a:t>
+                        <a:t>74百万円</a:t>
                       </a:r>
                       <a:endParaRPr lang="en-US" sz="1000" dirty="0">
                         <a:latin typeface="Yu Gothic" charset="0"/>
@@ -39491,7 +39749,7 @@
                           <a:ea typeface="Yu Gothic" pitchFamily="34" charset="-122"/>
                           <a:cs typeface="Yu Gothic" pitchFamily="34" charset="-120"/>
                         </a:rPr>
-                        <a:t>29.8%</a:t>
+                        <a:t>24.8%</a:t>
                       </a:r>
                       <a:endParaRPr lang="en-US" sz="1000" dirty="0">
                         <a:latin typeface="Yu Gothic" charset="0"/>
@@ -39559,7 +39817,7 @@
                           <a:ea typeface="Yu Gothic" pitchFamily="34" charset="-122"/>
                           <a:cs typeface="Yu Gothic" pitchFamily="34" charset="-120"/>
                         </a:rPr>
-                        <a:t>25.8%</a:t>
+                        <a:t>66百万円</a:t>
                       </a:r>
                       <a:endParaRPr lang="en-US" sz="1000" dirty="0">
                         <a:latin typeface="Yu Gothic" charset="0"/>
@@ -40160,7 +40418,7 @@
                 <a:ea typeface="Yu Gothic" pitchFamily="34" charset="-122"/>
                 <a:cs typeface="Yu Gothic" pitchFamily="34" charset="-120"/>
               </a:rPr>
-              <a:t>※ 回転12ヶ月に必要な年間販売額7.48億円は、現状の販売実力（5〜7億円）の上限をやや上回る。銘柄の大半はSPCと自己勘定で重複しないため配分の判断自体が生じず、回転期間は「何を組み入れるか」でほぼ決まる。重複銘柄の取扱いは在庫配分の公平性の頁を参照。投資家利回りが20%を割り込むのは回転が30ヶ月を超えた場合。</a:t>
+              <a:t>※ 回転12ヶ月に必要な年間販売額7.48億円は、現状の販売実力（5〜7億円）の上限をやや上回る。銘柄の大半はSPCと自己勘定で重複しないため配分の判断自体が生じず、回転期間は「何を組み入れるか」でほぼ決まる。重複銘柄の取扱いは在庫配分の公平性の頁を参照。投資家利回りが20%を割り込むのは回転が23.7ヶ月を超えた場合。</a:t>
             </a:r>
             <a:endParaRPr lang="en-US" sz="850" dirty="0"/>
           </a:p>
@@ -46262,8 +46520,8 @@
         </p:nvSpPr>
         <p:spPr>
           <a:xfrm>
-            <a:off x="658368" y="1664208"/>
-            <a:ext cx="3429914" cy="3657600"/>
+            <a:off x="658368" y="1627632"/>
+            <a:ext cx="3429914" cy="3931920"/>
           </a:xfrm>
           <a:prstGeom prst="roundRect">
             <a:avLst>
@@ -46406,7 +46664,7 @@
         </p:nvSpPr>
         <p:spPr>
           <a:xfrm>
-            <a:off x="914400" y="2528316"/>
+            <a:off x="914400" y="2519172"/>
             <a:ext cx="1966874" cy="237744"/>
           </a:xfrm>
           <a:prstGeom prst="rect">
@@ -46445,7 +46703,7 @@
         </p:nvSpPr>
         <p:spPr>
           <a:xfrm>
-            <a:off x="2606954" y="2528316"/>
+            <a:off x="2606954" y="2519172"/>
             <a:ext cx="1225296" cy="237744"/>
           </a:xfrm>
           <a:prstGeom prst="rect">
@@ -46484,7 +46742,7 @@
         </p:nvSpPr>
         <p:spPr>
           <a:xfrm>
-            <a:off x="914400" y="2825496"/>
+            <a:off x="914400" y="2807208"/>
             <a:ext cx="1966874" cy="237744"/>
           </a:xfrm>
           <a:prstGeom prst="rect">
@@ -46523,7 +46781,7 @@
         </p:nvSpPr>
         <p:spPr>
           <a:xfrm>
-            <a:off x="2606954" y="2825496"/>
+            <a:off x="2606954" y="2807208"/>
             <a:ext cx="1225296" cy="237744"/>
           </a:xfrm>
           <a:prstGeom prst="rect">
@@ -46562,7 +46820,7 @@
         </p:nvSpPr>
         <p:spPr>
           <a:xfrm>
-            <a:off x="914400" y="3122676"/>
+            <a:off x="914400" y="3095244"/>
             <a:ext cx="1966874" cy="237744"/>
           </a:xfrm>
           <a:prstGeom prst="rect">
@@ -46601,7 +46859,7 @@
         </p:nvSpPr>
         <p:spPr>
           <a:xfrm>
-            <a:off x="2606954" y="3122676"/>
+            <a:off x="2606954" y="3095244"/>
             <a:ext cx="1225296" cy="237744"/>
           </a:xfrm>
           <a:prstGeom prst="rect">
@@ -46640,7 +46898,7 @@
         </p:nvSpPr>
         <p:spPr>
           <a:xfrm>
-            <a:off x="914400" y="3419856"/>
+            <a:off x="914400" y="3383280"/>
             <a:ext cx="1966874" cy="237744"/>
           </a:xfrm>
           <a:prstGeom prst="rect">
@@ -46679,7 +46937,7 @@
         </p:nvSpPr>
         <p:spPr>
           <a:xfrm>
-            <a:off x="2606954" y="3419856"/>
+            <a:off x="2606954" y="3383280"/>
             <a:ext cx="1225296" cy="237744"/>
           </a:xfrm>
           <a:prstGeom prst="rect">
@@ -46718,7 +46976,7 @@
         </p:nvSpPr>
         <p:spPr>
           <a:xfrm>
-            <a:off x="914400" y="3717036"/>
+            <a:off x="914400" y="3671316"/>
             <a:ext cx="1966874" cy="237744"/>
           </a:xfrm>
           <a:prstGeom prst="rect">
@@ -46757,7 +47015,7 @@
         </p:nvSpPr>
         <p:spPr>
           <a:xfrm>
-            <a:off x="2606954" y="3717036"/>
+            <a:off x="2606954" y="3671316"/>
             <a:ext cx="1225296" cy="237744"/>
           </a:xfrm>
           <a:prstGeom prst="rect">
@@ -46796,7 +47054,7 @@
         </p:nvSpPr>
         <p:spPr>
           <a:xfrm>
-            <a:off x="914400" y="4014216"/>
+            <a:off x="914400" y="3959352"/>
             <a:ext cx="1966874" cy="237744"/>
           </a:xfrm>
           <a:prstGeom prst="rect">
@@ -46835,7 +47093,7 @@
         </p:nvSpPr>
         <p:spPr>
           <a:xfrm>
-            <a:off x="2606954" y="4014216"/>
+            <a:off x="2606954" y="3959352"/>
             <a:ext cx="1225296" cy="237744"/>
           </a:xfrm>
           <a:prstGeom prst="rect">
@@ -46874,7 +47132,7 @@
         </p:nvSpPr>
         <p:spPr>
           <a:xfrm>
-            <a:off x="914400" y="4311396"/>
+            <a:off x="914400" y="4247388"/>
             <a:ext cx="1966874" cy="237744"/>
           </a:xfrm>
           <a:prstGeom prst="rect">
@@ -46913,7 +47171,7 @@
         </p:nvSpPr>
         <p:spPr>
           <a:xfrm>
-            <a:off x="2606954" y="4311396"/>
+            <a:off x="2606954" y="4247388"/>
             <a:ext cx="1225296" cy="237744"/>
           </a:xfrm>
           <a:prstGeom prst="rect">
@@ -46952,7 +47210,7 @@
         </p:nvSpPr>
         <p:spPr>
           <a:xfrm>
-            <a:off x="914400" y="4608576"/>
+            <a:off x="914400" y="4535424"/>
             <a:ext cx="1966874" cy="237744"/>
           </a:xfrm>
           <a:prstGeom prst="rect">
@@ -46977,7 +47235,7 @@
                 <a:ea typeface="Yu Gothic" pitchFamily="34" charset="-122"/>
                 <a:cs typeface="Yu Gothic" pitchFamily="34" charset="-120"/>
               </a:rPr>
-              <a:t>粗利率</a:t>
+              <a:t>粗利率（売上比）</a:t>
             </a:r>
             <a:endParaRPr lang="en-US" sz="950" dirty="0"/>
           </a:p>
@@ -46991,7 +47249,7 @@
         </p:nvSpPr>
         <p:spPr>
           <a:xfrm>
-            <a:off x="2606954" y="4608576"/>
+            <a:off x="2606954" y="4535424"/>
             <a:ext cx="1225296" cy="237744"/>
           </a:xfrm>
           <a:prstGeom prst="rect">
@@ -47030,7 +47288,85 @@
         </p:nvSpPr>
         <p:spPr>
           <a:xfrm>
-            <a:off x="914400" y="4901184"/>
+            <a:off x="914400" y="4823460"/>
+            <a:ext cx="1966874" cy="237744"/>
+          </a:xfrm>
+          <a:prstGeom prst="rect">
+            <a:avLst/>
+          </a:prstGeom>
+          <a:noFill/>
+          <a:ln/>
+        </p:spPr>
+        <p:txBody>
+          <a:bodyPr wrap="square" lIns="0" tIns="0" rIns="0" bIns="0" rtlCol="0" anchor="ctr"/>
+          <a:lstStyle/>
+          <a:p>
+            <a:pPr indent="0" marL="0">
+              <a:buNone/>
+            </a:pPr>
+            <a:r>
+              <a:rPr lang="en-US" sz="950" dirty="0">
+                <a:solidFill>
+                  <a:srgbClr val="9A938A"/>
+                </a:solidFill>
+                <a:latin typeface="Yu Gothic" pitchFamily="34" charset="0"/>
+                <a:ea typeface="Yu Gothic" pitchFamily="34" charset="-122"/>
+                <a:cs typeface="Yu Gothic" pitchFamily="34" charset="-120"/>
+              </a:rPr>
+              <a:t>投下原価利益率</a:t>
+            </a:r>
+            <a:endParaRPr lang="en-US" sz="950" dirty="0"/>
+          </a:p>
+        </p:txBody>
+      </p:sp>
+      <p:sp>
+        <p:nvSpPr>
+          <p:cNvPr id="28" name="Text 26"/>
+          <p:cNvSpPr/>
+          <p:nvPr/>
+        </p:nvSpPr>
+        <p:spPr>
+          <a:xfrm>
+            <a:off x="2606954" y="4823460"/>
+            <a:ext cx="1225296" cy="237744"/>
+          </a:xfrm>
+          <a:prstGeom prst="rect">
+            <a:avLst/>
+          </a:prstGeom>
+          <a:noFill/>
+          <a:ln/>
+        </p:spPr>
+        <p:txBody>
+          <a:bodyPr wrap="square" lIns="0" tIns="0" rIns="0" bIns="0" rtlCol="0" anchor="ctr"/>
+          <a:lstStyle/>
+          <a:p>
+            <a:pPr algn="r" indent="0" marL="0">
+              <a:buNone/>
+            </a:pPr>
+            <a:r>
+              <a:rPr lang="en-US" sz="1250" b="1" dirty="0">
+                <a:solidFill>
+                  <a:srgbClr val="EFEBE3"/>
+                </a:solidFill>
+                <a:latin typeface="Cambria" pitchFamily="34" charset="0"/>
+                <a:ea typeface="Cambria" pitchFamily="34" charset="-122"/>
+                <a:cs typeface="Cambria" pitchFamily="34" charset="-120"/>
+              </a:rPr>
+              <a:t>32.0%</a:t>
+            </a:r>
+            <a:endParaRPr lang="en-US" sz="1250" dirty="0"/>
+          </a:p>
+        </p:txBody>
+      </p:sp>
+      <p:sp>
+        <p:nvSpPr>
+          <p:cNvPr id="29" name="Text 27"/>
+          <p:cNvSpPr/>
+          <p:nvPr/>
+        </p:nvSpPr>
+        <p:spPr>
+          <a:xfrm>
+            <a:off x="914400" y="5084064"/>
             <a:ext cx="2917850" cy="365760"/>
           </a:xfrm>
           <a:prstGeom prst="rect">
@@ -47066,14 +47402,14 @@
       </p:sp>
       <p:sp>
         <p:nvSpPr>
-          <p:cNvPr id="28" name="Shape 26"/>
-          <p:cNvSpPr/>
-          <p:nvPr/>
-        </p:nvSpPr>
-        <p:spPr>
-          <a:xfrm>
-            <a:off x="4380890" y="1664208"/>
-            <a:ext cx="3429914" cy="3657600"/>
+          <p:cNvPr id="30" name="Shape 28"/>
+          <p:cNvSpPr/>
+          <p:nvPr/>
+        </p:nvSpPr>
+        <p:spPr>
+          <a:xfrm>
+            <a:off x="4380890" y="1627632"/>
+            <a:ext cx="3429914" cy="3931920"/>
           </a:xfrm>
           <a:prstGeom prst="roundRect">
             <a:avLst>
@@ -47093,7 +47429,7 @@
       </p:sp>
       <p:sp>
         <p:nvSpPr>
-          <p:cNvPr id="29" name="Text 27"/>
+          <p:cNvPr id="31" name="Text 29"/>
           <p:cNvSpPr/>
           <p:nvPr/>
         </p:nvSpPr>
@@ -47132,7 +47468,7 @@
       </p:sp>
       <p:sp>
         <p:nvSpPr>
-          <p:cNvPr id="30" name="Text 28"/>
+          <p:cNvPr id="32" name="Text 30"/>
           <p:cNvSpPr/>
           <p:nvPr/>
         </p:nvSpPr>
@@ -47171,7 +47507,7 @@
       </p:sp>
       <p:sp>
         <p:nvSpPr>
-          <p:cNvPr id="31" name="Text 29"/>
+          <p:cNvPr id="33" name="Text 31"/>
           <p:cNvSpPr/>
           <p:nvPr/>
         </p:nvSpPr>
@@ -47210,13 +47546,13 @@
       </p:sp>
       <p:sp>
         <p:nvSpPr>
-          <p:cNvPr id="32" name="Text 30"/>
-          <p:cNvSpPr/>
-          <p:nvPr/>
-        </p:nvSpPr>
-        <p:spPr>
-          <a:xfrm>
-            <a:off x="4636922" y="2528316"/>
+          <p:cNvPr id="34" name="Text 32"/>
+          <p:cNvSpPr/>
+          <p:nvPr/>
+        </p:nvSpPr>
+        <p:spPr>
+          <a:xfrm>
+            <a:off x="4636922" y="2519172"/>
             <a:ext cx="1966874" cy="237744"/>
           </a:xfrm>
           <a:prstGeom prst="rect">
@@ -47249,13 +47585,13 @@
       </p:sp>
       <p:sp>
         <p:nvSpPr>
-          <p:cNvPr id="33" name="Text 31"/>
-          <p:cNvSpPr/>
-          <p:nvPr/>
-        </p:nvSpPr>
-        <p:spPr>
-          <a:xfrm>
-            <a:off x="6329477" y="2528316"/>
+          <p:cNvPr id="35" name="Text 33"/>
+          <p:cNvSpPr/>
+          <p:nvPr/>
+        </p:nvSpPr>
+        <p:spPr>
+          <a:xfrm>
+            <a:off x="6329477" y="2519172"/>
             <a:ext cx="1225296" cy="237744"/>
           </a:xfrm>
           <a:prstGeom prst="rect">
@@ -47288,13 +47624,13 @@
       </p:sp>
       <p:sp>
         <p:nvSpPr>
-          <p:cNvPr id="34" name="Text 32"/>
-          <p:cNvSpPr/>
-          <p:nvPr/>
-        </p:nvSpPr>
-        <p:spPr>
-          <a:xfrm>
-            <a:off x="4636922" y="2825496"/>
+          <p:cNvPr id="36" name="Text 34"/>
+          <p:cNvSpPr/>
+          <p:nvPr/>
+        </p:nvSpPr>
+        <p:spPr>
+          <a:xfrm>
+            <a:off x="4636922" y="2807208"/>
             <a:ext cx="1966874" cy="237744"/>
           </a:xfrm>
           <a:prstGeom prst="rect">
@@ -47327,13 +47663,13 @@
       </p:sp>
       <p:sp>
         <p:nvSpPr>
-          <p:cNvPr id="35" name="Text 33"/>
-          <p:cNvSpPr/>
-          <p:nvPr/>
-        </p:nvSpPr>
-        <p:spPr>
-          <a:xfrm>
-            <a:off x="6329477" y="2825496"/>
+          <p:cNvPr id="37" name="Text 35"/>
+          <p:cNvSpPr/>
+          <p:nvPr/>
+        </p:nvSpPr>
+        <p:spPr>
+          <a:xfrm>
+            <a:off x="6329477" y="2807208"/>
             <a:ext cx="1225296" cy="237744"/>
           </a:xfrm>
           <a:prstGeom prst="rect">
@@ -47366,13 +47702,13 @@
       </p:sp>
       <p:sp>
         <p:nvSpPr>
-          <p:cNvPr id="36" name="Text 34"/>
-          <p:cNvSpPr/>
-          <p:nvPr/>
-        </p:nvSpPr>
-        <p:spPr>
-          <a:xfrm>
-            <a:off x="4636922" y="3122676"/>
+          <p:cNvPr id="38" name="Text 36"/>
+          <p:cNvSpPr/>
+          <p:nvPr/>
+        </p:nvSpPr>
+        <p:spPr>
+          <a:xfrm>
+            <a:off x="4636922" y="3095244"/>
             <a:ext cx="1966874" cy="237744"/>
           </a:xfrm>
           <a:prstGeom prst="rect">
@@ -47405,13 +47741,13 @@
       </p:sp>
       <p:sp>
         <p:nvSpPr>
-          <p:cNvPr id="37" name="Text 35"/>
-          <p:cNvSpPr/>
-          <p:nvPr/>
-        </p:nvSpPr>
-        <p:spPr>
-          <a:xfrm>
-            <a:off x="6329477" y="3122676"/>
+          <p:cNvPr id="39" name="Text 37"/>
+          <p:cNvSpPr/>
+          <p:nvPr/>
+        </p:nvSpPr>
+        <p:spPr>
+          <a:xfrm>
+            <a:off x="6329477" y="3095244"/>
             <a:ext cx="1225296" cy="237744"/>
           </a:xfrm>
           <a:prstGeom prst="rect">
@@ -47444,13 +47780,13 @@
       </p:sp>
       <p:sp>
         <p:nvSpPr>
-          <p:cNvPr id="38" name="Text 36"/>
-          <p:cNvSpPr/>
-          <p:nvPr/>
-        </p:nvSpPr>
-        <p:spPr>
-          <a:xfrm>
-            <a:off x="4636922" y="3419856"/>
+          <p:cNvPr id="40" name="Text 38"/>
+          <p:cNvSpPr/>
+          <p:nvPr/>
+        </p:nvSpPr>
+        <p:spPr>
+          <a:xfrm>
+            <a:off x="4636922" y="3383280"/>
             <a:ext cx="1966874" cy="237744"/>
           </a:xfrm>
           <a:prstGeom prst="rect">
@@ -47483,13 +47819,13 @@
       </p:sp>
       <p:sp>
         <p:nvSpPr>
-          <p:cNvPr id="39" name="Text 37"/>
-          <p:cNvSpPr/>
-          <p:nvPr/>
-        </p:nvSpPr>
-        <p:spPr>
-          <a:xfrm>
-            <a:off x="6329477" y="3419856"/>
+          <p:cNvPr id="41" name="Text 39"/>
+          <p:cNvSpPr/>
+          <p:nvPr/>
+        </p:nvSpPr>
+        <p:spPr>
+          <a:xfrm>
+            <a:off x="6329477" y="3383280"/>
             <a:ext cx="1225296" cy="237744"/>
           </a:xfrm>
           <a:prstGeom prst="rect">
@@ -47522,13 +47858,13 @@
       </p:sp>
       <p:sp>
         <p:nvSpPr>
-          <p:cNvPr id="40" name="Text 38"/>
-          <p:cNvSpPr/>
-          <p:nvPr/>
-        </p:nvSpPr>
-        <p:spPr>
-          <a:xfrm>
-            <a:off x="4636922" y="3717036"/>
+          <p:cNvPr id="42" name="Text 40"/>
+          <p:cNvSpPr/>
+          <p:nvPr/>
+        </p:nvSpPr>
+        <p:spPr>
+          <a:xfrm>
+            <a:off x="4636922" y="3671316"/>
             <a:ext cx="1966874" cy="237744"/>
           </a:xfrm>
           <a:prstGeom prst="rect">
@@ -47561,13 +47897,13 @@
       </p:sp>
       <p:sp>
         <p:nvSpPr>
-          <p:cNvPr id="41" name="Text 39"/>
-          <p:cNvSpPr/>
-          <p:nvPr/>
-        </p:nvSpPr>
-        <p:spPr>
-          <a:xfrm>
-            <a:off x="6329477" y="3717036"/>
+          <p:cNvPr id="43" name="Text 41"/>
+          <p:cNvSpPr/>
+          <p:nvPr/>
+        </p:nvSpPr>
+        <p:spPr>
+          <a:xfrm>
+            <a:off x="6329477" y="3671316"/>
             <a:ext cx="1225296" cy="237744"/>
           </a:xfrm>
           <a:prstGeom prst="rect">
@@ -47600,13 +47936,13 @@
       </p:sp>
       <p:sp>
         <p:nvSpPr>
-          <p:cNvPr id="42" name="Text 40"/>
-          <p:cNvSpPr/>
-          <p:nvPr/>
-        </p:nvSpPr>
-        <p:spPr>
-          <a:xfrm>
-            <a:off x="4636922" y="4014216"/>
+          <p:cNvPr id="44" name="Text 42"/>
+          <p:cNvSpPr/>
+          <p:nvPr/>
+        </p:nvSpPr>
+        <p:spPr>
+          <a:xfrm>
+            <a:off x="4636922" y="3959352"/>
             <a:ext cx="1966874" cy="237744"/>
           </a:xfrm>
           <a:prstGeom prst="rect">
@@ -47639,13 +47975,13 @@
       </p:sp>
       <p:sp>
         <p:nvSpPr>
-          <p:cNvPr id="43" name="Text 41"/>
-          <p:cNvSpPr/>
-          <p:nvPr/>
-        </p:nvSpPr>
-        <p:spPr>
-          <a:xfrm>
-            <a:off x="6329477" y="4014216"/>
+          <p:cNvPr id="45" name="Text 43"/>
+          <p:cNvSpPr/>
+          <p:nvPr/>
+        </p:nvSpPr>
+        <p:spPr>
+          <a:xfrm>
+            <a:off x="6329477" y="3959352"/>
             <a:ext cx="1225296" cy="237744"/>
           </a:xfrm>
           <a:prstGeom prst="rect">
@@ -47678,13 +48014,13 @@
       </p:sp>
       <p:sp>
         <p:nvSpPr>
-          <p:cNvPr id="44" name="Text 42"/>
-          <p:cNvSpPr/>
-          <p:nvPr/>
-        </p:nvSpPr>
-        <p:spPr>
-          <a:xfrm>
-            <a:off x="4636922" y="4311396"/>
+          <p:cNvPr id="46" name="Text 44"/>
+          <p:cNvSpPr/>
+          <p:nvPr/>
+        </p:nvSpPr>
+        <p:spPr>
+          <a:xfrm>
+            <a:off x="4636922" y="4247388"/>
             <a:ext cx="1966874" cy="237744"/>
           </a:xfrm>
           <a:prstGeom prst="rect">
@@ -47717,13 +48053,13 @@
       </p:sp>
       <p:sp>
         <p:nvSpPr>
-          <p:cNvPr id="45" name="Text 43"/>
-          <p:cNvSpPr/>
-          <p:nvPr/>
-        </p:nvSpPr>
-        <p:spPr>
-          <a:xfrm>
-            <a:off x="6329477" y="4311396"/>
+          <p:cNvPr id="47" name="Text 45"/>
+          <p:cNvSpPr/>
+          <p:nvPr/>
+        </p:nvSpPr>
+        <p:spPr>
+          <a:xfrm>
+            <a:off x="6329477" y="4247388"/>
             <a:ext cx="1225296" cy="237744"/>
           </a:xfrm>
           <a:prstGeom prst="rect">
@@ -47756,13 +48092,13 @@
       </p:sp>
       <p:sp>
         <p:nvSpPr>
-          <p:cNvPr id="46" name="Text 44"/>
-          <p:cNvSpPr/>
-          <p:nvPr/>
-        </p:nvSpPr>
-        <p:spPr>
-          <a:xfrm>
-            <a:off x="4636922" y="4608576"/>
+          <p:cNvPr id="48" name="Text 46"/>
+          <p:cNvSpPr/>
+          <p:nvPr/>
+        </p:nvSpPr>
+        <p:spPr>
+          <a:xfrm>
+            <a:off x="4636922" y="4535424"/>
             <a:ext cx="1966874" cy="237744"/>
           </a:xfrm>
           <a:prstGeom prst="rect">
@@ -47787,7 +48123,7 @@
                 <a:ea typeface="Yu Gothic" pitchFamily="34" charset="-122"/>
                 <a:cs typeface="Yu Gothic" pitchFamily="34" charset="-120"/>
               </a:rPr>
-              <a:t>粗利率</a:t>
+              <a:t>粗利率（売上比）</a:t>
             </a:r>
             <a:endParaRPr lang="en-US" sz="950" dirty="0"/>
           </a:p>
@@ -47795,13 +48131,13 @@
       </p:sp>
       <p:sp>
         <p:nvSpPr>
-          <p:cNvPr id="47" name="Text 45"/>
-          <p:cNvSpPr/>
-          <p:nvPr/>
-        </p:nvSpPr>
-        <p:spPr>
-          <a:xfrm>
-            <a:off x="6329477" y="4608576"/>
+          <p:cNvPr id="49" name="Text 47"/>
+          <p:cNvSpPr/>
+          <p:nvPr/>
+        </p:nvSpPr>
+        <p:spPr>
+          <a:xfrm>
+            <a:off x="6329477" y="4535424"/>
             <a:ext cx="1225296" cy="237744"/>
           </a:xfrm>
           <a:prstGeom prst="rect">
@@ -47834,13 +48170,91 @@
       </p:sp>
       <p:sp>
         <p:nvSpPr>
-          <p:cNvPr id="48" name="Text 46"/>
-          <p:cNvSpPr/>
-          <p:nvPr/>
-        </p:nvSpPr>
-        <p:spPr>
-          <a:xfrm>
-            <a:off x="4636922" y="4901184"/>
+          <p:cNvPr id="50" name="Text 48"/>
+          <p:cNvSpPr/>
+          <p:nvPr/>
+        </p:nvSpPr>
+        <p:spPr>
+          <a:xfrm>
+            <a:off x="4636922" y="4823460"/>
+            <a:ext cx="1966874" cy="237744"/>
+          </a:xfrm>
+          <a:prstGeom prst="rect">
+            <a:avLst/>
+          </a:prstGeom>
+          <a:noFill/>
+          <a:ln/>
+        </p:spPr>
+        <p:txBody>
+          <a:bodyPr wrap="square" lIns="0" tIns="0" rIns="0" bIns="0" rtlCol="0" anchor="ctr"/>
+          <a:lstStyle/>
+          <a:p>
+            <a:pPr indent="0" marL="0">
+              <a:buNone/>
+            </a:pPr>
+            <a:r>
+              <a:rPr lang="en-US" sz="950" dirty="0">
+                <a:solidFill>
+                  <a:srgbClr val="9A938A"/>
+                </a:solidFill>
+                <a:latin typeface="Yu Gothic" pitchFamily="34" charset="0"/>
+                <a:ea typeface="Yu Gothic" pitchFamily="34" charset="-122"/>
+                <a:cs typeface="Yu Gothic" pitchFamily="34" charset="-120"/>
+              </a:rPr>
+              <a:t>投下原価利益率</a:t>
+            </a:r>
+            <a:endParaRPr lang="en-US" sz="950" dirty="0"/>
+          </a:p>
+        </p:txBody>
+      </p:sp>
+      <p:sp>
+        <p:nvSpPr>
+          <p:cNvPr id="51" name="Text 49"/>
+          <p:cNvSpPr/>
+          <p:nvPr/>
+        </p:nvSpPr>
+        <p:spPr>
+          <a:xfrm>
+            <a:off x="6329477" y="4823460"/>
+            <a:ext cx="1225296" cy="237744"/>
+          </a:xfrm>
+          <a:prstGeom prst="rect">
+            <a:avLst/>
+          </a:prstGeom>
+          <a:noFill/>
+          <a:ln/>
+        </p:spPr>
+        <p:txBody>
+          <a:bodyPr wrap="square" lIns="0" tIns="0" rIns="0" bIns="0" rtlCol="0" anchor="ctr"/>
+          <a:lstStyle/>
+          <a:p>
+            <a:pPr algn="r" indent="0" marL="0">
+              <a:buNone/>
+            </a:pPr>
+            <a:r>
+              <a:rPr lang="en-US" sz="1250" b="1" dirty="0">
+                <a:solidFill>
+                  <a:srgbClr val="C9A96E"/>
+                </a:solidFill>
+                <a:latin typeface="Cambria" pitchFamily="34" charset="0"/>
+                <a:ea typeface="Cambria" pitchFamily="34" charset="-122"/>
+                <a:cs typeface="Cambria" pitchFamily="34" charset="-120"/>
+              </a:rPr>
+              <a:t>47.3%</a:t>
+            </a:r>
+            <a:endParaRPr lang="en-US" sz="1250" dirty="0"/>
+          </a:p>
+        </p:txBody>
+      </p:sp>
+      <p:sp>
+        <p:nvSpPr>
+          <p:cNvPr id="52" name="Text 50"/>
+          <p:cNvSpPr/>
+          <p:nvPr/>
+        </p:nvSpPr>
+        <p:spPr>
+          <a:xfrm>
+            <a:off x="4636922" y="5084064"/>
             <a:ext cx="2917850" cy="365760"/>
           </a:xfrm>
           <a:prstGeom prst="rect">
@@ -47876,14 +48290,14 @@
       </p:sp>
       <p:sp>
         <p:nvSpPr>
-          <p:cNvPr id="49" name="Shape 47"/>
-          <p:cNvSpPr/>
-          <p:nvPr/>
-        </p:nvSpPr>
-        <p:spPr>
-          <a:xfrm>
-            <a:off x="8103413" y="1664208"/>
-            <a:ext cx="3429914" cy="3657600"/>
+          <p:cNvPr id="53" name="Shape 51"/>
+          <p:cNvSpPr/>
+          <p:nvPr/>
+        </p:nvSpPr>
+        <p:spPr>
+          <a:xfrm>
+            <a:off x="8103413" y="1627632"/>
+            <a:ext cx="3429914" cy="3931920"/>
           </a:xfrm>
           <a:prstGeom prst="roundRect">
             <a:avLst>
@@ -47903,7 +48317,7 @@
       </p:sp>
       <p:sp>
         <p:nvSpPr>
-          <p:cNvPr id="50" name="Text 48"/>
+          <p:cNvPr id="54" name="Text 52"/>
           <p:cNvSpPr/>
           <p:nvPr/>
         </p:nvSpPr>
@@ -47942,7 +48356,7 @@
       </p:sp>
       <p:sp>
         <p:nvSpPr>
-          <p:cNvPr id="51" name="Text 49"/>
+          <p:cNvPr id="55" name="Text 53"/>
           <p:cNvSpPr/>
           <p:nvPr/>
         </p:nvSpPr>
@@ -47981,7 +48395,7 @@
       </p:sp>
       <p:sp>
         <p:nvSpPr>
-          <p:cNvPr id="52" name="Text 50"/>
+          <p:cNvPr id="56" name="Text 54"/>
           <p:cNvSpPr/>
           <p:nvPr/>
         </p:nvSpPr>
@@ -48020,13 +48434,13 @@
       </p:sp>
       <p:sp>
         <p:nvSpPr>
-          <p:cNvPr id="53" name="Text 51"/>
-          <p:cNvSpPr/>
-          <p:nvPr/>
-        </p:nvSpPr>
-        <p:spPr>
-          <a:xfrm>
-            <a:off x="8359445" y="2528316"/>
+          <p:cNvPr id="57" name="Text 55"/>
+          <p:cNvSpPr/>
+          <p:nvPr/>
+        </p:nvSpPr>
+        <p:spPr>
+          <a:xfrm>
+            <a:off x="8359445" y="2519172"/>
             <a:ext cx="1966874" cy="237744"/>
           </a:xfrm>
           <a:prstGeom prst="rect">
@@ -48059,13 +48473,13 @@
       </p:sp>
       <p:sp>
         <p:nvSpPr>
-          <p:cNvPr id="54" name="Text 52"/>
-          <p:cNvSpPr/>
-          <p:nvPr/>
-        </p:nvSpPr>
-        <p:spPr>
-          <a:xfrm>
-            <a:off x="10051999" y="2528316"/>
+          <p:cNvPr id="58" name="Text 56"/>
+          <p:cNvSpPr/>
+          <p:nvPr/>
+        </p:nvSpPr>
+        <p:spPr>
+          <a:xfrm>
+            <a:off x="10051999" y="2519172"/>
             <a:ext cx="1225296" cy="237744"/>
           </a:xfrm>
           <a:prstGeom prst="rect">
@@ -48098,13 +48512,13 @@
       </p:sp>
       <p:sp>
         <p:nvSpPr>
-          <p:cNvPr id="55" name="Text 53"/>
-          <p:cNvSpPr/>
-          <p:nvPr/>
-        </p:nvSpPr>
-        <p:spPr>
-          <a:xfrm>
-            <a:off x="8359445" y="2825496"/>
+          <p:cNvPr id="59" name="Text 57"/>
+          <p:cNvSpPr/>
+          <p:nvPr/>
+        </p:nvSpPr>
+        <p:spPr>
+          <a:xfrm>
+            <a:off x="8359445" y="2807208"/>
             <a:ext cx="1966874" cy="237744"/>
           </a:xfrm>
           <a:prstGeom prst="rect">
@@ -48137,13 +48551,13 @@
       </p:sp>
       <p:sp>
         <p:nvSpPr>
-          <p:cNvPr id="56" name="Text 54"/>
-          <p:cNvSpPr/>
-          <p:nvPr/>
-        </p:nvSpPr>
-        <p:spPr>
-          <a:xfrm>
-            <a:off x="10051999" y="2825496"/>
+          <p:cNvPr id="60" name="Text 58"/>
+          <p:cNvSpPr/>
+          <p:nvPr/>
+        </p:nvSpPr>
+        <p:spPr>
+          <a:xfrm>
+            <a:off x="10051999" y="2807208"/>
             <a:ext cx="1225296" cy="237744"/>
           </a:xfrm>
           <a:prstGeom prst="rect">
@@ -48176,13 +48590,13 @@
       </p:sp>
       <p:sp>
         <p:nvSpPr>
-          <p:cNvPr id="57" name="Text 55"/>
-          <p:cNvSpPr/>
-          <p:nvPr/>
-        </p:nvSpPr>
-        <p:spPr>
-          <a:xfrm>
-            <a:off x="8359445" y="3122676"/>
+          <p:cNvPr id="61" name="Text 59"/>
+          <p:cNvSpPr/>
+          <p:nvPr/>
+        </p:nvSpPr>
+        <p:spPr>
+          <a:xfrm>
+            <a:off x="8359445" y="3095244"/>
             <a:ext cx="1966874" cy="237744"/>
           </a:xfrm>
           <a:prstGeom prst="rect">
@@ -48215,13 +48629,13 @@
       </p:sp>
       <p:sp>
         <p:nvSpPr>
-          <p:cNvPr id="58" name="Text 56"/>
-          <p:cNvSpPr/>
-          <p:nvPr/>
-        </p:nvSpPr>
-        <p:spPr>
-          <a:xfrm>
-            <a:off x="10051999" y="3122676"/>
+          <p:cNvPr id="62" name="Text 60"/>
+          <p:cNvSpPr/>
+          <p:nvPr/>
+        </p:nvSpPr>
+        <p:spPr>
+          <a:xfrm>
+            <a:off x="10051999" y="3095244"/>
             <a:ext cx="1225296" cy="237744"/>
           </a:xfrm>
           <a:prstGeom prst="rect">
@@ -48254,13 +48668,13 @@
       </p:sp>
       <p:sp>
         <p:nvSpPr>
-          <p:cNvPr id="59" name="Text 57"/>
-          <p:cNvSpPr/>
-          <p:nvPr/>
-        </p:nvSpPr>
-        <p:spPr>
-          <a:xfrm>
-            <a:off x="8359445" y="3419856"/>
+          <p:cNvPr id="63" name="Text 61"/>
+          <p:cNvSpPr/>
+          <p:nvPr/>
+        </p:nvSpPr>
+        <p:spPr>
+          <a:xfrm>
+            <a:off x="8359445" y="3383280"/>
             <a:ext cx="1966874" cy="237744"/>
           </a:xfrm>
           <a:prstGeom prst="rect">
@@ -48293,13 +48707,13 @@
       </p:sp>
       <p:sp>
         <p:nvSpPr>
-          <p:cNvPr id="60" name="Text 58"/>
-          <p:cNvSpPr/>
-          <p:nvPr/>
-        </p:nvSpPr>
-        <p:spPr>
-          <a:xfrm>
-            <a:off x="10051999" y="3419856"/>
+          <p:cNvPr id="64" name="Text 62"/>
+          <p:cNvSpPr/>
+          <p:nvPr/>
+        </p:nvSpPr>
+        <p:spPr>
+          <a:xfrm>
+            <a:off x="10051999" y="3383280"/>
             <a:ext cx="1225296" cy="237744"/>
           </a:xfrm>
           <a:prstGeom prst="rect">
@@ -48332,13 +48746,13 @@
       </p:sp>
       <p:sp>
         <p:nvSpPr>
-          <p:cNvPr id="61" name="Text 59"/>
-          <p:cNvSpPr/>
-          <p:nvPr/>
-        </p:nvSpPr>
-        <p:spPr>
-          <a:xfrm>
-            <a:off x="8359445" y="3717036"/>
+          <p:cNvPr id="65" name="Text 63"/>
+          <p:cNvSpPr/>
+          <p:nvPr/>
+        </p:nvSpPr>
+        <p:spPr>
+          <a:xfrm>
+            <a:off x="8359445" y="3671316"/>
             <a:ext cx="1966874" cy="237744"/>
           </a:xfrm>
           <a:prstGeom prst="rect">
@@ -48371,13 +48785,13 @@
       </p:sp>
       <p:sp>
         <p:nvSpPr>
-          <p:cNvPr id="62" name="Text 60"/>
-          <p:cNvSpPr/>
-          <p:nvPr/>
-        </p:nvSpPr>
-        <p:spPr>
-          <a:xfrm>
-            <a:off x="10051999" y="3717036"/>
+          <p:cNvPr id="66" name="Text 64"/>
+          <p:cNvSpPr/>
+          <p:nvPr/>
+        </p:nvSpPr>
+        <p:spPr>
+          <a:xfrm>
+            <a:off x="10051999" y="3671316"/>
             <a:ext cx="1225296" cy="237744"/>
           </a:xfrm>
           <a:prstGeom prst="rect">
@@ -48410,13 +48824,13 @@
       </p:sp>
       <p:sp>
         <p:nvSpPr>
-          <p:cNvPr id="63" name="Text 61"/>
-          <p:cNvSpPr/>
-          <p:nvPr/>
-        </p:nvSpPr>
-        <p:spPr>
-          <a:xfrm>
-            <a:off x="8359445" y="4014216"/>
+          <p:cNvPr id="67" name="Text 65"/>
+          <p:cNvSpPr/>
+          <p:nvPr/>
+        </p:nvSpPr>
+        <p:spPr>
+          <a:xfrm>
+            <a:off x="8359445" y="3959352"/>
             <a:ext cx="1966874" cy="237744"/>
           </a:xfrm>
           <a:prstGeom prst="rect">
@@ -48449,13 +48863,13 @@
       </p:sp>
       <p:sp>
         <p:nvSpPr>
-          <p:cNvPr id="64" name="Text 62"/>
-          <p:cNvSpPr/>
-          <p:nvPr/>
-        </p:nvSpPr>
-        <p:spPr>
-          <a:xfrm>
-            <a:off x="10051999" y="4014216"/>
+          <p:cNvPr id="68" name="Text 66"/>
+          <p:cNvSpPr/>
+          <p:nvPr/>
+        </p:nvSpPr>
+        <p:spPr>
+          <a:xfrm>
+            <a:off x="10051999" y="3959352"/>
             <a:ext cx="1225296" cy="237744"/>
           </a:xfrm>
           <a:prstGeom prst="rect">
@@ -48488,13 +48902,13 @@
       </p:sp>
       <p:sp>
         <p:nvSpPr>
-          <p:cNvPr id="65" name="Text 63"/>
-          <p:cNvSpPr/>
-          <p:nvPr/>
-        </p:nvSpPr>
-        <p:spPr>
-          <a:xfrm>
-            <a:off x="8359445" y="4311396"/>
+          <p:cNvPr id="69" name="Text 67"/>
+          <p:cNvSpPr/>
+          <p:nvPr/>
+        </p:nvSpPr>
+        <p:spPr>
+          <a:xfrm>
+            <a:off x="8359445" y="4247388"/>
             <a:ext cx="1966874" cy="237744"/>
           </a:xfrm>
           <a:prstGeom prst="rect">
@@ -48527,13 +48941,13 @@
       </p:sp>
       <p:sp>
         <p:nvSpPr>
-          <p:cNvPr id="66" name="Text 64"/>
-          <p:cNvSpPr/>
-          <p:nvPr/>
-        </p:nvSpPr>
-        <p:spPr>
-          <a:xfrm>
-            <a:off x="10051999" y="4311396"/>
+          <p:cNvPr id="70" name="Text 68"/>
+          <p:cNvSpPr/>
+          <p:nvPr/>
+        </p:nvSpPr>
+        <p:spPr>
+          <a:xfrm>
+            <a:off x="10051999" y="4247388"/>
             <a:ext cx="1225296" cy="237744"/>
           </a:xfrm>
           <a:prstGeom prst="rect">
@@ -48566,13 +48980,13 @@
       </p:sp>
       <p:sp>
         <p:nvSpPr>
-          <p:cNvPr id="67" name="Text 65"/>
-          <p:cNvSpPr/>
-          <p:nvPr/>
-        </p:nvSpPr>
-        <p:spPr>
-          <a:xfrm>
-            <a:off x="8359445" y="4608576"/>
+          <p:cNvPr id="71" name="Text 69"/>
+          <p:cNvSpPr/>
+          <p:nvPr/>
+        </p:nvSpPr>
+        <p:spPr>
+          <a:xfrm>
+            <a:off x="8359445" y="4535424"/>
             <a:ext cx="1966874" cy="237744"/>
           </a:xfrm>
           <a:prstGeom prst="rect">
@@ -48597,7 +49011,7 @@
                 <a:ea typeface="Yu Gothic" pitchFamily="34" charset="-122"/>
                 <a:cs typeface="Yu Gothic" pitchFamily="34" charset="-120"/>
               </a:rPr>
-              <a:t>粗利率</a:t>
+              <a:t>粗利率（売上比）</a:t>
             </a:r>
             <a:endParaRPr lang="en-US" sz="950" dirty="0"/>
           </a:p>
@@ -48605,13 +49019,13 @@
       </p:sp>
       <p:sp>
         <p:nvSpPr>
-          <p:cNvPr id="68" name="Text 66"/>
-          <p:cNvSpPr/>
-          <p:nvPr/>
-        </p:nvSpPr>
-        <p:spPr>
-          <a:xfrm>
-            <a:off x="10051999" y="4608576"/>
+          <p:cNvPr id="72" name="Text 70"/>
+          <p:cNvSpPr/>
+          <p:nvPr/>
+        </p:nvSpPr>
+        <p:spPr>
+          <a:xfrm>
+            <a:off x="10051999" y="4535424"/>
             <a:ext cx="1225296" cy="237744"/>
           </a:xfrm>
           <a:prstGeom prst="rect">
@@ -48644,13 +49058,91 @@
       </p:sp>
       <p:sp>
         <p:nvSpPr>
-          <p:cNvPr id="69" name="Text 67"/>
-          <p:cNvSpPr/>
-          <p:nvPr/>
-        </p:nvSpPr>
-        <p:spPr>
-          <a:xfrm>
-            <a:off x="8359445" y="4901184"/>
+          <p:cNvPr id="73" name="Text 71"/>
+          <p:cNvSpPr/>
+          <p:nvPr/>
+        </p:nvSpPr>
+        <p:spPr>
+          <a:xfrm>
+            <a:off x="8359445" y="4823460"/>
+            <a:ext cx="1966874" cy="237744"/>
+          </a:xfrm>
+          <a:prstGeom prst="rect">
+            <a:avLst/>
+          </a:prstGeom>
+          <a:noFill/>
+          <a:ln/>
+        </p:spPr>
+        <p:txBody>
+          <a:bodyPr wrap="square" lIns="0" tIns="0" rIns="0" bIns="0" rtlCol="0" anchor="ctr"/>
+          <a:lstStyle/>
+          <a:p>
+            <a:pPr indent="0" marL="0">
+              <a:buNone/>
+            </a:pPr>
+            <a:r>
+              <a:rPr lang="en-US" sz="950" dirty="0">
+                <a:solidFill>
+                  <a:srgbClr val="9A938A"/>
+                </a:solidFill>
+                <a:latin typeface="Yu Gothic" pitchFamily="34" charset="0"/>
+                <a:ea typeface="Yu Gothic" pitchFamily="34" charset="-122"/>
+                <a:cs typeface="Yu Gothic" pitchFamily="34" charset="-120"/>
+              </a:rPr>
+              <a:t>投下原価利益率</a:t>
+            </a:r>
+            <a:endParaRPr lang="en-US" sz="950" dirty="0"/>
+          </a:p>
+        </p:txBody>
+      </p:sp>
+      <p:sp>
+        <p:nvSpPr>
+          <p:cNvPr id="74" name="Text 72"/>
+          <p:cNvSpPr/>
+          <p:nvPr/>
+        </p:nvSpPr>
+        <p:spPr>
+          <a:xfrm>
+            <a:off x="10051999" y="4823460"/>
+            <a:ext cx="1225296" cy="237744"/>
+          </a:xfrm>
+          <a:prstGeom prst="rect">
+            <a:avLst/>
+          </a:prstGeom>
+          <a:noFill/>
+          <a:ln/>
+        </p:spPr>
+        <p:txBody>
+          <a:bodyPr wrap="square" lIns="0" tIns="0" rIns="0" bIns="0" rtlCol="0" anchor="ctr"/>
+          <a:lstStyle/>
+          <a:p>
+            <a:pPr algn="r" indent="0" marL="0">
+              <a:buNone/>
+            </a:pPr>
+            <a:r>
+              <a:rPr lang="en-US" sz="1250" b="1" dirty="0">
+                <a:solidFill>
+                  <a:srgbClr val="EFEBE3"/>
+                </a:solidFill>
+                <a:latin typeface="Cambria" pitchFamily="34" charset="0"/>
+                <a:ea typeface="Cambria" pitchFamily="34" charset="-122"/>
+                <a:cs typeface="Cambria" pitchFamily="34" charset="-120"/>
+              </a:rPr>
+              <a:t>86.4%</a:t>
+            </a:r>
+            <a:endParaRPr lang="en-US" sz="1250" dirty="0"/>
+          </a:p>
+        </p:txBody>
+      </p:sp>
+      <p:sp>
+        <p:nvSpPr>
+          <p:cNvPr id="75" name="Text 73"/>
+          <p:cNvSpPr/>
+          <p:nvPr/>
+        </p:nvSpPr>
+        <p:spPr>
+          <a:xfrm>
+            <a:off x="8359445" y="5084064"/>
             <a:ext cx="2917850" cy="365760"/>
           </a:xfrm>
           <a:prstGeom prst="rect">
@@ -48686,13 +49178,13 @@
       </p:sp>
       <p:sp>
         <p:nvSpPr>
-          <p:cNvPr id="70" name="Text 68"/>
-          <p:cNvSpPr/>
-          <p:nvPr/>
-        </p:nvSpPr>
-        <p:spPr>
-          <a:xfrm>
-            <a:off x="658368" y="5468112"/>
+          <p:cNvPr id="76" name="Text 74"/>
+          <p:cNvSpPr/>
+          <p:nvPr/>
+        </p:nvSpPr>
+        <p:spPr>
+          <a:xfrm>
+            <a:off x="658368" y="5687568"/>
             <a:ext cx="10874959" cy="365760"/>
           </a:xfrm>
           <a:prstGeom prst="rect">
@@ -48712,7 +49204,7 @@
               <a:buNone/>
             </a:pPr>
             <a:r>
-              <a:rPr lang="en-US" sz="900" dirty="0">
+              <a:rPr lang="en-US" sz="850" dirty="0">
                 <a:solidFill>
                   <a:srgbClr val="6E675E"/>
                 </a:solidFill>
@@ -48720,9 +49212,9 @@
                 <a:ea typeface="Yu Gothic" pitchFamily="34" charset="-122"/>
                 <a:cs typeface="Yu Gothic" pitchFamily="34" charset="-120"/>
               </a:rPr>
-              <a:t>※ 交渉余地を織り込み、ニュートラルを提案の主線とする。ネガティブは値引きに加えワイン価格が横ばいに留まる複合的な下振れ、ポジティブは調達・販売チャネルを最適化した場合の上振れ余地として位置づける。粗利率は変動販売費控除後の手取りに対する比率。</a:t>
-            </a:r>
-            <a:endParaRPr lang="en-US" sz="900" dirty="0"/>
+              <a:t>※ 粗利率（売上比）は単位粗利を売却時の売値で除したもの、投下原価利益率は投下資本であるSPC取得原価で除したもの。分母が異なるだけで同じ単位粗利を見ている。利回りの源泉となるのは後者であり、年1回転すれば投下資本が年47.3%増えることを意味する。</a:t>
+            </a:r>
+            <a:endParaRPr lang="en-US" sz="850" dirty="0"/>
           </a:p>
         </p:txBody>
       </p:sp>

--- a/docs/wine-fund/WineBank_ワインファンドSPC組成提案_5億_20260811.pptx
+++ b/docs/wine-fund/WineBank_ワインファンドSPC組成提案_5億_20260811.pptx
@@ -244,16 +244,16 @@
                 <c:formatCode>General</c:formatCode>
                 <c:ptCount val="4"/>
                 <c:pt idx="0">
-                  <c:v>45.2</c:v>
+                  <c:v>27.1</c:v>
                 </c:pt>
                 <c:pt idx="1">
-                  <c:v>35</c:v>
+                  <c:v>21</c:v>
                 </c:pt>
                 <c:pt idx="2">
-                  <c:v>28.9</c:v>
+                  <c:v>17.3</c:v>
                 </c:pt>
                 <c:pt idx="3">
-                  <c:v>24.8</c:v>
+                  <c:v>14.9</c:v>
                 </c:pt>
               </c:numCache>
             </c:numRef>
@@ -332,7 +332,7 @@
         <c:axId val="2094734552"/>
         <c:scaling>
           <c:orientation val="minMax"/>
-          <c:max val="52"/>
+          <c:max val="32"/>
           <c:min val="0"/>
         </c:scaling>
         <c:delete val="0"/>
@@ -521,16 +521,16 @@
                 <c:formatCode>General</c:formatCode>
                 <c:ptCount val="4"/>
                 <c:pt idx="0">
-                  <c:v>40.6</c:v>
+                  <c:v>24.3</c:v>
                 </c:pt>
                 <c:pt idx="1">
-                  <c:v>27.9</c:v>
+                  <c:v>16.7</c:v>
                 </c:pt>
                 <c:pt idx="2">
-                  <c:v>21.5</c:v>
+                  <c:v>12.9</c:v>
                 </c:pt>
                 <c:pt idx="3">
-                  <c:v>22.2</c:v>
+                  <c:v>13.3</c:v>
                 </c:pt>
               </c:numCache>
             </c:numRef>
@@ -609,7 +609,7 @@
         <c:axId val="2094734552"/>
         <c:scaling>
           <c:orientation val="minMax"/>
-          <c:max val="46"/>
+          <c:max val="29"/>
           <c:min val="0"/>
         </c:scaling>
         <c:delete val="0"/>
@@ -798,16 +798,16 @@
                 <c:formatCode>General</c:formatCode>
                 <c:ptCount val="4"/>
                 <c:pt idx="0">
-                  <c:v>85.6</c:v>
+                  <c:v>51.3</c:v>
                 </c:pt>
                 <c:pt idx="1">
-                  <c:v>65.6</c:v>
+                  <c:v>39.4</c:v>
                 </c:pt>
                 <c:pt idx="2">
-                  <c:v>53.7</c:v>
+                  <c:v>32.2</c:v>
                 </c:pt>
                 <c:pt idx="3">
-                  <c:v>45.8</c:v>
+                  <c:v>27.5</c:v>
                 </c:pt>
               </c:numCache>
             </c:numRef>
@@ -887,16 +887,16 @@
                 <c:formatCode>General</c:formatCode>
                 <c:ptCount val="4"/>
                 <c:pt idx="0">
-                  <c:v>45.2</c:v>
+                  <c:v>27.1</c:v>
                 </c:pt>
                 <c:pt idx="1">
-                  <c:v>35</c:v>
+                  <c:v>21</c:v>
                 </c:pt>
                 <c:pt idx="2">
-                  <c:v>28.9</c:v>
+                  <c:v>17.3</c:v>
                 </c:pt>
                 <c:pt idx="3">
-                  <c:v>24.8</c:v>
+                  <c:v>14.9</c:v>
                 </c:pt>
               </c:numCache>
             </c:numRef>
@@ -976,16 +976,16 @@
                 <c:formatCode>General</c:formatCode>
                 <c:ptCount val="4"/>
                 <c:pt idx="0">
-                  <c:v>31.3</c:v>
+                  <c:v>18.8</c:v>
                 </c:pt>
                 <c:pt idx="1">
-                  <c:v>22.9</c:v>
+                  <c:v>13.7</c:v>
                 </c:pt>
                 <c:pt idx="2">
-                  <c:v>17.8</c:v>
+                  <c:v>10.7</c:v>
                 </c:pt>
                 <c:pt idx="3">
-                  <c:v>14.5</c:v>
+                  <c:v>8.7</c:v>
                 </c:pt>
               </c:numCache>
             </c:numRef>
@@ -1064,7 +1064,7 @@
         <c:axId val="2094734552"/>
         <c:scaling>
           <c:orientation val="minMax"/>
-          <c:max val="96"/>
+          <c:max val="56"/>
           <c:min val="0"/>
         </c:scaling>
         <c:delete val="0"/>
@@ -1729,7 +1729,7 @@
           <a:p>
             <a:r>
               <a:rPr lang="en-US" dirty="0"/>
-              <a:t>主線のレンジは定常年間利回り21.1〜27.2%。</a:t>
+              <a:t>主線は回転12ヶ月で21.0%。20%の分岐点は回転12.7ヶ月で余裕は0.7ヶ月。</a:t>
             </a:r>
             <a:endParaRPr lang="en-US" dirty="0"/>
           </a:p>
@@ -1905,7 +1905,7 @@
           <a:p>
             <a:r>
               <a:rPr lang="en-US" dirty="0"/>
-              <a:t>値上がり効果は在庫に対するリターンなので回転期間によらず一定（約+6.6pt）。相殺ではなく底上げ。</a:t>
+              <a:t>値上がり効果は約+4.0ptで一定。これがないと主線でも17.0%で20%を割る。</a:t>
             </a:r>
             <a:endParaRPr lang="en-US" dirty="0"/>
           </a:p>
@@ -2169,7 +2169,7 @@
           <a:p>
             <a:r>
               <a:rPr lang="en-US" dirty="0"/>
-              <a:t>20%割れは回転23.7ヶ月超。ネガティブ複合では13.5ヶ月が分岐点で想定レンジ内。</a:t>
+              <a:t>20%の分岐点は回転12.7ヶ月。主線12ヶ月からの余裕は0.7ヶ月。回転12ヶ月は必要条件。</a:t>
             </a:r>
             <a:endParaRPr lang="en-US" dirty="0"/>
           </a:p>
@@ -2521,7 +2521,7 @@
           <a:p>
             <a:r>
               <a:rPr lang="en-US" dirty="0"/>
-              <a:t>骨子。主線は回転9〜12ヶ月で定常年間利回り17.1〜23.3%、5年通算の年平均利回り13.7〜20.9%。</a:t>
+              <a:t>骨子。主線は回転12ヶ月で投資家利回り21.0%、5年通算の年平均利回り16.7%。想定レンジ9〜18ヶ月では14.9〜27.1%。</a:t>
             </a:r>
             <a:endParaRPr lang="en-US" dirty="0"/>
           </a:p>
@@ -2961,7 +2961,7 @@
           <a:p>
             <a:r>
               <a:rPr lang="en-US" dirty="0"/>
-              <a:t>投資家60：WineBank40の按分。デット金利はWineBank負担。合成利回り19.1%の注意点も明記。</a:t>
+              <a:t>投資家帰属分（3/5）を折半。デット導入は投資家利回りを変えない。主線21.0%。</a:t>
             </a:r>
             <a:endParaRPr lang="en-US" dirty="0"/>
           </a:p>
@@ -4581,7 +4581,7 @@
                 <a:gridCol w="1965960"/>
                 <a:gridCol w="6574536"/>
               </a:tblGrid>
-              <a:tr h="297180">
+              <a:tr h="278892">
                 <a:tc>
                   <a:txBody>
                     <a:bodyPr/>
@@ -4787,7 +4787,7 @@
                   </a:tcPr>
                 </a:tc>
               </a:tr>
-              <a:tr h="297180">
+              <a:tr h="278892">
                 <a:tc>
                   <a:txBody>
                     <a:bodyPr/>
@@ -4993,7 +4993,7 @@
                   </a:tcPr>
                 </a:tc>
               </a:tr>
-              <a:tr h="297180">
+              <a:tr h="278892">
                 <a:tc>
                   <a:txBody>
                     <a:bodyPr/>
@@ -5199,7 +5199,7 @@
                   </a:tcPr>
                 </a:tc>
               </a:tr>
-              <a:tr h="297180">
+              <a:tr h="278892">
                 <a:tc>
                   <a:txBody>
                     <a:bodyPr/>
@@ -5405,7 +5405,7 @@
                   </a:tcPr>
                 </a:tc>
               </a:tr>
-              <a:tr h="297180">
+              <a:tr h="278892">
                 <a:tc>
                   <a:txBody>
                     <a:bodyPr/>
@@ -5611,7 +5611,7 @@
                   </a:tcPr>
                 </a:tc>
               </a:tr>
-              <a:tr h="297180">
+              <a:tr h="278892">
                 <a:tc>
                   <a:txBody>
                     <a:bodyPr/>
@@ -5817,7 +5817,7 @@
                   </a:tcPr>
                 </a:tc>
               </a:tr>
-              <a:tr h="297180">
+              <a:tr h="278892">
                 <a:tc>
                   <a:txBody>
                     <a:bodyPr/>
@@ -6023,7 +6023,7 @@
                   </a:tcPr>
                 </a:tc>
               </a:tr>
-              <a:tr h="297180">
+              <a:tr h="278892">
                 <a:tc>
                   <a:txBody>
                     <a:bodyPr/>
@@ -6229,7 +6229,7 @@
                   </a:tcPr>
                 </a:tc>
               </a:tr>
-              <a:tr h="297180">
+              <a:tr h="278892">
                 <a:tc>
                   <a:txBody>
                     <a:bodyPr/>
@@ -6383,7 +6383,7 @@
                           <a:ea typeface="Yu Gothic" pitchFamily="34" charset="-122"/>
                           <a:cs typeface="Yu Gothic" pitchFamily="34" charset="-120"/>
                         </a:rPr>
-                        <a:t>GP取分（利益の50%）から負担。SPCに管理報酬・成功報酬は課さない</a:t>
+                        <a:t>WineBankの成功報酬取分から負担。SPCに残高比例の期中管理報酬は課さない</a:t>
                       </a:r>
                       <a:endParaRPr lang="en-US" sz="1000" dirty="0">
                         <a:latin typeface="Yu Gothic" charset="0"/>
@@ -6447,7 +6447,7 @@
         </p:nvSpPr>
         <p:spPr>
           <a:xfrm>
-            <a:off x="658368" y="4315968"/>
+            <a:off x="658368" y="4334256"/>
             <a:ext cx="4572000" cy="219456"/>
           </a:xfrm>
           <a:prstGeom prst="rect">
@@ -6997,7 +6997,7 @@
                 <a:ea typeface="Yu Gothic" pitchFamily="34" charset="-122"/>
                 <a:cs typeface="Yu Gothic" pitchFamily="34" charset="-120"/>
               </a:rPr>
-              <a:t>※ 保管料は業務用パレット定温保管の水準（月10〜20円／本）。個人向けセラー預かり（月100〜150円／本）とは別の料金帯。主線（年間販売5.0億円）における年間SPC費用の合計は4,675万円で、内訳は変動販売費3,220万円・保管705万円・SPC固定費660万円・保険71万円・入庫19万円。デット2億円の金利はWineBankが負担するためSPCの費用には含まない。その他の運用前提：総額の95%をワイン購入に充当（現金5%）／仕入展開6ヶ月／ローリング運用／利益は複利再投資せず半期分配／税前利益を投資家60：WineBank40で按分／利回りは投資家の税引前ベース。</a:t>
+              <a:t>※ 保管料は業務用パレット定温保管の水準（月10〜20円／本）。個人向けセラー預かり（月100〜150円／本）とは別の料金帯。主線（在庫回転12ヶ月・年間販売7.48億円）における年間SPC費用の合計は6,282万円で、内訳は変動販売費4,816万円・保管705万円・SPC固定費660万円・保険71万円・入庫30万円。デット2億円の金利はWineBankが負担するためSPCの費用には含まない。その他の運用前提：総額の95%をワイン購入に充当（現金5%）／仕入展開6ヶ月／ローリング運用／利益は複利再投資せず半期分配／税前利益のうち出資3億円に帰属する5分の3を投資家とWineBankで折半／利回りは投資家の税引前ベース。</a:t>
             </a:r>
             <a:endParaRPr lang="en-US" sz="850" dirty="0"/>
           </a:p>
@@ -7146,7 +7146,7 @@
                 <a:ea typeface="Yu Gothic" pitchFamily="34" charset="-122"/>
                 <a:cs typeface="Yu Gothic" pitchFamily="34" charset="-120"/>
               </a:rPr>
-              <a:t>SPC取得原価50.5・ワイン価格上昇 年6%／総額5億円（デット2億＋出資3億）・損益は折半・稼働率95%</a:t>
+              <a:t>SPC取得原価50.5・ワイン価格上昇 年6%／総額5億円（デット2億＋出資3億）・投資家帰属利益を折半・稼働率95%</a:t>
             </a:r>
             <a:endParaRPr lang="en-US" sz="1150" dirty="0"/>
           </a:p>
@@ -7253,16 +7253,16 @@
             <a:tbl>
               <a:tblPr/>
               <a:tblGrid>
+                <a:gridCol w="1389888"/>
+                <a:gridCol w="859536"/>
+                <a:gridCol w="859536"/>
+                <a:gridCol w="731520"/>
+                <a:gridCol w="1042416"/>
                 <a:gridCol w="1481328"/>
-                <a:gridCol w="896112"/>
-                <a:gridCol w="896112"/>
-                <a:gridCol w="749808"/>
-                <a:gridCol w="1170432"/>
-                <a:gridCol w="1097280"/>
-                <a:gridCol w="1207008"/>
-                <a:gridCol w="1060704"/>
+                <a:gridCol w="1417320"/>
                 <a:gridCol w="1005840"/>
-                <a:gridCol w="1307592"/>
+                <a:gridCol w="969264"/>
+                <a:gridCol w="1115568"/>
               </a:tblGrid>
               <a:tr h="365760">
                 <a:tc>
@@ -7554,7 +7554,7 @@
                           <a:ea typeface="Yu Gothic" pitchFamily="34" charset="-122"/>
                           <a:cs typeface="Yu Gothic" pitchFamily="34" charset="-120"/>
                         </a:rPr>
-                        <a:t>その他SPC費用</a:t>
+                        <a:t>年間税前利益</a:t>
                       </a:r>
                       <a:endParaRPr lang="en-US" sz="950" dirty="0">
                         <a:latin typeface="Yu Gothic" charset="0"/>
@@ -7622,7 +7622,7 @@
                           <a:ea typeface="Yu Gothic" pitchFamily="34" charset="-122"/>
                           <a:cs typeface="Yu Gothic" pitchFamily="34" charset="-120"/>
                         </a:rPr>
-                        <a:t>年間税前利益</a:t>
+                        <a:t>投資家帰属分（5分の3）</a:t>
                       </a:r>
                       <a:endParaRPr lang="en-US" sz="950" dirty="0">
                         <a:latin typeface="Yu Gothic" charset="0"/>
@@ -7690,7 +7690,7 @@
                           <a:ea typeface="Yu Gothic" pitchFamily="34" charset="-122"/>
                           <a:cs typeface="Yu Gothic" pitchFamily="34" charset="-120"/>
                         </a:rPr>
-                        <a:t>投資家取分（50%）</a:t>
+                        <a:t>投資家取分（折半後）</a:t>
                       </a:r>
                       <a:endParaRPr lang="en-US" sz="950" dirty="0">
                         <a:latin typeface="Yu Gothic" charset="0"/>
@@ -8236,7 +8236,7 @@
                           <a:ea typeface="Yu Gothic" pitchFamily="34" charset="-122"/>
                           <a:cs typeface="Yu Gothic" pitchFamily="34" charset="-120"/>
                         </a:rPr>
-                        <a:t>15百万</a:t>
+                        <a:t>2.71億</a:t>
                       </a:r>
                       <a:endParaRPr lang="en-US" sz="1000" dirty="0">
                         <a:latin typeface="Yu Gothic" charset="0"/>
@@ -8304,7 +8304,7 @@
                           <a:ea typeface="Yu Gothic" pitchFamily="34" charset="-122"/>
                           <a:cs typeface="Yu Gothic" pitchFamily="34" charset="-120"/>
                         </a:rPr>
-                        <a:t>2.71億</a:t>
+                        <a:t>163百万</a:t>
                       </a:r>
                       <a:endParaRPr lang="en-US" sz="1000" dirty="0">
                         <a:latin typeface="Yu Gothic" charset="0"/>
@@ -8372,7 +8372,7 @@
                           <a:ea typeface="Yu Gothic" pitchFamily="34" charset="-122"/>
                           <a:cs typeface="Yu Gothic" pitchFamily="34" charset="-120"/>
                         </a:rPr>
-                        <a:t>136百万</a:t>
+                        <a:t>81百万</a:t>
                       </a:r>
                       <a:endParaRPr lang="en-US" sz="1000" dirty="0">
                         <a:latin typeface="Yu Gothic" charset="0"/>
@@ -8440,7 +8440,7 @@
                           <a:ea typeface="Yu Gothic" pitchFamily="34" charset="-122"/>
                           <a:cs typeface="Yu Gothic" pitchFamily="34" charset="-120"/>
                         </a:rPr>
-                        <a:t>45.2%</a:t>
+                        <a:t>27.1%</a:t>
                       </a:r>
                       <a:endParaRPr lang="en-US" sz="1000" dirty="0">
                         <a:latin typeface="Yu Gothic" charset="0"/>
@@ -8508,7 +8508,7 @@
                           <a:ea typeface="Yu Gothic" pitchFamily="34" charset="-122"/>
                           <a:cs typeface="Yu Gothic" pitchFamily="34" charset="-120"/>
                         </a:rPr>
-                        <a:t>609百万</a:t>
+                        <a:t>365百万</a:t>
                       </a:r>
                       <a:endParaRPr lang="en-US" sz="1000" dirty="0">
                         <a:latin typeface="Yu Gothic" charset="0"/>
@@ -8576,7 +8576,7 @@
                           <a:ea typeface="Yu Gothic" pitchFamily="34" charset="-122"/>
                           <a:cs typeface="Yu Gothic" pitchFamily="34" charset="-120"/>
                         </a:rPr>
-                        <a:t>40.6%</a:t>
+                        <a:t>24.3%</a:t>
                       </a:r>
                       <a:endParaRPr lang="en-US" sz="1000" dirty="0">
                         <a:latin typeface="Yu Gothic" charset="0"/>
@@ -8918,7 +8918,7 @@
                           <a:ea typeface="Yu Gothic" pitchFamily="34" charset="-122"/>
                           <a:cs typeface="Yu Gothic" pitchFamily="34" charset="-120"/>
                         </a:rPr>
-                        <a:t>15百万</a:t>
+                        <a:t>2.10億</a:t>
                       </a:r>
                       <a:endParaRPr lang="en-US" sz="1000" dirty="0">
                         <a:latin typeface="Yu Gothic" charset="0"/>
@@ -8986,7 +8986,7 @@
                           <a:ea typeface="Yu Gothic" pitchFamily="34" charset="-122"/>
                           <a:cs typeface="Yu Gothic" pitchFamily="34" charset="-120"/>
                         </a:rPr>
-                        <a:t>2.10億</a:t>
+                        <a:t>126百万</a:t>
                       </a:r>
                       <a:endParaRPr lang="en-US" sz="1000" dirty="0">
                         <a:latin typeface="Yu Gothic" charset="0"/>
@@ -9054,7 +9054,7 @@
                           <a:ea typeface="Yu Gothic" pitchFamily="34" charset="-122"/>
                           <a:cs typeface="Yu Gothic" pitchFamily="34" charset="-120"/>
                         </a:rPr>
-                        <a:t>105百万</a:t>
+                        <a:t>63百万</a:t>
                       </a:r>
                       <a:endParaRPr lang="en-US" sz="1000" dirty="0">
                         <a:latin typeface="Yu Gothic" charset="0"/>
@@ -9122,7 +9122,7 @@
                           <a:ea typeface="Yu Gothic" pitchFamily="34" charset="-122"/>
                           <a:cs typeface="Yu Gothic" pitchFamily="34" charset="-120"/>
                         </a:rPr>
-                        <a:t>35.0%</a:t>
+                        <a:t>21.0%</a:t>
                       </a:r>
                       <a:endParaRPr lang="en-US" sz="1000" dirty="0">
                         <a:latin typeface="Yu Gothic" charset="0"/>
@@ -9190,7 +9190,7 @@
                           <a:ea typeface="Yu Gothic" pitchFamily="34" charset="-122"/>
                           <a:cs typeface="Yu Gothic" pitchFamily="34" charset="-120"/>
                         </a:rPr>
-                        <a:t>418百万</a:t>
+                        <a:t>251百万</a:t>
                       </a:r>
                       <a:endParaRPr lang="en-US" sz="1000" dirty="0">
                         <a:latin typeface="Yu Gothic" charset="0"/>
@@ -9258,7 +9258,7 @@
                           <a:ea typeface="Yu Gothic" pitchFamily="34" charset="-122"/>
                           <a:cs typeface="Yu Gothic" pitchFamily="34" charset="-120"/>
                         </a:rPr>
-                        <a:t>27.9%</a:t>
+                        <a:t>16.7%</a:t>
                       </a:r>
                       <a:endParaRPr lang="en-US" sz="1000" dirty="0">
                         <a:latin typeface="Yu Gothic" charset="0"/>
@@ -9600,7 +9600,7 @@
                           <a:ea typeface="Yu Gothic" pitchFamily="34" charset="-122"/>
                           <a:cs typeface="Yu Gothic" pitchFamily="34" charset="-120"/>
                         </a:rPr>
-                        <a:t>15百万</a:t>
+                        <a:t>1.73億</a:t>
                       </a:r>
                       <a:endParaRPr lang="en-US" sz="1000" dirty="0">
                         <a:latin typeface="Yu Gothic" charset="0"/>
@@ -9668,7 +9668,7 @@
                           <a:ea typeface="Yu Gothic" pitchFamily="34" charset="-122"/>
                           <a:cs typeface="Yu Gothic" pitchFamily="34" charset="-120"/>
                         </a:rPr>
-                        <a:t>1.73億</a:t>
+                        <a:t>104百万</a:t>
                       </a:r>
                       <a:endParaRPr lang="en-US" sz="1000" dirty="0">
                         <a:latin typeface="Yu Gothic" charset="0"/>
@@ -9736,7 +9736,7 @@
                           <a:ea typeface="Yu Gothic" pitchFamily="34" charset="-122"/>
                           <a:cs typeface="Yu Gothic" pitchFamily="34" charset="-120"/>
                         </a:rPr>
-                        <a:t>87百万</a:t>
+                        <a:t>52百万</a:t>
                       </a:r>
                       <a:endParaRPr lang="en-US" sz="1000" dirty="0">
                         <a:latin typeface="Yu Gothic" charset="0"/>
@@ -9798,13 +9798,13 @@
                       <a:r>
                         <a:rPr lang="en-US" sz="1000" b="1" dirty="0">
                           <a:solidFill>
-                            <a:srgbClr val="C9A96E"/>
+                            <a:srgbClr val="B4553F"/>
                           </a:solidFill>
                           <a:latin typeface="Yu Gothic" pitchFamily="34" charset="0"/>
                           <a:ea typeface="Yu Gothic" pitchFamily="34" charset="-122"/>
                           <a:cs typeface="Yu Gothic" pitchFamily="34" charset="-120"/>
                         </a:rPr>
-                        <a:t>28.9%</a:t>
+                        <a:t>17.3%</a:t>
                       </a:r>
                       <a:endParaRPr lang="en-US" sz="1000" dirty="0">
                         <a:latin typeface="Yu Gothic" charset="0"/>
@@ -9872,7 +9872,7 @@
                           <a:ea typeface="Yu Gothic" pitchFamily="34" charset="-122"/>
                           <a:cs typeface="Yu Gothic" pitchFamily="34" charset="-120"/>
                         </a:rPr>
-                        <a:t>323百万</a:t>
+                        <a:t>193百万</a:t>
                       </a:r>
                       <a:endParaRPr lang="en-US" sz="1000" dirty="0">
                         <a:latin typeface="Yu Gothic" charset="0"/>
@@ -9934,13 +9934,13 @@
                       <a:r>
                         <a:rPr lang="en-US" sz="1000" b="1" dirty="0">
                           <a:solidFill>
-                            <a:srgbClr val="C9A96E"/>
+                            <a:srgbClr val="EFEBE3"/>
                           </a:solidFill>
                           <a:latin typeface="Yu Gothic" pitchFamily="34" charset="0"/>
                           <a:ea typeface="Yu Gothic" pitchFamily="34" charset="-122"/>
                           <a:cs typeface="Yu Gothic" pitchFamily="34" charset="-120"/>
                         </a:rPr>
-                        <a:t>21.5%</a:t>
+                        <a:t>12.9%</a:t>
                       </a:r>
                       <a:endParaRPr lang="en-US" sz="1000" dirty="0">
                         <a:latin typeface="Yu Gothic" charset="0"/>
@@ -10282,7 +10282,7 @@
                           <a:ea typeface="Yu Gothic" pitchFamily="34" charset="-122"/>
                           <a:cs typeface="Yu Gothic" pitchFamily="34" charset="-120"/>
                         </a:rPr>
-                        <a:t>15百万</a:t>
+                        <a:t>1.49億</a:t>
                       </a:r>
                       <a:endParaRPr lang="en-US" sz="1000" dirty="0">
                         <a:latin typeface="Yu Gothic" charset="0"/>
@@ -10350,7 +10350,7 @@
                           <a:ea typeface="Yu Gothic" pitchFamily="34" charset="-122"/>
                           <a:cs typeface="Yu Gothic" pitchFamily="34" charset="-120"/>
                         </a:rPr>
-                        <a:t>1.49億</a:t>
+                        <a:t>89百万</a:t>
                       </a:r>
                       <a:endParaRPr lang="en-US" sz="1000" dirty="0">
                         <a:latin typeface="Yu Gothic" charset="0"/>
@@ -10418,7 +10418,7 @@
                           <a:ea typeface="Yu Gothic" pitchFamily="34" charset="-122"/>
                           <a:cs typeface="Yu Gothic" pitchFamily="34" charset="-120"/>
                         </a:rPr>
-                        <a:t>74百万</a:t>
+                        <a:t>45百万</a:t>
                       </a:r>
                       <a:endParaRPr lang="en-US" sz="1000" dirty="0">
                         <a:latin typeface="Yu Gothic" charset="0"/>
@@ -10480,13 +10480,13 @@
                       <a:r>
                         <a:rPr lang="en-US" sz="1000" b="1" dirty="0">
                           <a:solidFill>
-                            <a:srgbClr val="C9A96E"/>
+                            <a:srgbClr val="B4553F"/>
                           </a:solidFill>
                           <a:latin typeface="Yu Gothic" pitchFamily="34" charset="0"/>
                           <a:ea typeface="Yu Gothic" pitchFamily="34" charset="-122"/>
                           <a:cs typeface="Yu Gothic" pitchFamily="34" charset="-120"/>
                         </a:rPr>
-                        <a:t>24.8%</a:t>
+                        <a:t>14.9%</a:t>
                       </a:r>
                       <a:endParaRPr lang="en-US" sz="1000" dirty="0">
                         <a:latin typeface="Yu Gothic" charset="0"/>
@@ -10554,7 +10554,7 @@
                           <a:ea typeface="Yu Gothic" pitchFamily="34" charset="-122"/>
                           <a:cs typeface="Yu Gothic" pitchFamily="34" charset="-120"/>
                         </a:rPr>
-                        <a:t>333百万</a:t>
+                        <a:t>200百万</a:t>
                       </a:r>
                       <a:endParaRPr lang="en-US" sz="1000" dirty="0">
                         <a:latin typeface="Yu Gothic" charset="0"/>
@@ -10622,7 +10622,7 @@
                           <a:ea typeface="Yu Gothic" pitchFamily="34" charset="-122"/>
                           <a:cs typeface="Yu Gothic" pitchFamily="34" charset="-120"/>
                         </a:rPr>
-                        <a:t>22.2%</a:t>
+                        <a:t>13.3%</a:t>
                       </a:r>
                       <a:endParaRPr lang="en-US" sz="1000" dirty="0">
                         <a:latin typeface="Yu Gothic" charset="0"/>
@@ -10738,7 +10738,7 @@
                 <a:ea typeface="Yu Gothic" pitchFamily="34" charset="-122"/>
                 <a:cs typeface="Yu Gothic" pitchFamily="34" charset="-120"/>
               </a:rPr>
-              <a:t>粗利率30.0%が投資家利回り35.0%になる理由</a:t>
+              <a:t>粗利率30.0%が投資家利回り21.0%になる理由</a:t>
             </a:r>
             <a:endParaRPr lang="en-US" sz="1150" dirty="0"/>
           </a:p>
@@ -11020,7 +11020,7 @@
                 <a:ea typeface="Yu Gothic" pitchFamily="34" charset="-122"/>
                 <a:cs typeface="Yu Gothic" pitchFamily="34" charset="-120"/>
               </a:rPr>
-              <a:t>税前利回り 42.0%</a:t>
+              <a:t>税前利益 2.10億円</a:t>
             </a:r>
             <a:endParaRPr lang="en-US" sz="950" dirty="0"/>
           </a:p>
@@ -11062,7 +11062,7 @@
                 <a:ea typeface="Yu Gothic" pitchFamily="34" charset="-122"/>
                 <a:cs typeface="Yu Gothic" pitchFamily="34" charset="-120"/>
               </a:rPr>
-              <a:t>SPC費用（保管・保険・入庫・固定 約1,500万円）控除後／総資産5億円に対して</a:t>
+              <a:t>SPC費用（保管・保険・入庫・固定 約1,500万円）控除後の年間税前利益</a:t>
             </a:r>
             <a:endParaRPr lang="en-US" sz="850" dirty="0"/>
           </a:p>
@@ -11101,7 +11101,7 @@
                 <a:ea typeface="Yu Gothic" pitchFamily="34" charset="-122"/>
                 <a:cs typeface="Yu Gothic" pitchFamily="34" charset="-120"/>
               </a:rPr>
-              <a:t>投資家利回り 35.0%</a:t>
+              <a:t>投資家利回り 21.0%</a:t>
             </a:r>
             <a:endParaRPr lang="en-US" sz="950" dirty="0"/>
           </a:p>
@@ -11143,7 +11143,7 @@
                 <a:ea typeface="Yu Gothic" pitchFamily="34" charset="-122"/>
                 <a:cs typeface="Yu Gothic" pitchFamily="34" charset="-120"/>
               </a:rPr>
-              <a:t>税前利益の50%（105百万円）を出資3億円で除したもの</a:t>
+              <a:t>うち出資3億円に帰属する126百万円を折半した63百万円を、出資3億円で除したもの</a:t>
             </a:r>
             <a:endParaRPr lang="en-US" sz="850" dirty="0"/>
           </a:p>
@@ -11287,7 +11287,7 @@
                 <a:ea typeface="Cambria" pitchFamily="34" charset="-122"/>
                 <a:cs typeface="Cambria" pitchFamily="34" charset="-120"/>
               </a:rPr>
-              <a:t>24.8 – 45.2</a:t>
+              <a:t>14.9 – 27.1</a:t>
             </a:r>
             <a:pPr indent="0" marL="0">
               <a:buNone/>
@@ -11343,7 +11343,7 @@
                 <a:ea typeface="Yu Gothic" pitchFamily="34" charset="-122"/>
                 <a:cs typeface="Yu Gothic" pitchFamily="34" charset="-120"/>
               </a:rPr>
-              <a:t>主線の回転12ヶ月で35.0%。最短9ヶ月なら45.2%、18ヶ月まで延びても24.8%を確保する。20%を割り込むのは回転が23.7ヶ月を超えた場合であり、想定レンジの外にある。</a:t>
+              <a:t>主線の回転12ヶ月で21.0%と貴社基準20%を満たす。ただし20%の分岐点は回転12.7ヶ月であり、余裕は0.7ヶ月しかない。15ヶ月まで延びると17.3%となり基準を下回る。</a:t>
             </a:r>
             <a:endParaRPr lang="en-US" sz="1000" dirty="0"/>
           </a:p>
@@ -11492,7 +11492,7 @@
                 <a:ea typeface="Yu Gothic" pitchFamily="34" charset="-122"/>
                 <a:cs typeface="Yu Gothic" pitchFamily="34" charset="-120"/>
               </a:rPr>
-              <a:t>いずれも出資3億円に対する数値。SPC税前利益の50%を投資家が受け取る前提。</a:t>
+              <a:t>いずれも出資3億円に対する数値。20%の分岐点は回転12.7ヶ月であり、主線12ヶ月との余裕は小さい。</a:t>
             </a:r>
             <a:endParaRPr lang="en-US" sz="1150" dirty="0"/>
           </a:p>
@@ -11722,7 +11722,7 @@
                 <a:ea typeface="Yu Gothic" pitchFamily="34" charset="-122"/>
                 <a:cs typeface="Yu Gothic" pitchFamily="34" charset="-120"/>
               </a:rPr>
-              <a:t>回転期間が主たる決定要因</a:t>
+              <a:t>回転12ヶ月が必須条件</a:t>
             </a:r>
             <a:endParaRPr lang="en-US" sz="1200" dirty="0"/>
           </a:p>
@@ -11764,7 +11764,7 @@
                 <a:ea typeface="Yu Gothic" pitchFamily="34" charset="-122"/>
                 <a:cs typeface="Yu Gothic" pitchFamily="34" charset="-120"/>
               </a:rPr>
-              <a:t>回転を1ヶ月短縮するごとに投資家利回りは約3.4ポイント改善する。何を組み入れるか（銘柄の流動性）で回転期間の大半が決まる。</a:t>
+              <a:t>20%の分岐点は回転12.7ヶ月。主線との余裕は0.7ヶ月しかなく、回転12ヶ月の達成が貴社基準を満たすための必須条件となる。</a:t>
             </a:r>
             <a:endParaRPr lang="en-US" sz="1000" dirty="0"/>
           </a:p>
@@ -11830,7 +11830,7 @@
                 <a:ea typeface="Yu Gothic" pitchFamily="34" charset="-122"/>
                 <a:cs typeface="Yu Gothic" pitchFamily="34" charset="-120"/>
               </a:rPr>
-              <a:t>ただし値上がりが下支えする</a:t>
+              <a:t>値上がりが4ポイントを底上げする</a:t>
             </a:r>
             <a:endParaRPr lang="en-US" sz="1200" dirty="0"/>
           </a:p>
@@ -11872,7 +11872,7 @@
                 <a:ea typeface="Yu Gothic" pitchFamily="34" charset="-122"/>
                 <a:cs typeface="Yu Gothic" pitchFamily="34" charset="-120"/>
               </a:rPr>
-              <a:t>回転が18ヶ月まで延びても24.8%を確保できる。保有が長いぶん売値が上がるためで、値上がりを織り込まない場合とは約6.6ポイントの差がつく（次頁）。</a:t>
+              <a:t>値上がりを織り込まない場合、主線でも17.0%にとどまり20%を割る。年6%の上昇が約4.0ポイントを底上げして21.0%に届かせている（次頁）。</a:t>
             </a:r>
             <a:endParaRPr lang="en-US" sz="1000" dirty="0"/>
           </a:p>
@@ -12285,7 +12285,7 @@
                 <a:ea typeface="Yu Gothic" pitchFamily="34" charset="-122"/>
                 <a:cs typeface="Yu Gothic" pitchFamily="34" charset="-120"/>
               </a:rPr>
-              <a:t>主線（回転12ヶ月）で 28.4%</a:t>
+              <a:t>主線（回転12ヶ月）で 17.0%</a:t>
             </a:r>
             <a:endParaRPr lang="en-US" sz="1300" dirty="0"/>
           </a:p>
@@ -12471,7 +12471,7 @@
                 <a:ea typeface="Yu Gothic" pitchFamily="34" charset="-122"/>
                 <a:cs typeface="Yu Gothic" pitchFamily="34" charset="-120"/>
               </a:rPr>
-              <a:t>回転期間によらず 約 +6.6pt</a:t>
+              <a:t>回転期間によらず 約 +4.0pt</a:t>
             </a:r>
             <a:endParaRPr lang="en-US" sz="1300" dirty="0"/>
           </a:p>
@@ -13002,7 +13002,7 @@
                           <a:ea typeface="Yu Gothic" pitchFamily="34" charset="-122"/>
                           <a:cs typeface="Yu Gothic" pitchFamily="34" charset="-120"/>
                         </a:rPr>
-                        <a:t>38.7%</a:t>
+                        <a:t>23.2%</a:t>
                       </a:r>
                       <a:endParaRPr lang="en-US" sz="1000" dirty="0">
                         <a:latin typeface="Yu Gothic" charset="0"/>
@@ -13070,7 +13070,7 @@
                           <a:ea typeface="Yu Gothic" pitchFamily="34" charset="-122"/>
                           <a:cs typeface="Yu Gothic" pitchFamily="34" charset="-120"/>
                         </a:rPr>
-                        <a:t>＋6.6pt</a:t>
+                        <a:t>＋3.9pt</a:t>
                       </a:r>
                       <a:endParaRPr lang="en-US" sz="1000" dirty="0">
                         <a:latin typeface="Yu Gothic" charset="0"/>
@@ -13138,7 +13138,7 @@
                           <a:ea typeface="Yu Gothic" pitchFamily="34" charset="-122"/>
                           <a:cs typeface="Yu Gothic" pitchFamily="34" charset="-120"/>
                         </a:rPr>
-                        <a:t>45.2%</a:t>
+                        <a:t>27.1%</a:t>
                       </a:r>
                       <a:endParaRPr lang="en-US" sz="1000" dirty="0">
                         <a:latin typeface="Yu Gothic" charset="0"/>
@@ -13344,7 +13344,7 @@
                           <a:ea typeface="Yu Gothic" pitchFamily="34" charset="-122"/>
                           <a:cs typeface="Yu Gothic" pitchFamily="34" charset="-120"/>
                         </a:rPr>
-                        <a:t>28.4%</a:t>
+                        <a:t>17.0%</a:t>
                       </a:r>
                       <a:endParaRPr lang="en-US" sz="1000" dirty="0">
                         <a:latin typeface="Yu Gothic" charset="0"/>
@@ -13412,7 +13412,7 @@
                           <a:ea typeface="Yu Gothic" pitchFamily="34" charset="-122"/>
                           <a:cs typeface="Yu Gothic" pitchFamily="34" charset="-120"/>
                         </a:rPr>
-                        <a:t>＋6.6pt</a:t>
+                        <a:t>＋4.0pt</a:t>
                       </a:r>
                       <a:endParaRPr lang="en-US" sz="1000" dirty="0">
                         <a:latin typeface="Yu Gothic" charset="0"/>
@@ -13480,7 +13480,7 @@
                           <a:ea typeface="Yu Gothic" pitchFamily="34" charset="-122"/>
                           <a:cs typeface="Yu Gothic" pitchFamily="34" charset="-120"/>
                         </a:rPr>
-                        <a:t>35.0%</a:t>
+                        <a:t>21.0%</a:t>
                       </a:r>
                       <a:endParaRPr lang="en-US" sz="1000" dirty="0">
                         <a:latin typeface="Yu Gothic" charset="0"/>
@@ -13686,7 +13686,7 @@
                           <a:ea typeface="Yu Gothic" pitchFamily="34" charset="-122"/>
                           <a:cs typeface="Yu Gothic" pitchFamily="34" charset="-120"/>
                         </a:rPr>
-                        <a:t>22.2%</a:t>
+                        <a:t>13.3%</a:t>
                       </a:r>
                       <a:endParaRPr lang="en-US" sz="1000" dirty="0">
                         <a:latin typeface="Yu Gothic" charset="0"/>
@@ -13754,7 +13754,7 @@
                           <a:ea typeface="Yu Gothic" pitchFamily="34" charset="-122"/>
                           <a:cs typeface="Yu Gothic" pitchFamily="34" charset="-120"/>
                         </a:rPr>
-                        <a:t>＋6.6pt</a:t>
+                        <a:t>＋4.0pt</a:t>
                       </a:r>
                       <a:endParaRPr lang="en-US" sz="1000" dirty="0">
                         <a:latin typeface="Yu Gothic" charset="0"/>
@@ -13816,13 +13816,13 @@
                       <a:r>
                         <a:rPr lang="en-US" sz="1000" b="1" dirty="0">
                           <a:solidFill>
-                            <a:srgbClr val="C9A96E"/>
+                            <a:srgbClr val="EFEBE3"/>
                           </a:solidFill>
                           <a:latin typeface="Yu Gothic" pitchFamily="34" charset="0"/>
                           <a:ea typeface="Yu Gothic" pitchFamily="34" charset="-122"/>
                           <a:cs typeface="Yu Gothic" pitchFamily="34" charset="-120"/>
                         </a:rPr>
-                        <a:t>28.9%</a:t>
+                        <a:t>17.3%</a:t>
                       </a:r>
                       <a:endParaRPr lang="en-US" sz="1000" dirty="0">
                         <a:latin typeface="Yu Gothic" charset="0"/>
@@ -14028,7 +14028,7 @@
                           <a:ea typeface="Yu Gothic" pitchFamily="34" charset="-122"/>
                           <a:cs typeface="Yu Gothic" pitchFamily="34" charset="-120"/>
                         </a:rPr>
-                        <a:t>18.1%</a:t>
+                        <a:t>10.9%</a:t>
                       </a:r>
                       <a:endParaRPr lang="en-US" sz="1000" dirty="0">
                         <a:latin typeface="Yu Gothic" charset="0"/>
@@ -14096,7 +14096,7 @@
                           <a:ea typeface="Yu Gothic" pitchFamily="34" charset="-122"/>
                           <a:cs typeface="Yu Gothic" pitchFamily="34" charset="-120"/>
                         </a:rPr>
-                        <a:t>＋6.7pt</a:t>
+                        <a:t>＋4.0pt</a:t>
                       </a:r>
                       <a:endParaRPr lang="en-US" sz="1000" dirty="0">
                         <a:latin typeface="Yu Gothic" charset="0"/>
@@ -14158,13 +14158,13 @@
                       <a:r>
                         <a:rPr lang="en-US" sz="1000" b="1" dirty="0">
                           <a:solidFill>
-                            <a:srgbClr val="C9A96E"/>
+                            <a:srgbClr val="EFEBE3"/>
                           </a:solidFill>
                           <a:latin typeface="Yu Gothic" pitchFamily="34" charset="0"/>
                           <a:ea typeface="Yu Gothic" pitchFamily="34" charset="-122"/>
                           <a:cs typeface="Yu Gothic" pitchFamily="34" charset="-120"/>
                         </a:rPr>
-                        <a:t>24.8%</a:t>
+                        <a:t>14.9%</a:t>
                       </a:r>
                       <a:endParaRPr lang="en-US" sz="1000" dirty="0">
                         <a:latin typeface="Yu Gothic" charset="0"/>
@@ -14358,7 +14358,7 @@
                 <a:ea typeface="Cambria" pitchFamily="34" charset="-122"/>
                 <a:cs typeface="Cambria" pitchFamily="34" charset="-120"/>
               </a:rPr>
-              <a:t>28.4%</a:t>
+              <a:t>17.0%</a:t>
             </a:r>
             <a:endParaRPr lang="en-US" sz="1900" dirty="0"/>
           </a:p>
@@ -14436,7 +14436,7 @@
                 <a:ea typeface="Cambria" pitchFamily="34" charset="-122"/>
                 <a:cs typeface="Cambria" pitchFamily="34" charset="-120"/>
               </a:rPr>
-              <a:t>35.0%</a:t>
+              <a:t>21.0%</a:t>
             </a:r>
             <a:endParaRPr lang="en-US" sz="1900" dirty="0"/>
           </a:p>
@@ -14514,7 +14514,7 @@
                 <a:ea typeface="Cambria" pitchFamily="34" charset="-122"/>
                 <a:cs typeface="Cambria" pitchFamily="34" charset="-120"/>
               </a:rPr>
-              <a:t>39.4%</a:t>
+              <a:t>23.6%</a:t>
             </a:r>
             <a:endParaRPr lang="en-US" sz="1900" dirty="0"/>
           </a:p>
@@ -14622,7 +14622,7 @@
                 <a:ea typeface="Yu Gothic" pitchFamily="34" charset="-122"/>
                 <a:cs typeface="Yu Gothic" pitchFamily="34" charset="-120"/>
               </a:rPr>
-              <a:t>値上がりは在庫金額に対して発生するため、年間の上乗せ幅は回転期間によらず約6.6ポイントで一定になる。回転が落ちた分をちょうど埋め合わせるわけではなく、どの回転期間でも一律に底上げする性質のもの。したがって回転期間の管理は引き続き最大の運用課題である。</a:t>
+              <a:t>値上がりは在庫金額に対して発生するため、年間の上乗せ幅は回転期間によらず約4.0ポイントで一定になる。回転が落ちた分をちょうど埋め合わせるわけではなく、どの回転期間でも一律に底上げする性質のもの。したがって回転期間の管理は引き続き最大の運用課題である。</a:t>
             </a:r>
             <a:endParaRPr lang="en-US" sz="900" dirty="0"/>
           </a:p>
@@ -15514,7 +15514,7 @@
                           <a:ea typeface="Yu Gothic" pitchFamily="34" charset="-122"/>
                           <a:cs typeface="Yu Gothic" pitchFamily="34" charset="-120"/>
                         </a:rPr>
-                        <a:t>257百万</a:t>
+                        <a:t>154百万</a:t>
                       </a:r>
                       <a:endParaRPr lang="en-US" sz="950" dirty="0">
                         <a:latin typeface="Yu Gothic" charset="0"/>
@@ -15582,7 +15582,7 @@
                           <a:ea typeface="Yu Gothic" pitchFamily="34" charset="-122"/>
                           <a:cs typeface="Yu Gothic" pitchFamily="34" charset="-120"/>
                         </a:rPr>
-                        <a:t>85.6%</a:t>
+                        <a:t>51.3%</a:t>
                       </a:r>
                       <a:endParaRPr lang="en-US" sz="950" dirty="0">
                         <a:latin typeface="Yu Gothic" charset="0"/>
@@ -15856,7 +15856,7 @@
                           <a:ea typeface="Yu Gothic" pitchFamily="34" charset="-122"/>
                           <a:cs typeface="Yu Gothic" pitchFamily="34" charset="-120"/>
                         </a:rPr>
-                        <a:t>197百万</a:t>
+                        <a:t>118百万</a:t>
                       </a:r>
                       <a:endParaRPr lang="en-US" sz="950" dirty="0">
                         <a:latin typeface="Yu Gothic" charset="0"/>
@@ -15924,7 +15924,7 @@
                           <a:ea typeface="Yu Gothic" pitchFamily="34" charset="-122"/>
                           <a:cs typeface="Yu Gothic" pitchFamily="34" charset="-120"/>
                         </a:rPr>
-                        <a:t>65.6%</a:t>
+                        <a:t>39.4%</a:t>
                       </a:r>
                       <a:endParaRPr lang="en-US" sz="950" dirty="0">
                         <a:latin typeface="Yu Gothic" charset="0"/>
@@ -16198,7 +16198,7 @@
                           <a:ea typeface="Yu Gothic" pitchFamily="34" charset="-122"/>
                           <a:cs typeface="Yu Gothic" pitchFamily="34" charset="-120"/>
                         </a:rPr>
-                        <a:t>161百万</a:t>
+                        <a:t>97百万</a:t>
                       </a:r>
                       <a:endParaRPr lang="en-US" sz="950" dirty="0">
                         <a:latin typeface="Yu Gothic" charset="0"/>
@@ -16266,7 +16266,7 @@
                           <a:ea typeface="Yu Gothic" pitchFamily="34" charset="-122"/>
                           <a:cs typeface="Yu Gothic" pitchFamily="34" charset="-120"/>
                         </a:rPr>
-                        <a:t>53.7%</a:t>
+                        <a:t>32.2%</a:t>
                       </a:r>
                       <a:endParaRPr lang="en-US" sz="950" dirty="0">
                         <a:latin typeface="Yu Gothic" charset="0"/>
@@ -16540,7 +16540,7 @@
                           <a:ea typeface="Yu Gothic" pitchFamily="34" charset="-122"/>
                           <a:cs typeface="Yu Gothic" pitchFamily="34" charset="-120"/>
                         </a:rPr>
-                        <a:t>137百万</a:t>
+                        <a:t>82百万</a:t>
                       </a:r>
                       <a:endParaRPr lang="en-US" sz="950" dirty="0">
                         <a:latin typeface="Yu Gothic" charset="0"/>
@@ -16608,7 +16608,7 @@
                           <a:ea typeface="Yu Gothic" pitchFamily="34" charset="-122"/>
                           <a:cs typeface="Yu Gothic" pitchFamily="34" charset="-120"/>
                         </a:rPr>
-                        <a:t>45.8%</a:t>
+                        <a:t>27.5%</a:t>
                       </a:r>
                       <a:endParaRPr lang="en-US" sz="950" dirty="0">
                         <a:latin typeface="Yu Gothic" charset="0"/>
@@ -17365,7 +17365,7 @@
                           <a:ea typeface="Yu Gothic" pitchFamily="34" charset="-122"/>
                           <a:cs typeface="Yu Gothic" pitchFamily="34" charset="-120"/>
                         </a:rPr>
-                        <a:t>94百万</a:t>
+                        <a:t>56百万</a:t>
                       </a:r>
                       <a:endParaRPr lang="en-US" sz="950" dirty="0">
                         <a:latin typeface="Yu Gothic" charset="0"/>
@@ -17427,13 +17427,13 @@
                       <a:r>
                         <a:rPr lang="en-US" sz="950" b="1" dirty="0">
                           <a:solidFill>
-                            <a:srgbClr val="EFEBE3"/>
+                            <a:srgbClr val="B4553F"/>
                           </a:solidFill>
                           <a:latin typeface="Yu Gothic" pitchFamily="34" charset="0"/>
                           <a:ea typeface="Yu Gothic" pitchFamily="34" charset="-122"/>
                           <a:cs typeface="Yu Gothic" pitchFamily="34" charset="-120"/>
                         </a:rPr>
-                        <a:t>31.3%</a:t>
+                        <a:t>18.8%</a:t>
                       </a:r>
                       <a:endParaRPr lang="en-US" sz="950" dirty="0">
                         <a:latin typeface="Yu Gothic" charset="0"/>
@@ -17707,7 +17707,7 @@
                           <a:ea typeface="Yu Gothic" pitchFamily="34" charset="-122"/>
                           <a:cs typeface="Yu Gothic" pitchFamily="34" charset="-120"/>
                         </a:rPr>
-                        <a:t>69百万</a:t>
+                        <a:t>41百万</a:t>
                       </a:r>
                       <a:endParaRPr lang="en-US" sz="950" dirty="0">
                         <a:latin typeface="Yu Gothic" charset="0"/>
@@ -17769,13 +17769,13 @@
                       <a:r>
                         <a:rPr lang="en-US" sz="950" b="1" dirty="0">
                           <a:solidFill>
-                            <a:srgbClr val="EFEBE3"/>
+                            <a:srgbClr val="B4553F"/>
                           </a:solidFill>
                           <a:latin typeface="Yu Gothic" pitchFamily="34" charset="0"/>
                           <a:ea typeface="Yu Gothic" pitchFamily="34" charset="-122"/>
                           <a:cs typeface="Yu Gothic" pitchFamily="34" charset="-120"/>
                         </a:rPr>
-                        <a:t>22.9%</a:t>
+                        <a:t>13.7%</a:t>
                       </a:r>
                       <a:endParaRPr lang="en-US" sz="950" dirty="0">
                         <a:latin typeface="Yu Gothic" charset="0"/>
@@ -18049,7 +18049,7 @@
                           <a:ea typeface="Yu Gothic" pitchFamily="34" charset="-122"/>
                           <a:cs typeface="Yu Gothic" pitchFamily="34" charset="-120"/>
                         </a:rPr>
-                        <a:t>54百万</a:t>
+                        <a:t>32百万</a:t>
                       </a:r>
                       <a:endParaRPr lang="en-US" sz="950" dirty="0">
                         <a:latin typeface="Yu Gothic" charset="0"/>
@@ -18117,7 +18117,7 @@
                           <a:ea typeface="Yu Gothic" pitchFamily="34" charset="-122"/>
                           <a:cs typeface="Yu Gothic" pitchFamily="34" charset="-120"/>
                         </a:rPr>
-                        <a:t>17.8%</a:t>
+                        <a:t>10.7%</a:t>
                       </a:r>
                       <a:endParaRPr lang="en-US" sz="950" dirty="0">
                         <a:latin typeface="Yu Gothic" charset="0"/>
@@ -18391,7 +18391,7 @@
                           <a:ea typeface="Yu Gothic" pitchFamily="34" charset="-122"/>
                           <a:cs typeface="Yu Gothic" pitchFamily="34" charset="-120"/>
                         </a:rPr>
-                        <a:t>43百万</a:t>
+                        <a:t>26百万</a:t>
                       </a:r>
                       <a:endParaRPr lang="en-US" sz="950" dirty="0">
                         <a:latin typeface="Yu Gothic" charset="0"/>
@@ -18459,7 +18459,7 @@
                           <a:ea typeface="Yu Gothic" pitchFamily="34" charset="-122"/>
                           <a:cs typeface="Yu Gothic" pitchFamily="34" charset="-120"/>
                         </a:rPr>
-                        <a:t>14.5%</a:t>
+                        <a:t>8.7%</a:t>
                       </a:r>
                       <a:endParaRPr lang="en-US" sz="950" dirty="0">
                         <a:latin typeface="Yu Gothic" charset="0"/>
@@ -18551,7 +18551,7 @@
                 <a:ea typeface="Yu Gothic" pitchFamily="34" charset="-122"/>
                 <a:cs typeface="Yu Gothic" pitchFamily="34" charset="-120"/>
               </a:rPr>
-              <a:t>値引き（▲5.8pt）と価格横ばい（▲6.6pt）が同時に起きた複合ケース。この場合の20%の分岐点は回転13.5ヶ月となり、想定レンジの中に入る。最も厳しい防衛線となる。</a:t>
+              <a:t>値引き（▲3.5pt）と価格横ばい（▲4.0pt）が同時に起きた複合ケース。この複合下振れでは回転8.5ヶ月まで縮めないと20%に届かず、想定レンジでは20%を確保できない。値引きを禁じることが最優先の防衛線となる。</a:t>
             </a:r>
             <a:endParaRPr lang="en-US" sz="900" dirty="0"/>
           </a:p>
@@ -18659,7 +18659,7 @@
                 <a:ea typeface="Yu Gothic" pitchFamily="34" charset="-122"/>
                 <a:cs typeface="Yu Gothic" pitchFamily="34" charset="-120"/>
               </a:rPr>
-              <a:t>「回転を上げるために値引く」は割に合わない。売値5%の値引きは単位粗利を15%毀損し、失う投資家利回り5.8ポイントを取り戻すには回転を12ヶ月から約10ヶ月へ短縮する必要がある。価格を維持したまま販売チャネルを増やすことが本筋の改善手段であり、むしろ売れ残りは値上がりを取りにいく機会でもある。</a:t>
+              <a:t>「回転を上げるために値引く」は割に合わない。売値5%の値引きは単位粗利を15%毀損し、失う投資家利回り3.5ポイントを取り戻すには回転を12ヶ月から約10ヶ月へ短縮する必要がある。価格を維持したまま販売チャネルを増やすことが本筋の改善手段であり、むしろ売れ残りは値上がりを取りにいく機会でもある。</a:t>
             </a:r>
             <a:endParaRPr lang="en-US" sz="1150" dirty="0"/>
           </a:p>
@@ -18808,7 +18808,7 @@
                 <a:ea typeface="Yu Gothic" pitchFamily="34" charset="-122"/>
                 <a:cs typeface="Yu Gothic" pitchFamily="34" charset="-120"/>
               </a:rPr>
-              <a:t>出資3億円に対する投資家の年間実力値。SPC税前利益の50%を投資家が受け取る前提。</a:t>
+              <a:t>出資3億円に対する投資家の年間実力値。SPC税前利益のうち出資3億円に帰属する分（5分の3）を、投資家とWineBankで折半した後の金額ベース。</a:t>
             </a:r>
             <a:endParaRPr lang="en-US" sz="1150" dirty="0"/>
           </a:p>
@@ -19037,7 +19037,7 @@
                 <a:ea typeface="Yu Gothic" pitchFamily="34" charset="-122"/>
                 <a:cs typeface="Yu Gothic" pitchFamily="34" charset="-120"/>
               </a:rPr>
-              <a:t>回転12ヶ月で投資家利回り35.0%。想定レンジ9〜18ヶ月では24.8〜45.2%となる。</a:t>
+              <a:t>回転12ヶ月で投資家利回り21.0%。想定レンジ9〜18ヶ月では14.9〜27.1%となり、20%を確保できるのは回転12.7ヶ月までとなる。</a:t>
             </a:r>
             <a:endParaRPr lang="en-US" sz="950" dirty="0"/>
           </a:p>
@@ -19253,7 +19253,7 @@
                 <a:ea typeface="Yu Gothic" pitchFamily="34" charset="-122"/>
                 <a:cs typeface="Yu Gothic" pitchFamily="34" charset="-120"/>
               </a:rPr>
-              <a:t>値引き5%と価格横ばいが重なった場合、20%の分岐点は回転13.5ヶ月。想定レンジの中に入るため最も厳しい防衛線となる。</a:t>
+              <a:t>値引き5%と価格横ばいが重なった場合、想定レンジ内では20%に届かない（分岐点は回転8.5ヶ月）。値引き販売の禁止が最優先の防衛線となる。</a:t>
             </a:r>
             <a:endParaRPr lang="en-US" sz="950" dirty="0"/>
           </a:p>
@@ -19402,7 +19402,7 @@
                 <a:ea typeface="Yu Gothic" pitchFamily="34" charset="-122"/>
                 <a:cs typeface="Yu Gothic" pitchFamily="34" charset="-120"/>
               </a:rPr>
-              <a:t>主線（在庫回転12ヶ月・投資家利回り35.0%）を基準とした、各変数の単独変動による影響。</a:t>
+              <a:t>主線（在庫回転12ヶ月・投資家利回り21.0%）を基準とした、各変数の単独変動による影響。</a:t>
             </a:r>
             <a:endParaRPr lang="en-US" sz="1150" dirty="0"/>
           </a:p>
@@ -20011,7 +20011,7 @@
                           <a:ea typeface="Yu Gothic" pitchFamily="34" charset="-122"/>
                           <a:cs typeface="Yu Gothic" pitchFamily="34" charset="-120"/>
                         </a:rPr>
-                        <a:t>35.0% → 24.8%（▲10.2pt）</a:t>
+                        <a:t>21.0% → 14.9%（▲6.1pt）</a:t>
                       </a:r>
                       <a:endParaRPr lang="en-US" sz="1000" dirty="0">
                         <a:latin typeface="Yu Gothic" charset="0"/>
@@ -20353,7 +20353,7 @@
                           <a:ea typeface="Yu Gothic" pitchFamily="34" charset="-122"/>
                           <a:cs typeface="Yu Gothic" pitchFamily="34" charset="-120"/>
                         </a:rPr>
-                        <a:t>35.0% → 28.4%（▲6.6pt）</a:t>
+                        <a:t>21.0% → 17.0%（▲4.0pt）</a:t>
                       </a:r>
                       <a:endParaRPr lang="en-US" sz="1000" dirty="0">
                         <a:latin typeface="Yu Gothic" charset="0"/>
@@ -20695,7 +20695,7 @@
                           <a:ea typeface="Yu Gothic" pitchFamily="34" charset="-122"/>
                           <a:cs typeface="Yu Gothic" pitchFamily="34" charset="-120"/>
                         </a:rPr>
-                        <a:t>35.0% → 29.2%（▲5.8pt）</a:t>
+                        <a:t>21.0% → 17.5%（▲3.5pt）</a:t>
                       </a:r>
                       <a:endParaRPr lang="en-US" sz="1000" dirty="0">
                         <a:latin typeface="Yu Gothic" charset="0"/>
@@ -21037,7 +21037,7 @@
                           <a:ea typeface="Yu Gothic" pitchFamily="34" charset="-122"/>
                           <a:cs typeface="Yu Gothic" pitchFamily="34" charset="-120"/>
                         </a:rPr>
-                        <a:t>35.0% → 31.2%（▲3.8pt）</a:t>
+                        <a:t>21.0% → 18.7%（▲2.3pt）</a:t>
                       </a:r>
                       <a:endParaRPr lang="en-US" sz="1000" dirty="0">
                         <a:latin typeface="Yu Gothic" charset="0"/>
@@ -21379,7 +21379,7 @@
                           <a:ea typeface="Yu Gothic" pitchFamily="34" charset="-122"/>
                           <a:cs typeface="Yu Gothic" pitchFamily="34" charset="-120"/>
                         </a:rPr>
-                        <a:t>35.0% → 33.3%（▲1.7pt）</a:t>
+                        <a:t>21.0% → 20.0%（▲1.0pt）</a:t>
                       </a:r>
                       <a:endParaRPr lang="en-US" sz="1000" dirty="0">
                         <a:latin typeface="Yu Gothic" charset="0"/>
@@ -21721,7 +21721,7 @@
                           <a:ea typeface="Yu Gothic" pitchFamily="34" charset="-122"/>
                           <a:cs typeface="Yu Gothic" pitchFamily="34" charset="-120"/>
                         </a:rPr>
-                        <a:t>35.0% → 39.4%（＋4.4pt）</a:t>
+                        <a:t>21.0% → 23.6%（＋2.6pt）</a:t>
                       </a:r>
                       <a:endParaRPr lang="en-US" sz="1000" dirty="0">
                         <a:latin typeface="Yu Gothic" charset="0"/>
@@ -22063,7 +22063,7 @@
                           <a:ea typeface="Yu Gothic" pitchFamily="34" charset="-122"/>
                           <a:cs typeface="Yu Gothic" pitchFamily="34" charset="-120"/>
                         </a:rPr>
-                        <a:t>35.0% → 47.8%（＋12.8pt）</a:t>
+                        <a:t>21.0% → 28.7%（＋7.7pt）</a:t>
                       </a:r>
                       <a:endParaRPr lang="en-US" sz="1000" dirty="0">
                         <a:latin typeface="Yu Gothic" charset="0"/>
@@ -22318,7 +22318,7 @@
                 <a:ea typeface="Yu Gothic" pitchFamily="34" charset="-122"/>
                 <a:cs typeface="Yu Gothic" pitchFamily="34" charset="-120"/>
               </a:rPr>
-              <a:t>結論：投資家利回りが20%を割り込むのは、回転が23.7ヶ月を超えた場合（ニュートラル前提）で、想定レンジ9〜18ヶ月の外にある。ただし値引き5%と価格横ばいが同時に起きる複合的な下振れ（ネガティブ）では、回転13.5ヶ月が20%の分岐点となり想定レンジの中に入る。なお、インポーターの仕入価格が上昇する局面では希望小売価格も連動して上昇するため、定価比の構造は維持され、利回りへの影響は生じない。</a:t>
+              <a:t>結論：20%の分岐点は回転12.7ヶ月（ニュートラル前提）であり、主線12ヶ月からの余裕は0.7ヶ月しかない。回転12ヶ月の達成は「上振れ条件」ではなく必要条件であり、ここが本ファンド最大の管理項目となる。回転が15ヶ月へ延びれば17.3%、18ヶ月なら14.9%まで低下する。したがって組入銘柄は流動性上位に絞り込み、B2B卸とB2Cを併走させて販売量を確保する設計とする。なお、インポーターの仕入価格が上昇する局面では希望小売価格も連動して上昇するため、定価比の構造は維持され、利回りへの影響は生じない。</a:t>
             </a:r>
             <a:endParaRPr lang="en-US" sz="1100" dirty="0"/>
           </a:p>
@@ -26376,7 +26376,7 @@
                 <a:ea typeface="Yu Gothic" pitchFamily="34" charset="-122"/>
                 <a:cs typeface="Yu Gothic" pitchFamily="34" charset="-120"/>
               </a:rPr>
-              <a:t>主線は年6%上昇を織り込むが、横ばい（0%）でも定常年間利回り17.1%を確保できる。会社資料の年率10%に対し保守的な前提。</a:t>
+              <a:t>主線は年6%上昇を織り込むが、横ばい（0%）でも投資家利回り17.0%を確保できる。会社資料の年率10%に対し保守的な前提。</a:t>
             </a:r>
             <a:endParaRPr lang="en-US" sz="950" dirty="0"/>
           </a:p>
@@ -27891,7 +27891,7 @@
                 <a:ea typeface="Cambria" pitchFamily="34" charset="-122"/>
                 <a:cs typeface="Cambria" pitchFamily="34" charset="-120"/>
               </a:rPr>
-              <a:t>35.0</a:t>
+              <a:t>21.0</a:t>
             </a:r>
             <a:pPr indent="0" marL="0">
               <a:buNone/>
@@ -27986,7 +27986,7 @@
                 <a:ea typeface="Yu Gothic" pitchFamily="34" charset="-122"/>
                 <a:cs typeface="Yu Gothic" pitchFamily="34" charset="-120"/>
               </a:rPr>
-              <a:t>出資3億円に対し、SPC税前利益の50%を受領</a:t>
+              <a:t>出資3億円に対する取分。投資家帰属利益の50%を受領</a:t>
             </a:r>
             <a:endParaRPr lang="en-US" sz="900" dirty="0"/>
           </a:p>
@@ -28052,7 +28052,7 @@
                 <a:ea typeface="Cambria" pitchFamily="34" charset="-122"/>
                 <a:cs typeface="Cambria" pitchFamily="34" charset="-120"/>
               </a:rPr>
-              <a:t>27.9</a:t>
+              <a:t>16.7</a:t>
             </a:r>
             <a:pPr indent="0" marL="0">
               <a:buNone/>
@@ -28534,7 +28534,7 @@
                 <a:ea typeface="Yu Gothic" pitchFamily="34" charset="-122"/>
                 <a:cs typeface="Yu Gothic" pitchFamily="34" charset="-120"/>
               </a:rPr>
-              <a:t>損益は従来どおり折半。投資家は出資3億円に対しSPC税前利益の50%を受け取る。</a:t>
+              <a:t>報酬体系は従来どおり。投資家が得た利益をWineBankと折半する成功報酬型。</a:t>
             </a:r>
             <a:endParaRPr lang="en-US" sz="1200" dirty="0"/>
           </a:p>
@@ -28573,7 +28573,7 @@
                 <a:ea typeface="Yu Gothic" pitchFamily="34" charset="-122"/>
                 <a:cs typeface="Yu Gothic" pitchFamily="34" charset="-120"/>
               </a:rPr>
-              <a:t>デット2億円の金利と保証責任はWineBankが負担する。投資家利回り35.0%は、粗利率30.0%を投下原価ベースに直した投下原価利益率47.3%から、SPC費用と折半を経て導かれる。</a:t>
+              <a:t>SPC税前利益のうち出資3億円に帰属する分（5分の3）を投資家とWineBankで折半する。期中の管理報酬（残高比例フィー）は課さない。デット2億円の金利と保証責任はWineBankが負担する。</a:t>
             </a:r>
             <a:endParaRPr lang="en-US" sz="1000" dirty="0"/>
           </a:p>
@@ -28963,7 +28963,7 @@
           </p:nvPr>
         </p:nvGraphicFramePr>
         <p:xfrm>
-          <a:off x="658368" y="1627632"/>
+          <a:off x="658368" y="1591056"/>
           <a:ext cx="5300320" cy="914400"/>
         </p:xfrm>
         <a:graphic>
@@ -28974,7 +28974,7 @@
                 <a:gridCol w="1536192"/>
                 <a:gridCol w="3764128"/>
               </a:tblGrid>
-              <a:tr h="384048">
+              <a:tr h="352044">
                 <a:tc>
                   <a:txBody>
                     <a:bodyPr/>
@@ -29112,7 +29112,7 @@
                   </a:tcPr>
                 </a:tc>
               </a:tr>
-              <a:tr h="384048">
+              <a:tr h="352044">
                 <a:tc>
                   <a:txBody>
                     <a:bodyPr/>
@@ -29122,7 +29122,7 @@
                         <a:buNone/>
                       </a:pPr>
                       <a:r>
-                        <a:rPr lang="en-US" sz="900" dirty="0">
+                        <a:rPr lang="en-US" sz="850" dirty="0">
                           <a:solidFill>
                             <a:srgbClr val="EFEBE3"/>
                           </a:solidFill>
@@ -29132,7 +29132,7 @@
                         </a:rPr>
                         <a:t>組成形態</a:t>
                       </a:r>
-                      <a:endParaRPr lang="en-US" sz="900" dirty="0">
+                      <a:endParaRPr lang="en-US" sz="850" dirty="0">
                         <a:latin typeface="Yu Gothic" charset="0"/>
                         <a:ea typeface="Yu Gothic" charset="0"/>
                         <a:cs typeface="Yu Gothic" charset="0"/>
@@ -29190,7 +29190,7 @@
                         <a:buNone/>
                       </a:pPr>
                       <a:r>
-                        <a:rPr lang="en-US" sz="900" dirty="0">
+                        <a:rPr lang="en-US" sz="850" dirty="0">
                           <a:solidFill>
                             <a:srgbClr val="EFEBE3"/>
                           </a:solidFill>
@@ -29200,7 +29200,7 @@
                         </a:rPr>
                         <a:t>合同会社＋匿名組合（GK-TK）。SPCレベルでは非課税、投資家側で課税</a:t>
                       </a:r>
-                      <a:endParaRPr lang="en-US" sz="900" dirty="0">
+                      <a:endParaRPr lang="en-US" sz="850" dirty="0">
                         <a:latin typeface="Yu Gothic" charset="0"/>
                         <a:ea typeface="Yu Gothic" charset="0"/>
                         <a:cs typeface="Yu Gothic" charset="0"/>
@@ -29250,7 +29250,7 @@
                   </a:tcPr>
                 </a:tc>
               </a:tr>
-              <a:tr h="384048">
+              <a:tr h="352044">
                 <a:tc>
                   <a:txBody>
                     <a:bodyPr/>
@@ -29260,7 +29260,7 @@
                         <a:buNone/>
                       </a:pPr>
                       <a:r>
-                        <a:rPr lang="en-US" sz="900" dirty="0">
+                        <a:rPr lang="en-US" sz="850" dirty="0">
                           <a:solidFill>
                             <a:srgbClr val="EFEBE3"/>
                           </a:solidFill>
@@ -29270,7 +29270,7 @@
                         </a:rPr>
                         <a:t>ファンド形態</a:t>
                       </a:r>
-                      <a:endParaRPr lang="en-US" sz="900" dirty="0">
+                      <a:endParaRPr lang="en-US" sz="850" dirty="0">
                         <a:latin typeface="Yu Gothic" charset="0"/>
                         <a:ea typeface="Yu Gothic" charset="0"/>
                         <a:cs typeface="Yu Gothic" charset="0"/>
@@ -29328,7 +29328,7 @@
                         <a:buNone/>
                       </a:pPr>
                       <a:r>
-                        <a:rPr lang="en-US" sz="900" dirty="0">
+                        <a:rPr lang="en-US" sz="850" dirty="0">
                           <a:solidFill>
                             <a:srgbClr val="EFEBE3"/>
                           </a:solidFill>
@@ -29338,7 +29338,7 @@
                         </a:rPr>
                         <a:t>適格機関投資家等特例業務による私募。適格機関投資家1名以上の確保を組成条件とする</a:t>
                       </a:r>
-                      <a:endParaRPr lang="en-US" sz="900" dirty="0">
+                      <a:endParaRPr lang="en-US" sz="850" dirty="0">
                         <a:latin typeface="Yu Gothic" charset="0"/>
                         <a:ea typeface="Yu Gothic" charset="0"/>
                         <a:cs typeface="Yu Gothic" charset="0"/>
@@ -29388,7 +29388,7 @@
                   </a:tcPr>
                 </a:tc>
               </a:tr>
-              <a:tr h="384048">
+              <a:tr h="352044">
                 <a:tc>
                   <a:txBody>
                     <a:bodyPr/>
@@ -29398,7 +29398,7 @@
                         <a:buNone/>
                       </a:pPr>
                       <a:r>
-                        <a:rPr lang="en-US" sz="900" dirty="0">
+                        <a:rPr lang="en-US" sz="850" dirty="0">
                           <a:solidFill>
                             <a:srgbClr val="EFEBE3"/>
                           </a:solidFill>
@@ -29408,7 +29408,7 @@
                         </a:rPr>
                         <a:t>募集総額</a:t>
                       </a:r>
-                      <a:endParaRPr lang="en-US" sz="900" dirty="0">
+                      <a:endParaRPr lang="en-US" sz="850" dirty="0">
                         <a:latin typeface="Yu Gothic" charset="0"/>
                         <a:ea typeface="Yu Gothic" charset="0"/>
                         <a:cs typeface="Yu Gothic" charset="0"/>
@@ -29466,7 +29466,7 @@
                         <a:buNone/>
                       </a:pPr>
                       <a:r>
-                        <a:rPr lang="en-US" sz="900" b="1" dirty="0">
+                        <a:rPr lang="en-US" sz="850" b="1" dirty="0">
                           <a:solidFill>
                             <a:srgbClr val="C9A96E"/>
                           </a:solidFill>
@@ -29476,7 +29476,7 @@
                         </a:rPr>
                         <a:t>総額5億円（デット2億円＋エクイティ3億円）</a:t>
                       </a:r>
-                      <a:endParaRPr lang="en-US" sz="900" dirty="0">
+                      <a:endParaRPr lang="en-US" sz="850" dirty="0">
                         <a:latin typeface="Yu Gothic" charset="0"/>
                         <a:ea typeface="Yu Gothic" charset="0"/>
                         <a:cs typeface="Yu Gothic" charset="0"/>
@@ -29526,7 +29526,7 @@
                   </a:tcPr>
                 </a:tc>
               </a:tr>
-              <a:tr h="384048">
+              <a:tr h="352044">
                 <a:tc>
                   <a:txBody>
                     <a:bodyPr/>
@@ -29536,7 +29536,7 @@
                         <a:buNone/>
                       </a:pPr>
                       <a:r>
-                        <a:rPr lang="en-US" sz="900" dirty="0">
+                        <a:rPr lang="en-US" sz="850" dirty="0">
                           <a:solidFill>
                             <a:srgbClr val="EFEBE3"/>
                           </a:solidFill>
@@ -29546,7 +29546,7 @@
                         </a:rPr>
                         <a:t>デット</a:t>
                       </a:r>
-                      <a:endParaRPr lang="en-US" sz="900" dirty="0">
+                      <a:endParaRPr lang="en-US" sz="850" dirty="0">
                         <a:latin typeface="Yu Gothic" charset="0"/>
                         <a:ea typeface="Yu Gothic" charset="0"/>
                         <a:cs typeface="Yu Gothic" charset="0"/>
@@ -29604,7 +29604,7 @@
                         <a:buNone/>
                       </a:pPr>
                       <a:r>
-                        <a:rPr lang="en-US" sz="900" dirty="0">
+                        <a:rPr lang="en-US" sz="850" dirty="0">
                           <a:solidFill>
                             <a:srgbClr val="EFEBE3"/>
                           </a:solidFill>
@@ -29612,9 +29612,9 @@
                           <a:ea typeface="Yu Gothic" pitchFamily="34" charset="-122"/>
                           <a:cs typeface="Yu Gothic" pitchFamily="34" charset="-120"/>
                         </a:rPr>
-                        <a:t>2億円・金利4%（固定）。調達コストはWineBankが負担し、SPCの費用には計上しない</a:t>
+                        <a:t>2億円・金利4%（固定）。調達コストはWineBankが負担しSPCに計上しない</a:t>
                       </a:r>
-                      <a:endParaRPr lang="en-US" sz="900" dirty="0">
+                      <a:endParaRPr lang="en-US" sz="850" dirty="0">
                         <a:latin typeface="Yu Gothic" charset="0"/>
                         <a:ea typeface="Yu Gothic" charset="0"/>
                         <a:cs typeface="Yu Gothic" charset="0"/>
@@ -29664,7 +29664,7 @@
                   </a:tcPr>
                 </a:tc>
               </a:tr>
-              <a:tr h="384048">
+              <a:tr h="352044">
                 <a:tc>
                   <a:txBody>
                     <a:bodyPr/>
@@ -29674,7 +29674,7 @@
                         <a:buNone/>
                       </a:pPr>
                       <a:r>
-                        <a:rPr lang="en-US" sz="900" dirty="0">
+                        <a:rPr lang="en-US" sz="850" dirty="0">
                           <a:solidFill>
                             <a:srgbClr val="EFEBE3"/>
                           </a:solidFill>
@@ -29684,7 +29684,7 @@
                         </a:rPr>
                         <a:t>損益の配分</a:t>
                       </a:r>
-                      <a:endParaRPr lang="en-US" sz="900" dirty="0">
+                      <a:endParaRPr lang="en-US" sz="850" dirty="0">
                         <a:latin typeface="Yu Gothic" charset="0"/>
                         <a:ea typeface="Yu Gothic" charset="0"/>
                         <a:cs typeface="Yu Gothic" charset="0"/>
@@ -29742,7 +29742,7 @@
                         <a:buNone/>
                       </a:pPr>
                       <a:r>
-                        <a:rPr lang="en-US" sz="900" b="1" dirty="0">
+                        <a:rPr lang="en-US" sz="850" b="1" dirty="0">
                           <a:solidFill>
                             <a:srgbClr val="C9A96E"/>
                           </a:solidFill>
@@ -29750,9 +29750,9 @@
                           <a:ea typeface="Yu Gothic" pitchFamily="34" charset="-122"/>
                           <a:cs typeface="Yu Gothic" pitchFamily="34" charset="-120"/>
                         </a:rPr>
-                        <a:t>SPC税前利益を折半（投資家50：WineBank50）。WineBankは現金拠出なし・期中報酬も成功報酬も課さない</a:t>
+                        <a:t>SPC税前利益のうち出資3億円に帰属する分（5分の3）を投資家とWineBankで折半（成功報酬）</a:t>
                       </a:r>
-                      <a:endParaRPr lang="en-US" sz="900" dirty="0">
+                      <a:endParaRPr lang="en-US" sz="850" dirty="0">
                         <a:latin typeface="Yu Gothic" charset="0"/>
                         <a:ea typeface="Yu Gothic" charset="0"/>
                         <a:cs typeface="Yu Gothic" charset="0"/>
@@ -29802,7 +29802,7 @@
                   </a:tcPr>
                 </a:tc>
               </a:tr>
-              <a:tr h="384048">
+              <a:tr h="352044">
                 <a:tc>
                   <a:txBody>
                     <a:bodyPr/>
@@ -29812,7 +29812,7 @@
                         <a:buNone/>
                       </a:pPr>
                       <a:r>
-                        <a:rPr lang="en-US" sz="900" dirty="0">
+                        <a:rPr lang="en-US" sz="850" dirty="0">
                           <a:solidFill>
                             <a:srgbClr val="EFEBE3"/>
                           </a:solidFill>
@@ -29822,7 +29822,7 @@
                         </a:rPr>
                         <a:t>運用期間</a:t>
                       </a:r>
-                      <a:endParaRPr lang="en-US" sz="900" dirty="0">
+                      <a:endParaRPr lang="en-US" sz="850" dirty="0">
                         <a:latin typeface="Yu Gothic" charset="0"/>
                         <a:ea typeface="Yu Gothic" charset="0"/>
                         <a:cs typeface="Yu Gothic" charset="0"/>
@@ -29880,7 +29880,7 @@
                         <a:buNone/>
                       </a:pPr>
                       <a:r>
-                        <a:rPr lang="en-US" sz="900" dirty="0">
+                        <a:rPr lang="en-US" sz="850" dirty="0">
                           <a:solidFill>
                             <a:srgbClr val="EFEBE3"/>
                           </a:solidFill>
@@ -29890,7 +29890,7 @@
                         </a:rPr>
                         <a:t>5年。満期時に在庫を売却清算のうえ元本償還</a:t>
                       </a:r>
-                      <a:endParaRPr lang="en-US" sz="900" dirty="0">
+                      <a:endParaRPr lang="en-US" sz="850" dirty="0">
                         <a:latin typeface="Yu Gothic" charset="0"/>
                         <a:ea typeface="Yu Gothic" charset="0"/>
                         <a:cs typeface="Yu Gothic" charset="0"/>
@@ -29940,7 +29940,7 @@
                   </a:tcPr>
                 </a:tc>
               </a:tr>
-              <a:tr h="384048">
+              <a:tr h="352044">
                 <a:tc>
                   <a:txBody>
                     <a:bodyPr/>
@@ -29950,7 +29950,7 @@
                         <a:buNone/>
                       </a:pPr>
                       <a:r>
-                        <a:rPr lang="en-US" sz="900" dirty="0">
+                        <a:rPr lang="en-US" sz="850" dirty="0">
                           <a:solidFill>
                             <a:srgbClr val="EFEBE3"/>
                           </a:solidFill>
@@ -29960,7 +29960,7 @@
                         </a:rPr>
                         <a:t>中途解約</a:t>
                       </a:r>
-                      <a:endParaRPr lang="en-US" sz="900" dirty="0">
+                      <a:endParaRPr lang="en-US" sz="850" dirty="0">
                         <a:latin typeface="Yu Gothic" charset="0"/>
                         <a:ea typeface="Yu Gothic" charset="0"/>
                         <a:cs typeface="Yu Gothic" charset="0"/>
@@ -30018,7 +30018,7 @@
                         <a:buNone/>
                       </a:pPr>
                       <a:r>
-                        <a:rPr lang="en-US" sz="900" b="1" dirty="0">
+                        <a:rPr lang="en-US" sz="850" b="1" dirty="0">
                           <a:solidFill>
                             <a:srgbClr val="C9A96E"/>
                           </a:solidFill>
@@ -30028,7 +30028,7 @@
                         </a:rPr>
                         <a:t>3年経過後、年度ごとの解約日に申出可（90日前通知）。当初3年間はロックアップ</a:t>
                       </a:r>
-                      <a:endParaRPr lang="en-US" sz="900" dirty="0">
+                      <a:endParaRPr lang="en-US" sz="850" dirty="0">
                         <a:latin typeface="Yu Gothic" charset="0"/>
                         <a:ea typeface="Yu Gothic" charset="0"/>
                         <a:cs typeface="Yu Gothic" charset="0"/>
@@ -30078,7 +30078,7 @@
                   </a:tcPr>
                 </a:tc>
               </a:tr>
-              <a:tr h="384048">
+              <a:tr h="352044">
                 <a:tc>
                   <a:txBody>
                     <a:bodyPr/>
@@ -30088,7 +30088,7 @@
                         <a:buNone/>
                       </a:pPr>
                       <a:r>
-                        <a:rPr lang="en-US" sz="900" dirty="0">
+                        <a:rPr lang="en-US" sz="850" dirty="0">
                           <a:solidFill>
                             <a:srgbClr val="EFEBE3"/>
                           </a:solidFill>
@@ -30098,7 +30098,7 @@
                         </a:rPr>
                         <a:t>分配</a:t>
                       </a:r>
-                      <a:endParaRPr lang="en-US" sz="900" dirty="0">
+                      <a:endParaRPr lang="en-US" sz="850" dirty="0">
                         <a:latin typeface="Yu Gothic" charset="0"/>
                         <a:ea typeface="Yu Gothic" charset="0"/>
                         <a:cs typeface="Yu Gothic" charset="0"/>
@@ -30156,7 +30156,7 @@
                         <a:buNone/>
                       </a:pPr>
                       <a:r>
-                        <a:rPr lang="en-US" sz="900" dirty="0">
+                        <a:rPr lang="en-US" sz="850" dirty="0">
                           <a:solidFill>
                             <a:srgbClr val="EFEBE3"/>
                           </a:solidFill>
@@ -30166,7 +30166,7 @@
                         </a:rPr>
                         <a:t>半期ごと。元本はSPC内に留保し継続運用</a:t>
                       </a:r>
-                      <a:endParaRPr lang="en-US" sz="900" dirty="0">
+                      <a:endParaRPr lang="en-US" sz="850" dirty="0">
                         <a:latin typeface="Yu Gothic" charset="0"/>
                         <a:ea typeface="Yu Gothic" charset="0"/>
                         <a:cs typeface="Yu Gothic" charset="0"/>
@@ -30216,7 +30216,7 @@
                   </a:tcPr>
                 </a:tc>
               </a:tr>
-              <a:tr h="384048">
+              <a:tr h="352044">
                 <a:tc>
                   <a:txBody>
                     <a:bodyPr/>
@@ -30226,7 +30226,7 @@
                         <a:buNone/>
                       </a:pPr>
                       <a:r>
-                        <a:rPr lang="en-US" sz="900" dirty="0">
+                        <a:rPr lang="en-US" sz="850" dirty="0">
                           <a:solidFill>
                             <a:srgbClr val="EFEBE3"/>
                           </a:solidFill>
@@ -30236,7 +30236,7 @@
                         </a:rPr>
                         <a:t>元本の裏付け</a:t>
                       </a:r>
-                      <a:endParaRPr lang="en-US" sz="900" dirty="0">
+                      <a:endParaRPr lang="en-US" sz="850" dirty="0">
                         <a:latin typeface="Yu Gothic" charset="0"/>
                         <a:ea typeface="Yu Gothic" charset="0"/>
                         <a:cs typeface="Yu Gothic" charset="0"/>
@@ -30294,7 +30294,7 @@
                         <a:buNone/>
                       </a:pPr>
                       <a:r>
-                        <a:rPr lang="en-US" sz="900" dirty="0">
+                        <a:rPr lang="en-US" sz="850" dirty="0">
                           <a:solidFill>
                             <a:srgbClr val="EFEBE3"/>
                           </a:solidFill>
@@ -30304,7 +30304,7 @@
                         </a:rPr>
                         <a:t>SPC名義のワイン現物および現金。四半期ごとに在庫明細・簿価を報告</a:t>
                       </a:r>
-                      <a:endParaRPr lang="en-US" sz="900" dirty="0">
+                      <a:endParaRPr lang="en-US" sz="850" dirty="0">
                         <a:latin typeface="Yu Gothic" charset="0"/>
                         <a:ea typeface="Yu Gothic" charset="0"/>
                         <a:cs typeface="Yu Gothic" charset="0"/>
@@ -30373,7 +30373,7 @@
           </p:nvPr>
         </p:nvGraphicFramePr>
         <p:xfrm>
-          <a:off x="6233008" y="1627632"/>
+          <a:off x="6233008" y="1591056"/>
           <a:ext cx="5300320" cy="914400"/>
         </p:xfrm>
         <a:graphic>
@@ -30384,7 +30384,7 @@
                 <a:gridCol w="1536192"/>
                 <a:gridCol w="3764128"/>
               </a:tblGrid>
-              <a:tr h="384048">
+              <a:tr h="352044">
                 <a:tc>
                   <a:txBody>
                     <a:bodyPr/>
@@ -30522,7 +30522,7 @@
                   </a:tcPr>
                 </a:tc>
               </a:tr>
-              <a:tr h="384048">
+              <a:tr h="352044">
                 <a:tc>
                   <a:txBody>
                     <a:bodyPr/>
@@ -30532,7 +30532,7 @@
                         <a:buNone/>
                       </a:pPr>
                       <a:r>
-                        <a:rPr lang="en-US" sz="900" dirty="0">
+                        <a:rPr lang="en-US" sz="850" dirty="0">
                           <a:solidFill>
                             <a:srgbClr val="EFEBE3"/>
                           </a:solidFill>
@@ -30542,7 +30542,7 @@
                         </a:rPr>
                         <a:t>現物の取得</a:t>
                       </a:r>
-                      <a:endParaRPr lang="en-US" sz="900" dirty="0">
+                      <a:endParaRPr lang="en-US" sz="850" dirty="0">
                         <a:latin typeface="Yu Gothic" charset="0"/>
                         <a:ea typeface="Yu Gothic" charset="0"/>
                         <a:cs typeface="Yu Gothic" charset="0"/>
@@ -30600,7 +30600,7 @@
                         <a:buNone/>
                       </a:pPr>
                       <a:r>
-                        <a:rPr lang="en-US" sz="900" dirty="0">
+                        <a:rPr lang="en-US" sz="850" dirty="0">
                           <a:solidFill>
                             <a:srgbClr val="EFEBE3"/>
                           </a:solidFill>
@@ -30608,9 +30608,9 @@
                           <a:ea typeface="Yu Gothic" pitchFamily="34" charset="-122"/>
                           <a:cs typeface="Yu Gothic" pitchFamily="34" charset="-120"/>
                         </a:rPr>
-                        <a:t>WineBankが調達した現物をSPCへ譲渡（＋1%）。5億の場合、実商品原価4.95億＋譲渡マージン500万円</a:t>
+                        <a:t>WineBankが調達した現物をSPCへ譲渡（＋1%）。実商品原価4.95億＋譲渡マージン500万円</a:t>
                       </a:r>
-                      <a:endParaRPr lang="en-US" sz="900" dirty="0">
+                      <a:endParaRPr lang="en-US" sz="850" dirty="0">
                         <a:latin typeface="Yu Gothic" charset="0"/>
                         <a:ea typeface="Yu Gothic" charset="0"/>
                         <a:cs typeface="Yu Gothic" charset="0"/>
@@ -30660,7 +30660,7 @@
                   </a:tcPr>
                 </a:tc>
               </a:tr>
-              <a:tr h="384048">
+              <a:tr h="352044">
                 <a:tc>
                   <a:txBody>
                     <a:bodyPr/>
@@ -30670,7 +30670,7 @@
                         <a:buNone/>
                       </a:pPr>
                       <a:r>
-                        <a:rPr lang="en-US" sz="900" dirty="0">
+                        <a:rPr lang="en-US" sz="850" dirty="0">
                           <a:solidFill>
                             <a:srgbClr val="EFEBE3"/>
                           </a:solidFill>
@@ -30680,7 +30680,7 @@
                         </a:rPr>
                         <a:t>資金配分</a:t>
                       </a:r>
-                      <a:endParaRPr lang="en-US" sz="900" dirty="0">
+                      <a:endParaRPr lang="en-US" sz="850" dirty="0">
                         <a:latin typeface="Yu Gothic" charset="0"/>
                         <a:ea typeface="Yu Gothic" charset="0"/>
                         <a:cs typeface="Yu Gothic" charset="0"/>
@@ -30738,7 +30738,7 @@
                         <a:buNone/>
                       </a:pPr>
                       <a:r>
-                        <a:rPr lang="en-US" sz="900" b="1" dirty="0">
+                        <a:rPr lang="en-US" sz="850" b="1" dirty="0">
                           <a:solidFill>
                             <a:srgbClr val="C9A96E"/>
                           </a:solidFill>
@@ -30748,7 +30748,7 @@
                         </a:rPr>
                         <a:t>総額の95%をワイン購入、5%を現金保有</a:t>
                       </a:r>
-                      <a:endParaRPr lang="en-US" sz="900" dirty="0">
+                      <a:endParaRPr lang="en-US" sz="850" dirty="0">
                         <a:latin typeface="Yu Gothic" charset="0"/>
                         <a:ea typeface="Yu Gothic" charset="0"/>
                         <a:cs typeface="Yu Gothic" charset="0"/>
@@ -30798,7 +30798,7 @@
                   </a:tcPr>
                 </a:tc>
               </a:tr>
-              <a:tr h="384048">
+              <a:tr h="352044">
                 <a:tc>
                   <a:txBody>
                     <a:bodyPr/>
@@ -30808,7 +30808,7 @@
                         <a:buNone/>
                       </a:pPr>
                       <a:r>
-                        <a:rPr lang="en-US" sz="900" dirty="0">
+                        <a:rPr lang="en-US" sz="850" dirty="0">
                           <a:solidFill>
                             <a:srgbClr val="EFEBE3"/>
                           </a:solidFill>
@@ -30818,7 +30818,7 @@
                         </a:rPr>
                         <a:t>販売チャネル</a:t>
                       </a:r>
-                      <a:endParaRPr lang="en-US" sz="900" dirty="0">
+                      <a:endParaRPr lang="en-US" sz="850" dirty="0">
                         <a:latin typeface="Yu Gothic" charset="0"/>
                         <a:ea typeface="Yu Gothic" charset="0"/>
                         <a:cs typeface="Yu Gothic" charset="0"/>
@@ -30876,7 +30876,7 @@
                         <a:buNone/>
                       </a:pPr>
                       <a:r>
-                        <a:rPr lang="en-US" sz="900" dirty="0">
+                        <a:rPr lang="en-US" sz="850" dirty="0">
                           <a:solidFill>
                             <a:srgbClr val="EFEBE3"/>
                           </a:solidFill>
@@ -30886,7 +30886,7 @@
                         </a:rPr>
                         <a:t>酒販店卸（B2B）と自社EC・オークション（B2C）を半々</a:t>
                       </a:r>
-                      <a:endParaRPr lang="en-US" sz="900" dirty="0">
+                      <a:endParaRPr lang="en-US" sz="850" dirty="0">
                         <a:latin typeface="Yu Gothic" charset="0"/>
                         <a:ea typeface="Yu Gothic" charset="0"/>
                         <a:cs typeface="Yu Gothic" charset="0"/>
@@ -30936,7 +30936,7 @@
                   </a:tcPr>
                 </a:tc>
               </a:tr>
-              <a:tr h="384048">
+              <a:tr h="352044">
                 <a:tc>
                   <a:txBody>
                     <a:bodyPr/>
@@ -30946,7 +30946,7 @@
                         <a:buNone/>
                       </a:pPr>
                       <a:r>
-                        <a:rPr lang="en-US" sz="900" dirty="0">
+                        <a:rPr lang="en-US" sz="850" dirty="0">
                           <a:solidFill>
                             <a:srgbClr val="EFEBE3"/>
                           </a:solidFill>
@@ -30956,7 +30956,7 @@
                         </a:rPr>
                         <a:t>在庫回転目標</a:t>
                       </a:r>
-                      <a:endParaRPr lang="en-US" sz="900" dirty="0">
+                      <a:endParaRPr lang="en-US" sz="850" dirty="0">
                         <a:latin typeface="Yu Gothic" charset="0"/>
                         <a:ea typeface="Yu Gothic" charset="0"/>
                         <a:cs typeface="Yu Gothic" charset="0"/>
@@ -31014,7 +31014,7 @@
                         <a:buNone/>
                       </a:pPr>
                       <a:r>
-                        <a:rPr lang="en-US" sz="900" b="1" dirty="0">
+                        <a:rPr lang="en-US" sz="850" b="1" dirty="0">
                           <a:solidFill>
                             <a:srgbClr val="C9A96E"/>
                           </a:solidFill>
@@ -31024,7 +31024,7 @@
                         </a:rPr>
                         <a:t>12ヶ月。最短9ヶ月、延びても15〜18ヶ月を想定レンジとする</a:t>
                       </a:r>
-                      <a:endParaRPr lang="en-US" sz="900" dirty="0">
+                      <a:endParaRPr lang="en-US" sz="850" dirty="0">
                         <a:latin typeface="Yu Gothic" charset="0"/>
                         <a:ea typeface="Yu Gothic" charset="0"/>
                         <a:cs typeface="Yu Gothic" charset="0"/>
@@ -31074,7 +31074,7 @@
                   </a:tcPr>
                 </a:tc>
               </a:tr>
-              <a:tr h="384048">
+              <a:tr h="352044">
                 <a:tc>
                   <a:txBody>
                     <a:bodyPr/>
@@ -31084,7 +31084,7 @@
                         <a:buNone/>
                       </a:pPr>
                       <a:r>
-                        <a:rPr lang="en-US" sz="900" dirty="0">
+                        <a:rPr lang="en-US" sz="850" dirty="0">
                           <a:solidFill>
                             <a:srgbClr val="EFEBE3"/>
                           </a:solidFill>
@@ -31094,7 +31094,7 @@
                         </a:rPr>
                         <a:t>価格前提</a:t>
                       </a:r>
-                      <a:endParaRPr lang="en-US" sz="900" dirty="0">
+                      <a:endParaRPr lang="en-US" sz="850" dirty="0">
                         <a:latin typeface="Yu Gothic" charset="0"/>
                         <a:ea typeface="Yu Gothic" charset="0"/>
                         <a:cs typeface="Yu Gothic" charset="0"/>
@@ -31152,7 +31152,7 @@
                         <a:buNone/>
                       </a:pPr>
                       <a:r>
-                        <a:rPr lang="en-US" sz="900" dirty="0">
+                        <a:rPr lang="en-US" sz="850" dirty="0">
                           <a:solidFill>
                             <a:srgbClr val="EFEBE3"/>
                           </a:solidFill>
@@ -31162,7 +31162,7 @@
                         </a:rPr>
                         <a:t>ワイン価格の年間上昇6%。会社資料のFine Wine年率10%に対し保守的に設定</a:t>
                       </a:r>
-                      <a:endParaRPr lang="en-US" sz="900" dirty="0">
+                      <a:endParaRPr lang="en-US" sz="850" dirty="0">
                         <a:latin typeface="Yu Gothic" charset="0"/>
                         <a:ea typeface="Yu Gothic" charset="0"/>
                         <a:cs typeface="Yu Gothic" charset="0"/>
@@ -31212,7 +31212,7 @@
                   </a:tcPr>
                 </a:tc>
               </a:tr>
-              <a:tr h="384048">
+              <a:tr h="352044">
                 <a:tc>
                   <a:txBody>
                     <a:bodyPr/>
@@ -31222,7 +31222,7 @@
                         <a:buNone/>
                       </a:pPr>
                       <a:r>
-                        <a:rPr lang="en-US" sz="900" dirty="0">
+                        <a:rPr lang="en-US" sz="850" dirty="0">
                           <a:solidFill>
                             <a:srgbClr val="EFEBE3"/>
                           </a:solidFill>
@@ -31232,7 +31232,7 @@
                         </a:rPr>
                         <a:t>SPC負担費用</a:t>
                       </a:r>
-                      <a:endParaRPr lang="en-US" sz="900" dirty="0">
+                      <a:endParaRPr lang="en-US" sz="850" dirty="0">
                         <a:latin typeface="Yu Gothic" charset="0"/>
                         <a:ea typeface="Yu Gothic" charset="0"/>
                         <a:cs typeface="Yu Gothic" charset="0"/>
@@ -31290,7 +31290,7 @@
                         <a:buNone/>
                       </a:pPr>
                       <a:r>
-                        <a:rPr lang="en-US" sz="900" dirty="0">
+                        <a:rPr lang="en-US" sz="850" dirty="0">
                           <a:solidFill>
                             <a:srgbClr val="EFEBE3"/>
                           </a:solidFill>
@@ -31298,9 +31298,9 @@
                           <a:ea typeface="Yu Gothic" pitchFamily="34" charset="-122"/>
                           <a:cs typeface="Yu Gothic" pitchFamily="34" charset="-120"/>
                         </a:rPr>
-                        <a:t>保管・保険・入庫・変動販売費・維持費200万・人件費360万・AUP50万・予備費50万</a:t>
+                        <a:t>保管・保険・入庫・変動販売費／維持費200万・人件費360万・AUP50万・予備費50万</a:t>
                       </a:r>
-                      <a:endParaRPr lang="en-US" sz="900" dirty="0">
+                      <a:endParaRPr lang="en-US" sz="850" dirty="0">
                         <a:latin typeface="Yu Gothic" charset="0"/>
                         <a:ea typeface="Yu Gothic" charset="0"/>
                         <a:cs typeface="Yu Gothic" charset="0"/>
@@ -31350,7 +31350,7 @@
                   </a:tcPr>
                 </a:tc>
               </a:tr>
-              <a:tr h="384048">
+              <a:tr h="352044">
                 <a:tc>
                   <a:txBody>
                     <a:bodyPr/>
@@ -31360,7 +31360,7 @@
                         <a:buNone/>
                       </a:pPr>
                       <a:r>
-                        <a:rPr lang="en-US" sz="900" dirty="0">
+                        <a:rPr lang="en-US" sz="850" dirty="0">
                           <a:solidFill>
                             <a:srgbClr val="EFEBE3"/>
                           </a:solidFill>
@@ -31370,7 +31370,7 @@
                         </a:rPr>
                         <a:t>想定リターン</a:t>
                       </a:r>
-                      <a:endParaRPr lang="en-US" sz="900" dirty="0">
+                      <a:endParaRPr lang="en-US" sz="850" dirty="0">
                         <a:latin typeface="Yu Gothic" charset="0"/>
                         <a:ea typeface="Yu Gothic" charset="0"/>
                         <a:cs typeface="Yu Gothic" charset="0"/>
@@ -31428,7 +31428,7 @@
                         <a:buNone/>
                       </a:pPr>
                       <a:r>
-                        <a:rPr lang="en-US" sz="900" b="1" dirty="0">
+                        <a:rPr lang="en-US" sz="850" b="1" dirty="0">
                           <a:solidFill>
                             <a:srgbClr val="C9A96E"/>
                           </a:solidFill>
@@ -31436,9 +31436,9 @@
                           <a:ea typeface="Yu Gothic" pitchFamily="34" charset="-122"/>
                           <a:cs typeface="Yu Gothic" pitchFamily="34" charset="-120"/>
                         </a:rPr>
-                        <a:t>投資家利回り35.0%（在庫回転12ヶ月・定常年間）。5年通算の年平均利回りは27.9%</a:t>
+                        <a:t>投資家利回り21.0%（回転12ヶ月・定常年間）。5年通算の年平均は16.7%</a:t>
                       </a:r>
-                      <a:endParaRPr lang="en-US" sz="900" dirty="0">
+                      <a:endParaRPr lang="en-US" sz="850" dirty="0">
                         <a:latin typeface="Yu Gothic" charset="0"/>
                         <a:ea typeface="Yu Gothic" charset="0"/>
                         <a:cs typeface="Yu Gothic" charset="0"/>
@@ -31488,7 +31488,7 @@
                   </a:tcPr>
                 </a:tc>
               </a:tr>
-              <a:tr h="384048">
+              <a:tr h="352044">
                 <a:tc>
                   <a:txBody>
                     <a:bodyPr/>
@@ -31498,7 +31498,7 @@
                         <a:buNone/>
                       </a:pPr>
                       <a:r>
-                        <a:rPr lang="en-US" sz="900" dirty="0">
+                        <a:rPr lang="en-US" sz="850" dirty="0">
                           <a:solidFill>
                             <a:srgbClr val="EFEBE3"/>
                           </a:solidFill>
@@ -31508,7 +31508,7 @@
                         </a:rPr>
                         <a:t>報告</a:t>
                       </a:r>
-                      <a:endParaRPr lang="en-US" sz="900" dirty="0">
+                      <a:endParaRPr lang="en-US" sz="850" dirty="0">
                         <a:latin typeface="Yu Gothic" charset="0"/>
                         <a:ea typeface="Yu Gothic" charset="0"/>
                         <a:cs typeface="Yu Gothic" charset="0"/>
@@ -31566,7 +31566,7 @@
                         <a:buNone/>
                       </a:pPr>
                       <a:r>
-                        <a:rPr lang="en-US" sz="900" dirty="0">
+                        <a:rPr lang="en-US" sz="850" dirty="0">
                           <a:solidFill>
                             <a:srgbClr val="EFEBE3"/>
                           </a:solidFill>
@@ -31576,7 +31576,7 @@
                         </a:rPr>
                         <a:t>四半期：在庫明細・簿価・売上・試算表／年次：決算</a:t>
                       </a:r>
-                      <a:endParaRPr lang="en-US" sz="900" dirty="0">
+                      <a:endParaRPr lang="en-US" sz="850" dirty="0">
                         <a:latin typeface="Yu Gothic" charset="0"/>
                         <a:ea typeface="Yu Gothic" charset="0"/>
                         <a:cs typeface="Yu Gothic" charset="0"/>
@@ -31626,7 +31626,7 @@
                   </a:tcPr>
                 </a:tc>
               </a:tr>
-              <a:tr h="384048">
+              <a:tr h="352044">
                 <a:tc>
                   <a:txBody>
                     <a:bodyPr/>
@@ -31636,7 +31636,7 @@
                         <a:buNone/>
                       </a:pPr>
                       <a:r>
-                        <a:rPr lang="en-US" sz="900" dirty="0">
+                        <a:rPr lang="en-US" sz="850" dirty="0">
                           <a:solidFill>
                             <a:srgbClr val="EFEBE3"/>
                           </a:solidFill>
@@ -31646,7 +31646,7 @@
                         </a:rPr>
                         <a:t>外部検証</a:t>
                       </a:r>
-                      <a:endParaRPr lang="en-US" sz="900" dirty="0">
+                      <a:endParaRPr lang="en-US" sz="850" dirty="0">
                         <a:latin typeface="Yu Gothic" charset="0"/>
                         <a:ea typeface="Yu Gothic" charset="0"/>
                         <a:cs typeface="Yu Gothic" charset="0"/>
@@ -31704,7 +31704,7 @@
                         <a:buNone/>
                       </a:pPr>
                       <a:r>
-                        <a:rPr lang="en-US" sz="900" dirty="0">
+                        <a:rPr lang="en-US" sz="850" dirty="0">
                           <a:solidFill>
                             <a:srgbClr val="EFEBE3"/>
                           </a:solidFill>
@@ -31712,9 +31712,9 @@
                           <a:ea typeface="Yu Gothic" pitchFamily="34" charset="-122"/>
                           <a:cs typeface="Yu Gothic" pitchFamily="34" charset="-120"/>
                         </a:rPr>
-                        <a:t>AUP（合意された手続）を年次で実施。配分ルールの遵守状況を手続の対象に含める</a:t>
+                        <a:t>AUP（合意された手続）を年次で実施。配分ルールの遵守状況も対象に含める</a:t>
                       </a:r>
-                      <a:endParaRPr lang="en-US" sz="900" dirty="0">
+                      <a:endParaRPr lang="en-US" sz="850" dirty="0">
                         <a:latin typeface="Yu Gothic" charset="0"/>
                         <a:ea typeface="Yu Gothic" charset="0"/>
                         <a:cs typeface="Yu Gothic" charset="0"/>
@@ -31764,7 +31764,7 @@
                   </a:tcPr>
                 </a:tc>
               </a:tr>
-              <a:tr h="384048">
+              <a:tr h="352044">
                 <a:tc>
                   <a:txBody>
                     <a:bodyPr/>
@@ -31774,7 +31774,7 @@
                         <a:buNone/>
                       </a:pPr>
                       <a:r>
-                        <a:rPr lang="en-US" sz="900" dirty="0">
+                        <a:rPr lang="en-US" sz="850" dirty="0">
                           <a:solidFill>
                             <a:srgbClr val="EFEBE3"/>
                           </a:solidFill>
@@ -31784,7 +31784,7 @@
                         </a:rPr>
                         <a:t>在庫配分</a:t>
                       </a:r>
-                      <a:endParaRPr lang="en-US" sz="900" dirty="0">
+                      <a:endParaRPr lang="en-US" sz="850" dirty="0">
                         <a:latin typeface="Yu Gothic" charset="0"/>
                         <a:ea typeface="Yu Gothic" charset="0"/>
                         <a:cs typeface="Yu Gothic" charset="0"/>
@@ -31842,7 +31842,7 @@
                         <a:buNone/>
                       </a:pPr>
                       <a:r>
-                        <a:rPr lang="en-US" sz="900" b="1" dirty="0">
+                        <a:rPr lang="en-US" sz="850" b="1" dirty="0">
                           <a:solidFill>
                             <a:srgbClr val="C9A96E"/>
                           </a:solidFill>
@@ -31852,7 +31852,7 @@
                         </a:rPr>
                         <a:t>在庫比率によるプロラタ配分を原則とし、判断を要する場合はSPC在庫を優先する</a:t>
                       </a:r>
-                      <a:endParaRPr lang="en-US" sz="900" dirty="0">
+                      <a:endParaRPr lang="en-US" sz="850" dirty="0">
                         <a:latin typeface="Yu Gothic" charset="0"/>
                         <a:ea typeface="Yu Gothic" charset="0"/>
                         <a:cs typeface="Yu Gothic" charset="0"/>
@@ -32008,7 +32008,7 @@
                 <a:ea typeface="Yu Gothic" pitchFamily="34" charset="-122"/>
                 <a:cs typeface="Yu Gothic" pitchFamily="34" charset="-120"/>
               </a:rPr>
-              <a:t>半期解約を前提とすると常時1〜3割を現金または即時換金可能な在庫で保有する必要があり、稼働率が下がって利回りも下がる（稼働率95%→85%で投資家利回りは35.0%→31.2%）。当初3年ロックアップ・4年目以降は年度ごとの解約という設計により、現金保有を5%に抑え、総額の95%をワインに充当できる。</a:t>
+              <a:t>半期解約を前提とすると常時1〜3割を現金または即時換金可能な在庫で保有する必要があり、稼働率が下がって利回りも下がる（稼働率95%→85%で投資家利回りは21.0%→18.7%）。当初3年ロックアップ・4年目以降は年度ごとの解約という設計により、現金保有を5%に抑え、総額の95%をワインに充当できる。</a:t>
             </a:r>
             <a:endParaRPr lang="en-US" sz="900" dirty="0"/>
           </a:p>
@@ -33672,7 +33672,7 @@
                 <a:ea typeface="Yu Gothic" pitchFamily="34" charset="-122"/>
                 <a:cs typeface="Yu Gothic" pitchFamily="34" charset="-120"/>
               </a:rPr>
-              <a:t>流通価格差（回転に対するリターン）とワインの値上がり（在庫に対するリターン）。価格が横ばいでも投資家利回り28.4%、回転が18ヶ月に延びても24.8%を確保する。</a:t>
+              <a:t>流通価格差（回転に対するリターン）とワインの値上がり（在庫に対するリターン）。価格が横ばいでも投資家利回り17.0%、回転が18ヶ月に延びても14.9%を確保する。</a:t>
             </a:r>
             <a:endParaRPr lang="en-US" sz="900" dirty="0"/>
           </a:p>
@@ -34188,7 +34188,7 @@
                 <a:ea typeface="Yu Gothic" pitchFamily="34" charset="-122"/>
                 <a:cs typeface="Yu Gothic" pitchFamily="34" charset="-120"/>
               </a:rPr>
-              <a:t>期中報酬も成功報酬も取らず、報酬はSPC税前利益の折半に一本化されている。加えてデット2億円の金利と保証責任もWineBankが負担する。投資家が儲からなければWineBankも儲からない。</a:t>
+              <a:t>報酬は投資家が得た利益を折半する成功報酬に一本化。期中の管理報酬は課さず、デット2億円の金利と保証責任もWineBankが負担する。投資家が儲からなければWineBankも儲からない。</a:t>
             </a:r>
             <a:endParaRPr lang="en-US" sz="900" dirty="0"/>
           </a:p>
@@ -34388,7 +34388,7 @@
                 <a:ea typeface="Yu Gothic" pitchFamily="34" charset="-122"/>
                 <a:cs typeface="Yu Gothic" pitchFamily="34" charset="-120"/>
               </a:rPr>
-              <a:t>在庫回転12ヶ月を主線とし、投資家利回り35.0%。想定レンジ9〜18ヶ月では24.8〜45.2%となり、いずれも貴社基準を上回る。</a:t>
+              <a:t>在庫回転12ヶ月を主線とし、投資家利回り21.0%。20%の分岐点は回転12.7ヶ月であり、余裕は0.7ヶ月しかない。</a:t>
             </a:r>
             <a:endParaRPr lang="en-US" sz="900" dirty="0"/>
           </a:p>
@@ -34430,7 +34430,7 @@
                 <a:ea typeface="Yu Gothic" pitchFamily="34" charset="-122"/>
                 <a:cs typeface="Yu Gothic" pitchFamily="34" charset="-120"/>
               </a:rPr>
-              <a:t>流動性の高い銘柄を組み入れることで回転12ヶ月を実現する。回転期間を運用KPIとして四半期報告する。</a:t>
+              <a:t>回転12ヶ月の達成が20%確保の必要条件となる。流動性上位の銘柄に絞って組み入れ、回転期間を運用KPIとして四半期報告する。</a:t>
             </a:r>
             <a:endParaRPr lang="en-US" sz="900" dirty="0"/>
           </a:p>
@@ -34606,7 +34606,7 @@
                 <a:ea typeface="Yu Gothic" pitchFamily="34" charset="-122"/>
                 <a:cs typeface="Yu Gothic" pitchFamily="34" charset="-120"/>
               </a:rPr>
-              <a:t>この設計により現金保有を5%に抑え、総額の95%をワインに充当できる。半期解約を前提とすると稼働率が下がり35.0%→31.2%に低下する。</a:t>
+              <a:t>この設計により現金保有を5%に抑え、総額の95%をワインに充当できる。半期解約を前提とすると稼働率が下がり21.0%→18.7%に低下する。</a:t>
             </a:r>
             <a:endParaRPr lang="en-US" sz="900" dirty="0"/>
           </a:p>
@@ -35316,7 +35316,7 @@
                 <a:ea typeface="Yu Gothic" pitchFamily="34" charset="-122"/>
                 <a:cs typeface="Yu Gothic" pitchFamily="34" charset="-120"/>
               </a:rPr>
-              <a:t>総額5億円をデット2億円とエクイティ3億円で構成する。デットの調達コストはWineBankが負担する。</a:t>
+              <a:t>総額5億円をデット2億円と投資家出資3億円で構成する。投資家に帰属する利益を投資家とWineBankで折半する報酬体系は従来どおり。</a:t>
             </a:r>
             <a:endParaRPr lang="en-US" sz="1150" dirty="0"/>
           </a:p>
@@ -35408,12 +35408,12 @@
         </p:nvSpPr>
         <p:spPr>
           <a:xfrm>
-            <a:off x="658368" y="1645920"/>
-            <a:ext cx="3442106" cy="1883664"/>
+            <a:off x="658368" y="1627632"/>
+            <a:ext cx="3442106" cy="1700784"/>
           </a:xfrm>
           <a:prstGeom prst="roundRect">
             <a:avLst>
-              <a:gd name="adj" fmla="val 2184"/>
+              <a:gd name="adj" fmla="val 2419"/>
             </a:avLst>
           </a:prstGeom>
           <a:solidFill>
@@ -35435,7 +35435,7 @@
         </p:nvSpPr>
         <p:spPr>
           <a:xfrm>
-            <a:off x="896112" y="1810512"/>
+            <a:off x="896112" y="1773936"/>
             <a:ext cx="2966618" cy="237744"/>
           </a:xfrm>
           <a:prstGeom prst="rect">
@@ -35474,8 +35474,8 @@
         </p:nvSpPr>
         <p:spPr>
           <a:xfrm>
-            <a:off x="896112" y="2084832"/>
-            <a:ext cx="2966618" cy="457200"/>
+            <a:off x="896112" y="2029968"/>
+            <a:ext cx="2966618" cy="420624"/>
           </a:xfrm>
           <a:prstGeom prst="rect">
             <a:avLst/>
@@ -35491,7 +35491,7 @@
               <a:buNone/>
             </a:pPr>
             <a:r>
-              <a:rPr lang="en-US" sz="3000" b="1" dirty="0">
+              <a:rPr lang="en-US" sz="2800" b="1" dirty="0">
                 <a:solidFill>
                   <a:srgbClr val="C9A96E"/>
                 </a:solidFill>
@@ -35515,7 +35515,7 @@
               </a:rPr>
               <a:t> 億円</a:t>
             </a:r>
-            <a:endParaRPr lang="en-US" sz="3000" dirty="0"/>
+            <a:endParaRPr lang="en-US" sz="2800" dirty="0"/>
           </a:p>
         </p:txBody>
       </p:sp>
@@ -35527,8 +35527,8 @@
         </p:nvSpPr>
         <p:spPr>
           <a:xfrm>
-            <a:off x="896112" y="2578608"/>
-            <a:ext cx="2966618" cy="237744"/>
+            <a:off x="896112" y="2487168"/>
+            <a:ext cx="2966618" cy="219456"/>
           </a:xfrm>
           <a:prstGeom prst="rect">
             <a:avLst/>
@@ -35544,7 +35544,7 @@
               <a:buNone/>
             </a:pPr>
             <a:r>
-              <a:rPr lang="en-US" sz="1100" b="1" dirty="0">
+              <a:rPr lang="en-US" sz="1050" b="1" dirty="0">
                 <a:solidFill>
                   <a:srgbClr val="EFEBE3"/>
                 </a:solidFill>
@@ -35554,7 +35554,7 @@
               </a:rPr>
               <a:t>金利4%（固定）</a:t>
             </a:r>
-            <a:endParaRPr lang="en-US" sz="1100" dirty="0"/>
+            <a:endParaRPr lang="en-US" sz="1050" dirty="0"/>
           </a:p>
         </p:txBody>
       </p:sp>
@@ -35566,8 +35566,8 @@
         </p:nvSpPr>
         <p:spPr>
           <a:xfrm>
-            <a:off x="896112" y="2834640"/>
-            <a:ext cx="2966618" cy="603504"/>
+            <a:off x="896112" y="2706624"/>
+            <a:ext cx="2966618" cy="566928"/>
           </a:xfrm>
           <a:prstGeom prst="rect">
             <a:avLst/>
@@ -35648,12 +35648,12 @@
         </p:nvSpPr>
         <p:spPr>
           <a:xfrm>
-            <a:off x="4374794" y="1645920"/>
-            <a:ext cx="3442106" cy="1883664"/>
+            <a:off x="4374794" y="1627632"/>
+            <a:ext cx="3442106" cy="1700784"/>
           </a:xfrm>
           <a:prstGeom prst="roundRect">
             <a:avLst>
-              <a:gd name="adj" fmla="val 2184"/>
+              <a:gd name="adj" fmla="val 2419"/>
             </a:avLst>
           </a:prstGeom>
           <a:solidFill>
@@ -35675,7 +35675,7 @@
         </p:nvSpPr>
         <p:spPr>
           <a:xfrm>
-            <a:off x="4612538" y="1810512"/>
+            <a:off x="4612538" y="1773936"/>
             <a:ext cx="2966618" cy="237744"/>
           </a:xfrm>
           <a:prstGeom prst="rect">
@@ -35714,8 +35714,8 @@
         </p:nvSpPr>
         <p:spPr>
           <a:xfrm>
-            <a:off x="4612538" y="2084832"/>
-            <a:ext cx="2966618" cy="457200"/>
+            <a:off x="4612538" y="2029968"/>
+            <a:ext cx="2966618" cy="420624"/>
           </a:xfrm>
           <a:prstGeom prst="rect">
             <a:avLst/>
@@ -35731,7 +35731,7 @@
               <a:buNone/>
             </a:pPr>
             <a:r>
-              <a:rPr lang="en-US" sz="3000" b="1" dirty="0">
+              <a:rPr lang="en-US" sz="2800" b="1" dirty="0">
                 <a:solidFill>
                   <a:srgbClr val="C9A96E"/>
                 </a:solidFill>
@@ -35755,7 +35755,7 @@
               </a:rPr>
               <a:t> 億円</a:t>
             </a:r>
-            <a:endParaRPr lang="en-US" sz="3000" dirty="0"/>
+            <a:endParaRPr lang="en-US" sz="2800" dirty="0"/>
           </a:p>
         </p:txBody>
       </p:sp>
@@ -35767,8 +35767,8 @@
         </p:nvSpPr>
         <p:spPr>
           <a:xfrm>
-            <a:off x="4612538" y="2578608"/>
-            <a:ext cx="2966618" cy="237744"/>
+            <a:off x="4612538" y="2487168"/>
+            <a:ext cx="2966618" cy="219456"/>
           </a:xfrm>
           <a:prstGeom prst="rect">
             <a:avLst/>
@@ -35784,7 +35784,7 @@
               <a:buNone/>
             </a:pPr>
             <a:r>
-              <a:rPr lang="en-US" sz="1100" b="1" dirty="0">
+              <a:rPr lang="en-US" sz="1050" b="1" dirty="0">
                 <a:solidFill>
                   <a:srgbClr val="EFEBE3"/>
                 </a:solidFill>
@@ -35792,9 +35792,9 @@
                 <a:ea typeface="Yu Gothic" pitchFamily="34" charset="-122"/>
                 <a:cs typeface="Yu Gothic" pitchFamily="34" charset="-120"/>
               </a:rPr>
-              <a:t>SPC税前利益の50%</a:t>
-            </a:r>
-            <a:endParaRPr lang="en-US" sz="1100" dirty="0"/>
+              <a:t>投資家帰属利益の50%</a:t>
+            </a:r>
+            <a:endParaRPr lang="en-US" sz="1050" dirty="0"/>
           </a:p>
         </p:txBody>
       </p:sp>
@@ -35806,8 +35806,8 @@
         </p:nvSpPr>
         <p:spPr>
           <a:xfrm>
-            <a:off x="4612538" y="2834640"/>
-            <a:ext cx="2966618" cy="603504"/>
+            <a:off x="4612538" y="2706624"/>
+            <a:ext cx="2966618" cy="566928"/>
           </a:xfrm>
           <a:prstGeom prst="rect">
             <a:avLst/>
@@ -35888,12 +35888,12 @@
         </p:nvSpPr>
         <p:spPr>
           <a:xfrm>
-            <a:off x="8091221" y="1645920"/>
-            <a:ext cx="3442106" cy="1883664"/>
+            <a:off x="8091221" y="1627632"/>
+            <a:ext cx="3442106" cy="1700784"/>
           </a:xfrm>
           <a:prstGeom prst="roundRect">
             <a:avLst>
-              <a:gd name="adj" fmla="val 2184"/>
+              <a:gd name="adj" fmla="val 2419"/>
             </a:avLst>
           </a:prstGeom>
           <a:solidFill>
@@ -35915,7 +35915,7 @@
         </p:nvSpPr>
         <p:spPr>
           <a:xfrm>
-            <a:off x="8328965" y="1810512"/>
+            <a:off x="8328965" y="1773936"/>
             <a:ext cx="2966618" cy="237744"/>
           </a:xfrm>
           <a:prstGeom prst="rect">
@@ -35954,8 +35954,8 @@
         </p:nvSpPr>
         <p:spPr>
           <a:xfrm>
-            <a:off x="8328965" y="2084832"/>
-            <a:ext cx="2966618" cy="457200"/>
+            <a:off x="8328965" y="2029968"/>
+            <a:ext cx="2966618" cy="420624"/>
           </a:xfrm>
           <a:prstGeom prst="rect">
             <a:avLst/>
@@ -35971,7 +35971,7 @@
               <a:buNone/>
             </a:pPr>
             <a:r>
-              <a:rPr lang="en-US" sz="3000" b="1" dirty="0">
+              <a:rPr lang="en-US" sz="2800" b="1" dirty="0">
                 <a:solidFill>
                   <a:srgbClr val="C9A96E"/>
                 </a:solidFill>
@@ -35979,7 +35979,7 @@
                 <a:ea typeface="Cambria" pitchFamily="34" charset="-122"/>
                 <a:cs typeface="Cambria" pitchFamily="34" charset="-120"/>
               </a:rPr>
-              <a:t>97</a:t>
+              <a:t>139</a:t>
             </a:r>
             <a:pPr indent="0" marL="0">
               <a:buNone/>
@@ -35995,7 +35995,7 @@
               </a:rPr>
               <a:t> 百万円</a:t>
             </a:r>
-            <a:endParaRPr lang="en-US" sz="3000" dirty="0"/>
+            <a:endParaRPr lang="en-US" sz="2800" dirty="0"/>
           </a:p>
         </p:txBody>
       </p:sp>
@@ -36007,8 +36007,8 @@
         </p:nvSpPr>
         <p:spPr>
           <a:xfrm>
-            <a:off x="8328965" y="2578608"/>
-            <a:ext cx="2966618" cy="237744"/>
+            <a:off x="8328965" y="2487168"/>
+            <a:ext cx="2966618" cy="219456"/>
           </a:xfrm>
           <a:prstGeom prst="rect">
             <a:avLst/>
@@ -36024,7 +36024,7 @@
               <a:buNone/>
             </a:pPr>
             <a:r>
-              <a:rPr lang="en-US" sz="1100" b="1" dirty="0">
+              <a:rPr lang="en-US" sz="1050" b="1" dirty="0">
                 <a:solidFill>
                   <a:srgbClr val="EFEBE3"/>
                 </a:solidFill>
@@ -36032,9 +36032,9 @@
                 <a:ea typeface="Yu Gothic" pitchFamily="34" charset="-122"/>
                 <a:cs typeface="Yu Gothic" pitchFamily="34" charset="-120"/>
               </a:rPr>
-              <a:t>SPC税前利益の50%（金利負担後の年間取分）</a:t>
-            </a:r>
-            <a:endParaRPr lang="en-US" sz="1100" dirty="0"/>
+              <a:t>成功報酬63百万円＋デット分76百万円</a:t>
+            </a:r>
+            <a:endParaRPr lang="en-US" sz="1050" dirty="0"/>
           </a:p>
         </p:txBody>
       </p:sp>
@@ -36046,8 +36046,8 @@
         </p:nvSpPr>
         <p:spPr>
           <a:xfrm>
-            <a:off x="8328965" y="2834640"/>
-            <a:ext cx="2966618" cy="603504"/>
+            <a:off x="8328965" y="2706624"/>
+            <a:ext cx="2966618" cy="566928"/>
           </a:xfrm>
           <a:prstGeom prst="rect">
             <a:avLst/>
@@ -36114,7 +36114,7 @@
                 <a:ea typeface="Yu Gothic" pitchFamily="34" charset="-122"/>
                 <a:cs typeface="Yu Gothic" pitchFamily="34" charset="-120"/>
               </a:rPr>
-              <a:t>・期中報酬・成功報酬は取らない</a:t>
+              <a:t>・期中の管理報酬は課さない</a:t>
             </a:r>
             <a:endParaRPr lang="en-US" sz="900" dirty="0"/>
           </a:p>
@@ -36135,7 +36135,7 @@
           </p:nvPr>
         </p:nvGraphicFramePr>
         <p:xfrm>
-          <a:off x="658368" y="3657600"/>
+          <a:off x="658368" y="3419856"/>
           <a:ext cx="10874959" cy="914400"/>
         </p:xfrm>
         <a:graphic>
@@ -36147,7 +36147,7 @@
                 <a:gridCol w="1737360"/>
                 <a:gridCol w="6757416"/>
               </a:tblGrid>
-              <a:tr h="315468">
+              <a:tr h="288036">
                 <a:tc>
                   <a:txBody>
                     <a:bodyPr/>
@@ -36353,7 +36353,7 @@
                   </a:tcPr>
                 </a:tc>
               </a:tr>
-              <a:tr h="315468">
+              <a:tr h="288036">
                 <a:tc>
                   <a:txBody>
                     <a:bodyPr/>
@@ -36363,7 +36363,7 @@
                         <a:buNone/>
                       </a:pPr>
                       <a:r>
-                        <a:rPr lang="en-US" sz="1000" dirty="0">
+                        <a:rPr lang="en-US" sz="850" dirty="0">
                           <a:solidFill>
                             <a:srgbClr val="EFEBE3"/>
                           </a:solidFill>
@@ -36373,7 +36373,7 @@
                         </a:rPr>
                         <a:t>年間税前利益（SPC）</a:t>
                       </a:r>
-                      <a:endParaRPr lang="en-US" sz="1000" dirty="0">
+                      <a:endParaRPr lang="en-US" sz="850" dirty="0">
                         <a:latin typeface="Yu Gothic" charset="0"/>
                         <a:ea typeface="Yu Gothic" charset="0"/>
                         <a:cs typeface="Yu Gothic" charset="0"/>
@@ -36431,7 +36431,7 @@
                         <a:buNone/>
                       </a:pPr>
                       <a:r>
-                        <a:rPr lang="en-US" sz="1000" b="1" dirty="0">
+                        <a:rPr lang="en-US" sz="850" b="1" dirty="0">
                           <a:solidFill>
                             <a:srgbClr val="EFEBE3"/>
                           </a:solidFill>
@@ -36441,7 +36441,7 @@
                         </a:rPr>
                         <a:t>2.10億円</a:t>
                       </a:r>
-                      <a:endParaRPr lang="en-US" sz="1000" dirty="0">
+                      <a:endParaRPr lang="en-US" sz="850" dirty="0">
                         <a:latin typeface="Yu Gothic" charset="0"/>
                         <a:ea typeface="Yu Gothic" charset="0"/>
                         <a:cs typeface="Yu Gothic" charset="0"/>
@@ -36499,7 +36499,7 @@
                         <a:buNone/>
                       </a:pPr>
                       <a:r>
-                        <a:rPr lang="en-US" sz="1000" dirty="0">
+                        <a:rPr lang="en-US" sz="850" dirty="0">
                           <a:solidFill>
                             <a:srgbClr val="EFEBE3"/>
                           </a:solidFill>
@@ -36509,7 +36509,7 @@
                         </a:rPr>
                         <a:t>在庫回転12ヶ月・年間売上7.48億円の主線ケース</a:t>
                       </a:r>
-                      <a:endParaRPr lang="en-US" sz="1000" dirty="0">
+                      <a:endParaRPr lang="en-US" sz="850" dirty="0">
                         <a:latin typeface="Yu Gothic" charset="0"/>
                         <a:ea typeface="Yu Gothic" charset="0"/>
                         <a:cs typeface="Yu Gothic" charset="0"/>
@@ -36559,7 +36559,7 @@
                   </a:tcPr>
                 </a:tc>
               </a:tr>
-              <a:tr h="315468">
+              <a:tr h="288036">
                 <a:tc>
                   <a:txBody>
                     <a:bodyPr/>
@@ -36569,7 +36569,7 @@
                         <a:buNone/>
                       </a:pPr>
                       <a:r>
-                        <a:rPr lang="en-US" sz="1000" dirty="0">
+                        <a:rPr lang="en-US" sz="850" dirty="0">
                           <a:solidFill>
                             <a:srgbClr val="EFEBE3"/>
                           </a:solidFill>
@@ -36577,9 +36577,9 @@
                           <a:ea typeface="Yu Gothic" pitchFamily="34" charset="-122"/>
                           <a:cs typeface="Yu Gothic" pitchFamily="34" charset="-120"/>
                         </a:rPr>
-                        <a:t>├ 投資家 50%</a:t>
+                        <a:t>├ 投資家帰属分</a:t>
                       </a:r>
-                      <a:endParaRPr lang="en-US" sz="1000" dirty="0">
+                      <a:endParaRPr lang="en-US" sz="850" dirty="0">
                         <a:latin typeface="Yu Gothic" charset="0"/>
                         <a:ea typeface="Yu Gothic" charset="0"/>
                         <a:cs typeface="Yu Gothic" charset="0"/>
@@ -36637,17 +36637,17 @@
                         <a:buNone/>
                       </a:pPr>
                       <a:r>
-                        <a:rPr lang="en-US" sz="1000" b="1" dirty="0">
+                        <a:rPr lang="en-US" sz="850" dirty="0">
                           <a:solidFill>
-                            <a:srgbClr val="C9A96E"/>
+                            <a:srgbClr val="EFEBE3"/>
                           </a:solidFill>
                           <a:latin typeface="Yu Gothic" pitchFamily="34" charset="0"/>
                           <a:ea typeface="Yu Gothic" pitchFamily="34" charset="-122"/>
                           <a:cs typeface="Yu Gothic" pitchFamily="34" charset="-120"/>
                         </a:rPr>
-                        <a:t>105百万円</a:t>
+                        <a:t>126百万円</a:t>
                       </a:r>
-                      <a:endParaRPr lang="en-US" sz="1000" dirty="0">
+                      <a:endParaRPr lang="en-US" sz="850" dirty="0">
                         <a:latin typeface="Yu Gothic" charset="0"/>
                         <a:ea typeface="Yu Gothic" charset="0"/>
                         <a:cs typeface="Yu Gothic" charset="0"/>
@@ -36705,17 +36705,17 @@
                         <a:buNone/>
                       </a:pPr>
                       <a:r>
-                        <a:rPr lang="en-US" sz="1000" b="1" dirty="0">
+                        <a:rPr lang="en-US" sz="850" dirty="0">
                           <a:solidFill>
-                            <a:srgbClr val="C9A96E"/>
+                            <a:srgbClr val="EFEBE3"/>
                           </a:solidFill>
                           <a:latin typeface="Yu Gothic" pitchFamily="34" charset="0"/>
                           <a:ea typeface="Yu Gothic" pitchFamily="34" charset="-122"/>
                           <a:cs typeface="Yu Gothic" pitchFamily="34" charset="-120"/>
                         </a:rPr>
-                        <a:t>出資3億円に対し 投資家利回り 35.0%</a:t>
+                        <a:t>出資3億円÷総額5億円＝5分の3。この分を投資家とWineBankで折半する</a:t>
                       </a:r>
-                      <a:endParaRPr lang="en-US" sz="1000" dirty="0">
+                      <a:endParaRPr lang="en-US" sz="850" dirty="0">
                         <a:latin typeface="Yu Gothic" charset="0"/>
                         <a:ea typeface="Yu Gothic" charset="0"/>
                         <a:cs typeface="Yu Gothic" charset="0"/>
@@ -36765,7 +36765,7 @@
                   </a:tcPr>
                 </a:tc>
               </a:tr>
-              <a:tr h="315468">
+              <a:tr h="288036">
                 <a:tc>
                   <a:txBody>
                     <a:bodyPr/>
@@ -36775,7 +36775,7 @@
                         <a:buNone/>
                       </a:pPr>
                       <a:r>
-                        <a:rPr lang="en-US" sz="1000" dirty="0">
+                        <a:rPr lang="en-US" sz="850" dirty="0">
                           <a:solidFill>
                             <a:srgbClr val="EFEBE3"/>
                           </a:solidFill>
@@ -36783,9 +36783,9 @@
                           <a:ea typeface="Yu Gothic" pitchFamily="34" charset="-122"/>
                           <a:cs typeface="Yu Gothic" pitchFamily="34" charset="-120"/>
                         </a:rPr>
-                        <a:t>└ WineBank 50%</a:t>
+                        <a:t>│　├ 投資家</a:t>
                       </a:r>
-                      <a:endParaRPr lang="en-US" sz="1000" dirty="0">
+                      <a:endParaRPr lang="en-US" sz="850" dirty="0">
                         <a:latin typeface="Yu Gothic" charset="0"/>
                         <a:ea typeface="Yu Gothic" charset="0"/>
                         <a:cs typeface="Yu Gothic" charset="0"/>
@@ -36843,17 +36843,17 @@
                         <a:buNone/>
                       </a:pPr>
                       <a:r>
-                        <a:rPr lang="en-US" sz="1000" dirty="0">
+                        <a:rPr lang="en-US" sz="850" b="1" dirty="0">
                           <a:solidFill>
-                            <a:srgbClr val="EFEBE3"/>
+                            <a:srgbClr val="C9A96E"/>
                           </a:solidFill>
                           <a:latin typeface="Yu Gothic" pitchFamily="34" charset="0"/>
                           <a:ea typeface="Yu Gothic" pitchFamily="34" charset="-122"/>
                           <a:cs typeface="Yu Gothic" pitchFamily="34" charset="-120"/>
                         </a:rPr>
-                        <a:t>105百万円</a:t>
+                        <a:t>63百万円</a:t>
                       </a:r>
-                      <a:endParaRPr lang="en-US" sz="1000" dirty="0">
+                      <a:endParaRPr lang="en-US" sz="850" dirty="0">
                         <a:latin typeface="Yu Gothic" charset="0"/>
                         <a:ea typeface="Yu Gothic" charset="0"/>
                         <a:cs typeface="Yu Gothic" charset="0"/>
@@ -36911,17 +36911,17 @@
                         <a:buNone/>
                       </a:pPr>
                       <a:r>
-                        <a:rPr lang="en-US" sz="1000" dirty="0">
+                        <a:rPr lang="en-US" sz="850" b="1" dirty="0">
                           <a:solidFill>
-                            <a:srgbClr val="EFEBE3"/>
+                            <a:srgbClr val="C9A96E"/>
                           </a:solidFill>
                           <a:latin typeface="Yu Gothic" pitchFamily="34" charset="0"/>
                           <a:ea typeface="Yu Gothic" pitchFamily="34" charset="-122"/>
                           <a:cs typeface="Yu Gothic" pitchFamily="34" charset="-120"/>
                         </a:rPr>
-                        <a:t>デット2億円の金利8百万円を負担 → 年間取分97百万円。現金拠出はないため利回りの形では示さない</a:t>
+                        <a:t>出資3億円に対し 投資家利回り 21.0%</a:t>
                       </a:r>
-                      <a:endParaRPr lang="en-US" sz="1000" dirty="0">
+                      <a:endParaRPr lang="en-US" sz="850" dirty="0">
                         <a:latin typeface="Yu Gothic" charset="0"/>
                         <a:ea typeface="Yu Gothic" charset="0"/>
                         <a:cs typeface="Yu Gothic" charset="0"/>
@@ -36971,7 +36971,7 @@
                   </a:tcPr>
                 </a:tc>
               </a:tr>
-              <a:tr h="315468">
+              <a:tr h="288036">
                 <a:tc>
                   <a:txBody>
                     <a:bodyPr/>
@@ -36981,7 +36981,7 @@
                         <a:buNone/>
                       </a:pPr>
                       <a:r>
-                        <a:rPr lang="en-US" sz="1000" dirty="0">
+                        <a:rPr lang="en-US" sz="850" dirty="0">
                           <a:solidFill>
                             <a:srgbClr val="EFEBE3"/>
                           </a:solidFill>
@@ -36989,9 +36989,9 @@
                           <a:ea typeface="Yu Gothic" pitchFamily="34" charset="-122"/>
                           <a:cs typeface="Yu Gothic" pitchFamily="34" charset="-120"/>
                         </a:rPr>
-                        <a:t>デット提供者への利息</a:t>
+                        <a:t>│　└ WineBank</a:t>
                       </a:r>
-                      <a:endParaRPr lang="en-US" sz="1000" dirty="0">
+                      <a:endParaRPr lang="en-US" sz="850" dirty="0">
                         <a:latin typeface="Yu Gothic" charset="0"/>
                         <a:ea typeface="Yu Gothic" charset="0"/>
                         <a:cs typeface="Yu Gothic" charset="0"/>
@@ -37049,7 +37049,7 @@
                         <a:buNone/>
                       </a:pPr>
                       <a:r>
-                        <a:rPr lang="en-US" sz="1000" dirty="0">
+                        <a:rPr lang="en-US" sz="850" dirty="0">
                           <a:solidFill>
                             <a:srgbClr val="EFEBE3"/>
                           </a:solidFill>
@@ -37057,9 +37057,9 @@
                           <a:ea typeface="Yu Gothic" pitchFamily="34" charset="-122"/>
                           <a:cs typeface="Yu Gothic" pitchFamily="34" charset="-120"/>
                         </a:rPr>
-                        <a:t>8百万円</a:t>
+                        <a:t>63百万円</a:t>
                       </a:r>
-                      <a:endParaRPr lang="en-US" sz="1000" dirty="0">
+                      <a:endParaRPr lang="en-US" sz="850" dirty="0">
                         <a:latin typeface="Yu Gothic" charset="0"/>
                         <a:ea typeface="Yu Gothic" charset="0"/>
                         <a:cs typeface="Yu Gothic" charset="0"/>
@@ -37117,7 +37117,419 @@
                         <a:buNone/>
                       </a:pPr>
                       <a:r>
-                        <a:rPr lang="en-US" sz="1000" dirty="0">
+                        <a:rPr lang="en-US" sz="850" dirty="0">
+                          <a:solidFill>
+                            <a:srgbClr val="EFEBE3"/>
+                          </a:solidFill>
+                          <a:latin typeface="Yu Gothic" pitchFamily="34" charset="0"/>
+                          <a:ea typeface="Yu Gothic" pitchFamily="34" charset="-122"/>
+                          <a:cs typeface="Yu Gothic" pitchFamily="34" charset="-120"/>
+                        </a:rPr>
+                        <a:t>投資家帰属利益の50%（成功報酬）</a:t>
+                      </a:r>
+                      <a:endParaRPr lang="en-US" sz="850" dirty="0">
+                        <a:latin typeface="Yu Gothic" charset="0"/>
+                        <a:ea typeface="Yu Gothic" charset="0"/>
+                        <a:cs typeface="Yu Gothic" charset="0"/>
+                      </a:endParaRPr>
+                    </a:p>
+                  </a:txBody>
+                  <a:tcPr marL="45720" marR="45720" marT="45720" marB="45720" anchor="ctr">
+                    <a:lnL w="7620" cap="flat" cmpd="sng" algn="ctr">
+                      <a:solidFill>
+                        <a:srgbClr val="2E2A24"/>
+                      </a:solidFill>
+                      <a:prstDash val="solid"/>
+                      <a:round/>
+                      <a:headEnd type="none" w="med" len="med"/>
+                      <a:tailEnd type="none" w="med" len="med"/>
+                    </a:lnL>
+                    <a:lnR w="7620" cap="flat" cmpd="sng" algn="ctr">
+                      <a:solidFill>
+                        <a:srgbClr val="2E2A24"/>
+                      </a:solidFill>
+                      <a:prstDash val="solid"/>
+                      <a:round/>
+                      <a:headEnd type="none" w="med" len="med"/>
+                      <a:tailEnd type="none" w="med" len="med"/>
+                    </a:lnR>
+                    <a:lnT w="7620" cap="flat" cmpd="sng" algn="ctr">
+                      <a:solidFill>
+                        <a:srgbClr val="2E2A24"/>
+                      </a:solidFill>
+                      <a:prstDash val="solid"/>
+                      <a:round/>
+                      <a:headEnd type="none" w="med" len="med"/>
+                      <a:tailEnd type="none" w="med" len="med"/>
+                    </a:lnT>
+                    <a:lnB w="7620" cap="flat" cmpd="sng" algn="ctr">
+                      <a:solidFill>
+                        <a:srgbClr val="2E2A24"/>
+                      </a:solidFill>
+                      <a:prstDash val="solid"/>
+                      <a:round/>
+                      <a:headEnd type="none" w="med" len="med"/>
+                      <a:tailEnd type="none" w="med" len="med"/>
+                    </a:lnB>
+                    <a:solidFill>
+                      <a:srgbClr val="171614"/>
+                    </a:solidFill>
+                  </a:tcPr>
+                </a:tc>
+              </a:tr>
+              <a:tr h="288036">
+                <a:tc>
+                  <a:txBody>
+                    <a:bodyPr/>
+                    <a:lstStyle/>
+                    <a:p>
+                      <a:pPr algn="ctr" indent="0" marL="0">
+                        <a:buNone/>
+                      </a:pPr>
+                      <a:r>
+                        <a:rPr lang="en-US" sz="850" dirty="0">
+                          <a:solidFill>
+                            <a:srgbClr val="EFEBE3"/>
+                          </a:solidFill>
+                          <a:latin typeface="Yu Gothic" pitchFamily="34" charset="0"/>
+                          <a:ea typeface="Yu Gothic" pitchFamily="34" charset="-122"/>
+                          <a:cs typeface="Yu Gothic" pitchFamily="34" charset="-120"/>
+                        </a:rPr>
+                        <a:t>└ デット2億円帰属分</a:t>
+                      </a:r>
+                      <a:endParaRPr lang="en-US" sz="850" dirty="0">
+                        <a:latin typeface="Yu Gothic" charset="0"/>
+                        <a:ea typeface="Yu Gothic" charset="0"/>
+                        <a:cs typeface="Yu Gothic" charset="0"/>
+                      </a:endParaRPr>
+                    </a:p>
+                  </a:txBody>
+                  <a:tcPr marL="45720" marR="45720" marT="45720" marB="45720" anchor="ctr">
+                    <a:lnL w="7620" cap="flat" cmpd="sng" algn="ctr">
+                      <a:solidFill>
+                        <a:srgbClr val="2E2A24"/>
+                      </a:solidFill>
+                      <a:prstDash val="solid"/>
+                      <a:round/>
+                      <a:headEnd type="none" w="med" len="med"/>
+                      <a:tailEnd type="none" w="med" len="med"/>
+                    </a:lnL>
+                    <a:lnR w="7620" cap="flat" cmpd="sng" algn="ctr">
+                      <a:solidFill>
+                        <a:srgbClr val="2E2A24"/>
+                      </a:solidFill>
+                      <a:prstDash val="solid"/>
+                      <a:round/>
+                      <a:headEnd type="none" w="med" len="med"/>
+                      <a:tailEnd type="none" w="med" len="med"/>
+                    </a:lnR>
+                    <a:lnT w="7620" cap="flat" cmpd="sng" algn="ctr">
+                      <a:solidFill>
+                        <a:srgbClr val="2E2A24"/>
+                      </a:solidFill>
+                      <a:prstDash val="solid"/>
+                      <a:round/>
+                      <a:headEnd type="none" w="med" len="med"/>
+                      <a:tailEnd type="none" w="med" len="med"/>
+                    </a:lnT>
+                    <a:lnB w="7620" cap="flat" cmpd="sng" algn="ctr">
+                      <a:solidFill>
+                        <a:srgbClr val="2E2A24"/>
+                      </a:solidFill>
+                      <a:prstDash val="solid"/>
+                      <a:round/>
+                      <a:headEnd type="none" w="med" len="med"/>
+                      <a:tailEnd type="none" w="med" len="med"/>
+                    </a:lnB>
+                    <a:solidFill>
+                      <a:srgbClr val="171614"/>
+                    </a:solidFill>
+                  </a:tcPr>
+                </a:tc>
+                <a:tc>
+                  <a:txBody>
+                    <a:bodyPr/>
+                    <a:lstStyle/>
+                    <a:p>
+                      <a:pPr algn="ctr" indent="0" marL="0">
+                        <a:buNone/>
+                      </a:pPr>
+                      <a:r>
+                        <a:rPr lang="en-US" sz="850" dirty="0">
+                          <a:solidFill>
+                            <a:srgbClr val="EFEBE3"/>
+                          </a:solidFill>
+                          <a:latin typeface="Yu Gothic" pitchFamily="34" charset="0"/>
+                          <a:ea typeface="Yu Gothic" pitchFamily="34" charset="-122"/>
+                          <a:cs typeface="Yu Gothic" pitchFamily="34" charset="-120"/>
+                        </a:rPr>
+                        <a:t>84百万円</a:t>
+                      </a:r>
+                      <a:endParaRPr lang="en-US" sz="850" dirty="0">
+                        <a:latin typeface="Yu Gothic" charset="0"/>
+                        <a:ea typeface="Yu Gothic" charset="0"/>
+                        <a:cs typeface="Yu Gothic" charset="0"/>
+                      </a:endParaRPr>
+                    </a:p>
+                  </a:txBody>
+                  <a:tcPr marL="45720" marR="45720" marT="45720" marB="45720" anchor="ctr">
+                    <a:lnL w="7620" cap="flat" cmpd="sng" algn="ctr">
+                      <a:solidFill>
+                        <a:srgbClr val="2E2A24"/>
+                      </a:solidFill>
+                      <a:prstDash val="solid"/>
+                      <a:round/>
+                      <a:headEnd type="none" w="med" len="med"/>
+                      <a:tailEnd type="none" w="med" len="med"/>
+                    </a:lnL>
+                    <a:lnR w="7620" cap="flat" cmpd="sng" algn="ctr">
+                      <a:solidFill>
+                        <a:srgbClr val="2E2A24"/>
+                      </a:solidFill>
+                      <a:prstDash val="solid"/>
+                      <a:round/>
+                      <a:headEnd type="none" w="med" len="med"/>
+                      <a:tailEnd type="none" w="med" len="med"/>
+                    </a:lnR>
+                    <a:lnT w="7620" cap="flat" cmpd="sng" algn="ctr">
+                      <a:solidFill>
+                        <a:srgbClr val="2E2A24"/>
+                      </a:solidFill>
+                      <a:prstDash val="solid"/>
+                      <a:round/>
+                      <a:headEnd type="none" w="med" len="med"/>
+                      <a:tailEnd type="none" w="med" len="med"/>
+                    </a:lnT>
+                    <a:lnB w="7620" cap="flat" cmpd="sng" algn="ctr">
+                      <a:solidFill>
+                        <a:srgbClr val="2E2A24"/>
+                      </a:solidFill>
+                      <a:prstDash val="solid"/>
+                      <a:round/>
+                      <a:headEnd type="none" w="med" len="med"/>
+                      <a:tailEnd type="none" w="med" len="med"/>
+                    </a:lnB>
+                    <a:solidFill>
+                      <a:srgbClr val="171614"/>
+                    </a:solidFill>
+                  </a:tcPr>
+                </a:tc>
+                <a:tc>
+                  <a:txBody>
+                    <a:bodyPr/>
+                    <a:lstStyle/>
+                    <a:p>
+                      <a:pPr algn="l" indent="0" marL="0">
+                        <a:buNone/>
+                      </a:pPr>
+                      <a:r>
+                        <a:rPr lang="en-US" sz="850" dirty="0">
+                          <a:solidFill>
+                            <a:srgbClr val="EFEBE3"/>
+                          </a:solidFill>
+                          <a:latin typeface="Yu Gothic" pitchFamily="34" charset="0"/>
+                          <a:ea typeface="Yu Gothic" pitchFamily="34" charset="-122"/>
+                          <a:cs typeface="Yu Gothic" pitchFamily="34" charset="-120"/>
+                        </a:rPr>
+                        <a:t>金利8百万円を控除し76百万円をWineBankが受領。保証責任を負う対価</a:t>
+                      </a:r>
+                      <a:endParaRPr lang="en-US" sz="850" dirty="0">
+                        <a:latin typeface="Yu Gothic" charset="0"/>
+                        <a:ea typeface="Yu Gothic" charset="0"/>
+                        <a:cs typeface="Yu Gothic" charset="0"/>
+                      </a:endParaRPr>
+                    </a:p>
+                  </a:txBody>
+                  <a:tcPr marL="45720" marR="45720" marT="45720" marB="45720" anchor="ctr">
+                    <a:lnL w="7620" cap="flat" cmpd="sng" algn="ctr">
+                      <a:solidFill>
+                        <a:srgbClr val="2E2A24"/>
+                      </a:solidFill>
+                      <a:prstDash val="solid"/>
+                      <a:round/>
+                      <a:headEnd type="none" w="med" len="med"/>
+                      <a:tailEnd type="none" w="med" len="med"/>
+                    </a:lnL>
+                    <a:lnR w="7620" cap="flat" cmpd="sng" algn="ctr">
+                      <a:solidFill>
+                        <a:srgbClr val="2E2A24"/>
+                      </a:solidFill>
+                      <a:prstDash val="solid"/>
+                      <a:round/>
+                      <a:headEnd type="none" w="med" len="med"/>
+                      <a:tailEnd type="none" w="med" len="med"/>
+                    </a:lnR>
+                    <a:lnT w="7620" cap="flat" cmpd="sng" algn="ctr">
+                      <a:solidFill>
+                        <a:srgbClr val="2E2A24"/>
+                      </a:solidFill>
+                      <a:prstDash val="solid"/>
+                      <a:round/>
+                      <a:headEnd type="none" w="med" len="med"/>
+                      <a:tailEnd type="none" w="med" len="med"/>
+                    </a:lnT>
+                    <a:lnB w="7620" cap="flat" cmpd="sng" algn="ctr">
+                      <a:solidFill>
+                        <a:srgbClr val="2E2A24"/>
+                      </a:solidFill>
+                      <a:prstDash val="solid"/>
+                      <a:round/>
+                      <a:headEnd type="none" w="med" len="med"/>
+                      <a:tailEnd type="none" w="med" len="med"/>
+                    </a:lnB>
+                    <a:solidFill>
+                      <a:srgbClr val="171614"/>
+                    </a:solidFill>
+                  </a:tcPr>
+                </a:tc>
+              </a:tr>
+              <a:tr h="288036">
+                <a:tc>
+                  <a:txBody>
+                    <a:bodyPr/>
+                    <a:lstStyle/>
+                    <a:p>
+                      <a:pPr algn="ctr" indent="0" marL="0">
+                        <a:buNone/>
+                      </a:pPr>
+                      <a:r>
+                        <a:rPr lang="en-US" sz="850" dirty="0">
+                          <a:solidFill>
+                            <a:srgbClr val="EFEBE3"/>
+                          </a:solidFill>
+                          <a:latin typeface="Yu Gothic" pitchFamily="34" charset="0"/>
+                          <a:ea typeface="Yu Gothic" pitchFamily="34" charset="-122"/>
+                          <a:cs typeface="Yu Gothic" pitchFamily="34" charset="-120"/>
+                        </a:rPr>
+                        <a:t>デット提供者への利息</a:t>
+                      </a:r>
+                      <a:endParaRPr lang="en-US" sz="850" dirty="0">
+                        <a:latin typeface="Yu Gothic" charset="0"/>
+                        <a:ea typeface="Yu Gothic" charset="0"/>
+                        <a:cs typeface="Yu Gothic" charset="0"/>
+                      </a:endParaRPr>
+                    </a:p>
+                  </a:txBody>
+                  <a:tcPr marL="45720" marR="45720" marT="45720" marB="45720" anchor="ctr">
+                    <a:lnL w="7620" cap="flat" cmpd="sng" algn="ctr">
+                      <a:solidFill>
+                        <a:srgbClr val="2E2A24"/>
+                      </a:solidFill>
+                      <a:prstDash val="solid"/>
+                      <a:round/>
+                      <a:headEnd type="none" w="med" len="med"/>
+                      <a:tailEnd type="none" w="med" len="med"/>
+                    </a:lnL>
+                    <a:lnR w="7620" cap="flat" cmpd="sng" algn="ctr">
+                      <a:solidFill>
+                        <a:srgbClr val="2E2A24"/>
+                      </a:solidFill>
+                      <a:prstDash val="solid"/>
+                      <a:round/>
+                      <a:headEnd type="none" w="med" len="med"/>
+                      <a:tailEnd type="none" w="med" len="med"/>
+                    </a:lnR>
+                    <a:lnT w="7620" cap="flat" cmpd="sng" algn="ctr">
+                      <a:solidFill>
+                        <a:srgbClr val="2E2A24"/>
+                      </a:solidFill>
+                      <a:prstDash val="solid"/>
+                      <a:round/>
+                      <a:headEnd type="none" w="med" len="med"/>
+                      <a:tailEnd type="none" w="med" len="med"/>
+                    </a:lnT>
+                    <a:lnB w="7620" cap="flat" cmpd="sng" algn="ctr">
+                      <a:solidFill>
+                        <a:srgbClr val="2E2A24"/>
+                      </a:solidFill>
+                      <a:prstDash val="solid"/>
+                      <a:round/>
+                      <a:headEnd type="none" w="med" len="med"/>
+                      <a:tailEnd type="none" w="med" len="med"/>
+                    </a:lnB>
+                    <a:solidFill>
+                      <a:srgbClr val="171614"/>
+                    </a:solidFill>
+                  </a:tcPr>
+                </a:tc>
+                <a:tc>
+                  <a:txBody>
+                    <a:bodyPr/>
+                    <a:lstStyle/>
+                    <a:p>
+                      <a:pPr algn="ctr" indent="0" marL="0">
+                        <a:buNone/>
+                      </a:pPr>
+                      <a:r>
+                        <a:rPr lang="en-US" sz="850" dirty="0">
+                          <a:solidFill>
+                            <a:srgbClr val="EFEBE3"/>
+                          </a:solidFill>
+                          <a:latin typeface="Yu Gothic" pitchFamily="34" charset="0"/>
+                          <a:ea typeface="Yu Gothic" pitchFamily="34" charset="-122"/>
+                          <a:cs typeface="Yu Gothic" pitchFamily="34" charset="-120"/>
+                        </a:rPr>
+                        <a:t>8百万円</a:t>
+                      </a:r>
+                      <a:endParaRPr lang="en-US" sz="850" dirty="0">
+                        <a:latin typeface="Yu Gothic" charset="0"/>
+                        <a:ea typeface="Yu Gothic" charset="0"/>
+                        <a:cs typeface="Yu Gothic" charset="0"/>
+                      </a:endParaRPr>
+                    </a:p>
+                  </a:txBody>
+                  <a:tcPr marL="45720" marR="45720" marT="45720" marB="45720" anchor="ctr">
+                    <a:lnL w="7620" cap="flat" cmpd="sng" algn="ctr">
+                      <a:solidFill>
+                        <a:srgbClr val="2E2A24"/>
+                      </a:solidFill>
+                      <a:prstDash val="solid"/>
+                      <a:round/>
+                      <a:headEnd type="none" w="med" len="med"/>
+                      <a:tailEnd type="none" w="med" len="med"/>
+                    </a:lnL>
+                    <a:lnR w="7620" cap="flat" cmpd="sng" algn="ctr">
+                      <a:solidFill>
+                        <a:srgbClr val="2E2A24"/>
+                      </a:solidFill>
+                      <a:prstDash val="solid"/>
+                      <a:round/>
+                      <a:headEnd type="none" w="med" len="med"/>
+                      <a:tailEnd type="none" w="med" len="med"/>
+                    </a:lnR>
+                    <a:lnT w="7620" cap="flat" cmpd="sng" algn="ctr">
+                      <a:solidFill>
+                        <a:srgbClr val="2E2A24"/>
+                      </a:solidFill>
+                      <a:prstDash val="solid"/>
+                      <a:round/>
+                      <a:headEnd type="none" w="med" len="med"/>
+                      <a:tailEnd type="none" w="med" len="med"/>
+                    </a:lnT>
+                    <a:lnB w="7620" cap="flat" cmpd="sng" algn="ctr">
+                      <a:solidFill>
+                        <a:srgbClr val="2E2A24"/>
+                      </a:solidFill>
+                      <a:prstDash val="solid"/>
+                      <a:round/>
+                      <a:headEnd type="none" w="med" len="med"/>
+                      <a:tailEnd type="none" w="med" len="med"/>
+                    </a:lnB>
+                    <a:solidFill>
+                      <a:srgbClr val="171614"/>
+                    </a:solidFill>
+                  </a:tcPr>
+                </a:tc>
+                <a:tc>
+                  <a:txBody>
+                    <a:bodyPr/>
+                    <a:lstStyle/>
+                    <a:p>
+                      <a:pPr algn="l" indent="0" marL="0">
+                        <a:buNone/>
+                      </a:pPr>
+                      <a:r>
+                        <a:rPr lang="en-US" sz="850" dirty="0">
                           <a:solidFill>
                             <a:srgbClr val="EFEBE3"/>
                           </a:solidFill>
@@ -37127,7 +37539,7 @@
                         </a:rPr>
                         <a:t>2億円×4%。WineBankが負担するためSPCの費用には計上しない</a:t>
                       </a:r>
-                      <a:endParaRPr lang="en-US" sz="1000" dirty="0">
+                      <a:endParaRPr lang="en-US" sz="850" dirty="0">
                         <a:latin typeface="Yu Gothic" charset="0"/>
                         <a:ea typeface="Yu Gothic" charset="0"/>
                         <a:cs typeface="Yu Gothic" charset="0"/>
@@ -37189,12 +37601,12 @@
         </p:nvSpPr>
         <p:spPr>
           <a:xfrm>
-            <a:off x="658368" y="5358384"/>
-            <a:ext cx="10874959" cy="969264"/>
+            <a:off x="658368" y="5504688"/>
+            <a:ext cx="10874959" cy="859536"/>
           </a:xfrm>
           <a:prstGeom prst="roundRect">
             <a:avLst>
-              <a:gd name="adj" fmla="val 4245"/>
+              <a:gd name="adj" fmla="val 4787"/>
             </a:avLst>
           </a:prstGeom>
           <a:solidFill>
@@ -37216,8 +37628,8 @@
         </p:nvSpPr>
         <p:spPr>
           <a:xfrm>
-            <a:off x="932688" y="5449824"/>
-            <a:ext cx="4572000" cy="219456"/>
+            <a:off x="932688" y="5577840"/>
+            <a:ext cx="4572000" cy="201168"/>
           </a:xfrm>
           <a:prstGeom prst="rect">
             <a:avLst/>
@@ -37233,7 +37645,7 @@
               <a:buNone/>
             </a:pPr>
             <a:r>
-              <a:rPr lang="en-US" sz="1100" b="1" dirty="0">
+              <a:rPr lang="en-US" sz="1050" b="1" dirty="0">
                 <a:solidFill>
                   <a:srgbClr val="C9A96E"/>
                 </a:solidFill>
@@ -37241,9 +37653,9 @@
                 <a:ea typeface="Yu Gothic" pitchFamily="34" charset="-122"/>
                 <a:cs typeface="Yu Gothic" pitchFamily="34" charset="-120"/>
               </a:rPr>
-              <a:t>この構成が投資家にもたらすもの</a:t>
-            </a:r>
-            <a:endParaRPr lang="en-US" sz="1100" dirty="0"/>
+              <a:t>以前の資料からの変更点（回転12ヶ月）</a:t>
+            </a:r>
+            <a:endParaRPr lang="en-US" sz="1050" dirty="0"/>
           </a:p>
         </p:txBody>
       </p:sp>
@@ -37255,8 +37667,8 @@
         </p:nvSpPr>
         <p:spPr>
           <a:xfrm>
-            <a:off x="932688" y="5669280"/>
-            <a:ext cx="10326319" cy="566928"/>
+            <a:off x="932688" y="5797296"/>
+            <a:ext cx="10326319" cy="219456"/>
           </a:xfrm>
           <a:prstGeom prst="rect">
             <a:avLst/>
@@ -37269,23 +37681,129 @@
           <a:lstStyle/>
           <a:p>
             <a:pPr indent="0" marL="0">
-              <a:lnSpc>
-                <a:spcPct val="118000"/>
-              </a:lnSpc>
-              <a:buNone/>
-            </a:pPr>
-            <a:r>
-              <a:rPr lang="en-US" sz="900" dirty="0">
-                <a:solidFill>
-                  <a:srgbClr val="EFEBE3"/>
+              <a:buNone/>
+            </a:pPr>
+            <a:r>
+              <a:rPr lang="en-US" sz="950" dirty="0">
+                <a:solidFill>
+                  <a:srgbClr val="9A938A"/>
                 </a:solidFill>
                 <a:latin typeface="Yu Gothic" pitchFamily="34" charset="0"/>
                 <a:ea typeface="Yu Gothic" pitchFamily="34" charset="-122"/>
                 <a:cs typeface="Yu Gothic" pitchFamily="34" charset="-120"/>
               </a:rPr>
-              <a:t>損益の配分は従来どおりSPC税前利益の折半であり、この点は変更していない。投資家は出資3億円に対して税前利益の50%を受け取る。デット2億円はWineBankが金利と保証責任を負う借入であり、投資家の出資とは切り離されている。WineBankは現金を拠出しないため、その取分は金額（年間97百万円）で示す。WineBankは期中報酬も成功報酬も取らず、報酬はこの利益折半に一本化されている。</a:t>
-            </a:r>
-            <a:endParaRPr lang="en-US" sz="900" dirty="0"/>
+              <a:t>① 旧版：投資家5億円出資・折半・値上がり未計上 </a:t>
+            </a:r>
+            <a:pPr indent="0" marL="0">
+              <a:buNone/>
+            </a:pPr>
+            <a:r>
+              <a:rPr lang="en-US" sz="1200" b="1" dirty="0">
+                <a:solidFill>
+                  <a:srgbClr val="EFEBE3"/>
+                </a:solidFill>
+                <a:latin typeface="Cambria" pitchFamily="34" charset="0"/>
+                <a:ea typeface="Cambria" pitchFamily="34" charset="-122"/>
+                <a:cs typeface="Cambria" pitchFamily="34" charset="-120"/>
+              </a:rPr>
+              <a:t>17.0%</a:t>
+            </a:r>
+            <a:pPr indent="0" marL="0">
+              <a:buNone/>
+            </a:pPr>
+            <a:r>
+              <a:rPr lang="en-US" sz="950" dirty="0">
+                <a:solidFill>
+                  <a:srgbClr val="9A938A"/>
+                </a:solidFill>
+                <a:latin typeface="Yu Gothic" pitchFamily="34" charset="0"/>
+                <a:ea typeface="Yu Gothic" pitchFamily="34" charset="-122"/>
+                <a:cs typeface="Yu Gothic" pitchFamily="34" charset="-120"/>
+              </a:rPr>
+              <a:t>　→　② ワイン価格の年6%上昇を織り込む </a:t>
+            </a:r>
+            <a:pPr indent="0" marL="0">
+              <a:buNone/>
+            </a:pPr>
+            <a:r>
+              <a:rPr lang="en-US" sz="1200" b="1" dirty="0">
+                <a:solidFill>
+                  <a:srgbClr val="EFEBE3"/>
+                </a:solidFill>
+                <a:latin typeface="Cambria" pitchFamily="34" charset="0"/>
+                <a:ea typeface="Cambria" pitchFamily="34" charset="-122"/>
+                <a:cs typeface="Cambria" pitchFamily="34" charset="-120"/>
+              </a:rPr>
+              <a:t>21.0%</a:t>
+            </a:r>
+            <a:pPr indent="0" marL="0">
+              <a:buNone/>
+            </a:pPr>
+            <a:r>
+              <a:rPr lang="en-US" sz="950" dirty="0">
+                <a:solidFill>
+                  <a:srgbClr val="9A938A"/>
+                </a:solidFill>
+                <a:latin typeface="Yu Gothic" pitchFamily="34" charset="0"/>
+                <a:ea typeface="Yu Gothic" pitchFamily="34" charset="-122"/>
+                <a:cs typeface="Yu Gothic" pitchFamily="34" charset="-120"/>
+              </a:rPr>
+              <a:t>　→　③ デット2億円を導入し、出資を3億円に </a:t>
+            </a:r>
+            <a:pPr indent="0" marL="0">
+              <a:buNone/>
+            </a:pPr>
+            <a:r>
+              <a:rPr lang="en-US" sz="1200" b="1" dirty="0">
+                <a:solidFill>
+                  <a:srgbClr val="C9A96E"/>
+                </a:solidFill>
+                <a:latin typeface="Cambria" pitchFamily="34" charset="0"/>
+                <a:ea typeface="Cambria" pitchFamily="34" charset="-122"/>
+                <a:cs typeface="Cambria" pitchFamily="34" charset="-120"/>
+              </a:rPr>
+              <a:t>21.0%</a:t>
+            </a:r>
+            <a:endParaRPr lang="en-US" sz="950" dirty="0"/>
+          </a:p>
+        </p:txBody>
+      </p:sp>
+      <p:sp>
+        <p:nvSpPr>
+          <p:cNvPr id="26" name="Text 23"/>
+          <p:cNvSpPr/>
+          <p:nvPr/>
+        </p:nvSpPr>
+        <p:spPr>
+          <a:xfrm>
+            <a:off x="932688" y="6035040"/>
+            <a:ext cx="10326319" cy="219456"/>
+          </a:xfrm>
+          <a:prstGeom prst="rect">
+            <a:avLst/>
+          </a:prstGeom>
+          <a:noFill/>
+          <a:ln/>
+        </p:spPr>
+        <p:txBody>
+          <a:bodyPr wrap="square" lIns="0" tIns="0" rIns="0" bIns="0" rtlCol="0" anchor="ctr"/>
+          <a:lstStyle/>
+          <a:p>
+            <a:pPr indent="0" marL="0">
+              <a:buNone/>
+            </a:pPr>
+            <a:r>
+              <a:rPr lang="en-US" sz="800" dirty="0">
+                <a:solidFill>
+                  <a:srgbClr val="6E675E"/>
+                </a:solidFill>
+                <a:latin typeface="Yu Gothic" pitchFamily="34" charset="0"/>
+                <a:ea typeface="Yu Gothic" pitchFamily="34" charset="-122"/>
+                <a:cs typeface="Yu Gothic" pitchFamily="34" charset="-120"/>
+              </a:rPr>
+              <a:t>※ 折半は一貫して変更していない。出資が5億円→3億円になる一方で帰属利益も5分の3になるため、比率としては同じ21.0%。デット2億円分の利益は保証責任を負うWineBankに帰属する。</a:t>
+            </a:r>
+            <a:endParaRPr lang="en-US" sz="800" dirty="0"/>
           </a:p>
         </p:txBody>
       </p:sp>
@@ -37769,7 +38287,7 @@
                           <a:ea typeface="Yu Gothic" pitchFamily="34" charset="-122"/>
                           <a:cs typeface="Yu Gothic" pitchFamily="34" charset="-120"/>
                         </a:rPr>
-                        <a:t>投資家取分（50%）</a:t>
+                        <a:t>投資家取分</a:t>
                       </a:r>
                       <a:endParaRPr lang="en-US" sz="950" dirty="0">
                         <a:latin typeface="Yu Gothic" charset="0"/>
@@ -38247,7 +38765,7 @@
                           <a:ea typeface="Yu Gothic" pitchFamily="34" charset="-122"/>
                           <a:cs typeface="Yu Gothic" pitchFamily="34" charset="-120"/>
                         </a:rPr>
-                        <a:t>136百万円</a:t>
+                        <a:t>81百万円</a:t>
                       </a:r>
                       <a:endParaRPr lang="en-US" sz="1000" dirty="0">
                         <a:latin typeface="Yu Gothic" charset="0"/>
@@ -38315,7 +38833,7 @@
                           <a:ea typeface="Yu Gothic" pitchFamily="34" charset="-122"/>
                           <a:cs typeface="Yu Gothic" pitchFamily="34" charset="-120"/>
                         </a:rPr>
-                        <a:t>45.2%</a:t>
+                        <a:t>27.1%</a:t>
                       </a:r>
                       <a:endParaRPr lang="en-US" sz="1000" dirty="0">
                         <a:latin typeface="Yu Gothic" charset="0"/>
@@ -38383,7 +38901,7 @@
                           <a:ea typeface="Yu Gothic" pitchFamily="34" charset="-122"/>
                           <a:cs typeface="Yu Gothic" pitchFamily="34" charset="-120"/>
                         </a:rPr>
-                        <a:t>128百万円</a:t>
+                        <a:t>182百万円</a:t>
                       </a:r>
                       <a:endParaRPr lang="en-US" sz="1000" dirty="0">
                         <a:latin typeface="Yu Gothic" charset="0"/>
@@ -38725,7 +39243,7 @@
                           <a:ea typeface="Yu Gothic" pitchFamily="34" charset="-122"/>
                           <a:cs typeface="Yu Gothic" pitchFamily="34" charset="-120"/>
                         </a:rPr>
-                        <a:t>105百万円</a:t>
+                        <a:t>63百万円</a:t>
                       </a:r>
                       <a:endParaRPr lang="en-US" sz="1000" dirty="0">
                         <a:latin typeface="Yu Gothic" charset="0"/>
@@ -38793,7 +39311,7 @@
                           <a:ea typeface="Yu Gothic" pitchFamily="34" charset="-122"/>
                           <a:cs typeface="Yu Gothic" pitchFamily="34" charset="-120"/>
                         </a:rPr>
-                        <a:t>35.0%</a:t>
+                        <a:t>21.0%</a:t>
                       </a:r>
                       <a:endParaRPr lang="en-US" sz="1000" dirty="0">
                         <a:latin typeface="Yu Gothic" charset="0"/>
@@ -38861,7 +39379,7 @@
                           <a:ea typeface="Yu Gothic" pitchFamily="34" charset="-122"/>
                           <a:cs typeface="Yu Gothic" pitchFamily="34" charset="-120"/>
                         </a:rPr>
-                        <a:t>97百万円</a:t>
+                        <a:t>139百万円</a:t>
                       </a:r>
                       <a:endParaRPr lang="en-US" sz="1000" dirty="0">
                         <a:latin typeface="Yu Gothic" charset="0"/>
@@ -38929,7 +39447,7 @@
                           <a:ea typeface="Yu Gothic" pitchFamily="34" charset="-122"/>
                           <a:cs typeface="Yu Gothic" pitchFamily="34" charset="-120"/>
                         </a:rPr>
-                        <a:t>組入銘柄の選定と配分ルールで達成</a:t>
+                        <a:t>貴社基準20%を満たす水準</a:t>
                       </a:r>
                       <a:endParaRPr lang="en-US" sz="1000" dirty="0">
                         <a:latin typeface="Yu Gothic" charset="0"/>
@@ -39203,7 +39721,7 @@
                           <a:ea typeface="Yu Gothic" pitchFamily="34" charset="-122"/>
                           <a:cs typeface="Yu Gothic" pitchFamily="34" charset="-120"/>
                         </a:rPr>
-                        <a:t>87百万円</a:t>
+                        <a:t>52百万円</a:t>
                       </a:r>
                       <a:endParaRPr lang="en-US" sz="1000" dirty="0">
                         <a:latin typeface="Yu Gothic" charset="0"/>
@@ -39265,13 +39783,13 @@
                       <a:r>
                         <a:rPr lang="en-US" sz="1000" b="1" dirty="0">
                           <a:solidFill>
-                            <a:srgbClr val="C9A96E"/>
+                            <a:srgbClr val="B4553F"/>
                           </a:solidFill>
                           <a:latin typeface="Yu Gothic" pitchFamily="34" charset="0"/>
                           <a:ea typeface="Yu Gothic" pitchFamily="34" charset="-122"/>
                           <a:cs typeface="Yu Gothic" pitchFamily="34" charset="-120"/>
                         </a:rPr>
-                        <a:t>28.9%</a:t>
+                        <a:t>17.3%</a:t>
                       </a:r>
                       <a:endParaRPr lang="en-US" sz="1000" dirty="0">
                         <a:latin typeface="Yu Gothic" charset="0"/>
@@ -39339,7 +39857,7 @@
                           <a:ea typeface="Yu Gothic" pitchFamily="34" charset="-122"/>
                           <a:cs typeface="Yu Gothic" pitchFamily="34" charset="-120"/>
                         </a:rPr>
-                        <a:t>79百万円</a:t>
+                        <a:t>113百万円</a:t>
                       </a:r>
                       <a:endParaRPr lang="en-US" sz="1000" dirty="0">
                         <a:latin typeface="Yu Gothic" charset="0"/>
@@ -39401,13 +39919,13 @@
                       <a:r>
                         <a:rPr lang="en-US" sz="1000" dirty="0">
                           <a:solidFill>
-                            <a:srgbClr val="EFEBE3"/>
+                            <a:srgbClr val="B4553F"/>
                           </a:solidFill>
                           <a:latin typeface="Yu Gothic" pitchFamily="34" charset="0"/>
                           <a:ea typeface="Yu Gothic" pitchFamily="34" charset="-122"/>
                           <a:cs typeface="Yu Gothic" pitchFamily="34" charset="-120"/>
                         </a:rPr>
-                        <a:t>現状の販売実力の範囲内</a:t>
+                        <a:t>20%を下回る</a:t>
                       </a:r>
                       <a:endParaRPr lang="en-US" sz="1000" dirty="0">
                         <a:latin typeface="Yu Gothic" charset="0"/>
@@ -39681,7 +40199,7 @@
                           <a:ea typeface="Yu Gothic" pitchFamily="34" charset="-122"/>
                           <a:cs typeface="Yu Gothic" pitchFamily="34" charset="-120"/>
                         </a:rPr>
-                        <a:t>74百万円</a:t>
+                        <a:t>45百万円</a:t>
                       </a:r>
                       <a:endParaRPr lang="en-US" sz="1000" dirty="0">
                         <a:latin typeface="Yu Gothic" charset="0"/>
@@ -39743,13 +40261,13 @@
                       <a:r>
                         <a:rPr lang="en-US" sz="1000" b="1" dirty="0">
                           <a:solidFill>
-                            <a:srgbClr val="C9A96E"/>
+                            <a:srgbClr val="B4553F"/>
                           </a:solidFill>
                           <a:latin typeface="Yu Gothic" pitchFamily="34" charset="0"/>
                           <a:ea typeface="Yu Gothic" pitchFamily="34" charset="-122"/>
                           <a:cs typeface="Yu Gothic" pitchFamily="34" charset="-120"/>
                         </a:rPr>
-                        <a:t>24.8%</a:t>
+                        <a:t>14.9%</a:t>
                       </a:r>
                       <a:endParaRPr lang="en-US" sz="1000" dirty="0">
                         <a:latin typeface="Yu Gothic" charset="0"/>
@@ -39817,7 +40335,7 @@
                           <a:ea typeface="Yu Gothic" pitchFamily="34" charset="-122"/>
                           <a:cs typeface="Yu Gothic" pitchFamily="34" charset="-120"/>
                         </a:rPr>
-                        <a:t>66百万円</a:t>
+                        <a:t>96百万円</a:t>
                       </a:r>
                       <a:endParaRPr lang="en-US" sz="1000" dirty="0">
                         <a:latin typeface="Yu Gothic" charset="0"/>
@@ -39879,13 +40397,13 @@
                       <a:r>
                         <a:rPr lang="en-US" sz="1000" dirty="0">
                           <a:solidFill>
-                            <a:srgbClr val="EFEBE3"/>
+                            <a:srgbClr val="B4553F"/>
                           </a:solidFill>
                           <a:latin typeface="Yu Gothic" pitchFamily="34" charset="0"/>
                           <a:ea typeface="Yu Gothic" pitchFamily="34" charset="-122"/>
                           <a:cs typeface="Yu Gothic" pitchFamily="34" charset="-120"/>
                         </a:rPr>
-                        <a:t>下振れ時の想定レンジ下限</a:t>
+                        <a:t>20%を下回る</a:t>
                       </a:r>
                       <a:endParaRPr lang="en-US" sz="1000" dirty="0">
                         <a:latin typeface="Yu Gothic" charset="0"/>
@@ -40418,7 +40936,7 @@
                 <a:ea typeface="Yu Gothic" pitchFamily="34" charset="-122"/>
                 <a:cs typeface="Yu Gothic" pitchFamily="34" charset="-120"/>
               </a:rPr>
-              <a:t>※ 回転12ヶ月に必要な年間販売額7.48億円は、現状の販売実力（5〜7億円）の上限をやや上回る。銘柄の大半はSPCと自己勘定で重複しないため配分の判断自体が生じず、回転期間は「何を組み入れるか」でほぼ決まる。重複銘柄の取扱いは在庫配分の公平性の頁を参照。投資家利回りが20%を割り込むのは回転が23.7ヶ月を超えた場合。</a:t>
+              <a:t>※ 回転12ヶ月に必要な年間販売額7.48億円は、現状の販売実力（5〜7億円）の上限をやや上回る。銘柄の大半はSPCと自己勘定で重複しないため配分の判断自体が生じず、回転期間は「何を組み入れるか」でほぼ決まる。重複銘柄の取扱いは在庫配分の公平性の頁を参照。投資家利回りが20%を割り込むのは回転が12.7ヶ月を超えた場合であり、主線12ヶ月との余裕は0.7ヶ月しかない。回転12ヶ月の達成が貴社基準を満たすための必須条件となる。</a:t>
             </a:r>
             <a:endParaRPr lang="en-US" sz="850" dirty="0"/>
           </a:p>
@@ -40750,7 +41268,7 @@
                 <a:ea typeface="Yu Gothic" pitchFamily="34" charset="-122"/>
                 <a:cs typeface="Yu Gothic" pitchFamily="34" charset="-120"/>
               </a:rPr>
-              <a:t>匿名組合出資　5億円</a:t>
+              <a:t>匿名組合出資　3億円</a:t>
             </a:r>
             <a:endParaRPr lang="en-US" sz="1050" dirty="0"/>
           </a:p>
@@ -40789,7 +41307,7 @@
                 <a:ea typeface="Yu Gothic" pitchFamily="34" charset="-122"/>
                 <a:cs typeface="Yu Gothic" pitchFamily="34" charset="-120"/>
               </a:rPr>
-              <a:t>半期ごとに税前利益の50%を受領</a:t>
+              <a:t>投資家帰属利益の50%を半期ごとに受領</a:t>
             </a:r>
             <a:endParaRPr lang="en-US" sz="950" dirty="0"/>
           </a:p>
@@ -41932,7 +42450,7 @@
                 <a:ea typeface="Yu Gothic" pitchFamily="34" charset="-122"/>
                 <a:cs typeface="Yu Gothic" pitchFamily="34" charset="-120"/>
               </a:rPr>
-              <a:t>SPCの税前利益を半期ごとに折半し分配。元本はSPC内で継続運用</a:t>
+              <a:t>SPCの税前利益のうち出資3億円に帰属する分を折半し半期ごとに分配。元本はSPC内で継続運用</a:t>
             </a:r>
             <a:endParaRPr lang="en-US" sz="950" dirty="0"/>
           </a:p>
@@ -42013,7 +42531,7 @@
                 <a:ea typeface="Yu Gothic" pitchFamily="34" charset="-122"/>
                 <a:cs typeface="Yu Gothic" pitchFamily="34" charset="-120"/>
               </a:rPr>
-              <a:t>※ ワイン現物はSPC名義で保有し、WineBankの債権者から倒産隔離する。WineBankはGPとして実行を担い、報酬は「譲渡時1%」と「利益折半のGP取分」に限定。SPCに対する別途の管理報酬（期中報酬・成功報酬）は課さない。</a:t>
+              <a:t>※ ワイン現物はSPC名義で保有し、WineBankの債権者から倒産隔離する。WineBankはGPとして実行を担い、報酬は「譲渡時1%」と「投資家帰属利益を折半する成功報酬」に限定。残高比例の期中管理報酬は課さない。</a:t>
             </a:r>
             <a:endParaRPr lang="en-US" sz="900" dirty="0"/>
           </a:p>
